--- a/source/Instructor Week 2 Grams/Instructor Week 2 Grams.pptx
+++ b/source/Instructor Week 2 Grams/Instructor Week 2 Grams.pptx
@@ -3143,11 +3143,11 @@
       </p:sp>
       <p:sp>
         <p:nvSpPr>
-          <p:cNvPr id="3" name="Rounded Rectangle 2"/>
+          <p:cNvPr id="3" name="Rounded Rectangle 2">
+            <a:hlinkClick r:id="rId2"/>
+          </p:cNvPr>
           <p:cNvSpPr/>
-          <p:nvPr>
-            <a:hlinkClick r:id="rId2"/>
-          </p:nvPr>
+          <p:nvPr/>
         </p:nvSpPr>
         <p:spPr>
           <a:xfrm>
@@ -3237,11 +3237,11 @@
       </p:sp>
       <p:sp>
         <p:nvSpPr>
-          <p:cNvPr id="5" name="Rounded Rectangle 4"/>
+          <p:cNvPr id="5" name="Rounded Rectangle 4">
+            <a:hlinkClick r:id="rId5"/>
+          </p:cNvPr>
           <p:cNvSpPr/>
-          <p:nvPr>
-            <a:hlinkClick r:id="rId5"/>
-          </p:nvPr>
+          <p:nvPr/>
         </p:nvSpPr>
         <p:spPr>
           <a:xfrm>
@@ -3347,11 +3347,11 @@
       </p:sp>
       <p:sp>
         <p:nvSpPr>
-          <p:cNvPr id="7" name="Rounded Rectangle 6"/>
+          <p:cNvPr id="7" name="Rounded Rectangle 6">
+            <a:hlinkClick r:id="rId10"/>
+          </p:cNvPr>
           <p:cNvSpPr/>
-          <p:nvPr>
-            <a:hlinkClick r:id="rId10"/>
-          </p:nvPr>
+          <p:nvPr/>
         </p:nvSpPr>
         <p:spPr>
           <a:xfrm>
@@ -3457,11 +3457,11 @@
       </p:sp>
       <p:sp>
         <p:nvSpPr>
-          <p:cNvPr id="9" name="Rounded Rectangle 8"/>
+          <p:cNvPr id="9" name="Rounded Rectangle 8">
+            <a:hlinkClick r:id="rId15"/>
+          </p:cNvPr>
           <p:cNvSpPr/>
-          <p:nvPr>
-            <a:hlinkClick r:id="rId15"/>
-          </p:nvPr>
+          <p:nvPr/>
         </p:nvSpPr>
         <p:spPr>
           <a:xfrm>
@@ -3551,11 +3551,11 @@
       </p:sp>
       <p:sp>
         <p:nvSpPr>
-          <p:cNvPr id="11" name="Rounded Rectangle 10"/>
+          <p:cNvPr id="11" name="Rounded Rectangle 10">
+            <a:hlinkClick r:id="rId18"/>
+          </p:cNvPr>
           <p:cNvSpPr/>
-          <p:nvPr>
-            <a:hlinkClick r:id="rId18"/>
-          </p:nvPr>
+          <p:nvPr/>
         </p:nvSpPr>
         <p:spPr>
           <a:xfrm>
@@ -3661,11 +3661,11 @@
       </p:sp>
       <p:sp>
         <p:nvSpPr>
-          <p:cNvPr id="13" name="Rounded Rectangle 12"/>
+          <p:cNvPr id="13" name="Rounded Rectangle 12">
+            <a:hlinkClick r:id="rId23"/>
+          </p:cNvPr>
           <p:cNvSpPr/>
-          <p:nvPr>
-            <a:hlinkClick r:id="rId23"/>
-          </p:nvPr>
+          <p:nvPr/>
         </p:nvSpPr>
         <p:spPr>
           <a:xfrm>
@@ -3763,11 +3763,11 @@
       </p:sp>
       <p:sp>
         <p:nvSpPr>
-          <p:cNvPr id="15" name="Rounded Rectangle 14"/>
+          <p:cNvPr id="15" name="Rounded Rectangle 14">
+            <a:hlinkClick r:id="rId27"/>
+          </p:cNvPr>
           <p:cNvSpPr/>
-          <p:nvPr>
-            <a:hlinkClick r:id="rId27"/>
-          </p:nvPr>
+          <p:nvPr/>
         </p:nvSpPr>
         <p:spPr>
           <a:xfrm>
@@ -3849,11 +3849,11 @@
       </p:sp>
       <p:sp>
         <p:nvSpPr>
-          <p:cNvPr id="17" name="Rounded Rectangle 16"/>
+          <p:cNvPr id="17" name="Rounded Rectangle 16">
+            <a:hlinkClick r:id="rId29"/>
+          </p:cNvPr>
           <p:cNvSpPr/>
-          <p:nvPr>
-            <a:hlinkClick r:id="rId29"/>
-          </p:nvPr>
+          <p:nvPr/>
         </p:nvSpPr>
         <p:spPr>
           <a:xfrm>
@@ -3951,11 +3951,11 @@
       </p:sp>
       <p:sp>
         <p:nvSpPr>
-          <p:cNvPr id="19" name="Rounded Rectangle 18"/>
+          <p:cNvPr id="19" name="Rounded Rectangle 18">
+            <a:hlinkClick r:id="rId33"/>
+          </p:cNvPr>
           <p:cNvSpPr/>
-          <p:nvPr>
-            <a:hlinkClick r:id="rId33"/>
-          </p:nvPr>
+          <p:nvPr/>
         </p:nvSpPr>
         <p:spPr>
           <a:xfrm>
@@ -4053,11 +4053,11 @@
       </p:sp>
       <p:sp>
         <p:nvSpPr>
-          <p:cNvPr id="21" name="Rounded Rectangle 20"/>
+          <p:cNvPr id="21" name="Rounded Rectangle 20">
+            <a:hlinkClick r:id="rId37"/>
+          </p:cNvPr>
           <p:cNvSpPr/>
-          <p:nvPr>
-            <a:hlinkClick r:id="rId37"/>
-          </p:nvPr>
+          <p:nvPr/>
         </p:nvSpPr>
         <p:spPr>
           <a:xfrm>
@@ -4147,11 +4147,11 @@
       </p:sp>
       <p:sp>
         <p:nvSpPr>
-          <p:cNvPr id="23" name="Rounded Rectangle 22"/>
+          <p:cNvPr id="23" name="Rounded Rectangle 22">
+            <a:hlinkClick r:id="rId40"/>
+          </p:cNvPr>
           <p:cNvSpPr/>
-          <p:nvPr>
-            <a:hlinkClick r:id="rId40"/>
-          </p:nvPr>
+          <p:nvPr/>
         </p:nvSpPr>
         <p:spPr>
           <a:xfrm>
@@ -4233,11 +4233,11 @@
       </p:sp>
       <p:sp>
         <p:nvSpPr>
-          <p:cNvPr id="25" name="Rounded Rectangle 24"/>
+          <p:cNvPr id="25" name="Rounded Rectangle 24">
+            <a:hlinkClick r:id="rId42"/>
+          </p:cNvPr>
           <p:cNvSpPr/>
-          <p:nvPr>
-            <a:hlinkClick r:id="rId42"/>
-          </p:nvPr>
+          <p:nvPr/>
         </p:nvSpPr>
         <p:spPr>
           <a:xfrm>
@@ -4319,11 +4319,11 @@
       </p:sp>
       <p:sp>
         <p:nvSpPr>
-          <p:cNvPr id="27" name="Rounded Rectangle 26"/>
+          <p:cNvPr id="27" name="Rounded Rectangle 26">
+            <a:hlinkClick r:id="rId44"/>
+          </p:cNvPr>
           <p:cNvSpPr/>
-          <p:nvPr>
-            <a:hlinkClick r:id="rId44"/>
-          </p:nvPr>
+          <p:nvPr/>
         </p:nvSpPr>
         <p:spPr>
           <a:xfrm>
@@ -4429,11 +4429,11 @@
       </p:sp>
       <p:sp>
         <p:nvSpPr>
-          <p:cNvPr id="29" name="Rounded Rectangle 28"/>
+          <p:cNvPr id="29" name="Rounded Rectangle 28">
+            <a:hlinkClick r:id="rId49"/>
+          </p:cNvPr>
           <p:cNvSpPr/>
-          <p:nvPr>
-            <a:hlinkClick r:id="rId49"/>
-          </p:nvPr>
+          <p:nvPr/>
         </p:nvSpPr>
         <p:spPr>
           <a:xfrm>
@@ -4515,11 +4515,11 @@
       </p:sp>
       <p:sp>
         <p:nvSpPr>
-          <p:cNvPr id="31" name="Rounded Rectangle 30"/>
+          <p:cNvPr id="31" name="Rounded Rectangle 30">
+            <a:hlinkClick r:id="rId51"/>
+          </p:cNvPr>
           <p:cNvSpPr/>
-          <p:nvPr>
-            <a:hlinkClick r:id="rId51"/>
-          </p:nvPr>
+          <p:nvPr/>
         </p:nvSpPr>
         <p:spPr>
           <a:xfrm>
@@ -4686,11 +4686,11 @@
       </p:sp>
       <p:sp>
         <p:nvSpPr>
-          <p:cNvPr id="3" name="Rounded Rectangle 2"/>
+          <p:cNvPr id="3" name="Rounded Rectangle 2">
+            <a:hlinkClick r:id="rId2"/>
+          </p:cNvPr>
           <p:cNvSpPr/>
-          <p:nvPr>
-            <a:hlinkClick r:id="rId2"/>
-          </p:nvPr>
+          <p:nvPr/>
         </p:nvSpPr>
         <p:spPr>
           <a:xfrm>
@@ -4772,11 +4772,11 @@
       </p:sp>
       <p:sp>
         <p:nvSpPr>
-          <p:cNvPr id="5" name="Rounded Rectangle 4"/>
+          <p:cNvPr id="5" name="Rounded Rectangle 4">
+            <a:hlinkClick r:id="rId4"/>
+          </p:cNvPr>
           <p:cNvSpPr/>
-          <p:nvPr>
-            <a:hlinkClick r:id="rId4"/>
-          </p:nvPr>
+          <p:nvPr/>
         </p:nvSpPr>
         <p:spPr>
           <a:xfrm>
@@ -4874,11 +4874,11 @@
       </p:sp>
       <p:sp>
         <p:nvSpPr>
-          <p:cNvPr id="7" name="Rounded Rectangle 6"/>
+          <p:cNvPr id="7" name="Rounded Rectangle 6">
+            <a:hlinkClick r:id="rId8"/>
+          </p:cNvPr>
           <p:cNvSpPr/>
-          <p:nvPr>
-            <a:hlinkClick r:id="rId8"/>
-          </p:nvPr>
+          <p:nvPr/>
         </p:nvSpPr>
         <p:spPr>
           <a:xfrm>
@@ -4968,11 +4968,11 @@
       </p:sp>
       <p:sp>
         <p:nvSpPr>
-          <p:cNvPr id="9" name="Rounded Rectangle 8"/>
+          <p:cNvPr id="9" name="Rounded Rectangle 8">
+            <a:hlinkClick r:id="rId11"/>
+          </p:cNvPr>
           <p:cNvSpPr/>
-          <p:nvPr>
-            <a:hlinkClick r:id="rId11"/>
-          </p:nvPr>
+          <p:nvPr/>
         </p:nvSpPr>
         <p:spPr>
           <a:xfrm>
@@ -5078,11 +5078,11 @@
       </p:sp>
       <p:sp>
         <p:nvSpPr>
-          <p:cNvPr id="11" name="Rounded Rectangle 10"/>
+          <p:cNvPr id="11" name="Rounded Rectangle 10">
+            <a:hlinkClick r:id="rId16"/>
+          </p:cNvPr>
           <p:cNvSpPr/>
-          <p:nvPr>
-            <a:hlinkClick r:id="rId16"/>
-          </p:nvPr>
+          <p:nvPr/>
         </p:nvSpPr>
         <p:spPr>
           <a:xfrm>
@@ -5172,11 +5172,11 @@
       </p:sp>
       <p:sp>
         <p:nvSpPr>
-          <p:cNvPr id="13" name="Rounded Rectangle 12"/>
+          <p:cNvPr id="13" name="Rounded Rectangle 12">
+            <a:hlinkClick r:id="rId19"/>
+          </p:cNvPr>
           <p:cNvSpPr/>
-          <p:nvPr>
-            <a:hlinkClick r:id="rId19"/>
-          </p:nvPr>
+          <p:nvPr/>
         </p:nvSpPr>
         <p:spPr>
           <a:xfrm>
@@ -5258,11 +5258,11 @@
       </p:sp>
       <p:sp>
         <p:nvSpPr>
-          <p:cNvPr id="15" name="Rounded Rectangle 14"/>
+          <p:cNvPr id="15" name="Rounded Rectangle 14">
+            <a:hlinkClick r:id="rId21"/>
+          </p:cNvPr>
           <p:cNvSpPr/>
-          <p:nvPr>
-            <a:hlinkClick r:id="rId21"/>
-          </p:nvPr>
+          <p:nvPr/>
         </p:nvSpPr>
         <p:spPr>
           <a:xfrm>
@@ -5344,11 +5344,11 @@
       </p:sp>
       <p:sp>
         <p:nvSpPr>
-          <p:cNvPr id="17" name="Rounded Rectangle 16"/>
+          <p:cNvPr id="17" name="Rounded Rectangle 16">
+            <a:hlinkClick r:id="rId23"/>
+          </p:cNvPr>
           <p:cNvSpPr/>
-          <p:nvPr>
-            <a:hlinkClick r:id="rId23"/>
-          </p:nvPr>
+          <p:nvPr/>
         </p:nvSpPr>
         <p:spPr>
           <a:xfrm>
@@ -5454,11 +5454,11 @@
       </p:sp>
       <p:sp>
         <p:nvSpPr>
-          <p:cNvPr id="19" name="Rounded Rectangle 18"/>
+          <p:cNvPr id="19" name="Rounded Rectangle 18">
+            <a:hlinkClick r:id="rId28"/>
+          </p:cNvPr>
           <p:cNvSpPr/>
-          <p:nvPr>
-            <a:hlinkClick r:id="rId28"/>
-          </p:nvPr>
+          <p:nvPr/>
         </p:nvSpPr>
         <p:spPr>
           <a:xfrm>
@@ -5564,11 +5564,11 @@
       </p:sp>
       <p:sp>
         <p:nvSpPr>
-          <p:cNvPr id="21" name="Rounded Rectangle 20"/>
+          <p:cNvPr id="21" name="Rounded Rectangle 20">
+            <a:hlinkClick r:id="rId33"/>
+          </p:cNvPr>
           <p:cNvSpPr/>
-          <p:nvPr>
-            <a:hlinkClick r:id="rId33"/>
-          </p:nvPr>
+          <p:nvPr/>
         </p:nvSpPr>
         <p:spPr>
           <a:xfrm>
@@ -5666,11 +5666,11 @@
       </p:sp>
       <p:sp>
         <p:nvSpPr>
-          <p:cNvPr id="23" name="Rounded Rectangle 22"/>
+          <p:cNvPr id="23" name="Rounded Rectangle 22">
+            <a:hlinkClick r:id="rId37"/>
+          </p:cNvPr>
           <p:cNvSpPr/>
-          <p:nvPr>
-            <a:hlinkClick r:id="rId37"/>
-          </p:nvPr>
+          <p:nvPr/>
         </p:nvSpPr>
         <p:spPr>
           <a:xfrm>
@@ -5760,11 +5760,11 @@
       </p:sp>
       <p:sp>
         <p:nvSpPr>
-          <p:cNvPr id="25" name="Rounded Rectangle 24"/>
+          <p:cNvPr id="25" name="Rounded Rectangle 24">
+            <a:hlinkClick r:id="rId40"/>
+          </p:cNvPr>
           <p:cNvSpPr/>
-          <p:nvPr>
-            <a:hlinkClick r:id="rId40"/>
-          </p:nvPr>
+          <p:nvPr/>
         </p:nvSpPr>
         <p:spPr>
           <a:xfrm>
@@ -5846,11 +5846,11 @@
       </p:sp>
       <p:sp>
         <p:nvSpPr>
-          <p:cNvPr id="27" name="Rounded Rectangle 26"/>
+          <p:cNvPr id="27" name="Rounded Rectangle 26">
+            <a:hlinkClick r:id="rId42"/>
+          </p:cNvPr>
           <p:cNvSpPr/>
-          <p:nvPr>
-            <a:hlinkClick r:id="rId42"/>
-          </p:nvPr>
+          <p:nvPr/>
         </p:nvSpPr>
         <p:spPr>
           <a:xfrm>
@@ -5932,11 +5932,11 @@
       </p:sp>
       <p:sp>
         <p:nvSpPr>
-          <p:cNvPr id="29" name="Rounded Rectangle 28"/>
+          <p:cNvPr id="29" name="Rounded Rectangle 28">
+            <a:hlinkClick r:id="rId44"/>
+          </p:cNvPr>
           <p:cNvSpPr/>
-          <p:nvPr>
-            <a:hlinkClick r:id="rId44"/>
-          </p:nvPr>
+          <p:nvPr/>
         </p:nvSpPr>
         <p:spPr>
           <a:xfrm>
@@ -6034,11 +6034,11 @@
       </p:sp>
       <p:sp>
         <p:nvSpPr>
-          <p:cNvPr id="31" name="Rounded Rectangle 30"/>
+          <p:cNvPr id="31" name="Rounded Rectangle 30">
+            <a:hlinkClick r:id="rId48"/>
+          </p:cNvPr>
           <p:cNvSpPr/>
-          <p:nvPr>
-            <a:hlinkClick r:id="rId48"/>
-          </p:nvPr>
+          <p:nvPr/>
         </p:nvSpPr>
         <p:spPr>
           <a:xfrm>
@@ -6213,11 +6213,11 @@
       </p:sp>
       <p:sp>
         <p:nvSpPr>
-          <p:cNvPr id="3" name="Rounded Rectangle 2"/>
+          <p:cNvPr id="3" name="Rounded Rectangle 2">
+            <a:hlinkClick r:id="rId2"/>
+          </p:cNvPr>
           <p:cNvSpPr/>
-          <p:nvPr>
-            <a:hlinkClick r:id="rId2"/>
-          </p:nvPr>
+          <p:nvPr/>
         </p:nvSpPr>
         <p:spPr>
           <a:xfrm>
@@ -6307,11 +6307,11 @@
       </p:sp>
       <p:sp>
         <p:nvSpPr>
-          <p:cNvPr id="5" name="Rounded Rectangle 4"/>
+          <p:cNvPr id="5" name="Rounded Rectangle 4">
+            <a:hlinkClick r:id="rId5"/>
+          </p:cNvPr>
           <p:cNvSpPr/>
-          <p:nvPr>
-            <a:hlinkClick r:id="rId5"/>
-          </p:nvPr>
+          <p:nvPr/>
         </p:nvSpPr>
         <p:spPr>
           <a:xfrm>
@@ -6409,11 +6409,11 @@
       </p:sp>
       <p:sp>
         <p:nvSpPr>
-          <p:cNvPr id="7" name="Rounded Rectangle 6"/>
+          <p:cNvPr id="7" name="Rounded Rectangle 6">
+            <a:hlinkClick r:id="rId9"/>
+          </p:cNvPr>
           <p:cNvSpPr/>
-          <p:nvPr>
-            <a:hlinkClick r:id="rId9"/>
-          </p:nvPr>
+          <p:nvPr/>
         </p:nvSpPr>
         <p:spPr>
           <a:xfrm>
@@ -6519,11 +6519,11 @@
       </p:sp>
       <p:sp>
         <p:nvSpPr>
-          <p:cNvPr id="9" name="Rounded Rectangle 8"/>
+          <p:cNvPr id="9" name="Rounded Rectangle 8">
+            <a:hlinkClick r:id="rId14"/>
+          </p:cNvPr>
           <p:cNvSpPr/>
-          <p:nvPr>
-            <a:hlinkClick r:id="rId14"/>
-          </p:nvPr>
+          <p:nvPr/>
         </p:nvSpPr>
         <p:spPr>
           <a:xfrm>
@@ -6629,11 +6629,11 @@
       </p:sp>
       <p:sp>
         <p:nvSpPr>
-          <p:cNvPr id="11" name="Rounded Rectangle 10"/>
+          <p:cNvPr id="11" name="Rounded Rectangle 10">
+            <a:hlinkClick r:id="rId19"/>
+          </p:cNvPr>
           <p:cNvSpPr/>
-          <p:nvPr>
-            <a:hlinkClick r:id="rId19"/>
-          </p:nvPr>
+          <p:nvPr/>
         </p:nvSpPr>
         <p:spPr>
           <a:xfrm>

--- a/source/Instructor Week 2 Grams/Instructor Week 2 Grams.pptx
+++ b/source/Instructor Week 2 Grams/Instructor Week 2 Grams.pptx
@@ -8,6 +8,8 @@
     <p:sldId id="256" r:id="rId7"/>
     <p:sldId id="257" r:id="rId8"/>
     <p:sldId id="258" r:id="rId9"/>
+    <p:sldId id="259" r:id="rId10"/>
+    <p:sldId id="260" r:id="rId11"/>
   </p:sldIdLst>
   <p:sldSz cx="12188952" cy="6858000" type="screen4x3"/>
   <p:notesSz cx="6858000" cy="9144000"/>
@@ -3092,120 +3094,48 @@
       <p:grpSpPr/>
       <p:sp>
         <p:nvSpPr>
-          <p:cNvPr id="2" name="Rectangle 1"/>
-          <p:cNvSpPr/>
+          <p:cNvPr id="2" name="TextBox 1"/>
+          <p:cNvSpPr txBox="1"/>
           <p:nvPr/>
         </p:nvSpPr>
         <p:spPr>
           <a:xfrm>
-            <a:off x="0" y="0"/>
-            <a:ext cx="12188952" cy="548640"/>
+            <a:off x="914400" y="2377440"/>
+            <a:ext cx="10360152" cy="1280160"/>
           </a:xfrm>
           <a:prstGeom prst="rect">
             <a:avLst/>
           </a:prstGeom>
-          <a:solidFill>
-            <a:srgbClr val="1F3A5F"/>
-          </a:solidFill>
-          <a:ln>
-            <a:noFill/>
-          </a:ln>
-        </p:spPr>
-        <p:style>
-          <a:lnRef idx="1">
-            <a:schemeClr val="accent1"/>
-          </a:lnRef>
-          <a:fillRef idx="3">
-            <a:schemeClr val="accent1"/>
-          </a:fillRef>
-          <a:effectRef idx="2">
-            <a:schemeClr val="accent1"/>
-          </a:effectRef>
-          <a:fontRef idx="minor">
-            <a:schemeClr val="lt1"/>
-          </a:fontRef>
-        </p:style>
-        <p:txBody>
-          <a:bodyPr rtlCol="0" anchor="ctr" lIns="182880" rIns="182880"/>
+          <a:noFill/>
+        </p:spPr>
+        <p:txBody>
+          <a:bodyPr wrap="square">
+            <a:spAutoFit/>
+          </a:bodyPr>
           <a:lstStyle/>
           <a:p>
             <a:pPr algn="ctr"/>
             <a:r>
-              <a:rPr sz="2000" b="1">
-                <a:solidFill>
-                  <a:srgbClr val="FFFFFF"/>
-                </a:solidFill>
-              </a:rPr>
-              <a:t>Instructor Week 2 Grams — Page 1 of 3</a:t>
-            </a:r>
-          </a:p>
-        </p:txBody>
-      </p:sp>
-      <p:sp>
-        <p:nvSpPr>
-          <p:cNvPr id="3" name="Rounded Rectangle 2"/>
-          <p:cNvSpPr/>
-          <p:nvPr>
-            <a:hlinkClick r:id="rId2"/>
-          </p:nvPr>
-        </p:nvSpPr>
-        <p:spPr>
-          <a:xfrm>
-            <a:off x="365760" y="731520"/>
-            <a:ext cx="2200046" cy="365760"/>
-          </a:xfrm>
-          <a:prstGeom prst="roundRect">
-            <a:avLst/>
-          </a:prstGeom>
-          <a:solidFill>
-            <a:srgbClr val="E8EEF7"/>
-          </a:solidFill>
-          <a:ln>
-            <a:solidFill>
-              <a:srgbClr val="1F3A5F"/>
-            </a:solidFill>
-          </a:ln>
-        </p:spPr>
-        <p:style>
-          <a:lnRef idx="1">
-            <a:schemeClr val="accent1"/>
-          </a:lnRef>
-          <a:fillRef idx="3">
-            <a:schemeClr val="accent1"/>
-          </a:fillRef>
-          <a:effectRef idx="2">
-            <a:schemeClr val="accent1"/>
-          </a:effectRef>
-          <a:fontRef idx="minor">
-            <a:schemeClr val="lt1"/>
-          </a:fontRef>
-        </p:style>
-        <p:txBody>
-          <a:bodyPr rtlCol="0" anchor="ctr" lIns="45720" rIns="45720"/>
-          <a:lstStyle/>
-          <a:p>
-            <a:pPr algn="ctr"/>
-            <a:r>
-              <a:rPr sz="900">
+              <a:rPr sz="4000" b="1">
                 <a:solidFill>
                   <a:srgbClr val="1F3A5F"/>
                 </a:solidFill>
               </a:rPr>
-              <a:t>Gram 1: FR Razor Crest, Category 1, Kronos</a:t>
-            </a:r>
-          </a:p>
-        </p:txBody>
-      </p:sp>
-      <p:sp>
-        <p:nvSpPr>
-          <p:cNvPr id="4" name="TextBox 3"/>
+              <a:t>Welcome to Instructor Week 2 Grams</a:t>
+            </a:r>
+          </a:p>
+        </p:txBody>
+      </p:sp>
+      <p:sp>
+        <p:nvSpPr>
+          <p:cNvPr id="3" name="TextBox 2"/>
           <p:cNvSpPr txBox="1"/>
           <p:nvPr/>
         </p:nvSpPr>
         <p:spPr>
           <a:xfrm>
-            <a:off x="365760" y="1115568"/>
-            <a:ext cx="2200046" cy="1447800"/>
+            <a:off x="914400" y="3840480"/>
+            <a:ext cx="10360152" cy="731520"/>
           </a:xfrm>
           <a:prstGeom prst="rect">
             <a:avLst/>
@@ -3213,1404 +3143,19 @@
           <a:noFill/>
         </p:spPr>
         <p:txBody>
-          <a:bodyPr wrap="square">
+          <a:bodyPr wrap="none">
             <a:spAutoFit/>
           </a:bodyPr>
           <a:lstStyle/>
           <a:p>
-            <a:r>
-              <a:rPr sz="800">
-                <a:hlinkClick r:id="rId3"/>
-              </a:rPr>
-              <a:t>Lofar 1</a:t>
-            </a:r>
-          </a:p>
-          <a:p>
-            <a:r>
-              <a:rPr sz="800">
-                <a:hlinkClick r:id="rId4"/>
-              </a:rPr>
-              <a:t>Lofar 2</a:t>
-            </a:r>
-          </a:p>
-        </p:txBody>
-      </p:sp>
-      <p:sp>
-        <p:nvSpPr>
-          <p:cNvPr id="5" name="Rounded Rectangle 4"/>
-          <p:cNvSpPr/>
-          <p:nvPr>
-            <a:hlinkClick r:id="rId5"/>
-          </p:nvPr>
-        </p:nvSpPr>
-        <p:spPr>
-          <a:xfrm>
-            <a:off x="2657246" y="731520"/>
-            <a:ext cx="2200046" cy="365760"/>
-          </a:xfrm>
-          <a:prstGeom prst="roundRect">
-            <a:avLst/>
-          </a:prstGeom>
-          <a:solidFill>
-            <a:srgbClr val="E8EEF7"/>
-          </a:solidFill>
-          <a:ln>
-            <a:solidFill>
-              <a:srgbClr val="1F3A5F"/>
-            </a:solidFill>
-          </a:ln>
-        </p:spPr>
-        <p:style>
-          <a:lnRef idx="1">
-            <a:schemeClr val="accent1"/>
-          </a:lnRef>
-          <a:fillRef idx="3">
-            <a:schemeClr val="accent1"/>
-          </a:fillRef>
-          <a:effectRef idx="2">
-            <a:schemeClr val="accent1"/>
-          </a:effectRef>
-          <a:fontRef idx="minor">
-            <a:schemeClr val="lt1"/>
-          </a:fontRef>
-        </p:style>
-        <p:txBody>
-          <a:bodyPr rtlCol="0" anchor="ctr" lIns="45720" rIns="45720"/>
-          <a:lstStyle/>
-          <a:p>
             <a:pPr algn="ctr"/>
             <a:r>
-              <a:rPr sz="900">
+              <a:rPr sz="2400">
                 <a:solidFill>
                   <a:srgbClr val="1F3A5F"/>
                 </a:solidFill>
               </a:rPr>
-              <a:t>Gram 2: FR Razor Crest, Category 3, Kobol</a:t>
-            </a:r>
-          </a:p>
-        </p:txBody>
-      </p:sp>
-      <p:sp>
-        <p:nvSpPr>
-          <p:cNvPr id="6" name="TextBox 5"/>
-          <p:cNvSpPr txBox="1"/>
-          <p:nvPr/>
-        </p:nvSpPr>
-        <p:spPr>
-          <a:xfrm>
-            <a:off x="2657246" y="1115568"/>
-            <a:ext cx="2200046" cy="1447800"/>
-          </a:xfrm>
-          <a:prstGeom prst="rect">
-            <a:avLst/>
-          </a:prstGeom>
-          <a:noFill/>
-        </p:spPr>
-        <p:txBody>
-          <a:bodyPr wrap="square">
-            <a:spAutoFit/>
-          </a:bodyPr>
-          <a:lstStyle/>
-          <a:p>
-            <a:r>
-              <a:rPr sz="800">
-                <a:hlinkClick r:id="rId6"/>
-              </a:rPr>
-              <a:t>Lofar 1</a:t>
-            </a:r>
-          </a:p>
-          <a:p>
-            <a:r>
-              <a:rPr sz="800">
-                <a:hlinkClick r:id="rId7"/>
-              </a:rPr>
-              <a:t>Lofar 2</a:t>
-            </a:r>
-          </a:p>
-          <a:p>
-            <a:r>
-              <a:rPr sz="800">
-                <a:hlinkClick r:id="rId8"/>
-              </a:rPr>
-              <a:t>Lofar 3</a:t>
-            </a:r>
-          </a:p>
-          <a:p>
-            <a:r>
-              <a:rPr sz="800">
-                <a:hlinkClick r:id="rId9"/>
-              </a:rPr>
-              <a:t>Lofar 4</a:t>
-            </a:r>
-          </a:p>
-        </p:txBody>
-      </p:sp>
-      <p:sp>
-        <p:nvSpPr>
-          <p:cNvPr id="7" name="Rounded Rectangle 6"/>
-          <p:cNvSpPr/>
-          <p:nvPr>
-            <a:hlinkClick r:id="rId10"/>
-          </p:nvPr>
-        </p:nvSpPr>
-        <p:spPr>
-          <a:xfrm>
-            <a:off x="4948732" y="731520"/>
-            <a:ext cx="2200046" cy="365760"/>
-          </a:xfrm>
-          <a:prstGeom prst="roundRect">
-            <a:avLst/>
-          </a:prstGeom>
-          <a:solidFill>
-            <a:srgbClr val="E8EEF7"/>
-          </a:solidFill>
-          <a:ln>
-            <a:solidFill>
-              <a:srgbClr val="1F3A5F"/>
-            </a:solidFill>
-          </a:ln>
-        </p:spPr>
-        <p:style>
-          <a:lnRef idx="1">
-            <a:schemeClr val="accent1"/>
-          </a:lnRef>
-          <a:fillRef idx="3">
-            <a:schemeClr val="accent1"/>
-          </a:fillRef>
-          <a:effectRef idx="2">
-            <a:schemeClr val="accent1"/>
-          </a:effectRef>
-          <a:fontRef idx="minor">
-            <a:schemeClr val="lt1"/>
-          </a:fontRef>
-        </p:style>
-        <p:txBody>
-          <a:bodyPr rtlCol="0" anchor="ctr" lIns="45720" rIns="45720"/>
-          <a:lstStyle/>
-          <a:p>
-            <a:pPr algn="ctr"/>
-            <a:r>
-              <a:rPr sz="900">
-                <a:solidFill>
-                  <a:srgbClr val="1F3A5F"/>
-                </a:solidFill>
-              </a:rPr>
-              <a:t>Gram 3: Slave I contact bearing 280, codename Yavin</a:t>
-            </a:r>
-          </a:p>
-        </p:txBody>
-      </p:sp>
-      <p:sp>
-        <p:nvSpPr>
-          <p:cNvPr id="8" name="TextBox 7"/>
-          <p:cNvSpPr txBox="1"/>
-          <p:nvPr/>
-        </p:nvSpPr>
-        <p:spPr>
-          <a:xfrm>
-            <a:off x="4948732" y="1115568"/>
-            <a:ext cx="2200046" cy="1447800"/>
-          </a:xfrm>
-          <a:prstGeom prst="rect">
-            <a:avLst/>
-          </a:prstGeom>
-          <a:noFill/>
-        </p:spPr>
-        <p:txBody>
-          <a:bodyPr wrap="square">
-            <a:spAutoFit/>
-          </a:bodyPr>
-          <a:lstStyle/>
-          <a:p>
-            <a:r>
-              <a:rPr sz="800">
-                <a:hlinkClick r:id="rId11"/>
-              </a:rPr>
-              <a:t>Lofar 1</a:t>
-            </a:r>
-          </a:p>
-          <a:p>
-            <a:r>
-              <a:rPr sz="800">
-                <a:hlinkClick r:id="rId12"/>
-              </a:rPr>
-              <a:t>Lofar 2</a:t>
-            </a:r>
-          </a:p>
-          <a:p>
-            <a:r>
-              <a:rPr sz="800">
-                <a:hlinkClick r:id="rId13"/>
-              </a:rPr>
-              <a:t>Lofar 3</a:t>
-            </a:r>
-          </a:p>
-          <a:p>
-            <a:r>
-              <a:rPr sz="800">
-                <a:hlinkClick r:id="rId14"/>
-              </a:rPr>
-              <a:t>Lofar 4</a:t>
-            </a:r>
-          </a:p>
-        </p:txBody>
-      </p:sp>
-      <p:sp>
-        <p:nvSpPr>
-          <p:cNvPr id="9" name="Rounded Rectangle 8"/>
-          <p:cNvSpPr/>
-          <p:nvPr>
-            <a:hlinkClick r:id="rId15"/>
-          </p:nvPr>
-        </p:nvSpPr>
-        <p:spPr>
-          <a:xfrm>
-            <a:off x="7240219" y="731520"/>
-            <a:ext cx="2200046" cy="365760"/>
-          </a:xfrm>
-          <a:prstGeom prst="roundRect">
-            <a:avLst/>
-          </a:prstGeom>
-          <a:solidFill>
-            <a:srgbClr val="E8EEF7"/>
-          </a:solidFill>
-          <a:ln>
-            <a:solidFill>
-              <a:srgbClr val="1F3A5F"/>
-            </a:solidFill>
-          </a:ln>
-        </p:spPr>
-        <p:style>
-          <a:lnRef idx="1">
-            <a:schemeClr val="accent1"/>
-          </a:lnRef>
-          <a:fillRef idx="3">
-            <a:schemeClr val="accent1"/>
-          </a:fillRef>
-          <a:effectRef idx="2">
-            <a:schemeClr val="accent1"/>
-          </a:effectRef>
-          <a:fontRef idx="minor">
-            <a:schemeClr val="lt1"/>
-          </a:fontRef>
-        </p:style>
-        <p:txBody>
-          <a:bodyPr rtlCol="0" anchor="ctr" lIns="45720" rIns="45720"/>
-          <a:lstStyle/>
-          <a:p>
-            <a:pPr algn="ctr"/>
-            <a:r>
-              <a:rPr sz="900">
-                <a:solidFill>
-                  <a:srgbClr val="1F3A5F"/>
-                </a:solidFill>
-              </a:rPr>
-              <a:t>Gram 4: FR Cerritos, Category 4, Gandalf</a:t>
-            </a:r>
-          </a:p>
-        </p:txBody>
-      </p:sp>
-      <p:sp>
-        <p:nvSpPr>
-          <p:cNvPr id="10" name="TextBox 9"/>
-          <p:cNvSpPr txBox="1"/>
-          <p:nvPr/>
-        </p:nvSpPr>
-        <p:spPr>
-          <a:xfrm>
-            <a:off x="7240219" y="1115568"/>
-            <a:ext cx="2200046" cy="1447800"/>
-          </a:xfrm>
-          <a:prstGeom prst="rect">
-            <a:avLst/>
-          </a:prstGeom>
-          <a:noFill/>
-        </p:spPr>
-        <p:txBody>
-          <a:bodyPr wrap="square">
-            <a:spAutoFit/>
-          </a:bodyPr>
-          <a:lstStyle/>
-          <a:p>
-            <a:r>
-              <a:rPr sz="800">
-                <a:hlinkClick r:id="rId16"/>
-              </a:rPr>
-              <a:t>Lofar 1</a:t>
-            </a:r>
-          </a:p>
-          <a:p>
-            <a:r>
-              <a:rPr sz="800">
-                <a:hlinkClick r:id="rId17"/>
-              </a:rPr>
-              <a:t>Lofar 2</a:t>
-            </a:r>
-          </a:p>
-        </p:txBody>
-      </p:sp>
-      <p:sp>
-        <p:nvSpPr>
-          <p:cNvPr id="11" name="Rounded Rectangle 10"/>
-          <p:cNvSpPr/>
-          <p:nvPr>
-            <a:hlinkClick r:id="rId18"/>
-          </p:nvPr>
-        </p:nvSpPr>
-        <p:spPr>
-          <a:xfrm>
-            <a:off x="9531705" y="731520"/>
-            <a:ext cx="2200046" cy="365760"/>
-          </a:xfrm>
-          <a:prstGeom prst="roundRect">
-            <a:avLst/>
-          </a:prstGeom>
-          <a:solidFill>
-            <a:srgbClr val="E8EEF7"/>
-          </a:solidFill>
-          <a:ln>
-            <a:solidFill>
-              <a:srgbClr val="1F3A5F"/>
-            </a:solidFill>
-          </a:ln>
-        </p:spPr>
-        <p:style>
-          <a:lnRef idx="1">
-            <a:schemeClr val="accent1"/>
-          </a:lnRef>
-          <a:fillRef idx="3">
-            <a:schemeClr val="accent1"/>
-          </a:fillRef>
-          <a:effectRef idx="2">
-            <a:schemeClr val="accent1"/>
-          </a:effectRef>
-          <a:fontRef idx="minor">
-            <a:schemeClr val="lt1"/>
-          </a:fontRef>
-        </p:style>
-        <p:txBody>
-          <a:bodyPr rtlCol="0" anchor="ctr" lIns="45720" rIns="45720"/>
-          <a:lstStyle/>
-          <a:p>
-            <a:pPr algn="ctr"/>
-            <a:r>
-              <a:rPr sz="900">
-                <a:solidFill>
-                  <a:srgbClr val="1F3A5F"/>
-                </a:solidFill>
-              </a:rPr>
-              <a:t>Gram 5: FR A-wing, Category 2, Endor</a:t>
-            </a:r>
-          </a:p>
-        </p:txBody>
-      </p:sp>
-      <p:sp>
-        <p:nvSpPr>
-          <p:cNvPr id="12" name="TextBox 11"/>
-          <p:cNvSpPr txBox="1"/>
-          <p:nvPr/>
-        </p:nvSpPr>
-        <p:spPr>
-          <a:xfrm>
-            <a:off x="9531705" y="1115568"/>
-            <a:ext cx="2200046" cy="1447800"/>
-          </a:xfrm>
-          <a:prstGeom prst="rect">
-            <a:avLst/>
-          </a:prstGeom>
-          <a:noFill/>
-        </p:spPr>
-        <p:txBody>
-          <a:bodyPr wrap="square">
-            <a:spAutoFit/>
-          </a:bodyPr>
-          <a:lstStyle/>
-          <a:p>
-            <a:r>
-              <a:rPr sz="800">
-                <a:hlinkClick r:id="rId19"/>
-              </a:rPr>
-              <a:t>Lofar 1</a:t>
-            </a:r>
-          </a:p>
-          <a:p>
-            <a:r>
-              <a:rPr sz="800">
-                <a:hlinkClick r:id="rId20"/>
-              </a:rPr>
-              <a:t>Lofar 2</a:t>
-            </a:r>
-          </a:p>
-          <a:p>
-            <a:r>
-              <a:rPr sz="800">
-                <a:hlinkClick r:id="rId21"/>
-              </a:rPr>
-              <a:t>Lofar 3</a:t>
-            </a:r>
-          </a:p>
-          <a:p>
-            <a:r>
-              <a:rPr sz="800">
-                <a:hlinkClick r:id="rId22"/>
-              </a:rPr>
-              <a:t>Lofar 4</a:t>
-            </a:r>
-          </a:p>
-        </p:txBody>
-      </p:sp>
-      <p:sp>
-        <p:nvSpPr>
-          <p:cNvPr id="13" name="Rounded Rectangle 12"/>
-          <p:cNvSpPr/>
-          <p:nvPr>
-            <a:hlinkClick r:id="rId23"/>
-          </p:nvPr>
-        </p:nvSpPr>
-        <p:spPr>
-          <a:xfrm>
-            <a:off x="365760" y="2682240"/>
-            <a:ext cx="2200046" cy="365760"/>
-          </a:xfrm>
-          <a:prstGeom prst="roundRect">
-            <a:avLst/>
-          </a:prstGeom>
-          <a:solidFill>
-            <a:srgbClr val="E8EEF7"/>
-          </a:solidFill>
-          <a:ln>
-            <a:solidFill>
-              <a:srgbClr val="1F3A5F"/>
-            </a:solidFill>
-          </a:ln>
-        </p:spPr>
-        <p:style>
-          <a:lnRef idx="1">
-            <a:schemeClr val="accent1"/>
-          </a:lnRef>
-          <a:fillRef idx="3">
-            <a:schemeClr val="accent1"/>
-          </a:fillRef>
-          <a:effectRef idx="2">
-            <a:schemeClr val="accent1"/>
-          </a:effectRef>
-          <a:fontRef idx="minor">
-            <a:schemeClr val="lt1"/>
-          </a:fontRef>
-        </p:style>
-        <p:txBody>
-          <a:bodyPr rtlCol="0" anchor="ctr" lIns="45720" rIns="45720"/>
-          <a:lstStyle/>
-          <a:p>
-            <a:pPr algn="ctr"/>
-            <a:r>
-              <a:rPr sz="900">
-                <a:solidFill>
-                  <a:srgbClr val="1F3A5F"/>
-                </a:solidFill>
-              </a:rPr>
-              <a:t>Gram 7: FR Discovery, Category 2, Dagobah</a:t>
-            </a:r>
-          </a:p>
-        </p:txBody>
-      </p:sp>
-      <p:sp>
-        <p:nvSpPr>
-          <p:cNvPr id="14" name="TextBox 13"/>
-          <p:cNvSpPr txBox="1"/>
-          <p:nvPr/>
-        </p:nvSpPr>
-        <p:spPr>
-          <a:xfrm>
-            <a:off x="365760" y="3066288"/>
-            <a:ext cx="2200046" cy="1447800"/>
-          </a:xfrm>
-          <a:prstGeom prst="rect">
-            <a:avLst/>
-          </a:prstGeom>
-          <a:noFill/>
-        </p:spPr>
-        <p:txBody>
-          <a:bodyPr wrap="square">
-            <a:spAutoFit/>
-          </a:bodyPr>
-          <a:lstStyle/>
-          <a:p>
-            <a:r>
-              <a:rPr sz="800">
-                <a:hlinkClick r:id="rId24"/>
-              </a:rPr>
-              <a:t>Lofar 1</a:t>
-            </a:r>
-          </a:p>
-          <a:p>
-            <a:r>
-              <a:rPr sz="800">
-                <a:hlinkClick r:id="rId25"/>
-              </a:rPr>
-              <a:t>Lofar 2</a:t>
-            </a:r>
-          </a:p>
-          <a:p>
-            <a:r>
-              <a:rPr sz="800">
-                <a:hlinkClick r:id="rId26"/>
-              </a:rPr>
-              <a:t>Lofar 3</a:t>
-            </a:r>
-          </a:p>
-        </p:txBody>
-      </p:sp>
-      <p:sp>
-        <p:nvSpPr>
-          <p:cNvPr id="15" name="Rounded Rectangle 14"/>
-          <p:cNvSpPr/>
-          <p:nvPr>
-            <a:hlinkClick r:id="rId27"/>
-          </p:nvPr>
-        </p:nvSpPr>
-        <p:spPr>
-          <a:xfrm>
-            <a:off x="2657246" y="2682240"/>
-            <a:ext cx="2200046" cy="365760"/>
-          </a:xfrm>
-          <a:prstGeom prst="roundRect">
-            <a:avLst/>
-          </a:prstGeom>
-          <a:solidFill>
-            <a:srgbClr val="E8EEF7"/>
-          </a:solidFill>
-          <a:ln>
-            <a:solidFill>
-              <a:srgbClr val="1F3A5F"/>
-            </a:solidFill>
-          </a:ln>
-        </p:spPr>
-        <p:style>
-          <a:lnRef idx="1">
-            <a:schemeClr val="accent1"/>
-          </a:lnRef>
-          <a:fillRef idx="3">
-            <a:schemeClr val="accent1"/>
-          </a:fillRef>
-          <a:effectRef idx="2">
-            <a:schemeClr val="accent1"/>
-          </a:effectRef>
-          <a:fontRef idx="minor">
-            <a:schemeClr val="lt1"/>
-          </a:fontRef>
-        </p:style>
-        <p:txBody>
-          <a:bodyPr rtlCol="0" anchor="ctr" lIns="45720" rIns="45720"/>
-          <a:lstStyle/>
-          <a:p>
-            <a:pPr algn="ctr"/>
-            <a:r>
-              <a:rPr sz="900">
-                <a:solidFill>
-                  <a:srgbClr val="1F3A5F"/>
-                </a:solidFill>
-              </a:rPr>
-              <a:t>Gram 9: FR Star Destroyer, Category 1, Yavin</a:t>
-            </a:r>
-          </a:p>
-        </p:txBody>
-      </p:sp>
-      <p:sp>
-        <p:nvSpPr>
-          <p:cNvPr id="16" name="TextBox 15"/>
-          <p:cNvSpPr txBox="1"/>
-          <p:nvPr/>
-        </p:nvSpPr>
-        <p:spPr>
-          <a:xfrm>
-            <a:off x="2657246" y="3066288"/>
-            <a:ext cx="2200046" cy="1447800"/>
-          </a:xfrm>
-          <a:prstGeom prst="rect">
-            <a:avLst/>
-          </a:prstGeom>
-          <a:noFill/>
-        </p:spPr>
-        <p:txBody>
-          <a:bodyPr wrap="square">
-            <a:spAutoFit/>
-          </a:bodyPr>
-          <a:lstStyle/>
-          <a:p>
-            <a:r>
-              <a:rPr sz="800">
-                <a:hlinkClick r:id="rId28"/>
-              </a:rPr>
-              <a:t>Lofar 1</a:t>
-            </a:r>
-          </a:p>
-        </p:txBody>
-      </p:sp>
-      <p:sp>
-        <p:nvSpPr>
-          <p:cNvPr id="17" name="Rounded Rectangle 16"/>
-          <p:cNvSpPr/>
-          <p:nvPr>
-            <a:hlinkClick r:id="rId29"/>
-          </p:nvPr>
-        </p:nvSpPr>
-        <p:spPr>
-          <a:xfrm>
-            <a:off x="4948732" y="2682240"/>
-            <a:ext cx="2200046" cy="365760"/>
-          </a:xfrm>
-          <a:prstGeom prst="roundRect">
-            <a:avLst/>
-          </a:prstGeom>
-          <a:solidFill>
-            <a:srgbClr val="E8EEF7"/>
-          </a:solidFill>
-          <a:ln>
-            <a:solidFill>
-              <a:srgbClr val="1F3A5F"/>
-            </a:solidFill>
-          </a:ln>
-        </p:spPr>
-        <p:style>
-          <a:lnRef idx="1">
-            <a:schemeClr val="accent1"/>
-          </a:lnRef>
-          <a:fillRef idx="3">
-            <a:schemeClr val="accent1"/>
-          </a:fillRef>
-          <a:effectRef idx="2">
-            <a:schemeClr val="accent1"/>
-          </a:effectRef>
-          <a:fontRef idx="minor">
-            <a:schemeClr val="lt1"/>
-          </a:fontRef>
-        </p:style>
-        <p:txBody>
-          <a:bodyPr rtlCol="0" anchor="ctr" lIns="45720" rIns="45720"/>
-          <a:lstStyle/>
-          <a:p>
-            <a:pPr algn="ctr"/>
-            <a:r>
-              <a:rPr sz="900">
-                <a:solidFill>
-                  <a:srgbClr val="1F3A5F"/>
-                </a:solidFill>
-              </a:rPr>
-              <a:t>Gram 10: FR Venator-class, Category 4, Bajor</a:t>
-            </a:r>
-          </a:p>
-        </p:txBody>
-      </p:sp>
-      <p:sp>
-        <p:nvSpPr>
-          <p:cNvPr id="18" name="TextBox 17"/>
-          <p:cNvSpPr txBox="1"/>
-          <p:nvPr/>
-        </p:nvSpPr>
-        <p:spPr>
-          <a:xfrm>
-            <a:off x="4948732" y="3066288"/>
-            <a:ext cx="2200046" cy="1447800"/>
-          </a:xfrm>
-          <a:prstGeom prst="rect">
-            <a:avLst/>
-          </a:prstGeom>
-          <a:noFill/>
-        </p:spPr>
-        <p:txBody>
-          <a:bodyPr wrap="square">
-            <a:spAutoFit/>
-          </a:bodyPr>
-          <a:lstStyle/>
-          <a:p>
-            <a:r>
-              <a:rPr sz="800">
-                <a:hlinkClick r:id="rId30"/>
-              </a:rPr>
-              <a:t>Lofar 1</a:t>
-            </a:r>
-          </a:p>
-          <a:p>
-            <a:r>
-              <a:rPr sz="800">
-                <a:hlinkClick r:id="rId31"/>
-              </a:rPr>
-              <a:t>Lofar 2</a:t>
-            </a:r>
-          </a:p>
-          <a:p>
-            <a:r>
-              <a:rPr sz="800">
-                <a:hlinkClick r:id="rId32"/>
-              </a:rPr>
-              <a:t>Lofar 3</a:t>
-            </a:r>
-          </a:p>
-        </p:txBody>
-      </p:sp>
-      <p:sp>
-        <p:nvSpPr>
-          <p:cNvPr id="19" name="Rounded Rectangle 18"/>
-          <p:cNvSpPr/>
-          <p:nvPr>
-            <a:hlinkClick r:id="rId33"/>
-          </p:nvPr>
-        </p:nvSpPr>
-        <p:spPr>
-          <a:xfrm>
-            <a:off x="7240219" y="2682240"/>
-            <a:ext cx="2200046" cy="365760"/>
-          </a:xfrm>
-          <a:prstGeom prst="roundRect">
-            <a:avLst/>
-          </a:prstGeom>
-          <a:solidFill>
-            <a:srgbClr val="E8EEF7"/>
-          </a:solidFill>
-          <a:ln>
-            <a:solidFill>
-              <a:srgbClr val="1F3A5F"/>
-            </a:solidFill>
-          </a:ln>
-        </p:spPr>
-        <p:style>
-          <a:lnRef idx="1">
-            <a:schemeClr val="accent1"/>
-          </a:lnRef>
-          <a:fillRef idx="3">
-            <a:schemeClr val="accent1"/>
-          </a:fillRef>
-          <a:effectRef idx="2">
-            <a:schemeClr val="accent1"/>
-          </a:effectRef>
-          <a:fontRef idx="minor">
-            <a:schemeClr val="lt1"/>
-          </a:fontRef>
-        </p:style>
-        <p:txBody>
-          <a:bodyPr rtlCol="0" anchor="ctr" lIns="45720" rIns="45720"/>
-          <a:lstStyle/>
-          <a:p>
-            <a:pPr algn="ctr"/>
-            <a:r>
-              <a:rPr sz="900">
-                <a:solidFill>
-                  <a:srgbClr val="1F3A5F"/>
-                </a:solidFill>
-              </a:rPr>
-              <a:t>Gram 11: FR Voyager, Category 1, Trill</a:t>
-            </a:r>
-          </a:p>
-        </p:txBody>
-      </p:sp>
-      <p:sp>
-        <p:nvSpPr>
-          <p:cNvPr id="20" name="TextBox 19"/>
-          <p:cNvSpPr txBox="1"/>
-          <p:nvPr/>
-        </p:nvSpPr>
-        <p:spPr>
-          <a:xfrm>
-            <a:off x="7240219" y="3066288"/>
-            <a:ext cx="2200046" cy="1447800"/>
-          </a:xfrm>
-          <a:prstGeom prst="rect">
-            <a:avLst/>
-          </a:prstGeom>
-          <a:noFill/>
-        </p:spPr>
-        <p:txBody>
-          <a:bodyPr wrap="square">
-            <a:spAutoFit/>
-          </a:bodyPr>
-          <a:lstStyle/>
-          <a:p>
-            <a:r>
-              <a:rPr sz="800">
-                <a:hlinkClick r:id="rId34"/>
-              </a:rPr>
-              <a:t>Lofar 1</a:t>
-            </a:r>
-          </a:p>
-          <a:p>
-            <a:r>
-              <a:rPr sz="800">
-                <a:hlinkClick r:id="rId35"/>
-              </a:rPr>
-              <a:t>Lofar 2</a:t>
-            </a:r>
-          </a:p>
-          <a:p>
-            <a:r>
-              <a:rPr sz="800">
-                <a:hlinkClick r:id="rId36"/>
-              </a:rPr>
-              <a:t>Lofar 3</a:t>
-            </a:r>
-          </a:p>
-        </p:txBody>
-      </p:sp>
-      <p:sp>
-        <p:nvSpPr>
-          <p:cNvPr id="21" name="Rounded Rectangle 20"/>
-          <p:cNvSpPr/>
-          <p:nvPr>
-            <a:hlinkClick r:id="rId37"/>
-          </p:nvPr>
-        </p:nvSpPr>
-        <p:spPr>
-          <a:xfrm>
-            <a:off x="9531705" y="2682240"/>
-            <a:ext cx="2200046" cy="365760"/>
-          </a:xfrm>
-          <a:prstGeom prst="roundRect">
-            <a:avLst/>
-          </a:prstGeom>
-          <a:solidFill>
-            <a:srgbClr val="E8EEF7"/>
-          </a:solidFill>
-          <a:ln>
-            <a:solidFill>
-              <a:srgbClr val="1F3A5F"/>
-            </a:solidFill>
-          </a:ln>
-        </p:spPr>
-        <p:style>
-          <a:lnRef idx="1">
-            <a:schemeClr val="accent1"/>
-          </a:lnRef>
-          <a:fillRef idx="3">
-            <a:schemeClr val="accent1"/>
-          </a:fillRef>
-          <a:effectRef idx="2">
-            <a:schemeClr val="accent1"/>
-          </a:effectRef>
-          <a:fontRef idx="minor">
-            <a:schemeClr val="lt1"/>
-          </a:fontRef>
-        </p:style>
-        <p:txBody>
-          <a:bodyPr rtlCol="0" anchor="ctr" lIns="45720" rIns="45720"/>
-          <a:lstStyle/>
-          <a:p>
-            <a:pPr algn="ctr"/>
-            <a:r>
-              <a:rPr sz="900">
-                <a:solidFill>
-                  <a:srgbClr val="1F3A5F"/>
-                </a:solidFill>
-              </a:rPr>
-              <a:t>Gram 12: FR Ghost, Category 3, Tantive</a:t>
-            </a:r>
-          </a:p>
-        </p:txBody>
-      </p:sp>
-      <p:sp>
-        <p:nvSpPr>
-          <p:cNvPr id="22" name="TextBox 21"/>
-          <p:cNvSpPr txBox="1"/>
-          <p:nvPr/>
-        </p:nvSpPr>
-        <p:spPr>
-          <a:xfrm>
-            <a:off x="9531705" y="3066288"/>
-            <a:ext cx="2200046" cy="1447800"/>
-          </a:xfrm>
-          <a:prstGeom prst="rect">
-            <a:avLst/>
-          </a:prstGeom>
-          <a:noFill/>
-        </p:spPr>
-        <p:txBody>
-          <a:bodyPr wrap="square">
-            <a:spAutoFit/>
-          </a:bodyPr>
-          <a:lstStyle/>
-          <a:p>
-            <a:r>
-              <a:rPr sz="800">
-                <a:hlinkClick r:id="rId38"/>
-              </a:rPr>
-              <a:t>Lofar 1</a:t>
-            </a:r>
-          </a:p>
-          <a:p>
-            <a:r>
-              <a:rPr sz="800">
-                <a:hlinkClick r:id="rId39"/>
-              </a:rPr>
-              <a:t>Lofar 2</a:t>
-            </a:r>
-          </a:p>
-        </p:txBody>
-      </p:sp>
-      <p:sp>
-        <p:nvSpPr>
-          <p:cNvPr id="23" name="Rounded Rectangle 22"/>
-          <p:cNvSpPr/>
-          <p:nvPr>
-            <a:hlinkClick r:id="rId40"/>
-          </p:nvPr>
-        </p:nvSpPr>
-        <p:spPr>
-          <a:xfrm>
-            <a:off x="365760" y="4632960"/>
-            <a:ext cx="2200046" cy="365760"/>
-          </a:xfrm>
-          <a:prstGeom prst="roundRect">
-            <a:avLst/>
-          </a:prstGeom>
-          <a:solidFill>
-            <a:srgbClr val="E8EEF7"/>
-          </a:solidFill>
-          <a:ln>
-            <a:solidFill>
-              <a:srgbClr val="1F3A5F"/>
-            </a:solidFill>
-          </a:ln>
-        </p:spPr>
-        <p:style>
-          <a:lnRef idx="1">
-            <a:schemeClr val="accent1"/>
-          </a:lnRef>
-          <a:fillRef idx="3">
-            <a:schemeClr val="accent1"/>
-          </a:fillRef>
-          <a:effectRef idx="2">
-            <a:schemeClr val="accent1"/>
-          </a:effectRef>
-          <a:fontRef idx="minor">
-            <a:schemeClr val="lt1"/>
-          </a:fontRef>
-        </p:style>
-        <p:txBody>
-          <a:bodyPr rtlCol="0" anchor="ctr" lIns="45720" rIns="45720"/>
-          <a:lstStyle/>
-          <a:p>
-            <a:pPr algn="ctr"/>
-            <a:r>
-              <a:rPr sz="900">
-                <a:solidFill>
-                  <a:srgbClr val="1F3A5F"/>
-                </a:solidFill>
-              </a:rPr>
-              <a:t>Gram 13: FR Venator-class, Category 4, Bajor</a:t>
-            </a:r>
-          </a:p>
-        </p:txBody>
-      </p:sp>
-      <p:sp>
-        <p:nvSpPr>
-          <p:cNvPr id="24" name="TextBox 23"/>
-          <p:cNvSpPr txBox="1"/>
-          <p:nvPr/>
-        </p:nvSpPr>
-        <p:spPr>
-          <a:xfrm>
-            <a:off x="365760" y="5017008"/>
-            <a:ext cx="2200046" cy="1447800"/>
-          </a:xfrm>
-          <a:prstGeom prst="rect">
-            <a:avLst/>
-          </a:prstGeom>
-          <a:noFill/>
-        </p:spPr>
-        <p:txBody>
-          <a:bodyPr wrap="square">
-            <a:spAutoFit/>
-          </a:bodyPr>
-          <a:lstStyle/>
-          <a:p>
-            <a:r>
-              <a:rPr sz="800">
-                <a:hlinkClick r:id="rId41"/>
-              </a:rPr>
-              <a:t>Lofar 1</a:t>
-            </a:r>
-          </a:p>
-        </p:txBody>
-      </p:sp>
-      <p:sp>
-        <p:nvSpPr>
-          <p:cNvPr id="25" name="Rounded Rectangle 24"/>
-          <p:cNvSpPr/>
-          <p:nvPr>
-            <a:hlinkClick r:id="rId42"/>
-          </p:nvPr>
-        </p:nvSpPr>
-        <p:spPr>
-          <a:xfrm>
-            <a:off x="2657246" y="4632960"/>
-            <a:ext cx="2200046" cy="365760"/>
-          </a:xfrm>
-          <a:prstGeom prst="roundRect">
-            <a:avLst/>
-          </a:prstGeom>
-          <a:solidFill>
-            <a:srgbClr val="E8EEF7"/>
-          </a:solidFill>
-          <a:ln>
-            <a:solidFill>
-              <a:srgbClr val="1F3A5F"/>
-            </a:solidFill>
-          </a:ln>
-        </p:spPr>
-        <p:style>
-          <a:lnRef idx="1">
-            <a:schemeClr val="accent1"/>
-          </a:lnRef>
-          <a:fillRef idx="3">
-            <a:schemeClr val="accent1"/>
-          </a:fillRef>
-          <a:effectRef idx="2">
-            <a:schemeClr val="accent1"/>
-          </a:effectRef>
-          <a:fontRef idx="minor">
-            <a:schemeClr val="lt1"/>
-          </a:fontRef>
-        </p:style>
-        <p:txBody>
-          <a:bodyPr rtlCol="0" anchor="ctr" lIns="45720" rIns="45720"/>
-          <a:lstStyle/>
-          <a:p>
-            <a:pPr algn="ctr"/>
-            <a:r>
-              <a:rPr sz="900">
-                <a:solidFill>
-                  <a:srgbClr val="1F3A5F"/>
-                </a:solidFill>
-              </a:rPr>
-              <a:t>Gram 14: FR Nebula-class, Category 1, Caprica</a:t>
-            </a:r>
-          </a:p>
-        </p:txBody>
-      </p:sp>
-      <p:sp>
-        <p:nvSpPr>
-          <p:cNvPr id="26" name="TextBox 25"/>
-          <p:cNvSpPr txBox="1"/>
-          <p:nvPr/>
-        </p:nvSpPr>
-        <p:spPr>
-          <a:xfrm>
-            <a:off x="2657246" y="5017008"/>
-            <a:ext cx="2200046" cy="1447800"/>
-          </a:xfrm>
-          <a:prstGeom prst="rect">
-            <a:avLst/>
-          </a:prstGeom>
-          <a:noFill/>
-        </p:spPr>
-        <p:txBody>
-          <a:bodyPr wrap="square">
-            <a:spAutoFit/>
-          </a:bodyPr>
-          <a:lstStyle/>
-          <a:p>
-            <a:r>
-              <a:rPr sz="800">
-                <a:hlinkClick r:id="rId43"/>
-              </a:rPr>
-              <a:t>Lofar 1</a:t>
-            </a:r>
-          </a:p>
-        </p:txBody>
-      </p:sp>
-      <p:sp>
-        <p:nvSpPr>
-          <p:cNvPr id="27" name="Rounded Rectangle 26"/>
-          <p:cNvSpPr/>
-          <p:nvPr>
-            <a:hlinkClick r:id="rId44"/>
-          </p:nvPr>
-        </p:nvSpPr>
-        <p:spPr>
-          <a:xfrm>
-            <a:off x="4948732" y="4632960"/>
-            <a:ext cx="2200046" cy="365760"/>
-          </a:xfrm>
-          <a:prstGeom prst="roundRect">
-            <a:avLst/>
-          </a:prstGeom>
-          <a:solidFill>
-            <a:srgbClr val="E8EEF7"/>
-          </a:solidFill>
-          <a:ln>
-            <a:solidFill>
-              <a:srgbClr val="1F3A5F"/>
-            </a:solidFill>
-          </a:ln>
-        </p:spPr>
-        <p:style>
-          <a:lnRef idx="1">
-            <a:schemeClr val="accent1"/>
-          </a:lnRef>
-          <a:fillRef idx="3">
-            <a:schemeClr val="accent1"/>
-          </a:fillRef>
-          <a:effectRef idx="2">
-            <a:schemeClr val="accent1"/>
-          </a:effectRef>
-          <a:fontRef idx="minor">
-            <a:schemeClr val="lt1"/>
-          </a:fontRef>
-        </p:style>
-        <p:txBody>
-          <a:bodyPr rtlCol="0" anchor="ctr" lIns="45720" rIns="45720"/>
-          <a:lstStyle/>
-          <a:p>
-            <a:pPr algn="ctr"/>
-            <a:r>
-              <a:rPr sz="900">
-                <a:solidFill>
-                  <a:srgbClr val="1F3A5F"/>
-                </a:solidFill>
-              </a:rPr>
-              <a:t>Gram 15: FR Sovereign-class, Category 1, Bajor</a:t>
-            </a:r>
-          </a:p>
-        </p:txBody>
-      </p:sp>
-      <p:sp>
-        <p:nvSpPr>
-          <p:cNvPr id="28" name="TextBox 27"/>
-          <p:cNvSpPr txBox="1"/>
-          <p:nvPr/>
-        </p:nvSpPr>
-        <p:spPr>
-          <a:xfrm>
-            <a:off x="4948732" y="5017008"/>
-            <a:ext cx="2200046" cy="1447800"/>
-          </a:xfrm>
-          <a:prstGeom prst="rect">
-            <a:avLst/>
-          </a:prstGeom>
-          <a:noFill/>
-        </p:spPr>
-        <p:txBody>
-          <a:bodyPr wrap="square">
-            <a:spAutoFit/>
-          </a:bodyPr>
-          <a:lstStyle/>
-          <a:p>
-            <a:r>
-              <a:rPr sz="800">
-                <a:hlinkClick r:id="rId45"/>
-              </a:rPr>
-              <a:t>Lofar 1</a:t>
-            </a:r>
-          </a:p>
-          <a:p>
-            <a:r>
-              <a:rPr sz="800">
-                <a:hlinkClick r:id="rId46"/>
-              </a:rPr>
-              <a:t>Lofar 2</a:t>
-            </a:r>
-          </a:p>
-          <a:p>
-            <a:r>
-              <a:rPr sz="800">
-                <a:hlinkClick r:id="rId47"/>
-              </a:rPr>
-              <a:t>Lofar 3</a:t>
-            </a:r>
-          </a:p>
-          <a:p>
-            <a:r>
-              <a:rPr sz="800">
-                <a:hlinkClick r:id="rId48"/>
-              </a:rPr>
-              <a:t>Lofar 4</a:t>
-            </a:r>
-          </a:p>
-        </p:txBody>
-      </p:sp>
-      <p:sp>
-        <p:nvSpPr>
-          <p:cNvPr id="29" name="Rounded Rectangle 28"/>
-          <p:cNvSpPr/>
-          <p:nvPr>
-            <a:hlinkClick r:id="rId49"/>
-          </p:nvPr>
-        </p:nvSpPr>
-        <p:spPr>
-          <a:xfrm>
-            <a:off x="7240219" y="4632960"/>
-            <a:ext cx="2200046" cy="365760"/>
-          </a:xfrm>
-          <a:prstGeom prst="roundRect">
-            <a:avLst/>
-          </a:prstGeom>
-          <a:solidFill>
-            <a:srgbClr val="E8EEF7"/>
-          </a:solidFill>
-          <a:ln>
-            <a:solidFill>
-              <a:srgbClr val="1F3A5F"/>
-            </a:solidFill>
-          </a:ln>
-        </p:spPr>
-        <p:style>
-          <a:lnRef idx="1">
-            <a:schemeClr val="accent1"/>
-          </a:lnRef>
-          <a:fillRef idx="3">
-            <a:schemeClr val="accent1"/>
-          </a:fillRef>
-          <a:effectRef idx="2">
-            <a:schemeClr val="accent1"/>
-          </a:effectRef>
-          <a:fontRef idx="minor">
-            <a:schemeClr val="lt1"/>
-          </a:fontRef>
-        </p:style>
-        <p:txBody>
-          <a:bodyPr rtlCol="0" anchor="ctr" lIns="45720" rIns="45720"/>
-          <a:lstStyle/>
-          <a:p>
-            <a:pPr algn="ctr"/>
-            <a:r>
-              <a:rPr sz="900">
-                <a:solidFill>
-                  <a:srgbClr val="1F3A5F"/>
-                </a:solidFill>
-              </a:rPr>
-              <a:t>Gram 16: FR TIE Fighter, Category 3, Yavin</a:t>
-            </a:r>
-          </a:p>
-        </p:txBody>
-      </p:sp>
-      <p:sp>
-        <p:nvSpPr>
-          <p:cNvPr id="30" name="TextBox 29"/>
-          <p:cNvSpPr txBox="1"/>
-          <p:nvPr/>
-        </p:nvSpPr>
-        <p:spPr>
-          <a:xfrm>
-            <a:off x="7240219" y="5017008"/>
-            <a:ext cx="2200046" cy="1447800"/>
-          </a:xfrm>
-          <a:prstGeom prst="rect">
-            <a:avLst/>
-          </a:prstGeom>
-          <a:noFill/>
-        </p:spPr>
-        <p:txBody>
-          <a:bodyPr wrap="square">
-            <a:spAutoFit/>
-          </a:bodyPr>
-          <a:lstStyle/>
-          <a:p>
-            <a:r>
-              <a:rPr sz="800">
-                <a:hlinkClick r:id="rId50"/>
-              </a:rPr>
-              <a:t>Lofar 1</a:t>
-            </a:r>
-          </a:p>
-        </p:txBody>
-      </p:sp>
-      <p:sp>
-        <p:nvSpPr>
-          <p:cNvPr id="31" name="Rounded Rectangle 30"/>
-          <p:cNvSpPr/>
-          <p:nvPr>
-            <a:hlinkClick r:id="rId51"/>
-          </p:nvPr>
-        </p:nvSpPr>
-        <p:spPr>
-          <a:xfrm>
-            <a:off x="9531705" y="4632960"/>
-            <a:ext cx="2200046" cy="365760"/>
-          </a:xfrm>
-          <a:prstGeom prst="roundRect">
-            <a:avLst/>
-          </a:prstGeom>
-          <a:solidFill>
-            <a:srgbClr val="E8EEF7"/>
-          </a:solidFill>
-          <a:ln>
-            <a:solidFill>
-              <a:srgbClr val="1F3A5F"/>
-            </a:solidFill>
-          </a:ln>
-        </p:spPr>
-        <p:style>
-          <a:lnRef idx="1">
-            <a:schemeClr val="accent1"/>
-          </a:lnRef>
-          <a:fillRef idx="3">
-            <a:schemeClr val="accent1"/>
-          </a:fillRef>
-          <a:effectRef idx="2">
-            <a:schemeClr val="accent1"/>
-          </a:effectRef>
-          <a:fontRef idx="minor">
-            <a:schemeClr val="lt1"/>
-          </a:fontRef>
-        </p:style>
-        <p:txBody>
-          <a:bodyPr rtlCol="0" anchor="ctr" lIns="45720" rIns="45720"/>
-          <a:lstStyle/>
-          <a:p>
-            <a:pPr algn="ctr"/>
-            <a:r>
-              <a:rPr sz="900">
-                <a:solidFill>
-                  <a:srgbClr val="1F3A5F"/>
-                </a:solidFill>
-              </a:rPr>
-              <a:t>Gram 18: FR Nebula-class, Category 4, Risa</a:t>
-            </a:r>
-          </a:p>
-        </p:txBody>
-      </p:sp>
-      <p:sp>
-        <p:nvSpPr>
-          <p:cNvPr id="32" name="TextBox 31"/>
-          <p:cNvSpPr txBox="1"/>
-          <p:nvPr/>
-        </p:nvSpPr>
-        <p:spPr>
-          <a:xfrm>
-            <a:off x="9531705" y="5017008"/>
-            <a:ext cx="2200046" cy="1447800"/>
-          </a:xfrm>
-          <a:prstGeom prst="rect">
-            <a:avLst/>
-          </a:prstGeom>
-          <a:noFill/>
-        </p:spPr>
-        <p:txBody>
-          <a:bodyPr wrap="square">
-            <a:spAutoFit/>
-          </a:bodyPr>
-          <a:lstStyle/>
-          <a:p>
-            <a:r>
-              <a:rPr sz="800">
-                <a:hlinkClick r:id="rId52"/>
-              </a:rPr>
-              <a:t>Lofar 1</a:t>
-            </a:r>
-          </a:p>
-          <a:p>
-            <a:r>
-              <a:rPr sz="800">
-                <a:hlinkClick r:id="rId53"/>
-              </a:rPr>
-              <a:t>Lofar 2</a:t>
-            </a:r>
-          </a:p>
-          <a:p>
-            <a:r>
-              <a:rPr sz="800">
-                <a:hlinkClick r:id="rId54"/>
-              </a:rPr>
-              <a:t>Lofar 3</a:t>
+              <a:t>Instructor Version</a:t>
             </a:r>
           </a:p>
         </p:txBody>
@@ -4679,7 +3224,7 @@
                   <a:srgbClr val="FFFFFF"/>
                 </a:solidFill>
               </a:rPr>
-              <a:t>Instructor Week 2 Grams — Page 2 of 3</a:t>
+              <a:t>Instructor Week 2 Grams — Page 1 of 3</a:t>
             </a:r>
           </a:p>
         </p:txBody>
@@ -4734,7 +3279,7 @@
                   <a:srgbClr val="1F3A5F"/>
                 </a:solidFill>
               </a:rPr>
-              <a:t>Gram 19: Akira-class contact bearing 162, codename Tatooine</a:t>
+              <a:t>Gram 1: FR Razor Crest, Category 1, Kronos</a:t>
             </a:r>
           </a:p>
         </p:txBody>
@@ -4768,6 +3313,14 @@
               <a:t>Lofar 1</a:t>
             </a:r>
           </a:p>
+          <a:p>
+            <a:r>
+              <a:rPr sz="800">
+                <a:hlinkClick r:id="rId4"/>
+              </a:rPr>
+              <a:t>Lofar 2</a:t>
+            </a:r>
+          </a:p>
         </p:txBody>
       </p:sp>
       <p:sp>
@@ -4775,7 +3328,7 @@
           <p:cNvPr id="5" name="Rounded Rectangle 4"/>
           <p:cNvSpPr/>
           <p:nvPr>
-            <a:hlinkClick r:id="rId4"/>
+            <a:hlinkClick r:id="rId5"/>
           </p:nvPr>
         </p:nvSpPr>
         <p:spPr>
@@ -4820,7 +3373,7 @@
                   <a:srgbClr val="1F3A5F"/>
                 </a:solidFill>
               </a:rPr>
-              <a:t>Gram 20: FR Stargazer, Category 4, Gandalf</a:t>
+              <a:t>Gram 2: FR Razor Crest, Category 3, Kobol</a:t>
             </a:r>
           </a:p>
         </p:txBody>
@@ -4849,7 +3402,7 @@
           <a:p>
             <a:r>
               <a:rPr sz="800">
-                <a:hlinkClick r:id="rId5"/>
+                <a:hlinkClick r:id="rId6"/>
               </a:rPr>
               <a:t>Lofar 1</a:t>
             </a:r>
@@ -4857,7 +3410,7 @@
           <a:p>
             <a:r>
               <a:rPr sz="800">
-                <a:hlinkClick r:id="rId6"/>
+                <a:hlinkClick r:id="rId7"/>
               </a:rPr>
               <a:t>Lofar 2</a:t>
             </a:r>
@@ -4865,9 +3418,17 @@
           <a:p>
             <a:r>
               <a:rPr sz="800">
-                <a:hlinkClick r:id="rId7"/>
+                <a:hlinkClick r:id="rId8"/>
               </a:rPr>
               <a:t>Lofar 3</a:t>
+            </a:r>
+          </a:p>
+          <a:p>
+            <a:r>
+              <a:rPr sz="800">
+                <a:hlinkClick r:id="rId9"/>
+              </a:rPr>
+              <a:t>Lofar 4</a:t>
             </a:r>
           </a:p>
         </p:txBody>
@@ -4877,7 +3438,7 @@
           <p:cNvPr id="7" name="Rounded Rectangle 6"/>
           <p:cNvSpPr/>
           <p:nvPr>
-            <a:hlinkClick r:id="rId8"/>
+            <a:hlinkClick r:id="rId10"/>
           </p:nvPr>
         </p:nvSpPr>
         <p:spPr>
@@ -4922,7 +3483,7 @@
                   <a:srgbClr val="1F3A5F"/>
                 </a:solidFill>
               </a:rPr>
-              <a:t>Gram 22: FR Y-wing, Category 1, Tantive</a:t>
+              <a:t>Gram 3: Slave I contact bearing 280, codename Yavin</a:t>
             </a:r>
           </a:p>
         </p:txBody>
@@ -4951,7 +3512,7 @@
           <a:p>
             <a:r>
               <a:rPr sz="800">
-                <a:hlinkClick r:id="rId9"/>
+                <a:hlinkClick r:id="rId11"/>
               </a:rPr>
               <a:t>Lofar 1</a:t>
             </a:r>
@@ -4959,9 +3520,25 @@
           <a:p>
             <a:r>
               <a:rPr sz="800">
-                <a:hlinkClick r:id="rId10"/>
+                <a:hlinkClick r:id="rId12"/>
               </a:rPr>
               <a:t>Lofar 2</a:t>
+            </a:r>
+          </a:p>
+          <a:p>
+            <a:r>
+              <a:rPr sz="800">
+                <a:hlinkClick r:id="rId13"/>
+              </a:rPr>
+              <a:t>Lofar 3</a:t>
+            </a:r>
+          </a:p>
+          <a:p>
+            <a:r>
+              <a:rPr sz="800">
+                <a:hlinkClick r:id="rId14"/>
+              </a:rPr>
+              <a:t>Lofar 4</a:t>
             </a:r>
           </a:p>
         </p:txBody>
@@ -4971,7 +3548,7 @@
           <p:cNvPr id="9" name="Rounded Rectangle 8"/>
           <p:cNvSpPr/>
           <p:nvPr>
-            <a:hlinkClick r:id="rId11"/>
+            <a:hlinkClick r:id="rId15"/>
           </p:nvPr>
         </p:nvSpPr>
         <p:spPr>
@@ -5016,7 +3593,7 @@
                   <a:srgbClr val="1F3A5F"/>
                 </a:solidFill>
               </a:rPr>
-              <a:t>Gram 24: FR Sovereign-class, Category 2, Coruscant</a:t>
+              <a:t>Gram 4: FR Cerritos, Category 4, Gandalf</a:t>
             </a:r>
           </a:p>
         </p:txBody>
@@ -5045,7 +3622,7 @@
           <a:p>
             <a:r>
               <a:rPr sz="800">
-                <a:hlinkClick r:id="rId12"/>
+                <a:hlinkClick r:id="rId16"/>
               </a:rPr>
               <a:t>Lofar 1</a:t>
             </a:r>
@@ -5053,25 +3630,9 @@
           <a:p>
             <a:r>
               <a:rPr sz="800">
-                <a:hlinkClick r:id="rId13"/>
+                <a:hlinkClick r:id="rId17"/>
               </a:rPr>
               <a:t>Lofar 2</a:t>
-            </a:r>
-          </a:p>
-          <a:p>
-            <a:r>
-              <a:rPr sz="800">
-                <a:hlinkClick r:id="rId14"/>
-              </a:rPr>
-              <a:t>Lofar 3</a:t>
-            </a:r>
-          </a:p>
-          <a:p>
-            <a:r>
-              <a:rPr sz="800">
-                <a:hlinkClick r:id="rId15"/>
-              </a:rPr>
-              <a:t>Lofar 4</a:t>
             </a:r>
           </a:p>
         </p:txBody>
@@ -5081,7 +3642,7 @@
           <p:cNvPr id="11" name="Rounded Rectangle 10"/>
           <p:cNvSpPr/>
           <p:nvPr>
-            <a:hlinkClick r:id="rId16"/>
+            <a:hlinkClick r:id="rId18"/>
           </p:nvPr>
         </p:nvSpPr>
         <p:spPr>
@@ -5126,7 +3687,7 @@
                   <a:srgbClr val="1F3A5F"/>
                 </a:solidFill>
               </a:rPr>
-              <a:t>Gram 25: FR Lambda Shuttle, Category 4, Gandalf</a:t>
+              <a:t>Gram 5: FR A-wing, Category 2, Endor</a:t>
             </a:r>
           </a:p>
         </p:txBody>
@@ -5155,7 +3716,7 @@
           <a:p>
             <a:r>
               <a:rPr sz="800">
-                <a:hlinkClick r:id="rId17"/>
+                <a:hlinkClick r:id="rId19"/>
               </a:rPr>
               <a:t>Lofar 1</a:t>
             </a:r>
@@ -5163,9 +3724,25 @@
           <a:p>
             <a:r>
               <a:rPr sz="800">
-                <a:hlinkClick r:id="rId18"/>
+                <a:hlinkClick r:id="rId20"/>
               </a:rPr>
               <a:t>Lofar 2</a:t>
+            </a:r>
+          </a:p>
+          <a:p>
+            <a:r>
+              <a:rPr sz="800">
+                <a:hlinkClick r:id="rId21"/>
+              </a:rPr>
+              <a:t>Lofar 3</a:t>
+            </a:r>
+          </a:p>
+          <a:p>
+            <a:r>
+              <a:rPr sz="800">
+                <a:hlinkClick r:id="rId22"/>
+              </a:rPr>
+              <a:t>Lofar 4</a:t>
             </a:r>
           </a:p>
         </p:txBody>
@@ -5175,7 +3752,7 @@
           <p:cNvPr id="13" name="Rounded Rectangle 12"/>
           <p:cNvSpPr/>
           <p:nvPr>
-            <a:hlinkClick r:id="rId19"/>
+            <a:hlinkClick r:id="rId23"/>
           </p:nvPr>
         </p:nvSpPr>
         <p:spPr>
@@ -5220,7 +3797,7 @@
                   <a:srgbClr val="1F3A5F"/>
                 </a:solidFill>
               </a:rPr>
-              <a:t>Gram 26: FR Voyager, Category 1, Kronos</a:t>
+              <a:t>Gram 7: FR Discovery, Category 2, Dagobah</a:t>
             </a:r>
           </a:p>
         </p:txBody>
@@ -5249,9 +3826,25 @@
           <a:p>
             <a:r>
               <a:rPr sz="800">
-                <a:hlinkClick r:id="rId20"/>
+                <a:hlinkClick r:id="rId24"/>
               </a:rPr>
               <a:t>Lofar 1</a:t>
+            </a:r>
+          </a:p>
+          <a:p>
+            <a:r>
+              <a:rPr sz="800">
+                <a:hlinkClick r:id="rId25"/>
+              </a:rPr>
+              <a:t>Lofar 2</a:t>
+            </a:r>
+          </a:p>
+          <a:p>
+            <a:r>
+              <a:rPr sz="800">
+                <a:hlinkClick r:id="rId26"/>
+              </a:rPr>
+              <a:t>Lofar 3</a:t>
             </a:r>
           </a:p>
         </p:txBody>
@@ -5261,7 +3854,7 @@
           <p:cNvPr id="15" name="Rounded Rectangle 14"/>
           <p:cNvSpPr/>
           <p:nvPr>
-            <a:hlinkClick r:id="rId21"/>
+            <a:hlinkClick r:id="rId27"/>
           </p:nvPr>
         </p:nvSpPr>
         <p:spPr>
@@ -5306,7 +3899,7 @@
                   <a:srgbClr val="1F3A5F"/>
                 </a:solidFill>
               </a:rPr>
-              <a:t>Gram 27: FR Millennium Falcon, Category 4, Tatooine</a:t>
+              <a:t>Gram 9: FR Star Destroyer, Category 1, Yavin</a:t>
             </a:r>
           </a:p>
         </p:txBody>
@@ -5335,7 +3928,7 @@
           <a:p>
             <a:r>
               <a:rPr sz="800">
-                <a:hlinkClick r:id="rId22"/>
+                <a:hlinkClick r:id="rId28"/>
               </a:rPr>
               <a:t>Lofar 1</a:t>
             </a:r>
@@ -5347,7 +3940,7 @@
           <p:cNvPr id="17" name="Rounded Rectangle 16"/>
           <p:cNvSpPr/>
           <p:nvPr>
-            <a:hlinkClick r:id="rId23"/>
+            <a:hlinkClick r:id="rId29"/>
           </p:nvPr>
         </p:nvSpPr>
         <p:spPr>
@@ -5392,7 +3985,7 @@
                   <a:srgbClr val="1F3A5F"/>
                 </a:solidFill>
               </a:rPr>
-              <a:t>Gram 28: FR Enterprise, Category 3, Dagobah</a:t>
+              <a:t>Gram 10: FR Venator-class, Category 4, Bajor</a:t>
             </a:r>
           </a:p>
         </p:txBody>
@@ -5421,7 +4014,7 @@
           <a:p>
             <a:r>
               <a:rPr sz="800">
-                <a:hlinkClick r:id="rId24"/>
+                <a:hlinkClick r:id="rId30"/>
               </a:rPr>
               <a:t>Lofar 1</a:t>
             </a:r>
@@ -5429,7 +4022,7 @@
           <a:p>
             <a:r>
               <a:rPr sz="800">
-                <a:hlinkClick r:id="rId25"/>
+                <a:hlinkClick r:id="rId31"/>
               </a:rPr>
               <a:t>Lofar 2</a:t>
             </a:r>
@@ -5437,17 +4030,9 @@
           <a:p>
             <a:r>
               <a:rPr sz="800">
-                <a:hlinkClick r:id="rId26"/>
+                <a:hlinkClick r:id="rId32"/>
               </a:rPr>
               <a:t>Lofar 3</a:t>
-            </a:r>
-          </a:p>
-          <a:p>
-            <a:r>
-              <a:rPr sz="800">
-                <a:hlinkClick r:id="rId27"/>
-              </a:rPr>
-              <a:t>Lofar 4</a:t>
             </a:r>
           </a:p>
         </p:txBody>
@@ -5457,7 +4042,7 @@
           <p:cNvPr id="19" name="Rounded Rectangle 18"/>
           <p:cNvSpPr/>
           <p:nvPr>
-            <a:hlinkClick r:id="rId28"/>
+            <a:hlinkClick r:id="rId33"/>
           </p:nvPr>
         </p:nvSpPr>
         <p:spPr>
@@ -5502,7 +4087,7 @@
                   <a:srgbClr val="1F3A5F"/>
                 </a:solidFill>
               </a:rPr>
-              <a:t>Gram 29: Prometheus contact bearing 036, codename Naboo</a:t>
+              <a:t>Gram 11: FR Voyager, Category 1, Trill</a:t>
             </a:r>
           </a:p>
         </p:txBody>
@@ -5531,7 +4116,7 @@
           <a:p>
             <a:r>
               <a:rPr sz="800">
-                <a:hlinkClick r:id="rId29"/>
+                <a:hlinkClick r:id="rId34"/>
               </a:rPr>
               <a:t>Lofar 1</a:t>
             </a:r>
@@ -5539,7 +4124,7 @@
           <a:p>
             <a:r>
               <a:rPr sz="800">
-                <a:hlinkClick r:id="rId30"/>
+                <a:hlinkClick r:id="rId35"/>
               </a:rPr>
               <a:t>Lofar 2</a:t>
             </a:r>
@@ -5547,17 +4132,9 @@
           <a:p>
             <a:r>
               <a:rPr sz="800">
-                <a:hlinkClick r:id="rId31"/>
+                <a:hlinkClick r:id="rId36"/>
               </a:rPr>
               <a:t>Lofar 3</a:t>
-            </a:r>
-          </a:p>
-          <a:p>
-            <a:r>
-              <a:rPr sz="800">
-                <a:hlinkClick r:id="rId32"/>
-              </a:rPr>
-              <a:t>Lofar 4</a:t>
             </a:r>
           </a:p>
         </p:txBody>
@@ -5567,7 +4144,7 @@
           <p:cNvPr id="21" name="Rounded Rectangle 20"/>
           <p:cNvSpPr/>
           <p:nvPr>
-            <a:hlinkClick r:id="rId33"/>
+            <a:hlinkClick r:id="rId37"/>
           </p:nvPr>
         </p:nvSpPr>
         <p:spPr>
@@ -5612,7 +4189,7 @@
                   <a:srgbClr val="1F3A5F"/>
                 </a:solidFill>
               </a:rPr>
-              <a:t>Gram 30: Ghost contact bearing 343, codename Dank</a:t>
+              <a:t>Gram 12: FR Ghost, Category 3, Tantive</a:t>
             </a:r>
           </a:p>
         </p:txBody>
@@ -5641,7 +4218,7 @@
           <a:p>
             <a:r>
               <a:rPr sz="800">
-                <a:hlinkClick r:id="rId34"/>
+                <a:hlinkClick r:id="rId38"/>
               </a:rPr>
               <a:t>Lofar 1</a:t>
             </a:r>
@@ -5649,17 +4226,9 @@
           <a:p>
             <a:r>
               <a:rPr sz="800">
-                <a:hlinkClick r:id="rId35"/>
+                <a:hlinkClick r:id="rId39"/>
               </a:rPr>
               <a:t>Lofar 2</a:t>
-            </a:r>
-          </a:p>
-          <a:p>
-            <a:r>
-              <a:rPr sz="800">
-                <a:hlinkClick r:id="rId36"/>
-              </a:rPr>
-              <a:t>Lofar 3</a:t>
             </a:r>
           </a:p>
         </p:txBody>
@@ -5669,7 +4238,7 @@
           <p:cNvPr id="23" name="Rounded Rectangle 22"/>
           <p:cNvSpPr/>
           <p:nvPr>
-            <a:hlinkClick r:id="rId37"/>
+            <a:hlinkClick r:id="rId40"/>
           </p:nvPr>
         </p:nvSpPr>
         <p:spPr>
@@ -5714,7 +4283,7 @@
                   <a:srgbClr val="1F3A5F"/>
                 </a:solidFill>
               </a:rPr>
-              <a:t>Gram 31: FR Imperial-class, Category 1, Yavin</a:t>
+              <a:t>Gram 13: FR Venator-class, Category 4, Bajor</a:t>
             </a:r>
           </a:p>
         </p:txBody>
@@ -5743,17 +4312,9 @@
           <a:p>
             <a:r>
               <a:rPr sz="800">
-                <a:hlinkClick r:id="rId38"/>
+                <a:hlinkClick r:id="rId41"/>
               </a:rPr>
               <a:t>Lofar 1</a:t>
-            </a:r>
-          </a:p>
-          <a:p>
-            <a:r>
-              <a:rPr sz="800">
-                <a:hlinkClick r:id="rId39"/>
-              </a:rPr>
-              <a:t>Lofar 2</a:t>
             </a:r>
           </a:p>
         </p:txBody>
@@ -5763,7 +4324,7 @@
           <p:cNvPr id="25" name="Rounded Rectangle 24"/>
           <p:cNvSpPr/>
           <p:nvPr>
-            <a:hlinkClick r:id="rId40"/>
+            <a:hlinkClick r:id="rId42"/>
           </p:nvPr>
         </p:nvSpPr>
         <p:spPr>
@@ -5808,7 +4369,7 @@
                   <a:srgbClr val="1F3A5F"/>
                 </a:solidFill>
               </a:rPr>
-              <a:t>Gram 32: FR Outrider, Category 4, Mustafar</a:t>
+              <a:t>Gram 14: FR Nebula-class, Category 1, Caprica</a:t>
             </a:r>
           </a:p>
         </p:txBody>
@@ -5837,7 +4398,7 @@
           <a:p>
             <a:r>
               <a:rPr sz="800">
-                <a:hlinkClick r:id="rId41"/>
+                <a:hlinkClick r:id="rId43"/>
               </a:rPr>
               <a:t>Lofar 1</a:t>
             </a:r>
@@ -5849,7 +4410,7 @@
           <p:cNvPr id="27" name="Rounded Rectangle 26"/>
           <p:cNvSpPr/>
           <p:nvPr>
-            <a:hlinkClick r:id="rId42"/>
+            <a:hlinkClick r:id="rId44"/>
           </p:nvPr>
         </p:nvSpPr>
         <p:spPr>
@@ -5894,7 +4455,7 @@
                   <a:srgbClr val="1F3A5F"/>
                 </a:solidFill>
               </a:rPr>
-              <a:t>Gram 33: FR Lambda Shuttle, Category 4, Bespin</a:t>
+              <a:t>Gram 15: FR Sovereign-class, Category 1, Bajor</a:t>
             </a:r>
           </a:p>
         </p:txBody>
@@ -5923,9 +4484,33 @@
           <a:p>
             <a:r>
               <a:rPr sz="800">
-                <a:hlinkClick r:id="rId43"/>
+                <a:hlinkClick r:id="rId45"/>
               </a:rPr>
               <a:t>Lofar 1</a:t>
+            </a:r>
+          </a:p>
+          <a:p>
+            <a:r>
+              <a:rPr sz="800">
+                <a:hlinkClick r:id="rId46"/>
+              </a:rPr>
+              <a:t>Lofar 2</a:t>
+            </a:r>
+          </a:p>
+          <a:p>
+            <a:r>
+              <a:rPr sz="800">
+                <a:hlinkClick r:id="rId47"/>
+              </a:rPr>
+              <a:t>Lofar 3</a:t>
+            </a:r>
+          </a:p>
+          <a:p>
+            <a:r>
+              <a:rPr sz="800">
+                <a:hlinkClick r:id="rId48"/>
+              </a:rPr>
+              <a:t>Lofar 4</a:t>
             </a:r>
           </a:p>
         </p:txBody>
@@ -5935,7 +4520,7 @@
           <p:cNvPr id="29" name="Rounded Rectangle 28"/>
           <p:cNvSpPr/>
           <p:nvPr>
-            <a:hlinkClick r:id="rId44"/>
+            <a:hlinkClick r:id="rId49"/>
           </p:nvPr>
         </p:nvSpPr>
         <p:spPr>
@@ -5980,7 +4565,7 @@
                   <a:srgbClr val="1F3A5F"/>
                 </a:solidFill>
               </a:rPr>
-              <a:t>Gram 35: FR Ghost, Category 1, Tatooine</a:t>
+              <a:t>Gram 16: FR TIE Fighter, Category 3, Yavin</a:t>
             </a:r>
           </a:p>
         </p:txBody>
@@ -6009,25 +4594,9 @@
           <a:p>
             <a:r>
               <a:rPr sz="800">
-                <a:hlinkClick r:id="rId45"/>
+                <a:hlinkClick r:id="rId50"/>
               </a:rPr>
               <a:t>Lofar 1</a:t>
-            </a:r>
-          </a:p>
-          <a:p>
-            <a:r>
-              <a:rPr sz="800">
-                <a:hlinkClick r:id="rId46"/>
-              </a:rPr>
-              <a:t>Lofar 2</a:t>
-            </a:r>
-          </a:p>
-          <a:p>
-            <a:r>
-              <a:rPr sz="800">
-                <a:hlinkClick r:id="rId47"/>
-              </a:rPr>
-              <a:t>Lofar 3</a:t>
             </a:r>
           </a:p>
         </p:txBody>
@@ -6037,7 +4606,7 @@
           <p:cNvPr id="31" name="Rounded Rectangle 30"/>
           <p:cNvSpPr/>
           <p:nvPr>
-            <a:hlinkClick r:id="rId48"/>
+            <a:hlinkClick r:id="rId51"/>
           </p:nvPr>
         </p:nvSpPr>
         <p:spPr>
@@ -6082,7 +4651,7 @@
                   <a:srgbClr val="1F3A5F"/>
                 </a:solidFill>
               </a:rPr>
-              <a:t>Gram 36: Rebel One contact bearing 243, codename Risa</a:t>
+              <a:t>Gram 18: FR Nebula-class, Category 4, Risa</a:t>
             </a:r>
           </a:p>
         </p:txBody>
@@ -6111,7 +4680,7 @@
           <a:p>
             <a:r>
               <a:rPr sz="800">
-                <a:hlinkClick r:id="rId49"/>
+                <a:hlinkClick r:id="rId52"/>
               </a:rPr>
               <a:t>Lofar 1</a:t>
             </a:r>
@@ -6119,7 +4688,7 @@
           <a:p>
             <a:r>
               <a:rPr sz="800">
-                <a:hlinkClick r:id="rId50"/>
+                <a:hlinkClick r:id="rId53"/>
               </a:rPr>
               <a:t>Lofar 2</a:t>
             </a:r>
@@ -6127,17 +4696,9 @@
           <a:p>
             <a:r>
               <a:rPr sz="800">
-                <a:hlinkClick r:id="rId51"/>
+                <a:hlinkClick r:id="rId54"/>
               </a:rPr>
               <a:t>Lofar 3</a:t>
-            </a:r>
-          </a:p>
-          <a:p>
-            <a:r>
-              <a:rPr sz="800">
-                <a:hlinkClick r:id="rId52"/>
-              </a:rPr>
-              <a:t>Lofar 4</a:t>
             </a:r>
           </a:p>
         </p:txBody>
@@ -6206,7 +4767,7 @@
                   <a:srgbClr val="FFFFFF"/>
                 </a:solidFill>
               </a:rPr>
-              <a:t>Instructor Week 2 Grams — Page 3 of 3</a:t>
+              <a:t>Instructor Week 2 Grams — Page 2 of 3</a:t>
             </a:r>
           </a:p>
         </p:txBody>
@@ -6261,7 +4822,7 @@
                   <a:srgbClr val="1F3A5F"/>
                 </a:solidFill>
               </a:rPr>
-              <a:t>Gram 38: Prometheus contact bearing 214, codename Gandalf</a:t>
+              <a:t>Gram 19: Akira-class contact bearing 162, codename Tatooine</a:t>
             </a:r>
           </a:p>
         </p:txBody>
@@ -6295,14 +4856,6 @@
               <a:t>Lofar 1</a:t>
             </a:r>
           </a:p>
-          <a:p>
-            <a:r>
-              <a:rPr sz="800">
-                <a:hlinkClick r:id="rId4"/>
-              </a:rPr>
-              <a:t>Lofar 2</a:t>
-            </a:r>
-          </a:p>
         </p:txBody>
       </p:sp>
       <p:sp>
@@ -6310,7 +4863,7 @@
           <p:cNvPr id="5" name="Rounded Rectangle 4"/>
           <p:cNvSpPr/>
           <p:nvPr>
-            <a:hlinkClick r:id="rId5"/>
+            <a:hlinkClick r:id="rId4"/>
           </p:nvPr>
         </p:nvSpPr>
         <p:spPr>
@@ -6355,7 +4908,7 @@
                   <a:srgbClr val="1F3A5F"/>
                 </a:solidFill>
               </a:rPr>
-              <a:t>Gram 39: FR Razor Crest, Category 1, Romulus</a:t>
+              <a:t>Gram 20: FR Stargazer, Category 4, Gandalf</a:t>
             </a:r>
           </a:p>
         </p:txBody>
@@ -6384,23 +4937,23 @@
           <a:p>
             <a:r>
               <a:rPr sz="800">
+                <a:hlinkClick r:id="rId5"/>
+              </a:rPr>
+              <a:t>Lofar 1</a:t>
+            </a:r>
+          </a:p>
+          <a:p>
+            <a:r>
+              <a:rPr sz="800">
                 <a:hlinkClick r:id="rId6"/>
               </a:rPr>
-              <a:t>Lofar 1</a:t>
+              <a:t>Lofar 2</a:t>
             </a:r>
           </a:p>
           <a:p>
             <a:r>
               <a:rPr sz="800">
                 <a:hlinkClick r:id="rId7"/>
-              </a:rPr>
-              <a:t>Lofar 2</a:t>
-            </a:r>
-          </a:p>
-          <a:p>
-            <a:r>
-              <a:rPr sz="800">
-                <a:hlinkClick r:id="rId8"/>
               </a:rPr>
               <a:t>Lofar 3</a:t>
             </a:r>
@@ -6412,7 +4965,7 @@
           <p:cNvPr id="7" name="Rounded Rectangle 6"/>
           <p:cNvSpPr/>
           <p:nvPr>
-            <a:hlinkClick r:id="rId9"/>
+            <a:hlinkClick r:id="rId8"/>
           </p:nvPr>
         </p:nvSpPr>
         <p:spPr>
@@ -6457,7 +5010,7 @@
                   <a:srgbClr val="1F3A5F"/>
                 </a:solidFill>
               </a:rPr>
-              <a:t>Gram 40: FR Outrider, Category 3, Bajor</a:t>
+              <a:t>Gram 22: FR Y-wing, Category 1, Tantive</a:t>
             </a:r>
           </a:p>
         </p:txBody>
@@ -6486,33 +5039,17 @@
           <a:p>
             <a:r>
               <a:rPr sz="800">
+                <a:hlinkClick r:id="rId9"/>
+              </a:rPr>
+              <a:t>Lofar 1</a:t>
+            </a:r>
+          </a:p>
+          <a:p>
+            <a:r>
+              <a:rPr sz="800">
                 <a:hlinkClick r:id="rId10"/>
               </a:rPr>
-              <a:t>Lofar 1</a:t>
-            </a:r>
-          </a:p>
-          <a:p>
-            <a:r>
-              <a:rPr sz="800">
-                <a:hlinkClick r:id="rId11"/>
-              </a:rPr>
               <a:t>Lofar 2</a:t>
-            </a:r>
-          </a:p>
-          <a:p>
-            <a:r>
-              <a:rPr sz="800">
-                <a:hlinkClick r:id="rId12"/>
-              </a:rPr>
-              <a:t>Lofar 3</a:t>
-            </a:r>
-          </a:p>
-          <a:p>
-            <a:r>
-              <a:rPr sz="800">
-                <a:hlinkClick r:id="rId13"/>
-              </a:rPr>
-              <a:t>Lofar 4</a:t>
             </a:r>
           </a:p>
         </p:txBody>
@@ -6522,7 +5059,7 @@
           <p:cNvPr id="9" name="Rounded Rectangle 8"/>
           <p:cNvSpPr/>
           <p:nvPr>
-            <a:hlinkClick r:id="rId14"/>
+            <a:hlinkClick r:id="rId11"/>
           </p:nvPr>
         </p:nvSpPr>
         <p:spPr>
@@ -6567,7 +5104,7 @@
                   <a:srgbClr val="1F3A5F"/>
                 </a:solidFill>
               </a:rPr>
-              <a:t>Gram 41: FR TIE Bomber, Category 2, Vulcan</a:t>
+              <a:t>Gram 24: FR Sovereign-class, Category 2, Coruscant</a:t>
             </a:r>
           </a:p>
         </p:txBody>
@@ -6596,31 +5133,31 @@
           <a:p>
             <a:r>
               <a:rPr sz="800">
+                <a:hlinkClick r:id="rId12"/>
+              </a:rPr>
+              <a:t>Lofar 1</a:t>
+            </a:r>
+          </a:p>
+          <a:p>
+            <a:r>
+              <a:rPr sz="800">
+                <a:hlinkClick r:id="rId13"/>
+              </a:rPr>
+              <a:t>Lofar 2</a:t>
+            </a:r>
+          </a:p>
+          <a:p>
+            <a:r>
+              <a:rPr sz="800">
+                <a:hlinkClick r:id="rId14"/>
+              </a:rPr>
+              <a:t>Lofar 3</a:t>
+            </a:r>
+          </a:p>
+          <a:p>
+            <a:r>
+              <a:rPr sz="800">
                 <a:hlinkClick r:id="rId15"/>
-              </a:rPr>
-              <a:t>Lofar 1</a:t>
-            </a:r>
-          </a:p>
-          <a:p>
-            <a:r>
-              <a:rPr sz="800">
-                <a:hlinkClick r:id="rId16"/>
-              </a:rPr>
-              <a:t>Lofar 2</a:t>
-            </a:r>
-          </a:p>
-          <a:p>
-            <a:r>
-              <a:rPr sz="800">
-                <a:hlinkClick r:id="rId17"/>
-              </a:rPr>
-              <a:t>Lofar 3</a:t>
-            </a:r>
-          </a:p>
-          <a:p>
-            <a:r>
-              <a:rPr sz="800">
-                <a:hlinkClick r:id="rId18"/>
               </a:rPr>
               <a:t>Lofar 4</a:t>
             </a:r>
@@ -6632,7 +5169,7 @@
           <p:cNvPr id="11" name="Rounded Rectangle 10"/>
           <p:cNvSpPr/>
           <p:nvPr>
-            <a:hlinkClick r:id="rId19"/>
+            <a:hlinkClick r:id="rId16"/>
           </p:nvPr>
         </p:nvSpPr>
         <p:spPr>
@@ -6677,7 +5214,7 @@
                   <a:srgbClr val="1F3A5F"/>
                 </a:solidFill>
               </a:rPr>
-              <a:t>Gram 42: FR Nebulon-B, Category 2, Romulus</a:t>
+              <a:t>Gram 25: FR Lambda Shuttle, Category 4, Gandalf</a:t>
             </a:r>
           </a:p>
         </p:txBody>
@@ -6706,9 +5243,1646 @@
           <a:p>
             <a:r>
               <a:rPr sz="800">
+                <a:hlinkClick r:id="rId17"/>
+              </a:rPr>
+              <a:t>Lofar 1</a:t>
+            </a:r>
+          </a:p>
+          <a:p>
+            <a:r>
+              <a:rPr sz="800">
+                <a:hlinkClick r:id="rId18"/>
+              </a:rPr>
+              <a:t>Lofar 2</a:t>
+            </a:r>
+          </a:p>
+        </p:txBody>
+      </p:sp>
+      <p:sp>
+        <p:nvSpPr>
+          <p:cNvPr id="13" name="Rounded Rectangle 12"/>
+          <p:cNvSpPr/>
+          <p:nvPr>
+            <a:hlinkClick r:id="rId19"/>
+          </p:nvPr>
+        </p:nvSpPr>
+        <p:spPr>
+          <a:xfrm>
+            <a:off x="365760" y="2682240"/>
+            <a:ext cx="2200046" cy="365760"/>
+          </a:xfrm>
+          <a:prstGeom prst="roundRect">
+            <a:avLst/>
+          </a:prstGeom>
+          <a:solidFill>
+            <a:srgbClr val="E8EEF7"/>
+          </a:solidFill>
+          <a:ln>
+            <a:solidFill>
+              <a:srgbClr val="1F3A5F"/>
+            </a:solidFill>
+          </a:ln>
+        </p:spPr>
+        <p:style>
+          <a:lnRef idx="1">
+            <a:schemeClr val="accent1"/>
+          </a:lnRef>
+          <a:fillRef idx="3">
+            <a:schemeClr val="accent1"/>
+          </a:fillRef>
+          <a:effectRef idx="2">
+            <a:schemeClr val="accent1"/>
+          </a:effectRef>
+          <a:fontRef idx="minor">
+            <a:schemeClr val="lt1"/>
+          </a:fontRef>
+        </p:style>
+        <p:txBody>
+          <a:bodyPr rtlCol="0" anchor="ctr" lIns="45720" rIns="45720"/>
+          <a:lstStyle/>
+          <a:p>
+            <a:pPr algn="ctr"/>
+            <a:r>
+              <a:rPr sz="900">
+                <a:solidFill>
+                  <a:srgbClr val="1F3A5F"/>
+                </a:solidFill>
+              </a:rPr>
+              <a:t>Gram 26: FR Voyager, Category 1, Kronos</a:t>
+            </a:r>
+          </a:p>
+        </p:txBody>
+      </p:sp>
+      <p:sp>
+        <p:nvSpPr>
+          <p:cNvPr id="14" name="TextBox 13"/>
+          <p:cNvSpPr txBox="1"/>
+          <p:nvPr/>
+        </p:nvSpPr>
+        <p:spPr>
+          <a:xfrm>
+            <a:off x="365760" y="3066288"/>
+            <a:ext cx="2200046" cy="1447800"/>
+          </a:xfrm>
+          <a:prstGeom prst="rect">
+            <a:avLst/>
+          </a:prstGeom>
+          <a:noFill/>
+        </p:spPr>
+        <p:txBody>
+          <a:bodyPr wrap="square">
+            <a:spAutoFit/>
+          </a:bodyPr>
+          <a:lstStyle/>
+          <a:p>
+            <a:r>
+              <a:rPr sz="800">
                 <a:hlinkClick r:id="rId20"/>
               </a:rPr>
               <a:t>Lofar 1</a:t>
+            </a:r>
+          </a:p>
+        </p:txBody>
+      </p:sp>
+      <p:sp>
+        <p:nvSpPr>
+          <p:cNvPr id="15" name="Rounded Rectangle 14"/>
+          <p:cNvSpPr/>
+          <p:nvPr>
+            <a:hlinkClick r:id="rId21"/>
+          </p:nvPr>
+        </p:nvSpPr>
+        <p:spPr>
+          <a:xfrm>
+            <a:off x="2657246" y="2682240"/>
+            <a:ext cx="2200046" cy="365760"/>
+          </a:xfrm>
+          <a:prstGeom prst="roundRect">
+            <a:avLst/>
+          </a:prstGeom>
+          <a:solidFill>
+            <a:srgbClr val="E8EEF7"/>
+          </a:solidFill>
+          <a:ln>
+            <a:solidFill>
+              <a:srgbClr val="1F3A5F"/>
+            </a:solidFill>
+          </a:ln>
+        </p:spPr>
+        <p:style>
+          <a:lnRef idx="1">
+            <a:schemeClr val="accent1"/>
+          </a:lnRef>
+          <a:fillRef idx="3">
+            <a:schemeClr val="accent1"/>
+          </a:fillRef>
+          <a:effectRef idx="2">
+            <a:schemeClr val="accent1"/>
+          </a:effectRef>
+          <a:fontRef idx="minor">
+            <a:schemeClr val="lt1"/>
+          </a:fontRef>
+        </p:style>
+        <p:txBody>
+          <a:bodyPr rtlCol="0" anchor="ctr" lIns="45720" rIns="45720"/>
+          <a:lstStyle/>
+          <a:p>
+            <a:pPr algn="ctr"/>
+            <a:r>
+              <a:rPr sz="900">
+                <a:solidFill>
+                  <a:srgbClr val="1F3A5F"/>
+                </a:solidFill>
+              </a:rPr>
+              <a:t>Gram 27: FR Millennium Falcon, Category 4, Tatooine</a:t>
+            </a:r>
+          </a:p>
+        </p:txBody>
+      </p:sp>
+      <p:sp>
+        <p:nvSpPr>
+          <p:cNvPr id="16" name="TextBox 15"/>
+          <p:cNvSpPr txBox="1"/>
+          <p:nvPr/>
+        </p:nvSpPr>
+        <p:spPr>
+          <a:xfrm>
+            <a:off x="2657246" y="3066288"/>
+            <a:ext cx="2200046" cy="1447800"/>
+          </a:xfrm>
+          <a:prstGeom prst="rect">
+            <a:avLst/>
+          </a:prstGeom>
+          <a:noFill/>
+        </p:spPr>
+        <p:txBody>
+          <a:bodyPr wrap="square">
+            <a:spAutoFit/>
+          </a:bodyPr>
+          <a:lstStyle/>
+          <a:p>
+            <a:r>
+              <a:rPr sz="800">
+                <a:hlinkClick r:id="rId22"/>
+              </a:rPr>
+              <a:t>Lofar 1</a:t>
+            </a:r>
+          </a:p>
+        </p:txBody>
+      </p:sp>
+      <p:sp>
+        <p:nvSpPr>
+          <p:cNvPr id="17" name="Rounded Rectangle 16"/>
+          <p:cNvSpPr/>
+          <p:nvPr>
+            <a:hlinkClick r:id="rId23"/>
+          </p:nvPr>
+        </p:nvSpPr>
+        <p:spPr>
+          <a:xfrm>
+            <a:off x="4948732" y="2682240"/>
+            <a:ext cx="2200046" cy="365760"/>
+          </a:xfrm>
+          <a:prstGeom prst="roundRect">
+            <a:avLst/>
+          </a:prstGeom>
+          <a:solidFill>
+            <a:srgbClr val="E8EEF7"/>
+          </a:solidFill>
+          <a:ln>
+            <a:solidFill>
+              <a:srgbClr val="1F3A5F"/>
+            </a:solidFill>
+          </a:ln>
+        </p:spPr>
+        <p:style>
+          <a:lnRef idx="1">
+            <a:schemeClr val="accent1"/>
+          </a:lnRef>
+          <a:fillRef idx="3">
+            <a:schemeClr val="accent1"/>
+          </a:fillRef>
+          <a:effectRef idx="2">
+            <a:schemeClr val="accent1"/>
+          </a:effectRef>
+          <a:fontRef idx="minor">
+            <a:schemeClr val="lt1"/>
+          </a:fontRef>
+        </p:style>
+        <p:txBody>
+          <a:bodyPr rtlCol="0" anchor="ctr" lIns="45720" rIns="45720"/>
+          <a:lstStyle/>
+          <a:p>
+            <a:pPr algn="ctr"/>
+            <a:r>
+              <a:rPr sz="900">
+                <a:solidFill>
+                  <a:srgbClr val="1F3A5F"/>
+                </a:solidFill>
+              </a:rPr>
+              <a:t>Gram 28: FR Enterprise, Category 3, Dagobah</a:t>
+            </a:r>
+          </a:p>
+        </p:txBody>
+      </p:sp>
+      <p:sp>
+        <p:nvSpPr>
+          <p:cNvPr id="18" name="TextBox 17"/>
+          <p:cNvSpPr txBox="1"/>
+          <p:nvPr/>
+        </p:nvSpPr>
+        <p:spPr>
+          <a:xfrm>
+            <a:off x="4948732" y="3066288"/>
+            <a:ext cx="2200046" cy="1447800"/>
+          </a:xfrm>
+          <a:prstGeom prst="rect">
+            <a:avLst/>
+          </a:prstGeom>
+          <a:noFill/>
+        </p:spPr>
+        <p:txBody>
+          <a:bodyPr wrap="square">
+            <a:spAutoFit/>
+          </a:bodyPr>
+          <a:lstStyle/>
+          <a:p>
+            <a:r>
+              <a:rPr sz="800">
+                <a:hlinkClick r:id="rId24"/>
+              </a:rPr>
+              <a:t>Lofar 1</a:t>
+            </a:r>
+          </a:p>
+          <a:p>
+            <a:r>
+              <a:rPr sz="800">
+                <a:hlinkClick r:id="rId25"/>
+              </a:rPr>
+              <a:t>Lofar 2</a:t>
+            </a:r>
+          </a:p>
+          <a:p>
+            <a:r>
+              <a:rPr sz="800">
+                <a:hlinkClick r:id="rId26"/>
+              </a:rPr>
+              <a:t>Lofar 3</a:t>
+            </a:r>
+          </a:p>
+          <a:p>
+            <a:r>
+              <a:rPr sz="800">
+                <a:hlinkClick r:id="rId27"/>
+              </a:rPr>
+              <a:t>Lofar 4</a:t>
+            </a:r>
+          </a:p>
+        </p:txBody>
+      </p:sp>
+      <p:sp>
+        <p:nvSpPr>
+          <p:cNvPr id="19" name="Rounded Rectangle 18"/>
+          <p:cNvSpPr/>
+          <p:nvPr>
+            <a:hlinkClick r:id="rId28"/>
+          </p:nvPr>
+        </p:nvSpPr>
+        <p:spPr>
+          <a:xfrm>
+            <a:off x="7240219" y="2682240"/>
+            <a:ext cx="2200046" cy="365760"/>
+          </a:xfrm>
+          <a:prstGeom prst="roundRect">
+            <a:avLst/>
+          </a:prstGeom>
+          <a:solidFill>
+            <a:srgbClr val="E8EEF7"/>
+          </a:solidFill>
+          <a:ln>
+            <a:solidFill>
+              <a:srgbClr val="1F3A5F"/>
+            </a:solidFill>
+          </a:ln>
+        </p:spPr>
+        <p:style>
+          <a:lnRef idx="1">
+            <a:schemeClr val="accent1"/>
+          </a:lnRef>
+          <a:fillRef idx="3">
+            <a:schemeClr val="accent1"/>
+          </a:fillRef>
+          <a:effectRef idx="2">
+            <a:schemeClr val="accent1"/>
+          </a:effectRef>
+          <a:fontRef idx="minor">
+            <a:schemeClr val="lt1"/>
+          </a:fontRef>
+        </p:style>
+        <p:txBody>
+          <a:bodyPr rtlCol="0" anchor="ctr" lIns="45720" rIns="45720"/>
+          <a:lstStyle/>
+          <a:p>
+            <a:pPr algn="ctr"/>
+            <a:r>
+              <a:rPr sz="900">
+                <a:solidFill>
+                  <a:srgbClr val="1F3A5F"/>
+                </a:solidFill>
+              </a:rPr>
+              <a:t>Gram 29: Prometheus contact bearing 036, codename Naboo</a:t>
+            </a:r>
+          </a:p>
+        </p:txBody>
+      </p:sp>
+      <p:sp>
+        <p:nvSpPr>
+          <p:cNvPr id="20" name="TextBox 19"/>
+          <p:cNvSpPr txBox="1"/>
+          <p:nvPr/>
+        </p:nvSpPr>
+        <p:spPr>
+          <a:xfrm>
+            <a:off x="7240219" y="3066288"/>
+            <a:ext cx="2200046" cy="1447800"/>
+          </a:xfrm>
+          <a:prstGeom prst="rect">
+            <a:avLst/>
+          </a:prstGeom>
+          <a:noFill/>
+        </p:spPr>
+        <p:txBody>
+          <a:bodyPr wrap="square">
+            <a:spAutoFit/>
+          </a:bodyPr>
+          <a:lstStyle/>
+          <a:p>
+            <a:r>
+              <a:rPr sz="800">
+                <a:hlinkClick r:id="rId29"/>
+              </a:rPr>
+              <a:t>Lofar 1</a:t>
+            </a:r>
+          </a:p>
+          <a:p>
+            <a:r>
+              <a:rPr sz="800">
+                <a:hlinkClick r:id="rId30"/>
+              </a:rPr>
+              <a:t>Lofar 2</a:t>
+            </a:r>
+          </a:p>
+          <a:p>
+            <a:r>
+              <a:rPr sz="800">
+                <a:hlinkClick r:id="rId31"/>
+              </a:rPr>
+              <a:t>Lofar 3</a:t>
+            </a:r>
+          </a:p>
+          <a:p>
+            <a:r>
+              <a:rPr sz="800">
+                <a:hlinkClick r:id="rId32"/>
+              </a:rPr>
+              <a:t>Lofar 4</a:t>
+            </a:r>
+          </a:p>
+        </p:txBody>
+      </p:sp>
+      <p:sp>
+        <p:nvSpPr>
+          <p:cNvPr id="21" name="Rounded Rectangle 20"/>
+          <p:cNvSpPr/>
+          <p:nvPr>
+            <a:hlinkClick r:id="rId33"/>
+          </p:nvPr>
+        </p:nvSpPr>
+        <p:spPr>
+          <a:xfrm>
+            <a:off x="9531705" y="2682240"/>
+            <a:ext cx="2200046" cy="365760"/>
+          </a:xfrm>
+          <a:prstGeom prst="roundRect">
+            <a:avLst/>
+          </a:prstGeom>
+          <a:solidFill>
+            <a:srgbClr val="E8EEF7"/>
+          </a:solidFill>
+          <a:ln>
+            <a:solidFill>
+              <a:srgbClr val="1F3A5F"/>
+            </a:solidFill>
+          </a:ln>
+        </p:spPr>
+        <p:style>
+          <a:lnRef idx="1">
+            <a:schemeClr val="accent1"/>
+          </a:lnRef>
+          <a:fillRef idx="3">
+            <a:schemeClr val="accent1"/>
+          </a:fillRef>
+          <a:effectRef idx="2">
+            <a:schemeClr val="accent1"/>
+          </a:effectRef>
+          <a:fontRef idx="minor">
+            <a:schemeClr val="lt1"/>
+          </a:fontRef>
+        </p:style>
+        <p:txBody>
+          <a:bodyPr rtlCol="0" anchor="ctr" lIns="45720" rIns="45720"/>
+          <a:lstStyle/>
+          <a:p>
+            <a:pPr algn="ctr"/>
+            <a:r>
+              <a:rPr sz="900">
+                <a:solidFill>
+                  <a:srgbClr val="1F3A5F"/>
+                </a:solidFill>
+              </a:rPr>
+              <a:t>Gram 30: Ghost contact bearing 343, codename Dank</a:t>
+            </a:r>
+          </a:p>
+        </p:txBody>
+      </p:sp>
+      <p:sp>
+        <p:nvSpPr>
+          <p:cNvPr id="22" name="TextBox 21"/>
+          <p:cNvSpPr txBox="1"/>
+          <p:nvPr/>
+        </p:nvSpPr>
+        <p:spPr>
+          <a:xfrm>
+            <a:off x="9531705" y="3066288"/>
+            <a:ext cx="2200046" cy="1447800"/>
+          </a:xfrm>
+          <a:prstGeom prst="rect">
+            <a:avLst/>
+          </a:prstGeom>
+          <a:noFill/>
+        </p:spPr>
+        <p:txBody>
+          <a:bodyPr wrap="square">
+            <a:spAutoFit/>
+          </a:bodyPr>
+          <a:lstStyle/>
+          <a:p>
+            <a:r>
+              <a:rPr sz="800">
+                <a:hlinkClick r:id="rId34"/>
+              </a:rPr>
+              <a:t>Lofar 1</a:t>
+            </a:r>
+          </a:p>
+          <a:p>
+            <a:r>
+              <a:rPr sz="800">
+                <a:hlinkClick r:id="rId35"/>
+              </a:rPr>
+              <a:t>Lofar 2</a:t>
+            </a:r>
+          </a:p>
+          <a:p>
+            <a:r>
+              <a:rPr sz="800">
+                <a:hlinkClick r:id="rId36"/>
+              </a:rPr>
+              <a:t>Lofar 3</a:t>
+            </a:r>
+          </a:p>
+        </p:txBody>
+      </p:sp>
+      <p:sp>
+        <p:nvSpPr>
+          <p:cNvPr id="23" name="Rounded Rectangle 22"/>
+          <p:cNvSpPr/>
+          <p:nvPr>
+            <a:hlinkClick r:id="rId37"/>
+          </p:nvPr>
+        </p:nvSpPr>
+        <p:spPr>
+          <a:xfrm>
+            <a:off x="365760" y="4632960"/>
+            <a:ext cx="2200046" cy="365760"/>
+          </a:xfrm>
+          <a:prstGeom prst="roundRect">
+            <a:avLst/>
+          </a:prstGeom>
+          <a:solidFill>
+            <a:srgbClr val="E8EEF7"/>
+          </a:solidFill>
+          <a:ln>
+            <a:solidFill>
+              <a:srgbClr val="1F3A5F"/>
+            </a:solidFill>
+          </a:ln>
+        </p:spPr>
+        <p:style>
+          <a:lnRef idx="1">
+            <a:schemeClr val="accent1"/>
+          </a:lnRef>
+          <a:fillRef idx="3">
+            <a:schemeClr val="accent1"/>
+          </a:fillRef>
+          <a:effectRef idx="2">
+            <a:schemeClr val="accent1"/>
+          </a:effectRef>
+          <a:fontRef idx="minor">
+            <a:schemeClr val="lt1"/>
+          </a:fontRef>
+        </p:style>
+        <p:txBody>
+          <a:bodyPr rtlCol="0" anchor="ctr" lIns="45720" rIns="45720"/>
+          <a:lstStyle/>
+          <a:p>
+            <a:pPr algn="ctr"/>
+            <a:r>
+              <a:rPr sz="900">
+                <a:solidFill>
+                  <a:srgbClr val="1F3A5F"/>
+                </a:solidFill>
+              </a:rPr>
+              <a:t>Gram 31: FR Imperial-class, Category 1, Yavin</a:t>
+            </a:r>
+          </a:p>
+        </p:txBody>
+      </p:sp>
+      <p:sp>
+        <p:nvSpPr>
+          <p:cNvPr id="24" name="TextBox 23"/>
+          <p:cNvSpPr txBox="1"/>
+          <p:nvPr/>
+        </p:nvSpPr>
+        <p:spPr>
+          <a:xfrm>
+            <a:off x="365760" y="5017008"/>
+            <a:ext cx="2200046" cy="1447800"/>
+          </a:xfrm>
+          <a:prstGeom prst="rect">
+            <a:avLst/>
+          </a:prstGeom>
+          <a:noFill/>
+        </p:spPr>
+        <p:txBody>
+          <a:bodyPr wrap="square">
+            <a:spAutoFit/>
+          </a:bodyPr>
+          <a:lstStyle/>
+          <a:p>
+            <a:r>
+              <a:rPr sz="800">
+                <a:hlinkClick r:id="rId38"/>
+              </a:rPr>
+              <a:t>Lofar 1</a:t>
+            </a:r>
+          </a:p>
+          <a:p>
+            <a:r>
+              <a:rPr sz="800">
+                <a:hlinkClick r:id="rId39"/>
+              </a:rPr>
+              <a:t>Lofar 2</a:t>
+            </a:r>
+          </a:p>
+        </p:txBody>
+      </p:sp>
+      <p:sp>
+        <p:nvSpPr>
+          <p:cNvPr id="25" name="Rounded Rectangle 24"/>
+          <p:cNvSpPr/>
+          <p:nvPr>
+            <a:hlinkClick r:id="rId40"/>
+          </p:nvPr>
+        </p:nvSpPr>
+        <p:spPr>
+          <a:xfrm>
+            <a:off x="2657246" y="4632960"/>
+            <a:ext cx="2200046" cy="365760"/>
+          </a:xfrm>
+          <a:prstGeom prst="roundRect">
+            <a:avLst/>
+          </a:prstGeom>
+          <a:solidFill>
+            <a:srgbClr val="E8EEF7"/>
+          </a:solidFill>
+          <a:ln>
+            <a:solidFill>
+              <a:srgbClr val="1F3A5F"/>
+            </a:solidFill>
+          </a:ln>
+        </p:spPr>
+        <p:style>
+          <a:lnRef idx="1">
+            <a:schemeClr val="accent1"/>
+          </a:lnRef>
+          <a:fillRef idx="3">
+            <a:schemeClr val="accent1"/>
+          </a:fillRef>
+          <a:effectRef idx="2">
+            <a:schemeClr val="accent1"/>
+          </a:effectRef>
+          <a:fontRef idx="minor">
+            <a:schemeClr val="lt1"/>
+          </a:fontRef>
+        </p:style>
+        <p:txBody>
+          <a:bodyPr rtlCol="0" anchor="ctr" lIns="45720" rIns="45720"/>
+          <a:lstStyle/>
+          <a:p>
+            <a:pPr algn="ctr"/>
+            <a:r>
+              <a:rPr sz="900">
+                <a:solidFill>
+                  <a:srgbClr val="1F3A5F"/>
+                </a:solidFill>
+              </a:rPr>
+              <a:t>Gram 32: FR Outrider, Category 4, Mustafar</a:t>
+            </a:r>
+          </a:p>
+        </p:txBody>
+      </p:sp>
+      <p:sp>
+        <p:nvSpPr>
+          <p:cNvPr id="26" name="TextBox 25"/>
+          <p:cNvSpPr txBox="1"/>
+          <p:nvPr/>
+        </p:nvSpPr>
+        <p:spPr>
+          <a:xfrm>
+            <a:off x="2657246" y="5017008"/>
+            <a:ext cx="2200046" cy="1447800"/>
+          </a:xfrm>
+          <a:prstGeom prst="rect">
+            <a:avLst/>
+          </a:prstGeom>
+          <a:noFill/>
+        </p:spPr>
+        <p:txBody>
+          <a:bodyPr wrap="square">
+            <a:spAutoFit/>
+          </a:bodyPr>
+          <a:lstStyle/>
+          <a:p>
+            <a:r>
+              <a:rPr sz="800">
+                <a:hlinkClick r:id="rId41"/>
+              </a:rPr>
+              <a:t>Lofar 1</a:t>
+            </a:r>
+          </a:p>
+        </p:txBody>
+      </p:sp>
+      <p:sp>
+        <p:nvSpPr>
+          <p:cNvPr id="27" name="Rounded Rectangle 26"/>
+          <p:cNvSpPr/>
+          <p:nvPr>
+            <a:hlinkClick r:id="rId42"/>
+          </p:nvPr>
+        </p:nvSpPr>
+        <p:spPr>
+          <a:xfrm>
+            <a:off x="4948732" y="4632960"/>
+            <a:ext cx="2200046" cy="365760"/>
+          </a:xfrm>
+          <a:prstGeom prst="roundRect">
+            <a:avLst/>
+          </a:prstGeom>
+          <a:solidFill>
+            <a:srgbClr val="E8EEF7"/>
+          </a:solidFill>
+          <a:ln>
+            <a:solidFill>
+              <a:srgbClr val="1F3A5F"/>
+            </a:solidFill>
+          </a:ln>
+        </p:spPr>
+        <p:style>
+          <a:lnRef idx="1">
+            <a:schemeClr val="accent1"/>
+          </a:lnRef>
+          <a:fillRef idx="3">
+            <a:schemeClr val="accent1"/>
+          </a:fillRef>
+          <a:effectRef idx="2">
+            <a:schemeClr val="accent1"/>
+          </a:effectRef>
+          <a:fontRef idx="minor">
+            <a:schemeClr val="lt1"/>
+          </a:fontRef>
+        </p:style>
+        <p:txBody>
+          <a:bodyPr rtlCol="0" anchor="ctr" lIns="45720" rIns="45720"/>
+          <a:lstStyle/>
+          <a:p>
+            <a:pPr algn="ctr"/>
+            <a:r>
+              <a:rPr sz="900">
+                <a:solidFill>
+                  <a:srgbClr val="1F3A5F"/>
+                </a:solidFill>
+              </a:rPr>
+              <a:t>Gram 33: FR Lambda Shuttle, Category 4, Bespin</a:t>
+            </a:r>
+          </a:p>
+        </p:txBody>
+      </p:sp>
+      <p:sp>
+        <p:nvSpPr>
+          <p:cNvPr id="28" name="TextBox 27"/>
+          <p:cNvSpPr txBox="1"/>
+          <p:nvPr/>
+        </p:nvSpPr>
+        <p:spPr>
+          <a:xfrm>
+            <a:off x="4948732" y="5017008"/>
+            <a:ext cx="2200046" cy="1447800"/>
+          </a:xfrm>
+          <a:prstGeom prst="rect">
+            <a:avLst/>
+          </a:prstGeom>
+          <a:noFill/>
+        </p:spPr>
+        <p:txBody>
+          <a:bodyPr wrap="square">
+            <a:spAutoFit/>
+          </a:bodyPr>
+          <a:lstStyle/>
+          <a:p>
+            <a:r>
+              <a:rPr sz="800">
+                <a:hlinkClick r:id="rId43"/>
+              </a:rPr>
+              <a:t>Lofar 1</a:t>
+            </a:r>
+          </a:p>
+        </p:txBody>
+      </p:sp>
+      <p:sp>
+        <p:nvSpPr>
+          <p:cNvPr id="29" name="Rounded Rectangle 28"/>
+          <p:cNvSpPr/>
+          <p:nvPr>
+            <a:hlinkClick r:id="rId44"/>
+          </p:nvPr>
+        </p:nvSpPr>
+        <p:spPr>
+          <a:xfrm>
+            <a:off x="7240219" y="4632960"/>
+            <a:ext cx="2200046" cy="365760"/>
+          </a:xfrm>
+          <a:prstGeom prst="roundRect">
+            <a:avLst/>
+          </a:prstGeom>
+          <a:solidFill>
+            <a:srgbClr val="E8EEF7"/>
+          </a:solidFill>
+          <a:ln>
+            <a:solidFill>
+              <a:srgbClr val="1F3A5F"/>
+            </a:solidFill>
+          </a:ln>
+        </p:spPr>
+        <p:style>
+          <a:lnRef idx="1">
+            <a:schemeClr val="accent1"/>
+          </a:lnRef>
+          <a:fillRef idx="3">
+            <a:schemeClr val="accent1"/>
+          </a:fillRef>
+          <a:effectRef idx="2">
+            <a:schemeClr val="accent1"/>
+          </a:effectRef>
+          <a:fontRef idx="minor">
+            <a:schemeClr val="lt1"/>
+          </a:fontRef>
+        </p:style>
+        <p:txBody>
+          <a:bodyPr rtlCol="0" anchor="ctr" lIns="45720" rIns="45720"/>
+          <a:lstStyle/>
+          <a:p>
+            <a:pPr algn="ctr"/>
+            <a:r>
+              <a:rPr sz="900">
+                <a:solidFill>
+                  <a:srgbClr val="1F3A5F"/>
+                </a:solidFill>
+              </a:rPr>
+              <a:t>Gram 35: FR Ghost, Category 1, Tatooine</a:t>
+            </a:r>
+          </a:p>
+        </p:txBody>
+      </p:sp>
+      <p:sp>
+        <p:nvSpPr>
+          <p:cNvPr id="30" name="TextBox 29"/>
+          <p:cNvSpPr txBox="1"/>
+          <p:nvPr/>
+        </p:nvSpPr>
+        <p:spPr>
+          <a:xfrm>
+            <a:off x="7240219" y="5017008"/>
+            <a:ext cx="2200046" cy="1447800"/>
+          </a:xfrm>
+          <a:prstGeom prst="rect">
+            <a:avLst/>
+          </a:prstGeom>
+          <a:noFill/>
+        </p:spPr>
+        <p:txBody>
+          <a:bodyPr wrap="square">
+            <a:spAutoFit/>
+          </a:bodyPr>
+          <a:lstStyle/>
+          <a:p>
+            <a:r>
+              <a:rPr sz="800">
+                <a:hlinkClick r:id="rId45"/>
+              </a:rPr>
+              <a:t>Lofar 1</a:t>
+            </a:r>
+          </a:p>
+          <a:p>
+            <a:r>
+              <a:rPr sz="800">
+                <a:hlinkClick r:id="rId46"/>
+              </a:rPr>
+              <a:t>Lofar 2</a:t>
+            </a:r>
+          </a:p>
+          <a:p>
+            <a:r>
+              <a:rPr sz="800">
+                <a:hlinkClick r:id="rId47"/>
+              </a:rPr>
+              <a:t>Lofar 3</a:t>
+            </a:r>
+          </a:p>
+        </p:txBody>
+      </p:sp>
+      <p:sp>
+        <p:nvSpPr>
+          <p:cNvPr id="31" name="Rounded Rectangle 30"/>
+          <p:cNvSpPr/>
+          <p:nvPr>
+            <a:hlinkClick r:id="rId48"/>
+          </p:nvPr>
+        </p:nvSpPr>
+        <p:spPr>
+          <a:xfrm>
+            <a:off x="9531705" y="4632960"/>
+            <a:ext cx="2200046" cy="365760"/>
+          </a:xfrm>
+          <a:prstGeom prst="roundRect">
+            <a:avLst/>
+          </a:prstGeom>
+          <a:solidFill>
+            <a:srgbClr val="E8EEF7"/>
+          </a:solidFill>
+          <a:ln>
+            <a:solidFill>
+              <a:srgbClr val="1F3A5F"/>
+            </a:solidFill>
+          </a:ln>
+        </p:spPr>
+        <p:style>
+          <a:lnRef idx="1">
+            <a:schemeClr val="accent1"/>
+          </a:lnRef>
+          <a:fillRef idx="3">
+            <a:schemeClr val="accent1"/>
+          </a:fillRef>
+          <a:effectRef idx="2">
+            <a:schemeClr val="accent1"/>
+          </a:effectRef>
+          <a:fontRef idx="minor">
+            <a:schemeClr val="lt1"/>
+          </a:fontRef>
+        </p:style>
+        <p:txBody>
+          <a:bodyPr rtlCol="0" anchor="ctr" lIns="45720" rIns="45720"/>
+          <a:lstStyle/>
+          <a:p>
+            <a:pPr algn="ctr"/>
+            <a:r>
+              <a:rPr sz="900">
+                <a:solidFill>
+                  <a:srgbClr val="1F3A5F"/>
+                </a:solidFill>
+              </a:rPr>
+              <a:t>Gram 36: Rebel One contact bearing 243, codename Risa</a:t>
+            </a:r>
+          </a:p>
+        </p:txBody>
+      </p:sp>
+      <p:sp>
+        <p:nvSpPr>
+          <p:cNvPr id="32" name="TextBox 31"/>
+          <p:cNvSpPr txBox="1"/>
+          <p:nvPr/>
+        </p:nvSpPr>
+        <p:spPr>
+          <a:xfrm>
+            <a:off x="9531705" y="5017008"/>
+            <a:ext cx="2200046" cy="1447800"/>
+          </a:xfrm>
+          <a:prstGeom prst="rect">
+            <a:avLst/>
+          </a:prstGeom>
+          <a:noFill/>
+        </p:spPr>
+        <p:txBody>
+          <a:bodyPr wrap="square">
+            <a:spAutoFit/>
+          </a:bodyPr>
+          <a:lstStyle/>
+          <a:p>
+            <a:r>
+              <a:rPr sz="800">
+                <a:hlinkClick r:id="rId49"/>
+              </a:rPr>
+              <a:t>Lofar 1</a:t>
+            </a:r>
+          </a:p>
+          <a:p>
+            <a:r>
+              <a:rPr sz="800">
+                <a:hlinkClick r:id="rId50"/>
+              </a:rPr>
+              <a:t>Lofar 2</a:t>
+            </a:r>
+          </a:p>
+          <a:p>
+            <a:r>
+              <a:rPr sz="800">
+                <a:hlinkClick r:id="rId51"/>
+              </a:rPr>
+              <a:t>Lofar 3</a:t>
+            </a:r>
+          </a:p>
+          <a:p>
+            <a:r>
+              <a:rPr sz="800">
+                <a:hlinkClick r:id="rId52"/>
+              </a:rPr>
+              <a:t>Lofar 4</a:t>
+            </a:r>
+          </a:p>
+        </p:txBody>
+      </p:sp>
+    </p:spTree>
+  </p:cSld>
+  <p:clrMapOvr>
+    <a:masterClrMapping/>
+  </p:clrMapOvr>
+</p:sld>
+</file>
+
+<file path=ppt/slides/slide4.xml><?xml version="1.0" encoding="utf-8"?>
+<p:sld xmlns:a="http://schemas.openxmlformats.org/drawingml/2006/main" xmlns:p="http://schemas.openxmlformats.org/presentationml/2006/main" xmlns:r="http://schemas.openxmlformats.org/officeDocument/2006/relationships">
+  <p:cSld>
+    <p:spTree>
+      <p:nvGrpSpPr>
+        <p:cNvPr id="1" name=""/>
+        <p:cNvGrpSpPr/>
+        <p:nvPr/>
+      </p:nvGrpSpPr>
+      <p:grpSpPr/>
+      <p:sp>
+        <p:nvSpPr>
+          <p:cNvPr id="2" name="Rectangle 1"/>
+          <p:cNvSpPr/>
+          <p:nvPr/>
+        </p:nvSpPr>
+        <p:spPr>
+          <a:xfrm>
+            <a:off x="0" y="0"/>
+            <a:ext cx="12188952" cy="548640"/>
+          </a:xfrm>
+          <a:prstGeom prst="rect">
+            <a:avLst/>
+          </a:prstGeom>
+          <a:solidFill>
+            <a:srgbClr val="1F3A5F"/>
+          </a:solidFill>
+          <a:ln>
+            <a:noFill/>
+          </a:ln>
+        </p:spPr>
+        <p:style>
+          <a:lnRef idx="1">
+            <a:schemeClr val="accent1"/>
+          </a:lnRef>
+          <a:fillRef idx="3">
+            <a:schemeClr val="accent1"/>
+          </a:fillRef>
+          <a:effectRef idx="2">
+            <a:schemeClr val="accent1"/>
+          </a:effectRef>
+          <a:fontRef idx="minor">
+            <a:schemeClr val="lt1"/>
+          </a:fontRef>
+        </p:style>
+        <p:txBody>
+          <a:bodyPr rtlCol="0" anchor="ctr" lIns="182880" rIns="182880"/>
+          <a:lstStyle/>
+          <a:p>
+            <a:pPr algn="ctr"/>
+            <a:r>
+              <a:rPr sz="2000" b="1">
+                <a:solidFill>
+                  <a:srgbClr val="FFFFFF"/>
+                </a:solidFill>
+              </a:rPr>
+              <a:t>Instructor Week 2 Grams — Page 3 of 3</a:t>
+            </a:r>
+          </a:p>
+        </p:txBody>
+      </p:sp>
+      <p:sp>
+        <p:nvSpPr>
+          <p:cNvPr id="3" name="Rounded Rectangle 2"/>
+          <p:cNvSpPr/>
+          <p:nvPr>
+            <a:hlinkClick r:id="rId2"/>
+          </p:nvPr>
+        </p:nvSpPr>
+        <p:spPr>
+          <a:xfrm>
+            <a:off x="365760" y="731520"/>
+            <a:ext cx="2200046" cy="365760"/>
+          </a:xfrm>
+          <a:prstGeom prst="roundRect">
+            <a:avLst/>
+          </a:prstGeom>
+          <a:solidFill>
+            <a:srgbClr val="E8EEF7"/>
+          </a:solidFill>
+          <a:ln>
+            <a:solidFill>
+              <a:srgbClr val="1F3A5F"/>
+            </a:solidFill>
+          </a:ln>
+        </p:spPr>
+        <p:style>
+          <a:lnRef idx="1">
+            <a:schemeClr val="accent1"/>
+          </a:lnRef>
+          <a:fillRef idx="3">
+            <a:schemeClr val="accent1"/>
+          </a:fillRef>
+          <a:effectRef idx="2">
+            <a:schemeClr val="accent1"/>
+          </a:effectRef>
+          <a:fontRef idx="minor">
+            <a:schemeClr val="lt1"/>
+          </a:fontRef>
+        </p:style>
+        <p:txBody>
+          <a:bodyPr rtlCol="0" anchor="ctr" lIns="45720" rIns="45720"/>
+          <a:lstStyle/>
+          <a:p>
+            <a:pPr algn="ctr"/>
+            <a:r>
+              <a:rPr sz="900">
+                <a:solidFill>
+                  <a:srgbClr val="1F3A5F"/>
+                </a:solidFill>
+              </a:rPr>
+              <a:t>Gram 38: Prometheus contact bearing 214, codename Gandalf</a:t>
+            </a:r>
+          </a:p>
+        </p:txBody>
+      </p:sp>
+      <p:sp>
+        <p:nvSpPr>
+          <p:cNvPr id="4" name="TextBox 3"/>
+          <p:cNvSpPr txBox="1"/>
+          <p:nvPr/>
+        </p:nvSpPr>
+        <p:spPr>
+          <a:xfrm>
+            <a:off x="365760" y="1115568"/>
+            <a:ext cx="2200046" cy="1447800"/>
+          </a:xfrm>
+          <a:prstGeom prst="rect">
+            <a:avLst/>
+          </a:prstGeom>
+          <a:noFill/>
+        </p:spPr>
+        <p:txBody>
+          <a:bodyPr wrap="square">
+            <a:spAutoFit/>
+          </a:bodyPr>
+          <a:lstStyle/>
+          <a:p>
+            <a:r>
+              <a:rPr sz="800">
+                <a:hlinkClick r:id="rId3"/>
+              </a:rPr>
+              <a:t>Lofar 1</a:t>
+            </a:r>
+          </a:p>
+          <a:p>
+            <a:r>
+              <a:rPr sz="800">
+                <a:hlinkClick r:id="rId4"/>
+              </a:rPr>
+              <a:t>Lofar 2</a:t>
+            </a:r>
+          </a:p>
+        </p:txBody>
+      </p:sp>
+      <p:sp>
+        <p:nvSpPr>
+          <p:cNvPr id="5" name="Rounded Rectangle 4"/>
+          <p:cNvSpPr/>
+          <p:nvPr>
+            <a:hlinkClick r:id="rId5"/>
+          </p:nvPr>
+        </p:nvSpPr>
+        <p:spPr>
+          <a:xfrm>
+            <a:off x="2657246" y="731520"/>
+            <a:ext cx="2200046" cy="365760"/>
+          </a:xfrm>
+          <a:prstGeom prst="roundRect">
+            <a:avLst/>
+          </a:prstGeom>
+          <a:solidFill>
+            <a:srgbClr val="E8EEF7"/>
+          </a:solidFill>
+          <a:ln>
+            <a:solidFill>
+              <a:srgbClr val="1F3A5F"/>
+            </a:solidFill>
+          </a:ln>
+        </p:spPr>
+        <p:style>
+          <a:lnRef idx="1">
+            <a:schemeClr val="accent1"/>
+          </a:lnRef>
+          <a:fillRef idx="3">
+            <a:schemeClr val="accent1"/>
+          </a:fillRef>
+          <a:effectRef idx="2">
+            <a:schemeClr val="accent1"/>
+          </a:effectRef>
+          <a:fontRef idx="minor">
+            <a:schemeClr val="lt1"/>
+          </a:fontRef>
+        </p:style>
+        <p:txBody>
+          <a:bodyPr rtlCol="0" anchor="ctr" lIns="45720" rIns="45720"/>
+          <a:lstStyle/>
+          <a:p>
+            <a:pPr algn="ctr"/>
+            <a:r>
+              <a:rPr sz="900">
+                <a:solidFill>
+                  <a:srgbClr val="1F3A5F"/>
+                </a:solidFill>
+              </a:rPr>
+              <a:t>Gram 39: FR Razor Crest, Category 1, Romulus</a:t>
+            </a:r>
+          </a:p>
+        </p:txBody>
+      </p:sp>
+      <p:sp>
+        <p:nvSpPr>
+          <p:cNvPr id="6" name="TextBox 5"/>
+          <p:cNvSpPr txBox="1"/>
+          <p:nvPr/>
+        </p:nvSpPr>
+        <p:spPr>
+          <a:xfrm>
+            <a:off x="2657246" y="1115568"/>
+            <a:ext cx="2200046" cy="1447800"/>
+          </a:xfrm>
+          <a:prstGeom prst="rect">
+            <a:avLst/>
+          </a:prstGeom>
+          <a:noFill/>
+        </p:spPr>
+        <p:txBody>
+          <a:bodyPr wrap="square">
+            <a:spAutoFit/>
+          </a:bodyPr>
+          <a:lstStyle/>
+          <a:p>
+            <a:r>
+              <a:rPr sz="800">
+                <a:hlinkClick r:id="rId6"/>
+              </a:rPr>
+              <a:t>Lofar 1</a:t>
+            </a:r>
+          </a:p>
+          <a:p>
+            <a:r>
+              <a:rPr sz="800">
+                <a:hlinkClick r:id="rId7"/>
+              </a:rPr>
+              <a:t>Lofar 2</a:t>
+            </a:r>
+          </a:p>
+          <a:p>
+            <a:r>
+              <a:rPr sz="800">
+                <a:hlinkClick r:id="rId8"/>
+              </a:rPr>
+              <a:t>Lofar 3</a:t>
+            </a:r>
+          </a:p>
+        </p:txBody>
+      </p:sp>
+      <p:sp>
+        <p:nvSpPr>
+          <p:cNvPr id="7" name="Rounded Rectangle 6"/>
+          <p:cNvSpPr/>
+          <p:nvPr>
+            <a:hlinkClick r:id="rId9"/>
+          </p:nvPr>
+        </p:nvSpPr>
+        <p:spPr>
+          <a:xfrm>
+            <a:off x="4948732" y="731520"/>
+            <a:ext cx="2200046" cy="365760"/>
+          </a:xfrm>
+          <a:prstGeom prst="roundRect">
+            <a:avLst/>
+          </a:prstGeom>
+          <a:solidFill>
+            <a:srgbClr val="E8EEF7"/>
+          </a:solidFill>
+          <a:ln>
+            <a:solidFill>
+              <a:srgbClr val="1F3A5F"/>
+            </a:solidFill>
+          </a:ln>
+        </p:spPr>
+        <p:style>
+          <a:lnRef idx="1">
+            <a:schemeClr val="accent1"/>
+          </a:lnRef>
+          <a:fillRef idx="3">
+            <a:schemeClr val="accent1"/>
+          </a:fillRef>
+          <a:effectRef idx="2">
+            <a:schemeClr val="accent1"/>
+          </a:effectRef>
+          <a:fontRef idx="minor">
+            <a:schemeClr val="lt1"/>
+          </a:fontRef>
+        </p:style>
+        <p:txBody>
+          <a:bodyPr rtlCol="0" anchor="ctr" lIns="45720" rIns="45720"/>
+          <a:lstStyle/>
+          <a:p>
+            <a:pPr algn="ctr"/>
+            <a:r>
+              <a:rPr sz="900">
+                <a:solidFill>
+                  <a:srgbClr val="1F3A5F"/>
+                </a:solidFill>
+              </a:rPr>
+              <a:t>Gram 40: FR Outrider, Category 3, Bajor</a:t>
+            </a:r>
+          </a:p>
+        </p:txBody>
+      </p:sp>
+      <p:sp>
+        <p:nvSpPr>
+          <p:cNvPr id="8" name="TextBox 7"/>
+          <p:cNvSpPr txBox="1"/>
+          <p:nvPr/>
+        </p:nvSpPr>
+        <p:spPr>
+          <a:xfrm>
+            <a:off x="4948732" y="1115568"/>
+            <a:ext cx="2200046" cy="1447800"/>
+          </a:xfrm>
+          <a:prstGeom prst="rect">
+            <a:avLst/>
+          </a:prstGeom>
+          <a:noFill/>
+        </p:spPr>
+        <p:txBody>
+          <a:bodyPr wrap="square">
+            <a:spAutoFit/>
+          </a:bodyPr>
+          <a:lstStyle/>
+          <a:p>
+            <a:r>
+              <a:rPr sz="800">
+                <a:hlinkClick r:id="rId10"/>
+              </a:rPr>
+              <a:t>Lofar 1</a:t>
+            </a:r>
+          </a:p>
+          <a:p>
+            <a:r>
+              <a:rPr sz="800">
+                <a:hlinkClick r:id="rId11"/>
+              </a:rPr>
+              <a:t>Lofar 2</a:t>
+            </a:r>
+          </a:p>
+          <a:p>
+            <a:r>
+              <a:rPr sz="800">
+                <a:hlinkClick r:id="rId12"/>
+              </a:rPr>
+              <a:t>Lofar 3</a:t>
+            </a:r>
+          </a:p>
+          <a:p>
+            <a:r>
+              <a:rPr sz="800">
+                <a:hlinkClick r:id="rId13"/>
+              </a:rPr>
+              <a:t>Lofar 4</a:t>
+            </a:r>
+          </a:p>
+        </p:txBody>
+      </p:sp>
+      <p:sp>
+        <p:nvSpPr>
+          <p:cNvPr id="9" name="Rounded Rectangle 8"/>
+          <p:cNvSpPr/>
+          <p:nvPr>
+            <a:hlinkClick r:id="rId14"/>
+          </p:nvPr>
+        </p:nvSpPr>
+        <p:spPr>
+          <a:xfrm>
+            <a:off x="7240219" y="731520"/>
+            <a:ext cx="2200046" cy="365760"/>
+          </a:xfrm>
+          <a:prstGeom prst="roundRect">
+            <a:avLst/>
+          </a:prstGeom>
+          <a:solidFill>
+            <a:srgbClr val="E8EEF7"/>
+          </a:solidFill>
+          <a:ln>
+            <a:solidFill>
+              <a:srgbClr val="1F3A5F"/>
+            </a:solidFill>
+          </a:ln>
+        </p:spPr>
+        <p:style>
+          <a:lnRef idx="1">
+            <a:schemeClr val="accent1"/>
+          </a:lnRef>
+          <a:fillRef idx="3">
+            <a:schemeClr val="accent1"/>
+          </a:fillRef>
+          <a:effectRef idx="2">
+            <a:schemeClr val="accent1"/>
+          </a:effectRef>
+          <a:fontRef idx="minor">
+            <a:schemeClr val="lt1"/>
+          </a:fontRef>
+        </p:style>
+        <p:txBody>
+          <a:bodyPr rtlCol="0" anchor="ctr" lIns="45720" rIns="45720"/>
+          <a:lstStyle/>
+          <a:p>
+            <a:pPr algn="ctr"/>
+            <a:r>
+              <a:rPr sz="900">
+                <a:solidFill>
+                  <a:srgbClr val="1F3A5F"/>
+                </a:solidFill>
+              </a:rPr>
+              <a:t>Gram 41: FR TIE Bomber, Category 2, Vulcan</a:t>
+            </a:r>
+          </a:p>
+        </p:txBody>
+      </p:sp>
+      <p:sp>
+        <p:nvSpPr>
+          <p:cNvPr id="10" name="TextBox 9"/>
+          <p:cNvSpPr txBox="1"/>
+          <p:nvPr/>
+        </p:nvSpPr>
+        <p:spPr>
+          <a:xfrm>
+            <a:off x="7240219" y="1115568"/>
+            <a:ext cx="2200046" cy="1447800"/>
+          </a:xfrm>
+          <a:prstGeom prst="rect">
+            <a:avLst/>
+          </a:prstGeom>
+          <a:noFill/>
+        </p:spPr>
+        <p:txBody>
+          <a:bodyPr wrap="square">
+            <a:spAutoFit/>
+          </a:bodyPr>
+          <a:lstStyle/>
+          <a:p>
+            <a:r>
+              <a:rPr sz="800">
+                <a:hlinkClick r:id="rId15"/>
+              </a:rPr>
+              <a:t>Lofar 1</a:t>
+            </a:r>
+          </a:p>
+          <a:p>
+            <a:r>
+              <a:rPr sz="800">
+                <a:hlinkClick r:id="rId16"/>
+              </a:rPr>
+              <a:t>Lofar 2</a:t>
+            </a:r>
+          </a:p>
+          <a:p>
+            <a:r>
+              <a:rPr sz="800">
+                <a:hlinkClick r:id="rId17"/>
+              </a:rPr>
+              <a:t>Lofar 3</a:t>
+            </a:r>
+          </a:p>
+          <a:p>
+            <a:r>
+              <a:rPr sz="800">
+                <a:hlinkClick r:id="rId18"/>
+              </a:rPr>
+              <a:t>Lofar 4</a:t>
+            </a:r>
+          </a:p>
+        </p:txBody>
+      </p:sp>
+      <p:sp>
+        <p:nvSpPr>
+          <p:cNvPr id="11" name="Rounded Rectangle 10"/>
+          <p:cNvSpPr/>
+          <p:nvPr>
+            <a:hlinkClick r:id="rId19"/>
+          </p:nvPr>
+        </p:nvSpPr>
+        <p:spPr>
+          <a:xfrm>
+            <a:off x="9531705" y="731520"/>
+            <a:ext cx="2200046" cy="365760"/>
+          </a:xfrm>
+          <a:prstGeom prst="roundRect">
+            <a:avLst/>
+          </a:prstGeom>
+          <a:solidFill>
+            <a:srgbClr val="E8EEF7"/>
+          </a:solidFill>
+          <a:ln>
+            <a:solidFill>
+              <a:srgbClr val="1F3A5F"/>
+            </a:solidFill>
+          </a:ln>
+        </p:spPr>
+        <p:style>
+          <a:lnRef idx="1">
+            <a:schemeClr val="accent1"/>
+          </a:lnRef>
+          <a:fillRef idx="3">
+            <a:schemeClr val="accent1"/>
+          </a:fillRef>
+          <a:effectRef idx="2">
+            <a:schemeClr val="accent1"/>
+          </a:effectRef>
+          <a:fontRef idx="minor">
+            <a:schemeClr val="lt1"/>
+          </a:fontRef>
+        </p:style>
+        <p:txBody>
+          <a:bodyPr rtlCol="0" anchor="ctr" lIns="45720" rIns="45720"/>
+          <a:lstStyle/>
+          <a:p>
+            <a:pPr algn="ctr"/>
+            <a:r>
+              <a:rPr sz="900">
+                <a:solidFill>
+                  <a:srgbClr val="1F3A5F"/>
+                </a:solidFill>
+              </a:rPr>
+              <a:t>Gram 42: FR Nebulon-B, Category 2, Romulus</a:t>
+            </a:r>
+          </a:p>
+        </p:txBody>
+      </p:sp>
+      <p:sp>
+        <p:nvSpPr>
+          <p:cNvPr id="12" name="TextBox 11"/>
+          <p:cNvSpPr txBox="1"/>
+          <p:nvPr/>
+        </p:nvSpPr>
+        <p:spPr>
+          <a:xfrm>
+            <a:off x="9531705" y="1115568"/>
+            <a:ext cx="2200046" cy="1447800"/>
+          </a:xfrm>
+          <a:prstGeom prst="rect">
+            <a:avLst/>
+          </a:prstGeom>
+          <a:noFill/>
+        </p:spPr>
+        <p:txBody>
+          <a:bodyPr wrap="square">
+            <a:spAutoFit/>
+          </a:bodyPr>
+          <a:lstStyle/>
+          <a:p>
+            <a:r>
+              <a:rPr sz="800">
+                <a:hlinkClick r:id="rId20"/>
+              </a:rPr>
+              <a:t>Lofar 1</a:t>
+            </a:r>
+          </a:p>
+        </p:txBody>
+      </p:sp>
+    </p:spTree>
+  </p:cSld>
+  <p:clrMapOvr>
+    <a:masterClrMapping/>
+  </p:clrMapOvr>
+</p:sld>
+</file>
+
+<file path=ppt/slides/slide5.xml><?xml version="1.0" encoding="utf-8"?>
+<p:sld xmlns:a="http://schemas.openxmlformats.org/drawingml/2006/main" xmlns:p="http://schemas.openxmlformats.org/presentationml/2006/main" xmlns:r="http://schemas.openxmlformats.org/officeDocument/2006/relationships">
+  <p:cSld>
+    <p:spTree>
+      <p:nvGrpSpPr>
+        <p:cNvPr id="1" name=""/>
+        <p:cNvGrpSpPr/>
+        <p:nvPr/>
+      </p:nvGrpSpPr>
+      <p:grpSpPr/>
+      <p:sp>
+        <p:nvSpPr>
+          <p:cNvPr id="2" name="TextBox 1"/>
+          <p:cNvSpPr txBox="1"/>
+          <p:nvPr/>
+        </p:nvSpPr>
+        <p:spPr>
+          <a:xfrm>
+            <a:off x="914400" y="2377440"/>
+            <a:ext cx="10360152" cy="1280160"/>
+          </a:xfrm>
+          <a:prstGeom prst="rect">
+            <a:avLst/>
+          </a:prstGeom>
+          <a:noFill/>
+        </p:spPr>
+        <p:txBody>
+          <a:bodyPr wrap="square">
+            <a:spAutoFit/>
+          </a:bodyPr>
+          <a:lstStyle/>
+          <a:p>
+            <a:pPr algn="ctr"/>
+            <a:r>
+              <a:rPr sz="4000" b="1">
+                <a:solidFill>
+                  <a:srgbClr val="1F3A5F"/>
+                </a:solidFill>
+              </a:rPr>
+              <a:t>End of Instructor Week 2 Grams</a:t>
+            </a:r>
+          </a:p>
+        </p:txBody>
+      </p:sp>
+      <p:sp>
+        <p:nvSpPr>
+          <p:cNvPr id="3" name="TextBox 2"/>
+          <p:cNvSpPr txBox="1"/>
+          <p:nvPr/>
+        </p:nvSpPr>
+        <p:spPr>
+          <a:xfrm>
+            <a:off x="914400" y="3840480"/>
+            <a:ext cx="10360152" cy="731520"/>
+          </a:xfrm>
+          <a:prstGeom prst="rect">
+            <a:avLst/>
+          </a:prstGeom>
+          <a:noFill/>
+        </p:spPr>
+        <p:txBody>
+          <a:bodyPr wrap="none">
+            <a:spAutoFit/>
+          </a:bodyPr>
+          <a:lstStyle/>
+          <a:p>
+            <a:pPr algn="ctr"/>
+            <a:r>
+              <a:rPr sz="2400">
+                <a:solidFill>
+                  <a:srgbClr val="1F3A5F"/>
+                </a:solidFill>
+              </a:rPr>
+              <a:t>Instructor Version</a:t>
             </a:r>
           </a:p>
         </p:txBody>

--- a/source/Instructor Week 2 Grams/Instructor Week 2 Grams.pptx
+++ b/source/Instructor Week 2 Grams/Instructor Week 2 Grams.pptx
@@ -8,8 +8,6 @@
     <p:sldId id="256" r:id="rId7"/>
     <p:sldId id="257" r:id="rId8"/>
     <p:sldId id="258" r:id="rId9"/>
-    <p:sldId id="259" r:id="rId10"/>
-    <p:sldId id="260" r:id="rId11"/>
   </p:sldIdLst>
   <p:sldSz cx="12188952" cy="6858000" type="screen4x3"/>
   <p:notesSz cx="6858000" cy="9144000"/>
@@ -3094,14 +3092,120 @@
       <p:grpSpPr/>
       <p:sp>
         <p:nvSpPr>
-          <p:cNvPr id="2" name="TextBox 1"/>
+          <p:cNvPr id="2" name="Rectangle 1"/>
+          <p:cNvSpPr/>
+          <p:nvPr/>
+        </p:nvSpPr>
+        <p:spPr>
+          <a:xfrm>
+            <a:off x="0" y="0"/>
+            <a:ext cx="12188952" cy="548640"/>
+          </a:xfrm>
+          <a:prstGeom prst="rect">
+            <a:avLst/>
+          </a:prstGeom>
+          <a:solidFill>
+            <a:srgbClr val="1F3A5F"/>
+          </a:solidFill>
+          <a:ln>
+            <a:noFill/>
+          </a:ln>
+        </p:spPr>
+        <p:style>
+          <a:lnRef idx="1">
+            <a:schemeClr val="accent1"/>
+          </a:lnRef>
+          <a:fillRef idx="3">
+            <a:schemeClr val="accent1"/>
+          </a:fillRef>
+          <a:effectRef idx="2">
+            <a:schemeClr val="accent1"/>
+          </a:effectRef>
+          <a:fontRef idx="minor">
+            <a:schemeClr val="lt1"/>
+          </a:fontRef>
+        </p:style>
+        <p:txBody>
+          <a:bodyPr rtlCol="0" anchor="ctr" lIns="182880" rIns="182880"/>
+          <a:lstStyle/>
+          <a:p>
+            <a:pPr algn="ctr"/>
+            <a:r>
+              <a:rPr sz="2000" b="1">
+                <a:solidFill>
+                  <a:srgbClr val="FFFFFF"/>
+                </a:solidFill>
+              </a:rPr>
+              <a:t>Instructor Week 2 Grams — Page 1 of 3</a:t>
+            </a:r>
+          </a:p>
+        </p:txBody>
+      </p:sp>
+      <p:sp>
+        <p:nvSpPr>
+          <p:cNvPr id="3" name="Rounded Rectangle 2">
+            <a:hlinkClick r:id="rId2"/>
+          </p:cNvPr>
+          <p:cNvSpPr/>
+          <p:nvPr/>
+        </p:nvSpPr>
+        <p:spPr>
+          <a:xfrm>
+            <a:off x="365760" y="731520"/>
+            <a:ext cx="2200046" cy="365760"/>
+          </a:xfrm>
+          <a:prstGeom prst="roundRect">
+            <a:avLst/>
+          </a:prstGeom>
+          <a:solidFill>
+            <a:srgbClr val="E8EEF7"/>
+          </a:solidFill>
+          <a:ln>
+            <a:solidFill>
+              <a:srgbClr val="1F3A5F"/>
+            </a:solidFill>
+          </a:ln>
+        </p:spPr>
+        <p:style>
+          <a:lnRef idx="1">
+            <a:schemeClr val="accent1"/>
+          </a:lnRef>
+          <a:fillRef idx="3">
+            <a:schemeClr val="accent1"/>
+          </a:fillRef>
+          <a:effectRef idx="2">
+            <a:schemeClr val="accent1"/>
+          </a:effectRef>
+          <a:fontRef idx="minor">
+            <a:schemeClr val="lt1"/>
+          </a:fontRef>
+        </p:style>
+        <p:txBody>
+          <a:bodyPr rtlCol="0" anchor="ctr" lIns="45720" rIns="45720"/>
+          <a:lstStyle/>
+          <a:p>
+            <a:pPr algn="ctr"/>
+            <a:r>
+              <a:rPr sz="900">
+                <a:solidFill>
+                  <a:srgbClr val="1F3A5F"/>
+                </a:solidFill>
+              </a:rPr>
+              <a:t>Gram 1: FR Razor Crest, Category 1, Kronos</a:t>
+            </a:r>
+          </a:p>
+        </p:txBody>
+      </p:sp>
+      <p:sp>
+        <p:nvSpPr>
+          <p:cNvPr id="4" name="TextBox 3"/>
           <p:cNvSpPr txBox="1"/>
           <p:nvPr/>
         </p:nvSpPr>
         <p:spPr>
           <a:xfrm>
-            <a:off x="914400" y="2377440"/>
-            <a:ext cx="10360152" cy="1280160"/>
+            <a:off x="365760" y="1115568"/>
+            <a:ext cx="2200046" cy="1447800"/>
           </a:xfrm>
           <a:prstGeom prst="rect">
             <a:avLst/>
@@ -3114,28 +3218,88 @@
           </a:bodyPr>
           <a:lstStyle/>
           <a:p>
+            <a:r>
+              <a:rPr sz="800">
+                <a:hlinkClick r:id="rId3"/>
+              </a:rPr>
+              <a:t>Lofar 1</a:t>
+            </a:r>
+          </a:p>
+          <a:p>
+            <a:r>
+              <a:rPr sz="800">
+                <a:hlinkClick r:id="rId4"/>
+              </a:rPr>
+              <a:t>Lofar 2</a:t>
+            </a:r>
+          </a:p>
+        </p:txBody>
+      </p:sp>
+      <p:sp>
+        <p:nvSpPr>
+          <p:cNvPr id="5" name="Rounded Rectangle 4">
+            <a:hlinkClick r:id="rId5"/>
+          </p:cNvPr>
+          <p:cNvSpPr/>
+          <p:nvPr/>
+        </p:nvSpPr>
+        <p:spPr>
+          <a:xfrm>
+            <a:off x="2657246" y="731520"/>
+            <a:ext cx="2200046" cy="365760"/>
+          </a:xfrm>
+          <a:prstGeom prst="roundRect">
+            <a:avLst/>
+          </a:prstGeom>
+          <a:solidFill>
+            <a:srgbClr val="E8EEF7"/>
+          </a:solidFill>
+          <a:ln>
+            <a:solidFill>
+              <a:srgbClr val="1F3A5F"/>
+            </a:solidFill>
+          </a:ln>
+        </p:spPr>
+        <p:style>
+          <a:lnRef idx="1">
+            <a:schemeClr val="accent1"/>
+          </a:lnRef>
+          <a:fillRef idx="3">
+            <a:schemeClr val="accent1"/>
+          </a:fillRef>
+          <a:effectRef idx="2">
+            <a:schemeClr val="accent1"/>
+          </a:effectRef>
+          <a:fontRef idx="minor">
+            <a:schemeClr val="lt1"/>
+          </a:fontRef>
+        </p:style>
+        <p:txBody>
+          <a:bodyPr rtlCol="0" anchor="ctr" lIns="45720" rIns="45720"/>
+          <a:lstStyle/>
+          <a:p>
             <a:pPr algn="ctr"/>
             <a:r>
-              <a:rPr sz="4000" b="1">
+              <a:rPr sz="900">
                 <a:solidFill>
                   <a:srgbClr val="1F3A5F"/>
                 </a:solidFill>
               </a:rPr>
-              <a:t>Welcome to Instructor Week 2 Grams</a:t>
-            </a:r>
-          </a:p>
-        </p:txBody>
-      </p:sp>
-      <p:sp>
-        <p:nvSpPr>
-          <p:cNvPr id="3" name="TextBox 2"/>
+              <a:t>Gram 2: FR Razor Crest, Category 3, Kobol</a:t>
+            </a:r>
+          </a:p>
+        </p:txBody>
+      </p:sp>
+      <p:sp>
+        <p:nvSpPr>
+          <p:cNvPr id="6" name="TextBox 5"/>
           <p:cNvSpPr txBox="1"/>
           <p:nvPr/>
         </p:nvSpPr>
         <p:spPr>
           <a:xfrm>
-            <a:off x="914400" y="3840480"/>
-            <a:ext cx="10360152" cy="731520"/>
+            <a:off x="2657246" y="1115568"/>
+            <a:ext cx="2200046" cy="1447800"/>
           </a:xfrm>
           <a:prstGeom prst="rect">
             <a:avLst/>
@@ -3143,19 +3307,1310 @@
           <a:noFill/>
         </p:spPr>
         <p:txBody>
-          <a:bodyPr wrap="none">
+          <a:bodyPr wrap="square">
             <a:spAutoFit/>
           </a:bodyPr>
           <a:lstStyle/>
           <a:p>
+            <a:r>
+              <a:rPr sz="800">
+                <a:hlinkClick r:id="rId6"/>
+              </a:rPr>
+              <a:t>Lofar 1</a:t>
+            </a:r>
+          </a:p>
+          <a:p>
+            <a:r>
+              <a:rPr sz="800">
+                <a:hlinkClick r:id="rId7"/>
+              </a:rPr>
+              <a:t>Lofar 2</a:t>
+            </a:r>
+          </a:p>
+          <a:p>
+            <a:r>
+              <a:rPr sz="800">
+                <a:hlinkClick r:id="rId8"/>
+              </a:rPr>
+              <a:t>Lofar 3</a:t>
+            </a:r>
+          </a:p>
+          <a:p>
+            <a:r>
+              <a:rPr sz="800">
+                <a:hlinkClick r:id="rId9"/>
+              </a:rPr>
+              <a:t>Lofar 4</a:t>
+            </a:r>
+          </a:p>
+        </p:txBody>
+      </p:sp>
+      <p:sp>
+        <p:nvSpPr>
+          <p:cNvPr id="7" name="Rounded Rectangle 6">
+            <a:hlinkClick r:id="rId10"/>
+          </p:cNvPr>
+          <p:cNvSpPr/>
+          <p:nvPr/>
+        </p:nvSpPr>
+        <p:spPr>
+          <a:xfrm>
+            <a:off x="4948732" y="731520"/>
+            <a:ext cx="2200046" cy="365760"/>
+          </a:xfrm>
+          <a:prstGeom prst="roundRect">
+            <a:avLst/>
+          </a:prstGeom>
+          <a:solidFill>
+            <a:srgbClr val="E8EEF7"/>
+          </a:solidFill>
+          <a:ln>
+            <a:solidFill>
+              <a:srgbClr val="1F3A5F"/>
+            </a:solidFill>
+          </a:ln>
+        </p:spPr>
+        <p:style>
+          <a:lnRef idx="1">
+            <a:schemeClr val="accent1"/>
+          </a:lnRef>
+          <a:fillRef idx="3">
+            <a:schemeClr val="accent1"/>
+          </a:fillRef>
+          <a:effectRef idx="2">
+            <a:schemeClr val="accent1"/>
+          </a:effectRef>
+          <a:fontRef idx="minor">
+            <a:schemeClr val="lt1"/>
+          </a:fontRef>
+        </p:style>
+        <p:txBody>
+          <a:bodyPr rtlCol="0" anchor="ctr" lIns="45720" rIns="45720"/>
+          <a:lstStyle/>
+          <a:p>
             <a:pPr algn="ctr"/>
             <a:r>
-              <a:rPr sz="2400">
+              <a:rPr sz="900">
                 <a:solidFill>
                   <a:srgbClr val="1F3A5F"/>
                 </a:solidFill>
               </a:rPr>
-              <a:t>Instructor Version</a:t>
+              <a:t>Gram 3: Slave I contact bearing 280, codename Yavin</a:t>
+            </a:r>
+          </a:p>
+        </p:txBody>
+      </p:sp>
+      <p:sp>
+        <p:nvSpPr>
+          <p:cNvPr id="8" name="TextBox 7"/>
+          <p:cNvSpPr txBox="1"/>
+          <p:nvPr/>
+        </p:nvSpPr>
+        <p:spPr>
+          <a:xfrm>
+            <a:off x="4948732" y="1115568"/>
+            <a:ext cx="2200046" cy="1447800"/>
+          </a:xfrm>
+          <a:prstGeom prst="rect">
+            <a:avLst/>
+          </a:prstGeom>
+          <a:noFill/>
+        </p:spPr>
+        <p:txBody>
+          <a:bodyPr wrap="square">
+            <a:spAutoFit/>
+          </a:bodyPr>
+          <a:lstStyle/>
+          <a:p>
+            <a:r>
+              <a:rPr sz="800">
+                <a:hlinkClick r:id="rId11"/>
+              </a:rPr>
+              <a:t>Lofar 1</a:t>
+            </a:r>
+          </a:p>
+          <a:p>
+            <a:r>
+              <a:rPr sz="800">
+                <a:hlinkClick r:id="rId12"/>
+              </a:rPr>
+              <a:t>Lofar 2</a:t>
+            </a:r>
+          </a:p>
+          <a:p>
+            <a:r>
+              <a:rPr sz="800">
+                <a:hlinkClick r:id="rId13"/>
+              </a:rPr>
+              <a:t>Lofar 3</a:t>
+            </a:r>
+          </a:p>
+          <a:p>
+            <a:r>
+              <a:rPr sz="800">
+                <a:hlinkClick r:id="rId14"/>
+              </a:rPr>
+              <a:t>Lofar 4</a:t>
+            </a:r>
+          </a:p>
+        </p:txBody>
+      </p:sp>
+      <p:sp>
+        <p:nvSpPr>
+          <p:cNvPr id="9" name="Rounded Rectangle 8">
+            <a:hlinkClick r:id="rId15"/>
+          </p:cNvPr>
+          <p:cNvSpPr/>
+          <p:nvPr/>
+        </p:nvSpPr>
+        <p:spPr>
+          <a:xfrm>
+            <a:off x="7240219" y="731520"/>
+            <a:ext cx="2200046" cy="365760"/>
+          </a:xfrm>
+          <a:prstGeom prst="roundRect">
+            <a:avLst/>
+          </a:prstGeom>
+          <a:solidFill>
+            <a:srgbClr val="E8EEF7"/>
+          </a:solidFill>
+          <a:ln>
+            <a:solidFill>
+              <a:srgbClr val="1F3A5F"/>
+            </a:solidFill>
+          </a:ln>
+        </p:spPr>
+        <p:style>
+          <a:lnRef idx="1">
+            <a:schemeClr val="accent1"/>
+          </a:lnRef>
+          <a:fillRef idx="3">
+            <a:schemeClr val="accent1"/>
+          </a:fillRef>
+          <a:effectRef idx="2">
+            <a:schemeClr val="accent1"/>
+          </a:effectRef>
+          <a:fontRef idx="minor">
+            <a:schemeClr val="lt1"/>
+          </a:fontRef>
+        </p:style>
+        <p:txBody>
+          <a:bodyPr rtlCol="0" anchor="ctr" lIns="45720" rIns="45720"/>
+          <a:lstStyle/>
+          <a:p>
+            <a:pPr algn="ctr"/>
+            <a:r>
+              <a:rPr sz="900">
+                <a:solidFill>
+                  <a:srgbClr val="1F3A5F"/>
+                </a:solidFill>
+              </a:rPr>
+              <a:t>Gram 4: FR Cerritos, Category 4, Gandalf</a:t>
+            </a:r>
+          </a:p>
+        </p:txBody>
+      </p:sp>
+      <p:sp>
+        <p:nvSpPr>
+          <p:cNvPr id="10" name="TextBox 9"/>
+          <p:cNvSpPr txBox="1"/>
+          <p:nvPr/>
+        </p:nvSpPr>
+        <p:spPr>
+          <a:xfrm>
+            <a:off x="7240219" y="1115568"/>
+            <a:ext cx="2200046" cy="1447800"/>
+          </a:xfrm>
+          <a:prstGeom prst="rect">
+            <a:avLst/>
+          </a:prstGeom>
+          <a:noFill/>
+        </p:spPr>
+        <p:txBody>
+          <a:bodyPr wrap="square">
+            <a:spAutoFit/>
+          </a:bodyPr>
+          <a:lstStyle/>
+          <a:p>
+            <a:r>
+              <a:rPr sz="800">
+                <a:hlinkClick r:id="rId16"/>
+              </a:rPr>
+              <a:t>Lofar 1</a:t>
+            </a:r>
+          </a:p>
+          <a:p>
+            <a:r>
+              <a:rPr sz="800">
+                <a:hlinkClick r:id="rId17"/>
+              </a:rPr>
+              <a:t>Lofar 2</a:t>
+            </a:r>
+          </a:p>
+        </p:txBody>
+      </p:sp>
+      <p:sp>
+        <p:nvSpPr>
+          <p:cNvPr id="11" name="Rounded Rectangle 10">
+            <a:hlinkClick r:id="rId18"/>
+          </p:cNvPr>
+          <p:cNvSpPr/>
+          <p:nvPr/>
+        </p:nvSpPr>
+        <p:spPr>
+          <a:xfrm>
+            <a:off x="9531705" y="731520"/>
+            <a:ext cx="2200046" cy="365760"/>
+          </a:xfrm>
+          <a:prstGeom prst="roundRect">
+            <a:avLst/>
+          </a:prstGeom>
+          <a:solidFill>
+            <a:srgbClr val="E8EEF7"/>
+          </a:solidFill>
+          <a:ln>
+            <a:solidFill>
+              <a:srgbClr val="1F3A5F"/>
+            </a:solidFill>
+          </a:ln>
+        </p:spPr>
+        <p:style>
+          <a:lnRef idx="1">
+            <a:schemeClr val="accent1"/>
+          </a:lnRef>
+          <a:fillRef idx="3">
+            <a:schemeClr val="accent1"/>
+          </a:fillRef>
+          <a:effectRef idx="2">
+            <a:schemeClr val="accent1"/>
+          </a:effectRef>
+          <a:fontRef idx="minor">
+            <a:schemeClr val="lt1"/>
+          </a:fontRef>
+        </p:style>
+        <p:txBody>
+          <a:bodyPr rtlCol="0" anchor="ctr" lIns="45720" rIns="45720"/>
+          <a:lstStyle/>
+          <a:p>
+            <a:pPr algn="ctr"/>
+            <a:r>
+              <a:rPr sz="900">
+                <a:solidFill>
+                  <a:srgbClr val="1F3A5F"/>
+                </a:solidFill>
+              </a:rPr>
+              <a:t>Gram 5: FR A-wing, Category 2, Endor</a:t>
+            </a:r>
+          </a:p>
+        </p:txBody>
+      </p:sp>
+      <p:sp>
+        <p:nvSpPr>
+          <p:cNvPr id="12" name="TextBox 11"/>
+          <p:cNvSpPr txBox="1"/>
+          <p:nvPr/>
+        </p:nvSpPr>
+        <p:spPr>
+          <a:xfrm>
+            <a:off x="9531705" y="1115568"/>
+            <a:ext cx="2200046" cy="1447800"/>
+          </a:xfrm>
+          <a:prstGeom prst="rect">
+            <a:avLst/>
+          </a:prstGeom>
+          <a:noFill/>
+        </p:spPr>
+        <p:txBody>
+          <a:bodyPr wrap="square">
+            <a:spAutoFit/>
+          </a:bodyPr>
+          <a:lstStyle/>
+          <a:p>
+            <a:r>
+              <a:rPr sz="800">
+                <a:hlinkClick r:id="rId19"/>
+              </a:rPr>
+              <a:t>Lofar 1</a:t>
+            </a:r>
+          </a:p>
+          <a:p>
+            <a:r>
+              <a:rPr sz="800">
+                <a:hlinkClick r:id="rId20"/>
+              </a:rPr>
+              <a:t>Lofar 2</a:t>
+            </a:r>
+          </a:p>
+          <a:p>
+            <a:r>
+              <a:rPr sz="800">
+                <a:hlinkClick r:id="rId21"/>
+              </a:rPr>
+              <a:t>Lofar 3</a:t>
+            </a:r>
+          </a:p>
+          <a:p>
+            <a:r>
+              <a:rPr sz="800">
+                <a:hlinkClick r:id="rId22"/>
+              </a:rPr>
+              <a:t>Lofar 4</a:t>
+            </a:r>
+          </a:p>
+        </p:txBody>
+      </p:sp>
+      <p:sp>
+        <p:nvSpPr>
+          <p:cNvPr id="13" name="Rounded Rectangle 12">
+            <a:hlinkClick r:id="rId23"/>
+          </p:cNvPr>
+          <p:cNvSpPr/>
+          <p:nvPr/>
+        </p:nvSpPr>
+        <p:spPr>
+          <a:xfrm>
+            <a:off x="365760" y="2682240"/>
+            <a:ext cx="2200046" cy="365760"/>
+          </a:xfrm>
+          <a:prstGeom prst="roundRect">
+            <a:avLst/>
+          </a:prstGeom>
+          <a:solidFill>
+            <a:srgbClr val="E8EEF7"/>
+          </a:solidFill>
+          <a:ln>
+            <a:solidFill>
+              <a:srgbClr val="1F3A5F"/>
+            </a:solidFill>
+          </a:ln>
+        </p:spPr>
+        <p:style>
+          <a:lnRef idx="1">
+            <a:schemeClr val="accent1"/>
+          </a:lnRef>
+          <a:fillRef idx="3">
+            <a:schemeClr val="accent1"/>
+          </a:fillRef>
+          <a:effectRef idx="2">
+            <a:schemeClr val="accent1"/>
+          </a:effectRef>
+          <a:fontRef idx="minor">
+            <a:schemeClr val="lt1"/>
+          </a:fontRef>
+        </p:style>
+        <p:txBody>
+          <a:bodyPr rtlCol="0" anchor="ctr" lIns="45720" rIns="45720"/>
+          <a:lstStyle/>
+          <a:p>
+            <a:pPr algn="ctr"/>
+            <a:r>
+              <a:rPr sz="900">
+                <a:solidFill>
+                  <a:srgbClr val="1F3A5F"/>
+                </a:solidFill>
+              </a:rPr>
+              <a:t>Gram 7: FR Discovery, Category 2, Dagobah</a:t>
+            </a:r>
+          </a:p>
+        </p:txBody>
+      </p:sp>
+      <p:sp>
+        <p:nvSpPr>
+          <p:cNvPr id="14" name="TextBox 13"/>
+          <p:cNvSpPr txBox="1"/>
+          <p:nvPr/>
+        </p:nvSpPr>
+        <p:spPr>
+          <a:xfrm>
+            <a:off x="365760" y="3066288"/>
+            <a:ext cx="2200046" cy="1447800"/>
+          </a:xfrm>
+          <a:prstGeom prst="rect">
+            <a:avLst/>
+          </a:prstGeom>
+          <a:noFill/>
+        </p:spPr>
+        <p:txBody>
+          <a:bodyPr wrap="square">
+            <a:spAutoFit/>
+          </a:bodyPr>
+          <a:lstStyle/>
+          <a:p>
+            <a:r>
+              <a:rPr sz="800">
+                <a:hlinkClick r:id="rId24"/>
+              </a:rPr>
+              <a:t>Lofar 1</a:t>
+            </a:r>
+          </a:p>
+          <a:p>
+            <a:r>
+              <a:rPr sz="800">
+                <a:hlinkClick r:id="rId25"/>
+              </a:rPr>
+              <a:t>Lofar 2</a:t>
+            </a:r>
+          </a:p>
+          <a:p>
+            <a:r>
+              <a:rPr sz="800">
+                <a:hlinkClick r:id="rId26"/>
+              </a:rPr>
+              <a:t>Lofar 3</a:t>
+            </a:r>
+          </a:p>
+        </p:txBody>
+      </p:sp>
+      <p:sp>
+        <p:nvSpPr>
+          <p:cNvPr id="15" name="Rounded Rectangle 14">
+            <a:hlinkClick r:id="rId27"/>
+          </p:cNvPr>
+          <p:cNvSpPr/>
+          <p:nvPr/>
+        </p:nvSpPr>
+        <p:spPr>
+          <a:xfrm>
+            <a:off x="2657246" y="2682240"/>
+            <a:ext cx="2200046" cy="365760"/>
+          </a:xfrm>
+          <a:prstGeom prst="roundRect">
+            <a:avLst/>
+          </a:prstGeom>
+          <a:solidFill>
+            <a:srgbClr val="E8EEF7"/>
+          </a:solidFill>
+          <a:ln>
+            <a:solidFill>
+              <a:srgbClr val="1F3A5F"/>
+            </a:solidFill>
+          </a:ln>
+        </p:spPr>
+        <p:style>
+          <a:lnRef idx="1">
+            <a:schemeClr val="accent1"/>
+          </a:lnRef>
+          <a:fillRef idx="3">
+            <a:schemeClr val="accent1"/>
+          </a:fillRef>
+          <a:effectRef idx="2">
+            <a:schemeClr val="accent1"/>
+          </a:effectRef>
+          <a:fontRef idx="minor">
+            <a:schemeClr val="lt1"/>
+          </a:fontRef>
+        </p:style>
+        <p:txBody>
+          <a:bodyPr rtlCol="0" anchor="ctr" lIns="45720" rIns="45720"/>
+          <a:lstStyle/>
+          <a:p>
+            <a:pPr algn="ctr"/>
+            <a:r>
+              <a:rPr sz="900">
+                <a:solidFill>
+                  <a:srgbClr val="1F3A5F"/>
+                </a:solidFill>
+              </a:rPr>
+              <a:t>Gram 9: FR Star Destroyer, Category 1, Yavin</a:t>
+            </a:r>
+          </a:p>
+        </p:txBody>
+      </p:sp>
+      <p:sp>
+        <p:nvSpPr>
+          <p:cNvPr id="16" name="TextBox 15"/>
+          <p:cNvSpPr txBox="1"/>
+          <p:nvPr/>
+        </p:nvSpPr>
+        <p:spPr>
+          <a:xfrm>
+            <a:off x="2657246" y="3066288"/>
+            <a:ext cx="2200046" cy="1447800"/>
+          </a:xfrm>
+          <a:prstGeom prst="rect">
+            <a:avLst/>
+          </a:prstGeom>
+          <a:noFill/>
+        </p:spPr>
+        <p:txBody>
+          <a:bodyPr wrap="square">
+            <a:spAutoFit/>
+          </a:bodyPr>
+          <a:lstStyle/>
+          <a:p>
+            <a:r>
+              <a:rPr sz="800">
+                <a:hlinkClick r:id="rId28"/>
+              </a:rPr>
+              <a:t>Lofar 1</a:t>
+            </a:r>
+          </a:p>
+        </p:txBody>
+      </p:sp>
+      <p:sp>
+        <p:nvSpPr>
+          <p:cNvPr id="17" name="Rounded Rectangle 16">
+            <a:hlinkClick r:id="rId29"/>
+          </p:cNvPr>
+          <p:cNvSpPr/>
+          <p:nvPr/>
+        </p:nvSpPr>
+        <p:spPr>
+          <a:xfrm>
+            <a:off x="4948732" y="2682240"/>
+            <a:ext cx="2200046" cy="365760"/>
+          </a:xfrm>
+          <a:prstGeom prst="roundRect">
+            <a:avLst/>
+          </a:prstGeom>
+          <a:solidFill>
+            <a:srgbClr val="E8EEF7"/>
+          </a:solidFill>
+          <a:ln>
+            <a:solidFill>
+              <a:srgbClr val="1F3A5F"/>
+            </a:solidFill>
+          </a:ln>
+        </p:spPr>
+        <p:style>
+          <a:lnRef idx="1">
+            <a:schemeClr val="accent1"/>
+          </a:lnRef>
+          <a:fillRef idx="3">
+            <a:schemeClr val="accent1"/>
+          </a:fillRef>
+          <a:effectRef idx="2">
+            <a:schemeClr val="accent1"/>
+          </a:effectRef>
+          <a:fontRef idx="minor">
+            <a:schemeClr val="lt1"/>
+          </a:fontRef>
+        </p:style>
+        <p:txBody>
+          <a:bodyPr rtlCol="0" anchor="ctr" lIns="45720" rIns="45720"/>
+          <a:lstStyle/>
+          <a:p>
+            <a:pPr algn="ctr"/>
+            <a:r>
+              <a:rPr sz="900">
+                <a:solidFill>
+                  <a:srgbClr val="1F3A5F"/>
+                </a:solidFill>
+              </a:rPr>
+              <a:t>Gram 10: FR Venator-class, Category 4, Bajor</a:t>
+            </a:r>
+          </a:p>
+        </p:txBody>
+      </p:sp>
+      <p:sp>
+        <p:nvSpPr>
+          <p:cNvPr id="18" name="TextBox 17"/>
+          <p:cNvSpPr txBox="1"/>
+          <p:nvPr/>
+        </p:nvSpPr>
+        <p:spPr>
+          <a:xfrm>
+            <a:off x="4948732" y="3066288"/>
+            <a:ext cx="2200046" cy="1447800"/>
+          </a:xfrm>
+          <a:prstGeom prst="rect">
+            <a:avLst/>
+          </a:prstGeom>
+          <a:noFill/>
+        </p:spPr>
+        <p:txBody>
+          <a:bodyPr wrap="square">
+            <a:spAutoFit/>
+          </a:bodyPr>
+          <a:lstStyle/>
+          <a:p>
+            <a:r>
+              <a:rPr sz="800">
+                <a:hlinkClick r:id="rId30"/>
+              </a:rPr>
+              <a:t>Lofar 1</a:t>
+            </a:r>
+          </a:p>
+          <a:p>
+            <a:r>
+              <a:rPr sz="800">
+                <a:hlinkClick r:id="rId31"/>
+              </a:rPr>
+              <a:t>Lofar 2</a:t>
+            </a:r>
+          </a:p>
+          <a:p>
+            <a:r>
+              <a:rPr sz="800">
+                <a:hlinkClick r:id="rId32"/>
+              </a:rPr>
+              <a:t>Lofar 3</a:t>
+            </a:r>
+          </a:p>
+        </p:txBody>
+      </p:sp>
+      <p:sp>
+        <p:nvSpPr>
+          <p:cNvPr id="19" name="Rounded Rectangle 18">
+            <a:hlinkClick r:id="rId33"/>
+          </p:cNvPr>
+          <p:cNvSpPr/>
+          <p:nvPr/>
+        </p:nvSpPr>
+        <p:spPr>
+          <a:xfrm>
+            <a:off x="7240219" y="2682240"/>
+            <a:ext cx="2200046" cy="365760"/>
+          </a:xfrm>
+          <a:prstGeom prst="roundRect">
+            <a:avLst/>
+          </a:prstGeom>
+          <a:solidFill>
+            <a:srgbClr val="E8EEF7"/>
+          </a:solidFill>
+          <a:ln>
+            <a:solidFill>
+              <a:srgbClr val="1F3A5F"/>
+            </a:solidFill>
+          </a:ln>
+        </p:spPr>
+        <p:style>
+          <a:lnRef idx="1">
+            <a:schemeClr val="accent1"/>
+          </a:lnRef>
+          <a:fillRef idx="3">
+            <a:schemeClr val="accent1"/>
+          </a:fillRef>
+          <a:effectRef idx="2">
+            <a:schemeClr val="accent1"/>
+          </a:effectRef>
+          <a:fontRef idx="minor">
+            <a:schemeClr val="lt1"/>
+          </a:fontRef>
+        </p:style>
+        <p:txBody>
+          <a:bodyPr rtlCol="0" anchor="ctr" lIns="45720" rIns="45720"/>
+          <a:lstStyle/>
+          <a:p>
+            <a:pPr algn="ctr"/>
+            <a:r>
+              <a:rPr sz="900">
+                <a:solidFill>
+                  <a:srgbClr val="1F3A5F"/>
+                </a:solidFill>
+              </a:rPr>
+              <a:t>Gram 11: FR Voyager, Category 1, Trill</a:t>
+            </a:r>
+          </a:p>
+        </p:txBody>
+      </p:sp>
+      <p:sp>
+        <p:nvSpPr>
+          <p:cNvPr id="20" name="TextBox 19"/>
+          <p:cNvSpPr txBox="1"/>
+          <p:nvPr/>
+        </p:nvSpPr>
+        <p:spPr>
+          <a:xfrm>
+            <a:off x="7240219" y="3066288"/>
+            <a:ext cx="2200046" cy="1447800"/>
+          </a:xfrm>
+          <a:prstGeom prst="rect">
+            <a:avLst/>
+          </a:prstGeom>
+          <a:noFill/>
+        </p:spPr>
+        <p:txBody>
+          <a:bodyPr wrap="square">
+            <a:spAutoFit/>
+          </a:bodyPr>
+          <a:lstStyle/>
+          <a:p>
+            <a:r>
+              <a:rPr sz="800">
+                <a:hlinkClick r:id="rId34"/>
+              </a:rPr>
+              <a:t>Lofar 1</a:t>
+            </a:r>
+          </a:p>
+          <a:p>
+            <a:r>
+              <a:rPr sz="800">
+                <a:hlinkClick r:id="rId35"/>
+              </a:rPr>
+              <a:t>Lofar 2</a:t>
+            </a:r>
+          </a:p>
+          <a:p>
+            <a:r>
+              <a:rPr sz="800">
+                <a:hlinkClick r:id="rId36"/>
+              </a:rPr>
+              <a:t>Lofar 3</a:t>
+            </a:r>
+          </a:p>
+        </p:txBody>
+      </p:sp>
+      <p:sp>
+        <p:nvSpPr>
+          <p:cNvPr id="21" name="Rounded Rectangle 20">
+            <a:hlinkClick r:id="rId37"/>
+          </p:cNvPr>
+          <p:cNvSpPr/>
+          <p:nvPr/>
+        </p:nvSpPr>
+        <p:spPr>
+          <a:xfrm>
+            <a:off x="9531705" y="2682240"/>
+            <a:ext cx="2200046" cy="365760"/>
+          </a:xfrm>
+          <a:prstGeom prst="roundRect">
+            <a:avLst/>
+          </a:prstGeom>
+          <a:solidFill>
+            <a:srgbClr val="E8EEF7"/>
+          </a:solidFill>
+          <a:ln>
+            <a:solidFill>
+              <a:srgbClr val="1F3A5F"/>
+            </a:solidFill>
+          </a:ln>
+        </p:spPr>
+        <p:style>
+          <a:lnRef idx="1">
+            <a:schemeClr val="accent1"/>
+          </a:lnRef>
+          <a:fillRef idx="3">
+            <a:schemeClr val="accent1"/>
+          </a:fillRef>
+          <a:effectRef idx="2">
+            <a:schemeClr val="accent1"/>
+          </a:effectRef>
+          <a:fontRef idx="minor">
+            <a:schemeClr val="lt1"/>
+          </a:fontRef>
+        </p:style>
+        <p:txBody>
+          <a:bodyPr rtlCol="0" anchor="ctr" lIns="45720" rIns="45720"/>
+          <a:lstStyle/>
+          <a:p>
+            <a:pPr algn="ctr"/>
+            <a:r>
+              <a:rPr sz="900">
+                <a:solidFill>
+                  <a:srgbClr val="1F3A5F"/>
+                </a:solidFill>
+              </a:rPr>
+              <a:t>Gram 12: FR Ghost, Category 3, Tantive</a:t>
+            </a:r>
+          </a:p>
+        </p:txBody>
+      </p:sp>
+      <p:sp>
+        <p:nvSpPr>
+          <p:cNvPr id="22" name="TextBox 21"/>
+          <p:cNvSpPr txBox="1"/>
+          <p:nvPr/>
+        </p:nvSpPr>
+        <p:spPr>
+          <a:xfrm>
+            <a:off x="9531705" y="3066288"/>
+            <a:ext cx="2200046" cy="1447800"/>
+          </a:xfrm>
+          <a:prstGeom prst="rect">
+            <a:avLst/>
+          </a:prstGeom>
+          <a:noFill/>
+        </p:spPr>
+        <p:txBody>
+          <a:bodyPr wrap="square">
+            <a:spAutoFit/>
+          </a:bodyPr>
+          <a:lstStyle/>
+          <a:p>
+            <a:r>
+              <a:rPr sz="800">
+                <a:hlinkClick r:id="rId38"/>
+              </a:rPr>
+              <a:t>Lofar 1</a:t>
+            </a:r>
+          </a:p>
+          <a:p>
+            <a:r>
+              <a:rPr sz="800">
+                <a:hlinkClick r:id="rId39"/>
+              </a:rPr>
+              <a:t>Lofar 2</a:t>
+            </a:r>
+          </a:p>
+        </p:txBody>
+      </p:sp>
+      <p:sp>
+        <p:nvSpPr>
+          <p:cNvPr id="23" name="Rounded Rectangle 22">
+            <a:hlinkClick r:id="rId40"/>
+          </p:cNvPr>
+          <p:cNvSpPr/>
+          <p:nvPr/>
+        </p:nvSpPr>
+        <p:spPr>
+          <a:xfrm>
+            <a:off x="365760" y="4632960"/>
+            <a:ext cx="2200046" cy="365760"/>
+          </a:xfrm>
+          <a:prstGeom prst="roundRect">
+            <a:avLst/>
+          </a:prstGeom>
+          <a:solidFill>
+            <a:srgbClr val="E8EEF7"/>
+          </a:solidFill>
+          <a:ln>
+            <a:solidFill>
+              <a:srgbClr val="1F3A5F"/>
+            </a:solidFill>
+          </a:ln>
+        </p:spPr>
+        <p:style>
+          <a:lnRef idx="1">
+            <a:schemeClr val="accent1"/>
+          </a:lnRef>
+          <a:fillRef idx="3">
+            <a:schemeClr val="accent1"/>
+          </a:fillRef>
+          <a:effectRef idx="2">
+            <a:schemeClr val="accent1"/>
+          </a:effectRef>
+          <a:fontRef idx="minor">
+            <a:schemeClr val="lt1"/>
+          </a:fontRef>
+        </p:style>
+        <p:txBody>
+          <a:bodyPr rtlCol="0" anchor="ctr" lIns="45720" rIns="45720"/>
+          <a:lstStyle/>
+          <a:p>
+            <a:pPr algn="ctr"/>
+            <a:r>
+              <a:rPr sz="900">
+                <a:solidFill>
+                  <a:srgbClr val="1F3A5F"/>
+                </a:solidFill>
+              </a:rPr>
+              <a:t>Gram 13: FR Venator-class, Category 4, Bajor</a:t>
+            </a:r>
+          </a:p>
+        </p:txBody>
+      </p:sp>
+      <p:sp>
+        <p:nvSpPr>
+          <p:cNvPr id="24" name="TextBox 23"/>
+          <p:cNvSpPr txBox="1"/>
+          <p:nvPr/>
+        </p:nvSpPr>
+        <p:spPr>
+          <a:xfrm>
+            <a:off x="365760" y="5017008"/>
+            <a:ext cx="2200046" cy="1447800"/>
+          </a:xfrm>
+          <a:prstGeom prst="rect">
+            <a:avLst/>
+          </a:prstGeom>
+          <a:noFill/>
+        </p:spPr>
+        <p:txBody>
+          <a:bodyPr wrap="square">
+            <a:spAutoFit/>
+          </a:bodyPr>
+          <a:lstStyle/>
+          <a:p>
+            <a:r>
+              <a:rPr sz="800">
+                <a:hlinkClick r:id="rId41"/>
+              </a:rPr>
+              <a:t>Lofar 1</a:t>
+            </a:r>
+          </a:p>
+        </p:txBody>
+      </p:sp>
+      <p:sp>
+        <p:nvSpPr>
+          <p:cNvPr id="25" name="Rounded Rectangle 24">
+            <a:hlinkClick r:id="rId42"/>
+          </p:cNvPr>
+          <p:cNvSpPr/>
+          <p:nvPr/>
+        </p:nvSpPr>
+        <p:spPr>
+          <a:xfrm>
+            <a:off x="2657246" y="4632960"/>
+            <a:ext cx="2200046" cy="365760"/>
+          </a:xfrm>
+          <a:prstGeom prst="roundRect">
+            <a:avLst/>
+          </a:prstGeom>
+          <a:solidFill>
+            <a:srgbClr val="E8EEF7"/>
+          </a:solidFill>
+          <a:ln>
+            <a:solidFill>
+              <a:srgbClr val="1F3A5F"/>
+            </a:solidFill>
+          </a:ln>
+        </p:spPr>
+        <p:style>
+          <a:lnRef idx="1">
+            <a:schemeClr val="accent1"/>
+          </a:lnRef>
+          <a:fillRef idx="3">
+            <a:schemeClr val="accent1"/>
+          </a:fillRef>
+          <a:effectRef idx="2">
+            <a:schemeClr val="accent1"/>
+          </a:effectRef>
+          <a:fontRef idx="minor">
+            <a:schemeClr val="lt1"/>
+          </a:fontRef>
+        </p:style>
+        <p:txBody>
+          <a:bodyPr rtlCol="0" anchor="ctr" lIns="45720" rIns="45720"/>
+          <a:lstStyle/>
+          <a:p>
+            <a:pPr algn="ctr"/>
+            <a:r>
+              <a:rPr sz="900">
+                <a:solidFill>
+                  <a:srgbClr val="1F3A5F"/>
+                </a:solidFill>
+              </a:rPr>
+              <a:t>Gram 14: FR Nebula-class, Category 1, Caprica</a:t>
+            </a:r>
+          </a:p>
+        </p:txBody>
+      </p:sp>
+      <p:sp>
+        <p:nvSpPr>
+          <p:cNvPr id="26" name="TextBox 25"/>
+          <p:cNvSpPr txBox="1"/>
+          <p:nvPr/>
+        </p:nvSpPr>
+        <p:spPr>
+          <a:xfrm>
+            <a:off x="2657246" y="5017008"/>
+            <a:ext cx="2200046" cy="1447800"/>
+          </a:xfrm>
+          <a:prstGeom prst="rect">
+            <a:avLst/>
+          </a:prstGeom>
+          <a:noFill/>
+        </p:spPr>
+        <p:txBody>
+          <a:bodyPr wrap="square">
+            <a:spAutoFit/>
+          </a:bodyPr>
+          <a:lstStyle/>
+          <a:p>
+            <a:r>
+              <a:rPr sz="800">
+                <a:hlinkClick r:id="rId43"/>
+              </a:rPr>
+              <a:t>Lofar 1</a:t>
+            </a:r>
+          </a:p>
+        </p:txBody>
+      </p:sp>
+      <p:sp>
+        <p:nvSpPr>
+          <p:cNvPr id="27" name="Rounded Rectangle 26">
+            <a:hlinkClick r:id="rId44"/>
+          </p:cNvPr>
+          <p:cNvSpPr/>
+          <p:nvPr/>
+        </p:nvSpPr>
+        <p:spPr>
+          <a:xfrm>
+            <a:off x="4948732" y="4632960"/>
+            <a:ext cx="2200046" cy="365760"/>
+          </a:xfrm>
+          <a:prstGeom prst="roundRect">
+            <a:avLst/>
+          </a:prstGeom>
+          <a:solidFill>
+            <a:srgbClr val="E8EEF7"/>
+          </a:solidFill>
+          <a:ln>
+            <a:solidFill>
+              <a:srgbClr val="1F3A5F"/>
+            </a:solidFill>
+          </a:ln>
+        </p:spPr>
+        <p:style>
+          <a:lnRef idx="1">
+            <a:schemeClr val="accent1"/>
+          </a:lnRef>
+          <a:fillRef idx="3">
+            <a:schemeClr val="accent1"/>
+          </a:fillRef>
+          <a:effectRef idx="2">
+            <a:schemeClr val="accent1"/>
+          </a:effectRef>
+          <a:fontRef idx="minor">
+            <a:schemeClr val="lt1"/>
+          </a:fontRef>
+        </p:style>
+        <p:txBody>
+          <a:bodyPr rtlCol="0" anchor="ctr" lIns="45720" rIns="45720"/>
+          <a:lstStyle/>
+          <a:p>
+            <a:pPr algn="ctr"/>
+            <a:r>
+              <a:rPr sz="900">
+                <a:solidFill>
+                  <a:srgbClr val="1F3A5F"/>
+                </a:solidFill>
+              </a:rPr>
+              <a:t>Gram 15: FR Sovereign-class, Category 1, Bajor</a:t>
+            </a:r>
+          </a:p>
+        </p:txBody>
+      </p:sp>
+      <p:sp>
+        <p:nvSpPr>
+          <p:cNvPr id="28" name="TextBox 27"/>
+          <p:cNvSpPr txBox="1"/>
+          <p:nvPr/>
+        </p:nvSpPr>
+        <p:spPr>
+          <a:xfrm>
+            <a:off x="4948732" y="5017008"/>
+            <a:ext cx="2200046" cy="1447800"/>
+          </a:xfrm>
+          <a:prstGeom prst="rect">
+            <a:avLst/>
+          </a:prstGeom>
+          <a:noFill/>
+        </p:spPr>
+        <p:txBody>
+          <a:bodyPr wrap="square">
+            <a:spAutoFit/>
+          </a:bodyPr>
+          <a:lstStyle/>
+          <a:p>
+            <a:r>
+              <a:rPr sz="800">
+                <a:hlinkClick r:id="rId45"/>
+              </a:rPr>
+              <a:t>Lofar 1</a:t>
+            </a:r>
+          </a:p>
+          <a:p>
+            <a:r>
+              <a:rPr sz="800">
+                <a:hlinkClick r:id="rId46"/>
+              </a:rPr>
+              <a:t>Lofar 2</a:t>
+            </a:r>
+          </a:p>
+          <a:p>
+            <a:r>
+              <a:rPr sz="800">
+                <a:hlinkClick r:id="rId47"/>
+              </a:rPr>
+              <a:t>Lofar 3</a:t>
+            </a:r>
+          </a:p>
+          <a:p>
+            <a:r>
+              <a:rPr sz="800">
+                <a:hlinkClick r:id="rId48"/>
+              </a:rPr>
+              <a:t>Lofar 4</a:t>
+            </a:r>
+          </a:p>
+        </p:txBody>
+      </p:sp>
+      <p:sp>
+        <p:nvSpPr>
+          <p:cNvPr id="29" name="Rounded Rectangle 28">
+            <a:hlinkClick r:id="rId49"/>
+          </p:cNvPr>
+          <p:cNvSpPr/>
+          <p:nvPr/>
+        </p:nvSpPr>
+        <p:spPr>
+          <a:xfrm>
+            <a:off x="7240219" y="4632960"/>
+            <a:ext cx="2200046" cy="365760"/>
+          </a:xfrm>
+          <a:prstGeom prst="roundRect">
+            <a:avLst/>
+          </a:prstGeom>
+          <a:solidFill>
+            <a:srgbClr val="E8EEF7"/>
+          </a:solidFill>
+          <a:ln>
+            <a:solidFill>
+              <a:srgbClr val="1F3A5F"/>
+            </a:solidFill>
+          </a:ln>
+        </p:spPr>
+        <p:style>
+          <a:lnRef idx="1">
+            <a:schemeClr val="accent1"/>
+          </a:lnRef>
+          <a:fillRef idx="3">
+            <a:schemeClr val="accent1"/>
+          </a:fillRef>
+          <a:effectRef idx="2">
+            <a:schemeClr val="accent1"/>
+          </a:effectRef>
+          <a:fontRef idx="minor">
+            <a:schemeClr val="lt1"/>
+          </a:fontRef>
+        </p:style>
+        <p:txBody>
+          <a:bodyPr rtlCol="0" anchor="ctr" lIns="45720" rIns="45720"/>
+          <a:lstStyle/>
+          <a:p>
+            <a:pPr algn="ctr"/>
+            <a:r>
+              <a:rPr sz="900">
+                <a:solidFill>
+                  <a:srgbClr val="1F3A5F"/>
+                </a:solidFill>
+              </a:rPr>
+              <a:t>Gram 16: FR TIE Fighter, Category 3, Yavin</a:t>
+            </a:r>
+          </a:p>
+        </p:txBody>
+      </p:sp>
+      <p:sp>
+        <p:nvSpPr>
+          <p:cNvPr id="30" name="TextBox 29"/>
+          <p:cNvSpPr txBox="1"/>
+          <p:nvPr/>
+        </p:nvSpPr>
+        <p:spPr>
+          <a:xfrm>
+            <a:off x="7240219" y="5017008"/>
+            <a:ext cx="2200046" cy="1447800"/>
+          </a:xfrm>
+          <a:prstGeom prst="rect">
+            <a:avLst/>
+          </a:prstGeom>
+          <a:noFill/>
+        </p:spPr>
+        <p:txBody>
+          <a:bodyPr wrap="square">
+            <a:spAutoFit/>
+          </a:bodyPr>
+          <a:lstStyle/>
+          <a:p>
+            <a:r>
+              <a:rPr sz="800">
+                <a:hlinkClick r:id="rId50"/>
+              </a:rPr>
+              <a:t>Lofar 1</a:t>
+            </a:r>
+          </a:p>
+        </p:txBody>
+      </p:sp>
+      <p:sp>
+        <p:nvSpPr>
+          <p:cNvPr id="31" name="Rounded Rectangle 30">
+            <a:hlinkClick r:id="rId51"/>
+          </p:cNvPr>
+          <p:cNvSpPr/>
+          <p:nvPr/>
+        </p:nvSpPr>
+        <p:spPr>
+          <a:xfrm>
+            <a:off x="9531705" y="4632960"/>
+            <a:ext cx="2200046" cy="365760"/>
+          </a:xfrm>
+          <a:prstGeom prst="roundRect">
+            <a:avLst/>
+          </a:prstGeom>
+          <a:solidFill>
+            <a:srgbClr val="E8EEF7"/>
+          </a:solidFill>
+          <a:ln>
+            <a:solidFill>
+              <a:srgbClr val="1F3A5F"/>
+            </a:solidFill>
+          </a:ln>
+        </p:spPr>
+        <p:style>
+          <a:lnRef idx="1">
+            <a:schemeClr val="accent1"/>
+          </a:lnRef>
+          <a:fillRef idx="3">
+            <a:schemeClr val="accent1"/>
+          </a:fillRef>
+          <a:effectRef idx="2">
+            <a:schemeClr val="accent1"/>
+          </a:effectRef>
+          <a:fontRef idx="minor">
+            <a:schemeClr val="lt1"/>
+          </a:fontRef>
+        </p:style>
+        <p:txBody>
+          <a:bodyPr rtlCol="0" anchor="ctr" lIns="45720" rIns="45720"/>
+          <a:lstStyle/>
+          <a:p>
+            <a:pPr algn="ctr"/>
+            <a:r>
+              <a:rPr sz="900">
+                <a:solidFill>
+                  <a:srgbClr val="1F3A5F"/>
+                </a:solidFill>
+              </a:rPr>
+              <a:t>Gram 18: FR Nebula-class, Category 4, Risa</a:t>
+            </a:r>
+          </a:p>
+        </p:txBody>
+      </p:sp>
+      <p:sp>
+        <p:nvSpPr>
+          <p:cNvPr id="32" name="TextBox 31"/>
+          <p:cNvSpPr txBox="1"/>
+          <p:nvPr/>
+        </p:nvSpPr>
+        <p:spPr>
+          <a:xfrm>
+            <a:off x="9531705" y="5017008"/>
+            <a:ext cx="2200046" cy="1447800"/>
+          </a:xfrm>
+          <a:prstGeom prst="rect">
+            <a:avLst/>
+          </a:prstGeom>
+          <a:noFill/>
+        </p:spPr>
+        <p:txBody>
+          <a:bodyPr wrap="square">
+            <a:spAutoFit/>
+          </a:bodyPr>
+          <a:lstStyle/>
+          <a:p>
+            <a:r>
+              <a:rPr sz="800">
+                <a:hlinkClick r:id="rId52"/>
+              </a:rPr>
+              <a:t>Lofar 1</a:t>
+            </a:r>
+          </a:p>
+          <a:p>
+            <a:r>
+              <a:rPr sz="800">
+                <a:hlinkClick r:id="rId53"/>
+              </a:rPr>
+              <a:t>Lofar 2</a:t>
+            </a:r>
+          </a:p>
+          <a:p>
+            <a:r>
+              <a:rPr sz="800">
+                <a:hlinkClick r:id="rId54"/>
+              </a:rPr>
+              <a:t>Lofar 3</a:t>
             </a:r>
           </a:p>
         </p:txBody>
@@ -3224,18 +4679,18 @@
                   <a:srgbClr val="FFFFFF"/>
                 </a:solidFill>
               </a:rPr>
-              <a:t>Instructor Week 2 Grams — Page 1 of 3</a:t>
-            </a:r>
-          </a:p>
-        </p:txBody>
-      </p:sp>
-      <p:sp>
-        <p:nvSpPr>
-          <p:cNvPr id="3" name="Rounded Rectangle 2"/>
+              <a:t>Instructor Week 2 Grams — Page 2 of 3</a:t>
+            </a:r>
+          </a:p>
+        </p:txBody>
+      </p:sp>
+      <p:sp>
+        <p:nvSpPr>
+          <p:cNvPr id="3" name="Rounded Rectangle 2">
+            <a:hlinkClick r:id="rId2"/>
+          </p:cNvPr>
           <p:cNvSpPr/>
-          <p:nvPr>
-            <a:hlinkClick r:id="rId2"/>
-          </p:nvPr>
+          <p:nvPr/>
         </p:nvSpPr>
         <p:spPr>
           <a:xfrm>
@@ -3279,7 +4734,7 @@
                   <a:srgbClr val="1F3A5F"/>
                 </a:solidFill>
               </a:rPr>
-              <a:t>Gram 1: FR Razor Crest, Category 1, Kronos</a:t>
+              <a:t>Gram 19: Akira-class contact bearing 162, codename Tatooine</a:t>
             </a:r>
           </a:p>
         </p:txBody>
@@ -3313,23 +4768,15 @@
               <a:t>Lofar 1</a:t>
             </a:r>
           </a:p>
-          <a:p>
-            <a:r>
-              <a:rPr sz="800">
-                <a:hlinkClick r:id="rId4"/>
-              </a:rPr>
-              <a:t>Lofar 2</a:t>
-            </a:r>
-          </a:p>
-        </p:txBody>
-      </p:sp>
-      <p:sp>
-        <p:nvSpPr>
-          <p:cNvPr id="5" name="Rounded Rectangle 4"/>
+        </p:txBody>
+      </p:sp>
+      <p:sp>
+        <p:nvSpPr>
+          <p:cNvPr id="5" name="Rounded Rectangle 4">
+            <a:hlinkClick r:id="rId4"/>
+          </p:cNvPr>
           <p:cNvSpPr/>
-          <p:nvPr>
-            <a:hlinkClick r:id="rId5"/>
-          </p:nvPr>
+          <p:nvPr/>
         </p:nvSpPr>
         <p:spPr>
           <a:xfrm>
@@ -3373,7 +4820,7 @@
                   <a:srgbClr val="1F3A5F"/>
                 </a:solidFill>
               </a:rPr>
-              <a:t>Gram 2: FR Razor Crest, Category 3, Kobol</a:t>
+              <a:t>Gram 20: FR Stargazer, Category 4, Gandalf</a:t>
             </a:r>
           </a:p>
         </p:txBody>
@@ -3402,9 +4849,17 @@
           <a:p>
             <a:r>
               <a:rPr sz="800">
+                <a:hlinkClick r:id="rId5"/>
+              </a:rPr>
+              <a:t>Lofar 1</a:t>
+            </a:r>
+          </a:p>
+          <a:p>
+            <a:r>
+              <a:rPr sz="800">
                 <a:hlinkClick r:id="rId6"/>
               </a:rPr>
-              <a:t>Lofar 1</a:t>
+              <a:t>Lofar 2</a:t>
             </a:r>
           </a:p>
           <a:p>
@@ -3412,34 +4867,18 @@
               <a:rPr sz="800">
                 <a:hlinkClick r:id="rId7"/>
               </a:rPr>
-              <a:t>Lofar 2</a:t>
-            </a:r>
-          </a:p>
-          <a:p>
-            <a:r>
-              <a:rPr sz="800">
-                <a:hlinkClick r:id="rId8"/>
-              </a:rPr>
               <a:t>Lofar 3</a:t>
             </a:r>
           </a:p>
-          <a:p>
-            <a:r>
-              <a:rPr sz="800">
-                <a:hlinkClick r:id="rId9"/>
-              </a:rPr>
-              <a:t>Lofar 4</a:t>
-            </a:r>
-          </a:p>
-        </p:txBody>
-      </p:sp>
-      <p:sp>
-        <p:nvSpPr>
-          <p:cNvPr id="7" name="Rounded Rectangle 6"/>
+        </p:txBody>
+      </p:sp>
+      <p:sp>
+        <p:nvSpPr>
+          <p:cNvPr id="7" name="Rounded Rectangle 6">
+            <a:hlinkClick r:id="rId8"/>
+          </p:cNvPr>
           <p:cNvSpPr/>
-          <p:nvPr>
-            <a:hlinkClick r:id="rId10"/>
-          </p:nvPr>
+          <p:nvPr/>
         </p:nvSpPr>
         <p:spPr>
           <a:xfrm>
@@ -3483,7 +4922,7 @@
                   <a:srgbClr val="1F3A5F"/>
                 </a:solidFill>
               </a:rPr>
-              <a:t>Gram 3: Slave I contact bearing 280, codename Yavin</a:t>
+              <a:t>Gram 22: FR Y-wing, Category 1, Tantive</a:t>
             </a:r>
           </a:p>
         </p:txBody>
@@ -3512,7 +4951,7 @@
           <a:p>
             <a:r>
               <a:rPr sz="800">
-                <a:hlinkClick r:id="rId11"/>
+                <a:hlinkClick r:id="rId9"/>
               </a:rPr>
               <a:t>Lofar 1</a:t>
             </a:r>
@@ -3520,36 +4959,20 @@
           <a:p>
             <a:r>
               <a:rPr sz="800">
-                <a:hlinkClick r:id="rId12"/>
+                <a:hlinkClick r:id="rId10"/>
               </a:rPr>
               <a:t>Lofar 2</a:t>
             </a:r>
           </a:p>
-          <a:p>
-            <a:r>
-              <a:rPr sz="800">
-                <a:hlinkClick r:id="rId13"/>
-              </a:rPr>
-              <a:t>Lofar 3</a:t>
-            </a:r>
-          </a:p>
-          <a:p>
-            <a:r>
-              <a:rPr sz="800">
-                <a:hlinkClick r:id="rId14"/>
-              </a:rPr>
-              <a:t>Lofar 4</a:t>
-            </a:r>
-          </a:p>
-        </p:txBody>
-      </p:sp>
-      <p:sp>
-        <p:nvSpPr>
-          <p:cNvPr id="9" name="Rounded Rectangle 8"/>
+        </p:txBody>
+      </p:sp>
+      <p:sp>
+        <p:nvSpPr>
+          <p:cNvPr id="9" name="Rounded Rectangle 8">
+            <a:hlinkClick r:id="rId11"/>
+          </p:cNvPr>
           <p:cNvSpPr/>
-          <p:nvPr>
-            <a:hlinkClick r:id="rId15"/>
-          </p:nvPr>
+          <p:nvPr/>
         </p:nvSpPr>
         <p:spPr>
           <a:xfrm>
@@ -3593,7 +5016,7 @@
                   <a:srgbClr val="1F3A5F"/>
                 </a:solidFill>
               </a:rPr>
-              <a:t>Gram 4: FR Cerritos, Category 4, Gandalf</a:t>
+              <a:t>Gram 24: FR Sovereign-class, Category 2, Coruscant</a:t>
             </a:r>
           </a:p>
         </p:txBody>
@@ -3622,7 +5045,7 @@
           <a:p>
             <a:r>
               <a:rPr sz="800">
-                <a:hlinkClick r:id="rId16"/>
+                <a:hlinkClick r:id="rId12"/>
               </a:rPr>
               <a:t>Lofar 1</a:t>
             </a:r>
@@ -3630,20 +5053,36 @@
           <a:p>
             <a:r>
               <a:rPr sz="800">
-                <a:hlinkClick r:id="rId17"/>
+                <a:hlinkClick r:id="rId13"/>
               </a:rPr>
               <a:t>Lofar 2</a:t>
             </a:r>
           </a:p>
-        </p:txBody>
-      </p:sp>
-      <p:sp>
-        <p:nvSpPr>
-          <p:cNvPr id="11" name="Rounded Rectangle 10"/>
+          <a:p>
+            <a:r>
+              <a:rPr sz="800">
+                <a:hlinkClick r:id="rId14"/>
+              </a:rPr>
+              <a:t>Lofar 3</a:t>
+            </a:r>
+          </a:p>
+          <a:p>
+            <a:r>
+              <a:rPr sz="800">
+                <a:hlinkClick r:id="rId15"/>
+              </a:rPr>
+              <a:t>Lofar 4</a:t>
+            </a:r>
+          </a:p>
+        </p:txBody>
+      </p:sp>
+      <p:sp>
+        <p:nvSpPr>
+          <p:cNvPr id="11" name="Rounded Rectangle 10">
+            <a:hlinkClick r:id="rId16"/>
+          </p:cNvPr>
           <p:cNvSpPr/>
-          <p:nvPr>
-            <a:hlinkClick r:id="rId18"/>
-          </p:nvPr>
+          <p:nvPr/>
         </p:nvSpPr>
         <p:spPr>
           <a:xfrm>
@@ -3687,7 +5126,7 @@
                   <a:srgbClr val="1F3A5F"/>
                 </a:solidFill>
               </a:rPr>
-              <a:t>Gram 5: FR A-wing, Category 2, Endor</a:t>
+              <a:t>Gram 25: FR Lambda Shuttle, Category 4, Gandalf</a:t>
             </a:r>
           </a:p>
         </p:txBody>
@@ -3716,7 +5155,7 @@
           <a:p>
             <a:r>
               <a:rPr sz="800">
-                <a:hlinkClick r:id="rId19"/>
+                <a:hlinkClick r:id="rId17"/>
               </a:rPr>
               <a:t>Lofar 1</a:t>
             </a:r>
@@ -3724,36 +5163,20 @@
           <a:p>
             <a:r>
               <a:rPr sz="800">
-                <a:hlinkClick r:id="rId20"/>
+                <a:hlinkClick r:id="rId18"/>
               </a:rPr>
               <a:t>Lofar 2</a:t>
             </a:r>
           </a:p>
-          <a:p>
-            <a:r>
-              <a:rPr sz="800">
-                <a:hlinkClick r:id="rId21"/>
-              </a:rPr>
-              <a:t>Lofar 3</a:t>
-            </a:r>
-          </a:p>
-          <a:p>
-            <a:r>
-              <a:rPr sz="800">
-                <a:hlinkClick r:id="rId22"/>
-              </a:rPr>
-              <a:t>Lofar 4</a:t>
-            </a:r>
-          </a:p>
-        </p:txBody>
-      </p:sp>
-      <p:sp>
-        <p:nvSpPr>
-          <p:cNvPr id="13" name="Rounded Rectangle 12"/>
+        </p:txBody>
+      </p:sp>
+      <p:sp>
+        <p:nvSpPr>
+          <p:cNvPr id="13" name="Rounded Rectangle 12">
+            <a:hlinkClick r:id="rId19"/>
+          </p:cNvPr>
           <p:cNvSpPr/>
-          <p:nvPr>
-            <a:hlinkClick r:id="rId23"/>
-          </p:nvPr>
+          <p:nvPr/>
         </p:nvSpPr>
         <p:spPr>
           <a:xfrm>
@@ -3797,7 +5220,7 @@
                   <a:srgbClr val="1F3A5F"/>
                 </a:solidFill>
               </a:rPr>
-              <a:t>Gram 7: FR Discovery, Category 2, Dagobah</a:t>
+              <a:t>Gram 26: FR Voyager, Category 1, Kronos</a:t>
             </a:r>
           </a:p>
         </p:txBody>
@@ -3826,36 +5249,20 @@
           <a:p>
             <a:r>
               <a:rPr sz="800">
-                <a:hlinkClick r:id="rId24"/>
+                <a:hlinkClick r:id="rId20"/>
               </a:rPr>
               <a:t>Lofar 1</a:t>
             </a:r>
           </a:p>
-          <a:p>
-            <a:r>
-              <a:rPr sz="800">
-                <a:hlinkClick r:id="rId25"/>
-              </a:rPr>
-              <a:t>Lofar 2</a:t>
-            </a:r>
-          </a:p>
-          <a:p>
-            <a:r>
-              <a:rPr sz="800">
-                <a:hlinkClick r:id="rId26"/>
-              </a:rPr>
-              <a:t>Lofar 3</a:t>
-            </a:r>
-          </a:p>
-        </p:txBody>
-      </p:sp>
-      <p:sp>
-        <p:nvSpPr>
-          <p:cNvPr id="15" name="Rounded Rectangle 14"/>
+        </p:txBody>
+      </p:sp>
+      <p:sp>
+        <p:nvSpPr>
+          <p:cNvPr id="15" name="Rounded Rectangle 14">
+            <a:hlinkClick r:id="rId21"/>
+          </p:cNvPr>
           <p:cNvSpPr/>
-          <p:nvPr>
-            <a:hlinkClick r:id="rId27"/>
-          </p:nvPr>
+          <p:nvPr/>
         </p:nvSpPr>
         <p:spPr>
           <a:xfrm>
@@ -3899,7 +5306,7 @@
                   <a:srgbClr val="1F3A5F"/>
                 </a:solidFill>
               </a:rPr>
-              <a:t>Gram 9: FR Star Destroyer, Category 1, Yavin</a:t>
+              <a:t>Gram 27: FR Millennium Falcon, Category 4, Tatooine</a:t>
             </a:r>
           </a:p>
         </p:txBody>
@@ -3928,7 +5335,7 @@
           <a:p>
             <a:r>
               <a:rPr sz="800">
-                <a:hlinkClick r:id="rId28"/>
+                <a:hlinkClick r:id="rId22"/>
               </a:rPr>
               <a:t>Lofar 1</a:t>
             </a:r>
@@ -3937,11 +5344,11 @@
       </p:sp>
       <p:sp>
         <p:nvSpPr>
-          <p:cNvPr id="17" name="Rounded Rectangle 16"/>
+          <p:cNvPr id="17" name="Rounded Rectangle 16">
+            <a:hlinkClick r:id="rId23"/>
+          </p:cNvPr>
           <p:cNvSpPr/>
-          <p:nvPr>
-            <a:hlinkClick r:id="rId29"/>
-          </p:nvPr>
+          <p:nvPr/>
         </p:nvSpPr>
         <p:spPr>
           <a:xfrm>
@@ -3985,7 +5392,7 @@
                   <a:srgbClr val="1F3A5F"/>
                 </a:solidFill>
               </a:rPr>
-              <a:t>Gram 10: FR Venator-class, Category 4, Bajor</a:t>
+              <a:t>Gram 28: FR Enterprise, Category 3, Dagobah</a:t>
             </a:r>
           </a:p>
         </p:txBody>
@@ -4014,7 +5421,7 @@
           <a:p>
             <a:r>
               <a:rPr sz="800">
-                <a:hlinkClick r:id="rId30"/>
+                <a:hlinkClick r:id="rId24"/>
               </a:rPr>
               <a:t>Lofar 1</a:t>
             </a:r>
@@ -4022,7 +5429,7 @@
           <a:p>
             <a:r>
               <a:rPr sz="800">
-                <a:hlinkClick r:id="rId31"/>
+                <a:hlinkClick r:id="rId25"/>
               </a:rPr>
               <a:t>Lofar 2</a:t>
             </a:r>
@@ -4030,20 +5437,28 @@
           <a:p>
             <a:r>
               <a:rPr sz="800">
-                <a:hlinkClick r:id="rId32"/>
+                <a:hlinkClick r:id="rId26"/>
               </a:rPr>
               <a:t>Lofar 3</a:t>
             </a:r>
           </a:p>
-        </p:txBody>
-      </p:sp>
-      <p:sp>
-        <p:nvSpPr>
-          <p:cNvPr id="19" name="Rounded Rectangle 18"/>
+          <a:p>
+            <a:r>
+              <a:rPr sz="800">
+                <a:hlinkClick r:id="rId27"/>
+              </a:rPr>
+              <a:t>Lofar 4</a:t>
+            </a:r>
+          </a:p>
+        </p:txBody>
+      </p:sp>
+      <p:sp>
+        <p:nvSpPr>
+          <p:cNvPr id="19" name="Rounded Rectangle 18">
+            <a:hlinkClick r:id="rId28"/>
+          </p:cNvPr>
           <p:cNvSpPr/>
-          <p:nvPr>
-            <a:hlinkClick r:id="rId33"/>
-          </p:nvPr>
+          <p:nvPr/>
         </p:nvSpPr>
         <p:spPr>
           <a:xfrm>
@@ -4087,7 +5502,7 @@
                   <a:srgbClr val="1F3A5F"/>
                 </a:solidFill>
               </a:rPr>
-              <a:t>Gram 11: FR Voyager, Category 1, Trill</a:t>
+              <a:t>Gram 29: Prometheus contact bearing 036, codename Naboo</a:t>
             </a:r>
           </a:p>
         </p:txBody>
@@ -4116,7 +5531,7 @@
           <a:p>
             <a:r>
               <a:rPr sz="800">
-                <a:hlinkClick r:id="rId34"/>
+                <a:hlinkClick r:id="rId29"/>
               </a:rPr>
               <a:t>Lofar 1</a:t>
             </a:r>
@@ -4124,7 +5539,7 @@
           <a:p>
             <a:r>
               <a:rPr sz="800">
-                <a:hlinkClick r:id="rId35"/>
+                <a:hlinkClick r:id="rId30"/>
               </a:rPr>
               <a:t>Lofar 2</a:t>
             </a:r>
@@ -4132,20 +5547,28 @@
           <a:p>
             <a:r>
               <a:rPr sz="800">
-                <a:hlinkClick r:id="rId36"/>
+                <a:hlinkClick r:id="rId31"/>
               </a:rPr>
               <a:t>Lofar 3</a:t>
             </a:r>
           </a:p>
-        </p:txBody>
-      </p:sp>
-      <p:sp>
-        <p:nvSpPr>
-          <p:cNvPr id="21" name="Rounded Rectangle 20"/>
+          <a:p>
+            <a:r>
+              <a:rPr sz="800">
+                <a:hlinkClick r:id="rId32"/>
+              </a:rPr>
+              <a:t>Lofar 4</a:t>
+            </a:r>
+          </a:p>
+        </p:txBody>
+      </p:sp>
+      <p:sp>
+        <p:nvSpPr>
+          <p:cNvPr id="21" name="Rounded Rectangle 20">
+            <a:hlinkClick r:id="rId33"/>
+          </p:cNvPr>
           <p:cNvSpPr/>
-          <p:nvPr>
-            <a:hlinkClick r:id="rId37"/>
-          </p:nvPr>
+          <p:nvPr/>
         </p:nvSpPr>
         <p:spPr>
           <a:xfrm>
@@ -4189,7 +5612,7 @@
                   <a:srgbClr val="1F3A5F"/>
                 </a:solidFill>
               </a:rPr>
-              <a:t>Gram 12: FR Ghost, Category 3, Tantive</a:t>
+              <a:t>Gram 30: Ghost contact bearing 343, codename Dank</a:t>
             </a:r>
           </a:p>
         </p:txBody>
@@ -4218,7 +5641,7 @@
           <a:p>
             <a:r>
               <a:rPr sz="800">
-                <a:hlinkClick r:id="rId38"/>
+                <a:hlinkClick r:id="rId34"/>
               </a:rPr>
               <a:t>Lofar 1</a:t>
             </a:r>
@@ -4226,20 +5649,28 @@
           <a:p>
             <a:r>
               <a:rPr sz="800">
-                <a:hlinkClick r:id="rId39"/>
+                <a:hlinkClick r:id="rId35"/>
               </a:rPr>
               <a:t>Lofar 2</a:t>
             </a:r>
           </a:p>
-        </p:txBody>
-      </p:sp>
-      <p:sp>
-        <p:nvSpPr>
-          <p:cNvPr id="23" name="Rounded Rectangle 22"/>
+          <a:p>
+            <a:r>
+              <a:rPr sz="800">
+                <a:hlinkClick r:id="rId36"/>
+              </a:rPr>
+              <a:t>Lofar 3</a:t>
+            </a:r>
+          </a:p>
+        </p:txBody>
+      </p:sp>
+      <p:sp>
+        <p:nvSpPr>
+          <p:cNvPr id="23" name="Rounded Rectangle 22">
+            <a:hlinkClick r:id="rId37"/>
+          </p:cNvPr>
           <p:cNvSpPr/>
-          <p:nvPr>
-            <a:hlinkClick r:id="rId40"/>
-          </p:nvPr>
+          <p:nvPr/>
         </p:nvSpPr>
         <p:spPr>
           <a:xfrm>
@@ -4283,7 +5714,7 @@
                   <a:srgbClr val="1F3A5F"/>
                 </a:solidFill>
               </a:rPr>
-              <a:t>Gram 13: FR Venator-class, Category 4, Bajor</a:t>
+              <a:t>Gram 31: FR Imperial-class, Category 1, Yavin</a:t>
             </a:r>
           </a:p>
         </p:txBody>
@@ -4312,20 +5743,28 @@
           <a:p>
             <a:r>
               <a:rPr sz="800">
-                <a:hlinkClick r:id="rId41"/>
+                <a:hlinkClick r:id="rId38"/>
               </a:rPr>
               <a:t>Lofar 1</a:t>
             </a:r>
           </a:p>
-        </p:txBody>
-      </p:sp>
-      <p:sp>
-        <p:nvSpPr>
-          <p:cNvPr id="25" name="Rounded Rectangle 24"/>
+          <a:p>
+            <a:r>
+              <a:rPr sz="800">
+                <a:hlinkClick r:id="rId39"/>
+              </a:rPr>
+              <a:t>Lofar 2</a:t>
+            </a:r>
+          </a:p>
+        </p:txBody>
+      </p:sp>
+      <p:sp>
+        <p:nvSpPr>
+          <p:cNvPr id="25" name="Rounded Rectangle 24">
+            <a:hlinkClick r:id="rId40"/>
+          </p:cNvPr>
           <p:cNvSpPr/>
-          <p:nvPr>
-            <a:hlinkClick r:id="rId42"/>
-          </p:nvPr>
+          <p:nvPr/>
         </p:nvSpPr>
         <p:spPr>
           <a:xfrm>
@@ -4369,7 +5808,7 @@
                   <a:srgbClr val="1F3A5F"/>
                 </a:solidFill>
               </a:rPr>
-              <a:t>Gram 14: FR Nebula-class, Category 1, Caprica</a:t>
+              <a:t>Gram 32: FR Outrider, Category 4, Mustafar</a:t>
             </a:r>
           </a:p>
         </p:txBody>
@@ -4398,7 +5837,7 @@
           <a:p>
             <a:r>
               <a:rPr sz="800">
-                <a:hlinkClick r:id="rId43"/>
+                <a:hlinkClick r:id="rId41"/>
               </a:rPr>
               <a:t>Lofar 1</a:t>
             </a:r>
@@ -4407,11 +5846,11 @@
       </p:sp>
       <p:sp>
         <p:nvSpPr>
-          <p:cNvPr id="27" name="Rounded Rectangle 26"/>
+          <p:cNvPr id="27" name="Rounded Rectangle 26">
+            <a:hlinkClick r:id="rId42"/>
+          </p:cNvPr>
           <p:cNvSpPr/>
-          <p:nvPr>
-            <a:hlinkClick r:id="rId44"/>
-          </p:nvPr>
+          <p:nvPr/>
         </p:nvSpPr>
         <p:spPr>
           <a:xfrm>
@@ -4455,7 +5894,7 @@
                   <a:srgbClr val="1F3A5F"/>
                 </a:solidFill>
               </a:rPr>
-              <a:t>Gram 15: FR Sovereign-class, Category 1, Bajor</a:t>
+              <a:t>Gram 33: FR Lambda Shuttle, Category 4, Bespin</a:t>
             </a:r>
           </a:p>
         </p:txBody>
@@ -4484,44 +5923,20 @@
           <a:p>
             <a:r>
               <a:rPr sz="800">
-                <a:hlinkClick r:id="rId45"/>
+                <a:hlinkClick r:id="rId43"/>
               </a:rPr>
               <a:t>Lofar 1</a:t>
             </a:r>
           </a:p>
-          <a:p>
-            <a:r>
-              <a:rPr sz="800">
-                <a:hlinkClick r:id="rId46"/>
-              </a:rPr>
-              <a:t>Lofar 2</a:t>
-            </a:r>
-          </a:p>
-          <a:p>
-            <a:r>
-              <a:rPr sz="800">
-                <a:hlinkClick r:id="rId47"/>
-              </a:rPr>
-              <a:t>Lofar 3</a:t>
-            </a:r>
-          </a:p>
-          <a:p>
-            <a:r>
-              <a:rPr sz="800">
-                <a:hlinkClick r:id="rId48"/>
-              </a:rPr>
-              <a:t>Lofar 4</a:t>
-            </a:r>
-          </a:p>
-        </p:txBody>
-      </p:sp>
-      <p:sp>
-        <p:nvSpPr>
-          <p:cNvPr id="29" name="Rounded Rectangle 28"/>
+        </p:txBody>
+      </p:sp>
+      <p:sp>
+        <p:nvSpPr>
+          <p:cNvPr id="29" name="Rounded Rectangle 28">
+            <a:hlinkClick r:id="rId44"/>
+          </p:cNvPr>
           <p:cNvSpPr/>
-          <p:nvPr>
-            <a:hlinkClick r:id="rId49"/>
-          </p:nvPr>
+          <p:nvPr/>
         </p:nvSpPr>
         <p:spPr>
           <a:xfrm>
@@ -4565,7 +5980,7 @@
                   <a:srgbClr val="1F3A5F"/>
                 </a:solidFill>
               </a:rPr>
-              <a:t>Gram 16: FR TIE Fighter, Category 3, Yavin</a:t>
+              <a:t>Gram 35: FR Ghost, Category 1, Tatooine</a:t>
             </a:r>
           </a:p>
         </p:txBody>
@@ -4594,20 +6009,36 @@
           <a:p>
             <a:r>
               <a:rPr sz="800">
-                <a:hlinkClick r:id="rId50"/>
+                <a:hlinkClick r:id="rId45"/>
               </a:rPr>
               <a:t>Lofar 1</a:t>
             </a:r>
           </a:p>
-        </p:txBody>
-      </p:sp>
-      <p:sp>
-        <p:nvSpPr>
-          <p:cNvPr id="31" name="Rounded Rectangle 30"/>
+          <a:p>
+            <a:r>
+              <a:rPr sz="800">
+                <a:hlinkClick r:id="rId46"/>
+              </a:rPr>
+              <a:t>Lofar 2</a:t>
+            </a:r>
+          </a:p>
+          <a:p>
+            <a:r>
+              <a:rPr sz="800">
+                <a:hlinkClick r:id="rId47"/>
+              </a:rPr>
+              <a:t>Lofar 3</a:t>
+            </a:r>
+          </a:p>
+        </p:txBody>
+      </p:sp>
+      <p:sp>
+        <p:nvSpPr>
+          <p:cNvPr id="31" name="Rounded Rectangle 30">
+            <a:hlinkClick r:id="rId48"/>
+          </p:cNvPr>
           <p:cNvSpPr/>
-          <p:nvPr>
-            <a:hlinkClick r:id="rId51"/>
-          </p:nvPr>
+          <p:nvPr/>
         </p:nvSpPr>
         <p:spPr>
           <a:xfrm>
@@ -4651,7 +6082,7 @@
                   <a:srgbClr val="1F3A5F"/>
                 </a:solidFill>
               </a:rPr>
-              <a:t>Gram 18: FR Nebula-class, Category 4, Risa</a:t>
+              <a:t>Gram 36: Rebel One contact bearing 243, codename Risa</a:t>
             </a:r>
           </a:p>
         </p:txBody>
@@ -4680,25 +6111,33 @@
           <a:p>
             <a:r>
               <a:rPr sz="800">
+                <a:hlinkClick r:id="rId49"/>
+              </a:rPr>
+              <a:t>Lofar 1</a:t>
+            </a:r>
+          </a:p>
+          <a:p>
+            <a:r>
+              <a:rPr sz="800">
+                <a:hlinkClick r:id="rId50"/>
+              </a:rPr>
+              <a:t>Lofar 2</a:t>
+            </a:r>
+          </a:p>
+          <a:p>
+            <a:r>
+              <a:rPr sz="800">
+                <a:hlinkClick r:id="rId51"/>
+              </a:rPr>
+              <a:t>Lofar 3</a:t>
+            </a:r>
+          </a:p>
+          <a:p>
+            <a:r>
+              <a:rPr sz="800">
                 <a:hlinkClick r:id="rId52"/>
               </a:rPr>
-              <a:t>Lofar 1</a:t>
-            </a:r>
-          </a:p>
-          <a:p>
-            <a:r>
-              <a:rPr sz="800">
-                <a:hlinkClick r:id="rId53"/>
-              </a:rPr>
-              <a:t>Lofar 2</a:t>
-            </a:r>
-          </a:p>
-          <a:p>
-            <a:r>
-              <a:rPr sz="800">
-                <a:hlinkClick r:id="rId54"/>
-              </a:rPr>
-              <a:t>Lofar 3</a:t>
+              <a:t>Lofar 4</a:t>
             </a:r>
           </a:p>
         </p:txBody>
@@ -4767,18 +6206,18 @@
                   <a:srgbClr val="FFFFFF"/>
                 </a:solidFill>
               </a:rPr>
-              <a:t>Instructor Week 2 Grams — Page 2 of 3</a:t>
-            </a:r>
-          </a:p>
-        </p:txBody>
-      </p:sp>
-      <p:sp>
-        <p:nvSpPr>
-          <p:cNvPr id="3" name="Rounded Rectangle 2"/>
+              <a:t>Instructor Week 2 Grams — Page 3 of 3</a:t>
+            </a:r>
+          </a:p>
+        </p:txBody>
+      </p:sp>
+      <p:sp>
+        <p:nvSpPr>
+          <p:cNvPr id="3" name="Rounded Rectangle 2">
+            <a:hlinkClick r:id="rId2"/>
+          </p:cNvPr>
           <p:cNvSpPr/>
-          <p:nvPr>
-            <a:hlinkClick r:id="rId2"/>
-          </p:nvPr>
+          <p:nvPr/>
         </p:nvSpPr>
         <p:spPr>
           <a:xfrm>
@@ -4822,7 +6261,7 @@
                   <a:srgbClr val="1F3A5F"/>
                 </a:solidFill>
               </a:rPr>
-              <a:t>Gram 19: Akira-class contact bearing 162, codename Tatooine</a:t>
+              <a:t>Gram 38: Prometheus contact bearing 214, codename Gandalf</a:t>
             </a:r>
           </a:p>
         </p:txBody>
@@ -4856,15 +6295,23 @@
               <a:t>Lofar 1</a:t>
             </a:r>
           </a:p>
-        </p:txBody>
-      </p:sp>
-      <p:sp>
-        <p:nvSpPr>
-          <p:cNvPr id="5" name="Rounded Rectangle 4"/>
+          <a:p>
+            <a:r>
+              <a:rPr sz="800">
+                <a:hlinkClick r:id="rId4"/>
+              </a:rPr>
+              <a:t>Lofar 2</a:t>
+            </a:r>
+          </a:p>
+        </p:txBody>
+      </p:sp>
+      <p:sp>
+        <p:nvSpPr>
+          <p:cNvPr id="5" name="Rounded Rectangle 4">
+            <a:hlinkClick r:id="rId5"/>
+          </p:cNvPr>
           <p:cNvSpPr/>
-          <p:nvPr>
-            <a:hlinkClick r:id="rId4"/>
-          </p:nvPr>
+          <p:nvPr/>
         </p:nvSpPr>
         <p:spPr>
           <a:xfrm>
@@ -4908,7 +6355,7 @@
                   <a:srgbClr val="1F3A5F"/>
                 </a:solidFill>
               </a:rPr>
-              <a:t>Gram 20: FR Stargazer, Category 4, Gandalf</a:t>
+              <a:t>Gram 39: FR Razor Crest, Category 1, Romulus</a:t>
             </a:r>
           </a:p>
         </p:txBody>
@@ -4937,7 +6384,7 @@
           <a:p>
             <a:r>
               <a:rPr sz="800">
-                <a:hlinkClick r:id="rId5"/>
+                <a:hlinkClick r:id="rId6"/>
               </a:rPr>
               <a:t>Lofar 1</a:t>
             </a:r>
@@ -4945,7 +6392,7 @@
           <a:p>
             <a:r>
               <a:rPr sz="800">
-                <a:hlinkClick r:id="rId6"/>
+                <a:hlinkClick r:id="rId7"/>
               </a:rPr>
               <a:t>Lofar 2</a:t>
             </a:r>
@@ -4953,7 +6400,7 @@
           <a:p>
             <a:r>
               <a:rPr sz="800">
-                <a:hlinkClick r:id="rId7"/>
+                <a:hlinkClick r:id="rId8"/>
               </a:rPr>
               <a:t>Lofar 3</a:t>
             </a:r>
@@ -4962,11 +6409,11 @@
       </p:sp>
       <p:sp>
         <p:nvSpPr>
-          <p:cNvPr id="7" name="Rounded Rectangle 6"/>
+          <p:cNvPr id="7" name="Rounded Rectangle 6">
+            <a:hlinkClick r:id="rId9"/>
+          </p:cNvPr>
           <p:cNvSpPr/>
-          <p:nvPr>
-            <a:hlinkClick r:id="rId8"/>
-          </p:nvPr>
+          <p:nvPr/>
         </p:nvSpPr>
         <p:spPr>
           <a:xfrm>
@@ -5010,7 +6457,7 @@
                   <a:srgbClr val="1F3A5F"/>
                 </a:solidFill>
               </a:rPr>
-              <a:t>Gram 22: FR Y-wing, Category 1, Tantive</a:t>
+              <a:t>Gram 40: FR Outrider, Category 3, Bajor</a:t>
             </a:r>
           </a:p>
         </p:txBody>
@@ -5039,7 +6486,7 @@
           <a:p>
             <a:r>
               <a:rPr sz="800">
-                <a:hlinkClick r:id="rId9"/>
+                <a:hlinkClick r:id="rId10"/>
               </a:rPr>
               <a:t>Lofar 1</a:t>
             </a:r>
@@ -5047,20 +6494,36 @@
           <a:p>
             <a:r>
               <a:rPr sz="800">
-                <a:hlinkClick r:id="rId10"/>
+                <a:hlinkClick r:id="rId11"/>
               </a:rPr>
               <a:t>Lofar 2</a:t>
             </a:r>
           </a:p>
-        </p:txBody>
-      </p:sp>
-      <p:sp>
-        <p:nvSpPr>
-          <p:cNvPr id="9" name="Rounded Rectangle 8"/>
+          <a:p>
+            <a:r>
+              <a:rPr sz="800">
+                <a:hlinkClick r:id="rId12"/>
+              </a:rPr>
+              <a:t>Lofar 3</a:t>
+            </a:r>
+          </a:p>
+          <a:p>
+            <a:r>
+              <a:rPr sz="800">
+                <a:hlinkClick r:id="rId13"/>
+              </a:rPr>
+              <a:t>Lofar 4</a:t>
+            </a:r>
+          </a:p>
+        </p:txBody>
+      </p:sp>
+      <p:sp>
+        <p:nvSpPr>
+          <p:cNvPr id="9" name="Rounded Rectangle 8">
+            <a:hlinkClick r:id="rId14"/>
+          </p:cNvPr>
           <p:cNvSpPr/>
-          <p:nvPr>
-            <a:hlinkClick r:id="rId11"/>
-          </p:nvPr>
+          <p:nvPr/>
         </p:nvSpPr>
         <p:spPr>
           <a:xfrm>
@@ -5104,7 +6567,7 @@
                   <a:srgbClr val="1F3A5F"/>
                 </a:solidFill>
               </a:rPr>
-              <a:t>Gram 24: FR Sovereign-class, Category 2, Coruscant</a:t>
+              <a:t>Gram 41: FR TIE Bomber, Category 2, Vulcan</a:t>
             </a:r>
           </a:p>
         </p:txBody>
@@ -5133,7 +6596,7 @@
           <a:p>
             <a:r>
               <a:rPr sz="800">
-                <a:hlinkClick r:id="rId12"/>
+                <a:hlinkClick r:id="rId15"/>
               </a:rPr>
               <a:t>Lofar 1</a:t>
             </a:r>
@@ -5141,7 +6604,7 @@
           <a:p>
             <a:r>
               <a:rPr sz="800">
-                <a:hlinkClick r:id="rId13"/>
+                <a:hlinkClick r:id="rId16"/>
               </a:rPr>
               <a:t>Lofar 2</a:t>
             </a:r>
@@ -5149,7 +6612,7 @@
           <a:p>
             <a:r>
               <a:rPr sz="800">
-                <a:hlinkClick r:id="rId14"/>
+                <a:hlinkClick r:id="rId17"/>
               </a:rPr>
               <a:t>Lofar 3</a:t>
             </a:r>
@@ -5157,7 +6620,7 @@
           <a:p>
             <a:r>
               <a:rPr sz="800">
-                <a:hlinkClick r:id="rId15"/>
+                <a:hlinkClick r:id="rId18"/>
               </a:rPr>
               <a:t>Lofar 4</a:t>
             </a:r>
@@ -5166,11 +6629,11 @@
       </p:sp>
       <p:sp>
         <p:nvSpPr>
-          <p:cNvPr id="11" name="Rounded Rectangle 10"/>
+          <p:cNvPr id="11" name="Rounded Rectangle 10">
+            <a:hlinkClick r:id="rId19"/>
+          </p:cNvPr>
           <p:cNvSpPr/>
-          <p:nvPr>
-            <a:hlinkClick r:id="rId16"/>
-          </p:nvPr>
+          <p:nvPr/>
         </p:nvSpPr>
         <p:spPr>
           <a:xfrm>
@@ -5214,7 +6677,7 @@
                   <a:srgbClr val="1F3A5F"/>
                 </a:solidFill>
               </a:rPr>
-              <a:t>Gram 25: FR Lambda Shuttle, Category 4, Gandalf</a:t>
+              <a:t>Gram 42: FR Nebulon-B, Category 2, Romulus</a:t>
             </a:r>
           </a:p>
         </p:txBody>
@@ -5243,1646 +6706,9 @@
           <a:p>
             <a:r>
               <a:rPr sz="800">
-                <a:hlinkClick r:id="rId17"/>
+                <a:hlinkClick r:id="rId20"/>
               </a:rPr>
               <a:t>Lofar 1</a:t>
-            </a:r>
-          </a:p>
-          <a:p>
-            <a:r>
-              <a:rPr sz="800">
-                <a:hlinkClick r:id="rId18"/>
-              </a:rPr>
-              <a:t>Lofar 2</a:t>
-            </a:r>
-          </a:p>
-        </p:txBody>
-      </p:sp>
-      <p:sp>
-        <p:nvSpPr>
-          <p:cNvPr id="13" name="Rounded Rectangle 12"/>
-          <p:cNvSpPr/>
-          <p:nvPr>
-            <a:hlinkClick r:id="rId19"/>
-          </p:nvPr>
-        </p:nvSpPr>
-        <p:spPr>
-          <a:xfrm>
-            <a:off x="365760" y="2682240"/>
-            <a:ext cx="2200046" cy="365760"/>
-          </a:xfrm>
-          <a:prstGeom prst="roundRect">
-            <a:avLst/>
-          </a:prstGeom>
-          <a:solidFill>
-            <a:srgbClr val="E8EEF7"/>
-          </a:solidFill>
-          <a:ln>
-            <a:solidFill>
-              <a:srgbClr val="1F3A5F"/>
-            </a:solidFill>
-          </a:ln>
-        </p:spPr>
-        <p:style>
-          <a:lnRef idx="1">
-            <a:schemeClr val="accent1"/>
-          </a:lnRef>
-          <a:fillRef idx="3">
-            <a:schemeClr val="accent1"/>
-          </a:fillRef>
-          <a:effectRef idx="2">
-            <a:schemeClr val="accent1"/>
-          </a:effectRef>
-          <a:fontRef idx="minor">
-            <a:schemeClr val="lt1"/>
-          </a:fontRef>
-        </p:style>
-        <p:txBody>
-          <a:bodyPr rtlCol="0" anchor="ctr" lIns="45720" rIns="45720"/>
-          <a:lstStyle/>
-          <a:p>
-            <a:pPr algn="ctr"/>
-            <a:r>
-              <a:rPr sz="900">
-                <a:solidFill>
-                  <a:srgbClr val="1F3A5F"/>
-                </a:solidFill>
-              </a:rPr>
-              <a:t>Gram 26: FR Voyager, Category 1, Kronos</a:t>
-            </a:r>
-          </a:p>
-        </p:txBody>
-      </p:sp>
-      <p:sp>
-        <p:nvSpPr>
-          <p:cNvPr id="14" name="TextBox 13"/>
-          <p:cNvSpPr txBox="1"/>
-          <p:nvPr/>
-        </p:nvSpPr>
-        <p:spPr>
-          <a:xfrm>
-            <a:off x="365760" y="3066288"/>
-            <a:ext cx="2200046" cy="1447800"/>
-          </a:xfrm>
-          <a:prstGeom prst="rect">
-            <a:avLst/>
-          </a:prstGeom>
-          <a:noFill/>
-        </p:spPr>
-        <p:txBody>
-          <a:bodyPr wrap="square">
-            <a:spAutoFit/>
-          </a:bodyPr>
-          <a:lstStyle/>
-          <a:p>
-            <a:r>
-              <a:rPr sz="800">
-                <a:hlinkClick r:id="rId20"/>
-              </a:rPr>
-              <a:t>Lofar 1</a:t>
-            </a:r>
-          </a:p>
-        </p:txBody>
-      </p:sp>
-      <p:sp>
-        <p:nvSpPr>
-          <p:cNvPr id="15" name="Rounded Rectangle 14"/>
-          <p:cNvSpPr/>
-          <p:nvPr>
-            <a:hlinkClick r:id="rId21"/>
-          </p:nvPr>
-        </p:nvSpPr>
-        <p:spPr>
-          <a:xfrm>
-            <a:off x="2657246" y="2682240"/>
-            <a:ext cx="2200046" cy="365760"/>
-          </a:xfrm>
-          <a:prstGeom prst="roundRect">
-            <a:avLst/>
-          </a:prstGeom>
-          <a:solidFill>
-            <a:srgbClr val="E8EEF7"/>
-          </a:solidFill>
-          <a:ln>
-            <a:solidFill>
-              <a:srgbClr val="1F3A5F"/>
-            </a:solidFill>
-          </a:ln>
-        </p:spPr>
-        <p:style>
-          <a:lnRef idx="1">
-            <a:schemeClr val="accent1"/>
-          </a:lnRef>
-          <a:fillRef idx="3">
-            <a:schemeClr val="accent1"/>
-          </a:fillRef>
-          <a:effectRef idx="2">
-            <a:schemeClr val="accent1"/>
-          </a:effectRef>
-          <a:fontRef idx="minor">
-            <a:schemeClr val="lt1"/>
-          </a:fontRef>
-        </p:style>
-        <p:txBody>
-          <a:bodyPr rtlCol="0" anchor="ctr" lIns="45720" rIns="45720"/>
-          <a:lstStyle/>
-          <a:p>
-            <a:pPr algn="ctr"/>
-            <a:r>
-              <a:rPr sz="900">
-                <a:solidFill>
-                  <a:srgbClr val="1F3A5F"/>
-                </a:solidFill>
-              </a:rPr>
-              <a:t>Gram 27: FR Millennium Falcon, Category 4, Tatooine</a:t>
-            </a:r>
-          </a:p>
-        </p:txBody>
-      </p:sp>
-      <p:sp>
-        <p:nvSpPr>
-          <p:cNvPr id="16" name="TextBox 15"/>
-          <p:cNvSpPr txBox="1"/>
-          <p:nvPr/>
-        </p:nvSpPr>
-        <p:spPr>
-          <a:xfrm>
-            <a:off x="2657246" y="3066288"/>
-            <a:ext cx="2200046" cy="1447800"/>
-          </a:xfrm>
-          <a:prstGeom prst="rect">
-            <a:avLst/>
-          </a:prstGeom>
-          <a:noFill/>
-        </p:spPr>
-        <p:txBody>
-          <a:bodyPr wrap="square">
-            <a:spAutoFit/>
-          </a:bodyPr>
-          <a:lstStyle/>
-          <a:p>
-            <a:r>
-              <a:rPr sz="800">
-                <a:hlinkClick r:id="rId22"/>
-              </a:rPr>
-              <a:t>Lofar 1</a:t>
-            </a:r>
-          </a:p>
-        </p:txBody>
-      </p:sp>
-      <p:sp>
-        <p:nvSpPr>
-          <p:cNvPr id="17" name="Rounded Rectangle 16"/>
-          <p:cNvSpPr/>
-          <p:nvPr>
-            <a:hlinkClick r:id="rId23"/>
-          </p:nvPr>
-        </p:nvSpPr>
-        <p:spPr>
-          <a:xfrm>
-            <a:off x="4948732" y="2682240"/>
-            <a:ext cx="2200046" cy="365760"/>
-          </a:xfrm>
-          <a:prstGeom prst="roundRect">
-            <a:avLst/>
-          </a:prstGeom>
-          <a:solidFill>
-            <a:srgbClr val="E8EEF7"/>
-          </a:solidFill>
-          <a:ln>
-            <a:solidFill>
-              <a:srgbClr val="1F3A5F"/>
-            </a:solidFill>
-          </a:ln>
-        </p:spPr>
-        <p:style>
-          <a:lnRef idx="1">
-            <a:schemeClr val="accent1"/>
-          </a:lnRef>
-          <a:fillRef idx="3">
-            <a:schemeClr val="accent1"/>
-          </a:fillRef>
-          <a:effectRef idx="2">
-            <a:schemeClr val="accent1"/>
-          </a:effectRef>
-          <a:fontRef idx="minor">
-            <a:schemeClr val="lt1"/>
-          </a:fontRef>
-        </p:style>
-        <p:txBody>
-          <a:bodyPr rtlCol="0" anchor="ctr" lIns="45720" rIns="45720"/>
-          <a:lstStyle/>
-          <a:p>
-            <a:pPr algn="ctr"/>
-            <a:r>
-              <a:rPr sz="900">
-                <a:solidFill>
-                  <a:srgbClr val="1F3A5F"/>
-                </a:solidFill>
-              </a:rPr>
-              <a:t>Gram 28: FR Enterprise, Category 3, Dagobah</a:t>
-            </a:r>
-          </a:p>
-        </p:txBody>
-      </p:sp>
-      <p:sp>
-        <p:nvSpPr>
-          <p:cNvPr id="18" name="TextBox 17"/>
-          <p:cNvSpPr txBox="1"/>
-          <p:nvPr/>
-        </p:nvSpPr>
-        <p:spPr>
-          <a:xfrm>
-            <a:off x="4948732" y="3066288"/>
-            <a:ext cx="2200046" cy="1447800"/>
-          </a:xfrm>
-          <a:prstGeom prst="rect">
-            <a:avLst/>
-          </a:prstGeom>
-          <a:noFill/>
-        </p:spPr>
-        <p:txBody>
-          <a:bodyPr wrap="square">
-            <a:spAutoFit/>
-          </a:bodyPr>
-          <a:lstStyle/>
-          <a:p>
-            <a:r>
-              <a:rPr sz="800">
-                <a:hlinkClick r:id="rId24"/>
-              </a:rPr>
-              <a:t>Lofar 1</a:t>
-            </a:r>
-          </a:p>
-          <a:p>
-            <a:r>
-              <a:rPr sz="800">
-                <a:hlinkClick r:id="rId25"/>
-              </a:rPr>
-              <a:t>Lofar 2</a:t>
-            </a:r>
-          </a:p>
-          <a:p>
-            <a:r>
-              <a:rPr sz="800">
-                <a:hlinkClick r:id="rId26"/>
-              </a:rPr>
-              <a:t>Lofar 3</a:t>
-            </a:r>
-          </a:p>
-          <a:p>
-            <a:r>
-              <a:rPr sz="800">
-                <a:hlinkClick r:id="rId27"/>
-              </a:rPr>
-              <a:t>Lofar 4</a:t>
-            </a:r>
-          </a:p>
-        </p:txBody>
-      </p:sp>
-      <p:sp>
-        <p:nvSpPr>
-          <p:cNvPr id="19" name="Rounded Rectangle 18"/>
-          <p:cNvSpPr/>
-          <p:nvPr>
-            <a:hlinkClick r:id="rId28"/>
-          </p:nvPr>
-        </p:nvSpPr>
-        <p:spPr>
-          <a:xfrm>
-            <a:off x="7240219" y="2682240"/>
-            <a:ext cx="2200046" cy="365760"/>
-          </a:xfrm>
-          <a:prstGeom prst="roundRect">
-            <a:avLst/>
-          </a:prstGeom>
-          <a:solidFill>
-            <a:srgbClr val="E8EEF7"/>
-          </a:solidFill>
-          <a:ln>
-            <a:solidFill>
-              <a:srgbClr val="1F3A5F"/>
-            </a:solidFill>
-          </a:ln>
-        </p:spPr>
-        <p:style>
-          <a:lnRef idx="1">
-            <a:schemeClr val="accent1"/>
-          </a:lnRef>
-          <a:fillRef idx="3">
-            <a:schemeClr val="accent1"/>
-          </a:fillRef>
-          <a:effectRef idx="2">
-            <a:schemeClr val="accent1"/>
-          </a:effectRef>
-          <a:fontRef idx="minor">
-            <a:schemeClr val="lt1"/>
-          </a:fontRef>
-        </p:style>
-        <p:txBody>
-          <a:bodyPr rtlCol="0" anchor="ctr" lIns="45720" rIns="45720"/>
-          <a:lstStyle/>
-          <a:p>
-            <a:pPr algn="ctr"/>
-            <a:r>
-              <a:rPr sz="900">
-                <a:solidFill>
-                  <a:srgbClr val="1F3A5F"/>
-                </a:solidFill>
-              </a:rPr>
-              <a:t>Gram 29: Prometheus contact bearing 036, codename Naboo</a:t>
-            </a:r>
-          </a:p>
-        </p:txBody>
-      </p:sp>
-      <p:sp>
-        <p:nvSpPr>
-          <p:cNvPr id="20" name="TextBox 19"/>
-          <p:cNvSpPr txBox="1"/>
-          <p:nvPr/>
-        </p:nvSpPr>
-        <p:spPr>
-          <a:xfrm>
-            <a:off x="7240219" y="3066288"/>
-            <a:ext cx="2200046" cy="1447800"/>
-          </a:xfrm>
-          <a:prstGeom prst="rect">
-            <a:avLst/>
-          </a:prstGeom>
-          <a:noFill/>
-        </p:spPr>
-        <p:txBody>
-          <a:bodyPr wrap="square">
-            <a:spAutoFit/>
-          </a:bodyPr>
-          <a:lstStyle/>
-          <a:p>
-            <a:r>
-              <a:rPr sz="800">
-                <a:hlinkClick r:id="rId29"/>
-              </a:rPr>
-              <a:t>Lofar 1</a:t>
-            </a:r>
-          </a:p>
-          <a:p>
-            <a:r>
-              <a:rPr sz="800">
-                <a:hlinkClick r:id="rId30"/>
-              </a:rPr>
-              <a:t>Lofar 2</a:t>
-            </a:r>
-          </a:p>
-          <a:p>
-            <a:r>
-              <a:rPr sz="800">
-                <a:hlinkClick r:id="rId31"/>
-              </a:rPr>
-              <a:t>Lofar 3</a:t>
-            </a:r>
-          </a:p>
-          <a:p>
-            <a:r>
-              <a:rPr sz="800">
-                <a:hlinkClick r:id="rId32"/>
-              </a:rPr>
-              <a:t>Lofar 4</a:t>
-            </a:r>
-          </a:p>
-        </p:txBody>
-      </p:sp>
-      <p:sp>
-        <p:nvSpPr>
-          <p:cNvPr id="21" name="Rounded Rectangle 20"/>
-          <p:cNvSpPr/>
-          <p:nvPr>
-            <a:hlinkClick r:id="rId33"/>
-          </p:nvPr>
-        </p:nvSpPr>
-        <p:spPr>
-          <a:xfrm>
-            <a:off x="9531705" y="2682240"/>
-            <a:ext cx="2200046" cy="365760"/>
-          </a:xfrm>
-          <a:prstGeom prst="roundRect">
-            <a:avLst/>
-          </a:prstGeom>
-          <a:solidFill>
-            <a:srgbClr val="E8EEF7"/>
-          </a:solidFill>
-          <a:ln>
-            <a:solidFill>
-              <a:srgbClr val="1F3A5F"/>
-            </a:solidFill>
-          </a:ln>
-        </p:spPr>
-        <p:style>
-          <a:lnRef idx="1">
-            <a:schemeClr val="accent1"/>
-          </a:lnRef>
-          <a:fillRef idx="3">
-            <a:schemeClr val="accent1"/>
-          </a:fillRef>
-          <a:effectRef idx="2">
-            <a:schemeClr val="accent1"/>
-          </a:effectRef>
-          <a:fontRef idx="minor">
-            <a:schemeClr val="lt1"/>
-          </a:fontRef>
-        </p:style>
-        <p:txBody>
-          <a:bodyPr rtlCol="0" anchor="ctr" lIns="45720" rIns="45720"/>
-          <a:lstStyle/>
-          <a:p>
-            <a:pPr algn="ctr"/>
-            <a:r>
-              <a:rPr sz="900">
-                <a:solidFill>
-                  <a:srgbClr val="1F3A5F"/>
-                </a:solidFill>
-              </a:rPr>
-              <a:t>Gram 30: Ghost contact bearing 343, codename Dank</a:t>
-            </a:r>
-          </a:p>
-        </p:txBody>
-      </p:sp>
-      <p:sp>
-        <p:nvSpPr>
-          <p:cNvPr id="22" name="TextBox 21"/>
-          <p:cNvSpPr txBox="1"/>
-          <p:nvPr/>
-        </p:nvSpPr>
-        <p:spPr>
-          <a:xfrm>
-            <a:off x="9531705" y="3066288"/>
-            <a:ext cx="2200046" cy="1447800"/>
-          </a:xfrm>
-          <a:prstGeom prst="rect">
-            <a:avLst/>
-          </a:prstGeom>
-          <a:noFill/>
-        </p:spPr>
-        <p:txBody>
-          <a:bodyPr wrap="square">
-            <a:spAutoFit/>
-          </a:bodyPr>
-          <a:lstStyle/>
-          <a:p>
-            <a:r>
-              <a:rPr sz="800">
-                <a:hlinkClick r:id="rId34"/>
-              </a:rPr>
-              <a:t>Lofar 1</a:t>
-            </a:r>
-          </a:p>
-          <a:p>
-            <a:r>
-              <a:rPr sz="800">
-                <a:hlinkClick r:id="rId35"/>
-              </a:rPr>
-              <a:t>Lofar 2</a:t>
-            </a:r>
-          </a:p>
-          <a:p>
-            <a:r>
-              <a:rPr sz="800">
-                <a:hlinkClick r:id="rId36"/>
-              </a:rPr>
-              <a:t>Lofar 3</a:t>
-            </a:r>
-          </a:p>
-        </p:txBody>
-      </p:sp>
-      <p:sp>
-        <p:nvSpPr>
-          <p:cNvPr id="23" name="Rounded Rectangle 22"/>
-          <p:cNvSpPr/>
-          <p:nvPr>
-            <a:hlinkClick r:id="rId37"/>
-          </p:nvPr>
-        </p:nvSpPr>
-        <p:spPr>
-          <a:xfrm>
-            <a:off x="365760" y="4632960"/>
-            <a:ext cx="2200046" cy="365760"/>
-          </a:xfrm>
-          <a:prstGeom prst="roundRect">
-            <a:avLst/>
-          </a:prstGeom>
-          <a:solidFill>
-            <a:srgbClr val="E8EEF7"/>
-          </a:solidFill>
-          <a:ln>
-            <a:solidFill>
-              <a:srgbClr val="1F3A5F"/>
-            </a:solidFill>
-          </a:ln>
-        </p:spPr>
-        <p:style>
-          <a:lnRef idx="1">
-            <a:schemeClr val="accent1"/>
-          </a:lnRef>
-          <a:fillRef idx="3">
-            <a:schemeClr val="accent1"/>
-          </a:fillRef>
-          <a:effectRef idx="2">
-            <a:schemeClr val="accent1"/>
-          </a:effectRef>
-          <a:fontRef idx="minor">
-            <a:schemeClr val="lt1"/>
-          </a:fontRef>
-        </p:style>
-        <p:txBody>
-          <a:bodyPr rtlCol="0" anchor="ctr" lIns="45720" rIns="45720"/>
-          <a:lstStyle/>
-          <a:p>
-            <a:pPr algn="ctr"/>
-            <a:r>
-              <a:rPr sz="900">
-                <a:solidFill>
-                  <a:srgbClr val="1F3A5F"/>
-                </a:solidFill>
-              </a:rPr>
-              <a:t>Gram 31: FR Imperial-class, Category 1, Yavin</a:t>
-            </a:r>
-          </a:p>
-        </p:txBody>
-      </p:sp>
-      <p:sp>
-        <p:nvSpPr>
-          <p:cNvPr id="24" name="TextBox 23"/>
-          <p:cNvSpPr txBox="1"/>
-          <p:nvPr/>
-        </p:nvSpPr>
-        <p:spPr>
-          <a:xfrm>
-            <a:off x="365760" y="5017008"/>
-            <a:ext cx="2200046" cy="1447800"/>
-          </a:xfrm>
-          <a:prstGeom prst="rect">
-            <a:avLst/>
-          </a:prstGeom>
-          <a:noFill/>
-        </p:spPr>
-        <p:txBody>
-          <a:bodyPr wrap="square">
-            <a:spAutoFit/>
-          </a:bodyPr>
-          <a:lstStyle/>
-          <a:p>
-            <a:r>
-              <a:rPr sz="800">
-                <a:hlinkClick r:id="rId38"/>
-              </a:rPr>
-              <a:t>Lofar 1</a:t>
-            </a:r>
-          </a:p>
-          <a:p>
-            <a:r>
-              <a:rPr sz="800">
-                <a:hlinkClick r:id="rId39"/>
-              </a:rPr>
-              <a:t>Lofar 2</a:t>
-            </a:r>
-          </a:p>
-        </p:txBody>
-      </p:sp>
-      <p:sp>
-        <p:nvSpPr>
-          <p:cNvPr id="25" name="Rounded Rectangle 24"/>
-          <p:cNvSpPr/>
-          <p:nvPr>
-            <a:hlinkClick r:id="rId40"/>
-          </p:nvPr>
-        </p:nvSpPr>
-        <p:spPr>
-          <a:xfrm>
-            <a:off x="2657246" y="4632960"/>
-            <a:ext cx="2200046" cy="365760"/>
-          </a:xfrm>
-          <a:prstGeom prst="roundRect">
-            <a:avLst/>
-          </a:prstGeom>
-          <a:solidFill>
-            <a:srgbClr val="E8EEF7"/>
-          </a:solidFill>
-          <a:ln>
-            <a:solidFill>
-              <a:srgbClr val="1F3A5F"/>
-            </a:solidFill>
-          </a:ln>
-        </p:spPr>
-        <p:style>
-          <a:lnRef idx="1">
-            <a:schemeClr val="accent1"/>
-          </a:lnRef>
-          <a:fillRef idx="3">
-            <a:schemeClr val="accent1"/>
-          </a:fillRef>
-          <a:effectRef idx="2">
-            <a:schemeClr val="accent1"/>
-          </a:effectRef>
-          <a:fontRef idx="minor">
-            <a:schemeClr val="lt1"/>
-          </a:fontRef>
-        </p:style>
-        <p:txBody>
-          <a:bodyPr rtlCol="0" anchor="ctr" lIns="45720" rIns="45720"/>
-          <a:lstStyle/>
-          <a:p>
-            <a:pPr algn="ctr"/>
-            <a:r>
-              <a:rPr sz="900">
-                <a:solidFill>
-                  <a:srgbClr val="1F3A5F"/>
-                </a:solidFill>
-              </a:rPr>
-              <a:t>Gram 32: FR Outrider, Category 4, Mustafar</a:t>
-            </a:r>
-          </a:p>
-        </p:txBody>
-      </p:sp>
-      <p:sp>
-        <p:nvSpPr>
-          <p:cNvPr id="26" name="TextBox 25"/>
-          <p:cNvSpPr txBox="1"/>
-          <p:nvPr/>
-        </p:nvSpPr>
-        <p:spPr>
-          <a:xfrm>
-            <a:off x="2657246" y="5017008"/>
-            <a:ext cx="2200046" cy="1447800"/>
-          </a:xfrm>
-          <a:prstGeom prst="rect">
-            <a:avLst/>
-          </a:prstGeom>
-          <a:noFill/>
-        </p:spPr>
-        <p:txBody>
-          <a:bodyPr wrap="square">
-            <a:spAutoFit/>
-          </a:bodyPr>
-          <a:lstStyle/>
-          <a:p>
-            <a:r>
-              <a:rPr sz="800">
-                <a:hlinkClick r:id="rId41"/>
-              </a:rPr>
-              <a:t>Lofar 1</a:t>
-            </a:r>
-          </a:p>
-        </p:txBody>
-      </p:sp>
-      <p:sp>
-        <p:nvSpPr>
-          <p:cNvPr id="27" name="Rounded Rectangle 26"/>
-          <p:cNvSpPr/>
-          <p:nvPr>
-            <a:hlinkClick r:id="rId42"/>
-          </p:nvPr>
-        </p:nvSpPr>
-        <p:spPr>
-          <a:xfrm>
-            <a:off x="4948732" y="4632960"/>
-            <a:ext cx="2200046" cy="365760"/>
-          </a:xfrm>
-          <a:prstGeom prst="roundRect">
-            <a:avLst/>
-          </a:prstGeom>
-          <a:solidFill>
-            <a:srgbClr val="E8EEF7"/>
-          </a:solidFill>
-          <a:ln>
-            <a:solidFill>
-              <a:srgbClr val="1F3A5F"/>
-            </a:solidFill>
-          </a:ln>
-        </p:spPr>
-        <p:style>
-          <a:lnRef idx="1">
-            <a:schemeClr val="accent1"/>
-          </a:lnRef>
-          <a:fillRef idx="3">
-            <a:schemeClr val="accent1"/>
-          </a:fillRef>
-          <a:effectRef idx="2">
-            <a:schemeClr val="accent1"/>
-          </a:effectRef>
-          <a:fontRef idx="minor">
-            <a:schemeClr val="lt1"/>
-          </a:fontRef>
-        </p:style>
-        <p:txBody>
-          <a:bodyPr rtlCol="0" anchor="ctr" lIns="45720" rIns="45720"/>
-          <a:lstStyle/>
-          <a:p>
-            <a:pPr algn="ctr"/>
-            <a:r>
-              <a:rPr sz="900">
-                <a:solidFill>
-                  <a:srgbClr val="1F3A5F"/>
-                </a:solidFill>
-              </a:rPr>
-              <a:t>Gram 33: FR Lambda Shuttle, Category 4, Bespin</a:t>
-            </a:r>
-          </a:p>
-        </p:txBody>
-      </p:sp>
-      <p:sp>
-        <p:nvSpPr>
-          <p:cNvPr id="28" name="TextBox 27"/>
-          <p:cNvSpPr txBox="1"/>
-          <p:nvPr/>
-        </p:nvSpPr>
-        <p:spPr>
-          <a:xfrm>
-            <a:off x="4948732" y="5017008"/>
-            <a:ext cx="2200046" cy="1447800"/>
-          </a:xfrm>
-          <a:prstGeom prst="rect">
-            <a:avLst/>
-          </a:prstGeom>
-          <a:noFill/>
-        </p:spPr>
-        <p:txBody>
-          <a:bodyPr wrap="square">
-            <a:spAutoFit/>
-          </a:bodyPr>
-          <a:lstStyle/>
-          <a:p>
-            <a:r>
-              <a:rPr sz="800">
-                <a:hlinkClick r:id="rId43"/>
-              </a:rPr>
-              <a:t>Lofar 1</a:t>
-            </a:r>
-          </a:p>
-        </p:txBody>
-      </p:sp>
-      <p:sp>
-        <p:nvSpPr>
-          <p:cNvPr id="29" name="Rounded Rectangle 28"/>
-          <p:cNvSpPr/>
-          <p:nvPr>
-            <a:hlinkClick r:id="rId44"/>
-          </p:nvPr>
-        </p:nvSpPr>
-        <p:spPr>
-          <a:xfrm>
-            <a:off x="7240219" y="4632960"/>
-            <a:ext cx="2200046" cy="365760"/>
-          </a:xfrm>
-          <a:prstGeom prst="roundRect">
-            <a:avLst/>
-          </a:prstGeom>
-          <a:solidFill>
-            <a:srgbClr val="E8EEF7"/>
-          </a:solidFill>
-          <a:ln>
-            <a:solidFill>
-              <a:srgbClr val="1F3A5F"/>
-            </a:solidFill>
-          </a:ln>
-        </p:spPr>
-        <p:style>
-          <a:lnRef idx="1">
-            <a:schemeClr val="accent1"/>
-          </a:lnRef>
-          <a:fillRef idx="3">
-            <a:schemeClr val="accent1"/>
-          </a:fillRef>
-          <a:effectRef idx="2">
-            <a:schemeClr val="accent1"/>
-          </a:effectRef>
-          <a:fontRef idx="minor">
-            <a:schemeClr val="lt1"/>
-          </a:fontRef>
-        </p:style>
-        <p:txBody>
-          <a:bodyPr rtlCol="0" anchor="ctr" lIns="45720" rIns="45720"/>
-          <a:lstStyle/>
-          <a:p>
-            <a:pPr algn="ctr"/>
-            <a:r>
-              <a:rPr sz="900">
-                <a:solidFill>
-                  <a:srgbClr val="1F3A5F"/>
-                </a:solidFill>
-              </a:rPr>
-              <a:t>Gram 35: FR Ghost, Category 1, Tatooine</a:t>
-            </a:r>
-          </a:p>
-        </p:txBody>
-      </p:sp>
-      <p:sp>
-        <p:nvSpPr>
-          <p:cNvPr id="30" name="TextBox 29"/>
-          <p:cNvSpPr txBox="1"/>
-          <p:nvPr/>
-        </p:nvSpPr>
-        <p:spPr>
-          <a:xfrm>
-            <a:off x="7240219" y="5017008"/>
-            <a:ext cx="2200046" cy="1447800"/>
-          </a:xfrm>
-          <a:prstGeom prst="rect">
-            <a:avLst/>
-          </a:prstGeom>
-          <a:noFill/>
-        </p:spPr>
-        <p:txBody>
-          <a:bodyPr wrap="square">
-            <a:spAutoFit/>
-          </a:bodyPr>
-          <a:lstStyle/>
-          <a:p>
-            <a:r>
-              <a:rPr sz="800">
-                <a:hlinkClick r:id="rId45"/>
-              </a:rPr>
-              <a:t>Lofar 1</a:t>
-            </a:r>
-          </a:p>
-          <a:p>
-            <a:r>
-              <a:rPr sz="800">
-                <a:hlinkClick r:id="rId46"/>
-              </a:rPr>
-              <a:t>Lofar 2</a:t>
-            </a:r>
-          </a:p>
-          <a:p>
-            <a:r>
-              <a:rPr sz="800">
-                <a:hlinkClick r:id="rId47"/>
-              </a:rPr>
-              <a:t>Lofar 3</a:t>
-            </a:r>
-          </a:p>
-        </p:txBody>
-      </p:sp>
-      <p:sp>
-        <p:nvSpPr>
-          <p:cNvPr id="31" name="Rounded Rectangle 30"/>
-          <p:cNvSpPr/>
-          <p:nvPr>
-            <a:hlinkClick r:id="rId48"/>
-          </p:nvPr>
-        </p:nvSpPr>
-        <p:spPr>
-          <a:xfrm>
-            <a:off x="9531705" y="4632960"/>
-            <a:ext cx="2200046" cy="365760"/>
-          </a:xfrm>
-          <a:prstGeom prst="roundRect">
-            <a:avLst/>
-          </a:prstGeom>
-          <a:solidFill>
-            <a:srgbClr val="E8EEF7"/>
-          </a:solidFill>
-          <a:ln>
-            <a:solidFill>
-              <a:srgbClr val="1F3A5F"/>
-            </a:solidFill>
-          </a:ln>
-        </p:spPr>
-        <p:style>
-          <a:lnRef idx="1">
-            <a:schemeClr val="accent1"/>
-          </a:lnRef>
-          <a:fillRef idx="3">
-            <a:schemeClr val="accent1"/>
-          </a:fillRef>
-          <a:effectRef idx="2">
-            <a:schemeClr val="accent1"/>
-          </a:effectRef>
-          <a:fontRef idx="minor">
-            <a:schemeClr val="lt1"/>
-          </a:fontRef>
-        </p:style>
-        <p:txBody>
-          <a:bodyPr rtlCol="0" anchor="ctr" lIns="45720" rIns="45720"/>
-          <a:lstStyle/>
-          <a:p>
-            <a:pPr algn="ctr"/>
-            <a:r>
-              <a:rPr sz="900">
-                <a:solidFill>
-                  <a:srgbClr val="1F3A5F"/>
-                </a:solidFill>
-              </a:rPr>
-              <a:t>Gram 36: Rebel One contact bearing 243, codename Risa</a:t>
-            </a:r>
-          </a:p>
-        </p:txBody>
-      </p:sp>
-      <p:sp>
-        <p:nvSpPr>
-          <p:cNvPr id="32" name="TextBox 31"/>
-          <p:cNvSpPr txBox="1"/>
-          <p:nvPr/>
-        </p:nvSpPr>
-        <p:spPr>
-          <a:xfrm>
-            <a:off x="9531705" y="5017008"/>
-            <a:ext cx="2200046" cy="1447800"/>
-          </a:xfrm>
-          <a:prstGeom prst="rect">
-            <a:avLst/>
-          </a:prstGeom>
-          <a:noFill/>
-        </p:spPr>
-        <p:txBody>
-          <a:bodyPr wrap="square">
-            <a:spAutoFit/>
-          </a:bodyPr>
-          <a:lstStyle/>
-          <a:p>
-            <a:r>
-              <a:rPr sz="800">
-                <a:hlinkClick r:id="rId49"/>
-              </a:rPr>
-              <a:t>Lofar 1</a:t>
-            </a:r>
-          </a:p>
-          <a:p>
-            <a:r>
-              <a:rPr sz="800">
-                <a:hlinkClick r:id="rId50"/>
-              </a:rPr>
-              <a:t>Lofar 2</a:t>
-            </a:r>
-          </a:p>
-          <a:p>
-            <a:r>
-              <a:rPr sz="800">
-                <a:hlinkClick r:id="rId51"/>
-              </a:rPr>
-              <a:t>Lofar 3</a:t>
-            </a:r>
-          </a:p>
-          <a:p>
-            <a:r>
-              <a:rPr sz="800">
-                <a:hlinkClick r:id="rId52"/>
-              </a:rPr>
-              <a:t>Lofar 4</a:t>
-            </a:r>
-          </a:p>
-        </p:txBody>
-      </p:sp>
-    </p:spTree>
-  </p:cSld>
-  <p:clrMapOvr>
-    <a:masterClrMapping/>
-  </p:clrMapOvr>
-</p:sld>
-</file>
-
-<file path=ppt/slides/slide4.xml><?xml version="1.0" encoding="utf-8"?>
-<p:sld xmlns:a="http://schemas.openxmlformats.org/drawingml/2006/main" xmlns:p="http://schemas.openxmlformats.org/presentationml/2006/main" xmlns:r="http://schemas.openxmlformats.org/officeDocument/2006/relationships">
-  <p:cSld>
-    <p:spTree>
-      <p:nvGrpSpPr>
-        <p:cNvPr id="1" name=""/>
-        <p:cNvGrpSpPr/>
-        <p:nvPr/>
-      </p:nvGrpSpPr>
-      <p:grpSpPr/>
-      <p:sp>
-        <p:nvSpPr>
-          <p:cNvPr id="2" name="Rectangle 1"/>
-          <p:cNvSpPr/>
-          <p:nvPr/>
-        </p:nvSpPr>
-        <p:spPr>
-          <a:xfrm>
-            <a:off x="0" y="0"/>
-            <a:ext cx="12188952" cy="548640"/>
-          </a:xfrm>
-          <a:prstGeom prst="rect">
-            <a:avLst/>
-          </a:prstGeom>
-          <a:solidFill>
-            <a:srgbClr val="1F3A5F"/>
-          </a:solidFill>
-          <a:ln>
-            <a:noFill/>
-          </a:ln>
-        </p:spPr>
-        <p:style>
-          <a:lnRef idx="1">
-            <a:schemeClr val="accent1"/>
-          </a:lnRef>
-          <a:fillRef idx="3">
-            <a:schemeClr val="accent1"/>
-          </a:fillRef>
-          <a:effectRef idx="2">
-            <a:schemeClr val="accent1"/>
-          </a:effectRef>
-          <a:fontRef idx="minor">
-            <a:schemeClr val="lt1"/>
-          </a:fontRef>
-        </p:style>
-        <p:txBody>
-          <a:bodyPr rtlCol="0" anchor="ctr" lIns="182880" rIns="182880"/>
-          <a:lstStyle/>
-          <a:p>
-            <a:pPr algn="ctr"/>
-            <a:r>
-              <a:rPr sz="2000" b="1">
-                <a:solidFill>
-                  <a:srgbClr val="FFFFFF"/>
-                </a:solidFill>
-              </a:rPr>
-              <a:t>Instructor Week 2 Grams — Page 3 of 3</a:t>
-            </a:r>
-          </a:p>
-        </p:txBody>
-      </p:sp>
-      <p:sp>
-        <p:nvSpPr>
-          <p:cNvPr id="3" name="Rounded Rectangle 2"/>
-          <p:cNvSpPr/>
-          <p:nvPr>
-            <a:hlinkClick r:id="rId2"/>
-          </p:nvPr>
-        </p:nvSpPr>
-        <p:spPr>
-          <a:xfrm>
-            <a:off x="365760" y="731520"/>
-            <a:ext cx="2200046" cy="365760"/>
-          </a:xfrm>
-          <a:prstGeom prst="roundRect">
-            <a:avLst/>
-          </a:prstGeom>
-          <a:solidFill>
-            <a:srgbClr val="E8EEF7"/>
-          </a:solidFill>
-          <a:ln>
-            <a:solidFill>
-              <a:srgbClr val="1F3A5F"/>
-            </a:solidFill>
-          </a:ln>
-        </p:spPr>
-        <p:style>
-          <a:lnRef idx="1">
-            <a:schemeClr val="accent1"/>
-          </a:lnRef>
-          <a:fillRef idx="3">
-            <a:schemeClr val="accent1"/>
-          </a:fillRef>
-          <a:effectRef idx="2">
-            <a:schemeClr val="accent1"/>
-          </a:effectRef>
-          <a:fontRef idx="minor">
-            <a:schemeClr val="lt1"/>
-          </a:fontRef>
-        </p:style>
-        <p:txBody>
-          <a:bodyPr rtlCol="0" anchor="ctr" lIns="45720" rIns="45720"/>
-          <a:lstStyle/>
-          <a:p>
-            <a:pPr algn="ctr"/>
-            <a:r>
-              <a:rPr sz="900">
-                <a:solidFill>
-                  <a:srgbClr val="1F3A5F"/>
-                </a:solidFill>
-              </a:rPr>
-              <a:t>Gram 38: Prometheus contact bearing 214, codename Gandalf</a:t>
-            </a:r>
-          </a:p>
-        </p:txBody>
-      </p:sp>
-      <p:sp>
-        <p:nvSpPr>
-          <p:cNvPr id="4" name="TextBox 3"/>
-          <p:cNvSpPr txBox="1"/>
-          <p:nvPr/>
-        </p:nvSpPr>
-        <p:spPr>
-          <a:xfrm>
-            <a:off x="365760" y="1115568"/>
-            <a:ext cx="2200046" cy="1447800"/>
-          </a:xfrm>
-          <a:prstGeom prst="rect">
-            <a:avLst/>
-          </a:prstGeom>
-          <a:noFill/>
-        </p:spPr>
-        <p:txBody>
-          <a:bodyPr wrap="square">
-            <a:spAutoFit/>
-          </a:bodyPr>
-          <a:lstStyle/>
-          <a:p>
-            <a:r>
-              <a:rPr sz="800">
-                <a:hlinkClick r:id="rId3"/>
-              </a:rPr>
-              <a:t>Lofar 1</a:t>
-            </a:r>
-          </a:p>
-          <a:p>
-            <a:r>
-              <a:rPr sz="800">
-                <a:hlinkClick r:id="rId4"/>
-              </a:rPr>
-              <a:t>Lofar 2</a:t>
-            </a:r>
-          </a:p>
-        </p:txBody>
-      </p:sp>
-      <p:sp>
-        <p:nvSpPr>
-          <p:cNvPr id="5" name="Rounded Rectangle 4"/>
-          <p:cNvSpPr/>
-          <p:nvPr>
-            <a:hlinkClick r:id="rId5"/>
-          </p:nvPr>
-        </p:nvSpPr>
-        <p:spPr>
-          <a:xfrm>
-            <a:off x="2657246" y="731520"/>
-            <a:ext cx="2200046" cy="365760"/>
-          </a:xfrm>
-          <a:prstGeom prst="roundRect">
-            <a:avLst/>
-          </a:prstGeom>
-          <a:solidFill>
-            <a:srgbClr val="E8EEF7"/>
-          </a:solidFill>
-          <a:ln>
-            <a:solidFill>
-              <a:srgbClr val="1F3A5F"/>
-            </a:solidFill>
-          </a:ln>
-        </p:spPr>
-        <p:style>
-          <a:lnRef idx="1">
-            <a:schemeClr val="accent1"/>
-          </a:lnRef>
-          <a:fillRef idx="3">
-            <a:schemeClr val="accent1"/>
-          </a:fillRef>
-          <a:effectRef idx="2">
-            <a:schemeClr val="accent1"/>
-          </a:effectRef>
-          <a:fontRef idx="minor">
-            <a:schemeClr val="lt1"/>
-          </a:fontRef>
-        </p:style>
-        <p:txBody>
-          <a:bodyPr rtlCol="0" anchor="ctr" lIns="45720" rIns="45720"/>
-          <a:lstStyle/>
-          <a:p>
-            <a:pPr algn="ctr"/>
-            <a:r>
-              <a:rPr sz="900">
-                <a:solidFill>
-                  <a:srgbClr val="1F3A5F"/>
-                </a:solidFill>
-              </a:rPr>
-              <a:t>Gram 39: FR Razor Crest, Category 1, Romulus</a:t>
-            </a:r>
-          </a:p>
-        </p:txBody>
-      </p:sp>
-      <p:sp>
-        <p:nvSpPr>
-          <p:cNvPr id="6" name="TextBox 5"/>
-          <p:cNvSpPr txBox="1"/>
-          <p:nvPr/>
-        </p:nvSpPr>
-        <p:spPr>
-          <a:xfrm>
-            <a:off x="2657246" y="1115568"/>
-            <a:ext cx="2200046" cy="1447800"/>
-          </a:xfrm>
-          <a:prstGeom prst="rect">
-            <a:avLst/>
-          </a:prstGeom>
-          <a:noFill/>
-        </p:spPr>
-        <p:txBody>
-          <a:bodyPr wrap="square">
-            <a:spAutoFit/>
-          </a:bodyPr>
-          <a:lstStyle/>
-          <a:p>
-            <a:r>
-              <a:rPr sz="800">
-                <a:hlinkClick r:id="rId6"/>
-              </a:rPr>
-              <a:t>Lofar 1</a:t>
-            </a:r>
-          </a:p>
-          <a:p>
-            <a:r>
-              <a:rPr sz="800">
-                <a:hlinkClick r:id="rId7"/>
-              </a:rPr>
-              <a:t>Lofar 2</a:t>
-            </a:r>
-          </a:p>
-          <a:p>
-            <a:r>
-              <a:rPr sz="800">
-                <a:hlinkClick r:id="rId8"/>
-              </a:rPr>
-              <a:t>Lofar 3</a:t>
-            </a:r>
-          </a:p>
-        </p:txBody>
-      </p:sp>
-      <p:sp>
-        <p:nvSpPr>
-          <p:cNvPr id="7" name="Rounded Rectangle 6"/>
-          <p:cNvSpPr/>
-          <p:nvPr>
-            <a:hlinkClick r:id="rId9"/>
-          </p:nvPr>
-        </p:nvSpPr>
-        <p:spPr>
-          <a:xfrm>
-            <a:off x="4948732" y="731520"/>
-            <a:ext cx="2200046" cy="365760"/>
-          </a:xfrm>
-          <a:prstGeom prst="roundRect">
-            <a:avLst/>
-          </a:prstGeom>
-          <a:solidFill>
-            <a:srgbClr val="E8EEF7"/>
-          </a:solidFill>
-          <a:ln>
-            <a:solidFill>
-              <a:srgbClr val="1F3A5F"/>
-            </a:solidFill>
-          </a:ln>
-        </p:spPr>
-        <p:style>
-          <a:lnRef idx="1">
-            <a:schemeClr val="accent1"/>
-          </a:lnRef>
-          <a:fillRef idx="3">
-            <a:schemeClr val="accent1"/>
-          </a:fillRef>
-          <a:effectRef idx="2">
-            <a:schemeClr val="accent1"/>
-          </a:effectRef>
-          <a:fontRef idx="minor">
-            <a:schemeClr val="lt1"/>
-          </a:fontRef>
-        </p:style>
-        <p:txBody>
-          <a:bodyPr rtlCol="0" anchor="ctr" lIns="45720" rIns="45720"/>
-          <a:lstStyle/>
-          <a:p>
-            <a:pPr algn="ctr"/>
-            <a:r>
-              <a:rPr sz="900">
-                <a:solidFill>
-                  <a:srgbClr val="1F3A5F"/>
-                </a:solidFill>
-              </a:rPr>
-              <a:t>Gram 40: FR Outrider, Category 3, Bajor</a:t>
-            </a:r>
-          </a:p>
-        </p:txBody>
-      </p:sp>
-      <p:sp>
-        <p:nvSpPr>
-          <p:cNvPr id="8" name="TextBox 7"/>
-          <p:cNvSpPr txBox="1"/>
-          <p:nvPr/>
-        </p:nvSpPr>
-        <p:spPr>
-          <a:xfrm>
-            <a:off x="4948732" y="1115568"/>
-            <a:ext cx="2200046" cy="1447800"/>
-          </a:xfrm>
-          <a:prstGeom prst="rect">
-            <a:avLst/>
-          </a:prstGeom>
-          <a:noFill/>
-        </p:spPr>
-        <p:txBody>
-          <a:bodyPr wrap="square">
-            <a:spAutoFit/>
-          </a:bodyPr>
-          <a:lstStyle/>
-          <a:p>
-            <a:r>
-              <a:rPr sz="800">
-                <a:hlinkClick r:id="rId10"/>
-              </a:rPr>
-              <a:t>Lofar 1</a:t>
-            </a:r>
-          </a:p>
-          <a:p>
-            <a:r>
-              <a:rPr sz="800">
-                <a:hlinkClick r:id="rId11"/>
-              </a:rPr>
-              <a:t>Lofar 2</a:t>
-            </a:r>
-          </a:p>
-          <a:p>
-            <a:r>
-              <a:rPr sz="800">
-                <a:hlinkClick r:id="rId12"/>
-              </a:rPr>
-              <a:t>Lofar 3</a:t>
-            </a:r>
-          </a:p>
-          <a:p>
-            <a:r>
-              <a:rPr sz="800">
-                <a:hlinkClick r:id="rId13"/>
-              </a:rPr>
-              <a:t>Lofar 4</a:t>
-            </a:r>
-          </a:p>
-        </p:txBody>
-      </p:sp>
-      <p:sp>
-        <p:nvSpPr>
-          <p:cNvPr id="9" name="Rounded Rectangle 8"/>
-          <p:cNvSpPr/>
-          <p:nvPr>
-            <a:hlinkClick r:id="rId14"/>
-          </p:nvPr>
-        </p:nvSpPr>
-        <p:spPr>
-          <a:xfrm>
-            <a:off x="7240219" y="731520"/>
-            <a:ext cx="2200046" cy="365760"/>
-          </a:xfrm>
-          <a:prstGeom prst="roundRect">
-            <a:avLst/>
-          </a:prstGeom>
-          <a:solidFill>
-            <a:srgbClr val="E8EEF7"/>
-          </a:solidFill>
-          <a:ln>
-            <a:solidFill>
-              <a:srgbClr val="1F3A5F"/>
-            </a:solidFill>
-          </a:ln>
-        </p:spPr>
-        <p:style>
-          <a:lnRef idx="1">
-            <a:schemeClr val="accent1"/>
-          </a:lnRef>
-          <a:fillRef idx="3">
-            <a:schemeClr val="accent1"/>
-          </a:fillRef>
-          <a:effectRef idx="2">
-            <a:schemeClr val="accent1"/>
-          </a:effectRef>
-          <a:fontRef idx="minor">
-            <a:schemeClr val="lt1"/>
-          </a:fontRef>
-        </p:style>
-        <p:txBody>
-          <a:bodyPr rtlCol="0" anchor="ctr" lIns="45720" rIns="45720"/>
-          <a:lstStyle/>
-          <a:p>
-            <a:pPr algn="ctr"/>
-            <a:r>
-              <a:rPr sz="900">
-                <a:solidFill>
-                  <a:srgbClr val="1F3A5F"/>
-                </a:solidFill>
-              </a:rPr>
-              <a:t>Gram 41: FR TIE Bomber, Category 2, Vulcan</a:t>
-            </a:r>
-          </a:p>
-        </p:txBody>
-      </p:sp>
-      <p:sp>
-        <p:nvSpPr>
-          <p:cNvPr id="10" name="TextBox 9"/>
-          <p:cNvSpPr txBox="1"/>
-          <p:nvPr/>
-        </p:nvSpPr>
-        <p:spPr>
-          <a:xfrm>
-            <a:off x="7240219" y="1115568"/>
-            <a:ext cx="2200046" cy="1447800"/>
-          </a:xfrm>
-          <a:prstGeom prst="rect">
-            <a:avLst/>
-          </a:prstGeom>
-          <a:noFill/>
-        </p:spPr>
-        <p:txBody>
-          <a:bodyPr wrap="square">
-            <a:spAutoFit/>
-          </a:bodyPr>
-          <a:lstStyle/>
-          <a:p>
-            <a:r>
-              <a:rPr sz="800">
-                <a:hlinkClick r:id="rId15"/>
-              </a:rPr>
-              <a:t>Lofar 1</a:t>
-            </a:r>
-          </a:p>
-          <a:p>
-            <a:r>
-              <a:rPr sz="800">
-                <a:hlinkClick r:id="rId16"/>
-              </a:rPr>
-              <a:t>Lofar 2</a:t>
-            </a:r>
-          </a:p>
-          <a:p>
-            <a:r>
-              <a:rPr sz="800">
-                <a:hlinkClick r:id="rId17"/>
-              </a:rPr>
-              <a:t>Lofar 3</a:t>
-            </a:r>
-          </a:p>
-          <a:p>
-            <a:r>
-              <a:rPr sz="800">
-                <a:hlinkClick r:id="rId18"/>
-              </a:rPr>
-              <a:t>Lofar 4</a:t>
-            </a:r>
-          </a:p>
-        </p:txBody>
-      </p:sp>
-      <p:sp>
-        <p:nvSpPr>
-          <p:cNvPr id="11" name="Rounded Rectangle 10"/>
-          <p:cNvSpPr/>
-          <p:nvPr>
-            <a:hlinkClick r:id="rId19"/>
-          </p:nvPr>
-        </p:nvSpPr>
-        <p:spPr>
-          <a:xfrm>
-            <a:off x="9531705" y="731520"/>
-            <a:ext cx="2200046" cy="365760"/>
-          </a:xfrm>
-          <a:prstGeom prst="roundRect">
-            <a:avLst/>
-          </a:prstGeom>
-          <a:solidFill>
-            <a:srgbClr val="E8EEF7"/>
-          </a:solidFill>
-          <a:ln>
-            <a:solidFill>
-              <a:srgbClr val="1F3A5F"/>
-            </a:solidFill>
-          </a:ln>
-        </p:spPr>
-        <p:style>
-          <a:lnRef idx="1">
-            <a:schemeClr val="accent1"/>
-          </a:lnRef>
-          <a:fillRef idx="3">
-            <a:schemeClr val="accent1"/>
-          </a:fillRef>
-          <a:effectRef idx="2">
-            <a:schemeClr val="accent1"/>
-          </a:effectRef>
-          <a:fontRef idx="minor">
-            <a:schemeClr val="lt1"/>
-          </a:fontRef>
-        </p:style>
-        <p:txBody>
-          <a:bodyPr rtlCol="0" anchor="ctr" lIns="45720" rIns="45720"/>
-          <a:lstStyle/>
-          <a:p>
-            <a:pPr algn="ctr"/>
-            <a:r>
-              <a:rPr sz="900">
-                <a:solidFill>
-                  <a:srgbClr val="1F3A5F"/>
-                </a:solidFill>
-              </a:rPr>
-              <a:t>Gram 42: FR Nebulon-B, Category 2, Romulus</a:t>
-            </a:r>
-          </a:p>
-        </p:txBody>
-      </p:sp>
-      <p:sp>
-        <p:nvSpPr>
-          <p:cNvPr id="12" name="TextBox 11"/>
-          <p:cNvSpPr txBox="1"/>
-          <p:nvPr/>
-        </p:nvSpPr>
-        <p:spPr>
-          <a:xfrm>
-            <a:off x="9531705" y="1115568"/>
-            <a:ext cx="2200046" cy="1447800"/>
-          </a:xfrm>
-          <a:prstGeom prst="rect">
-            <a:avLst/>
-          </a:prstGeom>
-          <a:noFill/>
-        </p:spPr>
-        <p:txBody>
-          <a:bodyPr wrap="square">
-            <a:spAutoFit/>
-          </a:bodyPr>
-          <a:lstStyle/>
-          <a:p>
-            <a:r>
-              <a:rPr sz="800">
-                <a:hlinkClick r:id="rId20"/>
-              </a:rPr>
-              <a:t>Lofar 1</a:t>
-            </a:r>
-          </a:p>
-        </p:txBody>
-      </p:sp>
-    </p:spTree>
-  </p:cSld>
-  <p:clrMapOvr>
-    <a:masterClrMapping/>
-  </p:clrMapOvr>
-</p:sld>
-</file>
-
-<file path=ppt/slides/slide5.xml><?xml version="1.0" encoding="utf-8"?>
-<p:sld xmlns:a="http://schemas.openxmlformats.org/drawingml/2006/main" xmlns:p="http://schemas.openxmlformats.org/presentationml/2006/main" xmlns:r="http://schemas.openxmlformats.org/officeDocument/2006/relationships">
-  <p:cSld>
-    <p:spTree>
-      <p:nvGrpSpPr>
-        <p:cNvPr id="1" name=""/>
-        <p:cNvGrpSpPr/>
-        <p:nvPr/>
-      </p:nvGrpSpPr>
-      <p:grpSpPr/>
-      <p:sp>
-        <p:nvSpPr>
-          <p:cNvPr id="2" name="TextBox 1"/>
-          <p:cNvSpPr txBox="1"/>
-          <p:nvPr/>
-        </p:nvSpPr>
-        <p:spPr>
-          <a:xfrm>
-            <a:off x="914400" y="2377440"/>
-            <a:ext cx="10360152" cy="1280160"/>
-          </a:xfrm>
-          <a:prstGeom prst="rect">
-            <a:avLst/>
-          </a:prstGeom>
-          <a:noFill/>
-        </p:spPr>
-        <p:txBody>
-          <a:bodyPr wrap="square">
-            <a:spAutoFit/>
-          </a:bodyPr>
-          <a:lstStyle/>
-          <a:p>
-            <a:pPr algn="ctr"/>
-            <a:r>
-              <a:rPr sz="4000" b="1">
-                <a:solidFill>
-                  <a:srgbClr val="1F3A5F"/>
-                </a:solidFill>
-              </a:rPr>
-              <a:t>End of Instructor Week 2 Grams</a:t>
-            </a:r>
-          </a:p>
-        </p:txBody>
-      </p:sp>
-      <p:sp>
-        <p:nvSpPr>
-          <p:cNvPr id="3" name="TextBox 2"/>
-          <p:cNvSpPr txBox="1"/>
-          <p:nvPr/>
-        </p:nvSpPr>
-        <p:spPr>
-          <a:xfrm>
-            <a:off x="914400" y="3840480"/>
-            <a:ext cx="10360152" cy="731520"/>
-          </a:xfrm>
-          <a:prstGeom prst="rect">
-            <a:avLst/>
-          </a:prstGeom>
-          <a:noFill/>
-        </p:spPr>
-        <p:txBody>
-          <a:bodyPr wrap="none">
-            <a:spAutoFit/>
-          </a:bodyPr>
-          <a:lstStyle/>
-          <a:p>
-            <a:pPr algn="ctr"/>
-            <a:r>
-              <a:rPr sz="2400">
-                <a:solidFill>
-                  <a:srgbClr val="1F3A5F"/>
-                </a:solidFill>
-              </a:rPr>
-              <a:t>Instructor Version</a:t>
             </a:r>
           </a:p>
         </p:txBody>

--- a/source/Instructor Week 2 Grams/Instructor Week 2 Grams.pptx
+++ b/source/Instructor Week 2 Grams/Instructor Week 2 Grams.pptx
@@ -8,6 +8,8 @@
     <p:sldId id="256" r:id="rId7"/>
     <p:sldId id="257" r:id="rId8"/>
     <p:sldId id="258" r:id="rId9"/>
+    <p:sldId id="259" r:id="rId10"/>
+    <p:sldId id="260" r:id="rId11"/>
   </p:sldIdLst>
   <p:sldSz cx="12188952" cy="6858000" type="screen4x3"/>
   <p:notesSz cx="6858000" cy="9144000"/>
@@ -3092,120 +3094,48 @@
       <p:grpSpPr/>
       <p:sp>
         <p:nvSpPr>
-          <p:cNvPr id="2" name="Rectangle 1"/>
-          <p:cNvSpPr/>
-          <p:nvPr/>
-        </p:nvSpPr>
-        <p:spPr>
-          <a:xfrm>
-            <a:off x="0" y="0"/>
-            <a:ext cx="12188952" cy="548640"/>
+          <p:cNvPr id="2" name="TextBox 1"/>
+          <p:cNvSpPr txBox="1"/>
+          <p:nvPr/>
+        </p:nvSpPr>
+        <p:spPr>
+          <a:xfrm>
+            <a:off x="914400" y="2377440"/>
+            <a:ext cx="10360152" cy="1280160"/>
           </a:xfrm>
           <a:prstGeom prst="rect">
             <a:avLst/>
           </a:prstGeom>
-          <a:solidFill>
-            <a:srgbClr val="1F3A5F"/>
-          </a:solidFill>
-          <a:ln>
-            <a:noFill/>
-          </a:ln>
-        </p:spPr>
-        <p:style>
-          <a:lnRef idx="1">
-            <a:schemeClr val="accent1"/>
-          </a:lnRef>
-          <a:fillRef idx="3">
-            <a:schemeClr val="accent1"/>
-          </a:fillRef>
-          <a:effectRef idx="2">
-            <a:schemeClr val="accent1"/>
-          </a:effectRef>
-          <a:fontRef idx="minor">
-            <a:schemeClr val="lt1"/>
-          </a:fontRef>
-        </p:style>
-        <p:txBody>
-          <a:bodyPr rtlCol="0" anchor="ctr" lIns="182880" rIns="182880"/>
+          <a:noFill/>
+        </p:spPr>
+        <p:txBody>
+          <a:bodyPr wrap="square">
+            <a:spAutoFit/>
+          </a:bodyPr>
           <a:lstStyle/>
           <a:p>
             <a:pPr algn="ctr"/>
             <a:r>
-              <a:rPr sz="2000" b="1">
-                <a:solidFill>
-                  <a:srgbClr val="FFFFFF"/>
-                </a:solidFill>
-              </a:rPr>
-              <a:t>Instructor Week 2 Grams — Page 1 of 3</a:t>
-            </a:r>
-          </a:p>
-        </p:txBody>
-      </p:sp>
-      <p:sp>
-        <p:nvSpPr>
-          <p:cNvPr id="3" name="Rounded Rectangle 2">
-            <a:hlinkClick r:id="rId2"/>
-          </p:cNvPr>
-          <p:cNvSpPr/>
-          <p:nvPr/>
-        </p:nvSpPr>
-        <p:spPr>
-          <a:xfrm>
-            <a:off x="365760" y="731520"/>
-            <a:ext cx="2200046" cy="365760"/>
-          </a:xfrm>
-          <a:prstGeom prst="roundRect">
-            <a:avLst/>
-          </a:prstGeom>
-          <a:solidFill>
-            <a:srgbClr val="E8EEF7"/>
-          </a:solidFill>
-          <a:ln>
-            <a:solidFill>
-              <a:srgbClr val="1F3A5F"/>
-            </a:solidFill>
-          </a:ln>
-        </p:spPr>
-        <p:style>
-          <a:lnRef idx="1">
-            <a:schemeClr val="accent1"/>
-          </a:lnRef>
-          <a:fillRef idx="3">
-            <a:schemeClr val="accent1"/>
-          </a:fillRef>
-          <a:effectRef idx="2">
-            <a:schemeClr val="accent1"/>
-          </a:effectRef>
-          <a:fontRef idx="minor">
-            <a:schemeClr val="lt1"/>
-          </a:fontRef>
-        </p:style>
-        <p:txBody>
-          <a:bodyPr rtlCol="0" anchor="ctr" lIns="45720" rIns="45720"/>
-          <a:lstStyle/>
-          <a:p>
-            <a:pPr algn="ctr"/>
-            <a:r>
-              <a:rPr sz="900">
+              <a:rPr sz="4000" b="1">
                 <a:solidFill>
                   <a:srgbClr val="1F3A5F"/>
                 </a:solidFill>
               </a:rPr>
-              <a:t>Gram 1: FR Razor Crest, Category 1, Kronos</a:t>
-            </a:r>
-          </a:p>
-        </p:txBody>
-      </p:sp>
-      <p:sp>
-        <p:nvSpPr>
-          <p:cNvPr id="4" name="TextBox 3"/>
+              <a:t>Welcome to Instructor Week 2 Grams</a:t>
+            </a:r>
+          </a:p>
+        </p:txBody>
+      </p:sp>
+      <p:sp>
+        <p:nvSpPr>
+          <p:cNvPr id="3" name="TextBox 2"/>
           <p:cNvSpPr txBox="1"/>
           <p:nvPr/>
         </p:nvSpPr>
         <p:spPr>
           <a:xfrm>
-            <a:off x="365760" y="1115568"/>
-            <a:ext cx="2200046" cy="1447800"/>
+            <a:off x="914400" y="3840480"/>
+            <a:ext cx="10360152" cy="731520"/>
           </a:xfrm>
           <a:prstGeom prst="rect">
             <a:avLst/>
@@ -3213,1404 +3143,19 @@
           <a:noFill/>
         </p:spPr>
         <p:txBody>
-          <a:bodyPr wrap="square">
+          <a:bodyPr wrap="none">
             <a:spAutoFit/>
           </a:bodyPr>
           <a:lstStyle/>
           <a:p>
-            <a:r>
-              <a:rPr sz="800">
-                <a:hlinkClick r:id="rId3"/>
-              </a:rPr>
-              <a:t>Lofar 1</a:t>
-            </a:r>
-          </a:p>
-          <a:p>
-            <a:r>
-              <a:rPr sz="800">
-                <a:hlinkClick r:id="rId4"/>
-              </a:rPr>
-              <a:t>Lofar 2</a:t>
-            </a:r>
-          </a:p>
-        </p:txBody>
-      </p:sp>
-      <p:sp>
-        <p:nvSpPr>
-          <p:cNvPr id="5" name="Rounded Rectangle 4">
-            <a:hlinkClick r:id="rId5"/>
-          </p:cNvPr>
-          <p:cNvSpPr/>
-          <p:nvPr/>
-        </p:nvSpPr>
-        <p:spPr>
-          <a:xfrm>
-            <a:off x="2657246" y="731520"/>
-            <a:ext cx="2200046" cy="365760"/>
-          </a:xfrm>
-          <a:prstGeom prst="roundRect">
-            <a:avLst/>
-          </a:prstGeom>
-          <a:solidFill>
-            <a:srgbClr val="E8EEF7"/>
-          </a:solidFill>
-          <a:ln>
-            <a:solidFill>
-              <a:srgbClr val="1F3A5F"/>
-            </a:solidFill>
-          </a:ln>
-        </p:spPr>
-        <p:style>
-          <a:lnRef idx="1">
-            <a:schemeClr val="accent1"/>
-          </a:lnRef>
-          <a:fillRef idx="3">
-            <a:schemeClr val="accent1"/>
-          </a:fillRef>
-          <a:effectRef idx="2">
-            <a:schemeClr val="accent1"/>
-          </a:effectRef>
-          <a:fontRef idx="minor">
-            <a:schemeClr val="lt1"/>
-          </a:fontRef>
-        </p:style>
-        <p:txBody>
-          <a:bodyPr rtlCol="0" anchor="ctr" lIns="45720" rIns="45720"/>
-          <a:lstStyle/>
-          <a:p>
             <a:pPr algn="ctr"/>
             <a:r>
-              <a:rPr sz="900">
+              <a:rPr sz="2400">
                 <a:solidFill>
                   <a:srgbClr val="1F3A5F"/>
                 </a:solidFill>
               </a:rPr>
-              <a:t>Gram 2: FR Razor Crest, Category 3, Kobol</a:t>
-            </a:r>
-          </a:p>
-        </p:txBody>
-      </p:sp>
-      <p:sp>
-        <p:nvSpPr>
-          <p:cNvPr id="6" name="TextBox 5"/>
-          <p:cNvSpPr txBox="1"/>
-          <p:nvPr/>
-        </p:nvSpPr>
-        <p:spPr>
-          <a:xfrm>
-            <a:off x="2657246" y="1115568"/>
-            <a:ext cx="2200046" cy="1447800"/>
-          </a:xfrm>
-          <a:prstGeom prst="rect">
-            <a:avLst/>
-          </a:prstGeom>
-          <a:noFill/>
-        </p:spPr>
-        <p:txBody>
-          <a:bodyPr wrap="square">
-            <a:spAutoFit/>
-          </a:bodyPr>
-          <a:lstStyle/>
-          <a:p>
-            <a:r>
-              <a:rPr sz="800">
-                <a:hlinkClick r:id="rId6"/>
-              </a:rPr>
-              <a:t>Lofar 1</a:t>
-            </a:r>
-          </a:p>
-          <a:p>
-            <a:r>
-              <a:rPr sz="800">
-                <a:hlinkClick r:id="rId7"/>
-              </a:rPr>
-              <a:t>Lofar 2</a:t>
-            </a:r>
-          </a:p>
-          <a:p>
-            <a:r>
-              <a:rPr sz="800">
-                <a:hlinkClick r:id="rId8"/>
-              </a:rPr>
-              <a:t>Lofar 3</a:t>
-            </a:r>
-          </a:p>
-          <a:p>
-            <a:r>
-              <a:rPr sz="800">
-                <a:hlinkClick r:id="rId9"/>
-              </a:rPr>
-              <a:t>Lofar 4</a:t>
-            </a:r>
-          </a:p>
-        </p:txBody>
-      </p:sp>
-      <p:sp>
-        <p:nvSpPr>
-          <p:cNvPr id="7" name="Rounded Rectangle 6">
-            <a:hlinkClick r:id="rId10"/>
-          </p:cNvPr>
-          <p:cNvSpPr/>
-          <p:nvPr/>
-        </p:nvSpPr>
-        <p:spPr>
-          <a:xfrm>
-            <a:off x="4948732" y="731520"/>
-            <a:ext cx="2200046" cy="365760"/>
-          </a:xfrm>
-          <a:prstGeom prst="roundRect">
-            <a:avLst/>
-          </a:prstGeom>
-          <a:solidFill>
-            <a:srgbClr val="E8EEF7"/>
-          </a:solidFill>
-          <a:ln>
-            <a:solidFill>
-              <a:srgbClr val="1F3A5F"/>
-            </a:solidFill>
-          </a:ln>
-        </p:spPr>
-        <p:style>
-          <a:lnRef idx="1">
-            <a:schemeClr val="accent1"/>
-          </a:lnRef>
-          <a:fillRef idx="3">
-            <a:schemeClr val="accent1"/>
-          </a:fillRef>
-          <a:effectRef idx="2">
-            <a:schemeClr val="accent1"/>
-          </a:effectRef>
-          <a:fontRef idx="minor">
-            <a:schemeClr val="lt1"/>
-          </a:fontRef>
-        </p:style>
-        <p:txBody>
-          <a:bodyPr rtlCol="0" anchor="ctr" lIns="45720" rIns="45720"/>
-          <a:lstStyle/>
-          <a:p>
-            <a:pPr algn="ctr"/>
-            <a:r>
-              <a:rPr sz="900">
-                <a:solidFill>
-                  <a:srgbClr val="1F3A5F"/>
-                </a:solidFill>
-              </a:rPr>
-              <a:t>Gram 3: Slave I contact bearing 280, codename Yavin</a:t>
-            </a:r>
-          </a:p>
-        </p:txBody>
-      </p:sp>
-      <p:sp>
-        <p:nvSpPr>
-          <p:cNvPr id="8" name="TextBox 7"/>
-          <p:cNvSpPr txBox="1"/>
-          <p:nvPr/>
-        </p:nvSpPr>
-        <p:spPr>
-          <a:xfrm>
-            <a:off x="4948732" y="1115568"/>
-            <a:ext cx="2200046" cy="1447800"/>
-          </a:xfrm>
-          <a:prstGeom prst="rect">
-            <a:avLst/>
-          </a:prstGeom>
-          <a:noFill/>
-        </p:spPr>
-        <p:txBody>
-          <a:bodyPr wrap="square">
-            <a:spAutoFit/>
-          </a:bodyPr>
-          <a:lstStyle/>
-          <a:p>
-            <a:r>
-              <a:rPr sz="800">
-                <a:hlinkClick r:id="rId11"/>
-              </a:rPr>
-              <a:t>Lofar 1</a:t>
-            </a:r>
-          </a:p>
-          <a:p>
-            <a:r>
-              <a:rPr sz="800">
-                <a:hlinkClick r:id="rId12"/>
-              </a:rPr>
-              <a:t>Lofar 2</a:t>
-            </a:r>
-          </a:p>
-          <a:p>
-            <a:r>
-              <a:rPr sz="800">
-                <a:hlinkClick r:id="rId13"/>
-              </a:rPr>
-              <a:t>Lofar 3</a:t>
-            </a:r>
-          </a:p>
-          <a:p>
-            <a:r>
-              <a:rPr sz="800">
-                <a:hlinkClick r:id="rId14"/>
-              </a:rPr>
-              <a:t>Lofar 4</a:t>
-            </a:r>
-          </a:p>
-        </p:txBody>
-      </p:sp>
-      <p:sp>
-        <p:nvSpPr>
-          <p:cNvPr id="9" name="Rounded Rectangle 8">
-            <a:hlinkClick r:id="rId15"/>
-          </p:cNvPr>
-          <p:cNvSpPr/>
-          <p:nvPr/>
-        </p:nvSpPr>
-        <p:spPr>
-          <a:xfrm>
-            <a:off x="7240219" y="731520"/>
-            <a:ext cx="2200046" cy="365760"/>
-          </a:xfrm>
-          <a:prstGeom prst="roundRect">
-            <a:avLst/>
-          </a:prstGeom>
-          <a:solidFill>
-            <a:srgbClr val="E8EEF7"/>
-          </a:solidFill>
-          <a:ln>
-            <a:solidFill>
-              <a:srgbClr val="1F3A5F"/>
-            </a:solidFill>
-          </a:ln>
-        </p:spPr>
-        <p:style>
-          <a:lnRef idx="1">
-            <a:schemeClr val="accent1"/>
-          </a:lnRef>
-          <a:fillRef idx="3">
-            <a:schemeClr val="accent1"/>
-          </a:fillRef>
-          <a:effectRef idx="2">
-            <a:schemeClr val="accent1"/>
-          </a:effectRef>
-          <a:fontRef idx="minor">
-            <a:schemeClr val="lt1"/>
-          </a:fontRef>
-        </p:style>
-        <p:txBody>
-          <a:bodyPr rtlCol="0" anchor="ctr" lIns="45720" rIns="45720"/>
-          <a:lstStyle/>
-          <a:p>
-            <a:pPr algn="ctr"/>
-            <a:r>
-              <a:rPr sz="900">
-                <a:solidFill>
-                  <a:srgbClr val="1F3A5F"/>
-                </a:solidFill>
-              </a:rPr>
-              <a:t>Gram 4: FR Cerritos, Category 4, Gandalf</a:t>
-            </a:r>
-          </a:p>
-        </p:txBody>
-      </p:sp>
-      <p:sp>
-        <p:nvSpPr>
-          <p:cNvPr id="10" name="TextBox 9"/>
-          <p:cNvSpPr txBox="1"/>
-          <p:nvPr/>
-        </p:nvSpPr>
-        <p:spPr>
-          <a:xfrm>
-            <a:off x="7240219" y="1115568"/>
-            <a:ext cx="2200046" cy="1447800"/>
-          </a:xfrm>
-          <a:prstGeom prst="rect">
-            <a:avLst/>
-          </a:prstGeom>
-          <a:noFill/>
-        </p:spPr>
-        <p:txBody>
-          <a:bodyPr wrap="square">
-            <a:spAutoFit/>
-          </a:bodyPr>
-          <a:lstStyle/>
-          <a:p>
-            <a:r>
-              <a:rPr sz="800">
-                <a:hlinkClick r:id="rId16"/>
-              </a:rPr>
-              <a:t>Lofar 1</a:t>
-            </a:r>
-          </a:p>
-          <a:p>
-            <a:r>
-              <a:rPr sz="800">
-                <a:hlinkClick r:id="rId17"/>
-              </a:rPr>
-              <a:t>Lofar 2</a:t>
-            </a:r>
-          </a:p>
-        </p:txBody>
-      </p:sp>
-      <p:sp>
-        <p:nvSpPr>
-          <p:cNvPr id="11" name="Rounded Rectangle 10">
-            <a:hlinkClick r:id="rId18"/>
-          </p:cNvPr>
-          <p:cNvSpPr/>
-          <p:nvPr/>
-        </p:nvSpPr>
-        <p:spPr>
-          <a:xfrm>
-            <a:off x="9531705" y="731520"/>
-            <a:ext cx="2200046" cy="365760"/>
-          </a:xfrm>
-          <a:prstGeom prst="roundRect">
-            <a:avLst/>
-          </a:prstGeom>
-          <a:solidFill>
-            <a:srgbClr val="E8EEF7"/>
-          </a:solidFill>
-          <a:ln>
-            <a:solidFill>
-              <a:srgbClr val="1F3A5F"/>
-            </a:solidFill>
-          </a:ln>
-        </p:spPr>
-        <p:style>
-          <a:lnRef idx="1">
-            <a:schemeClr val="accent1"/>
-          </a:lnRef>
-          <a:fillRef idx="3">
-            <a:schemeClr val="accent1"/>
-          </a:fillRef>
-          <a:effectRef idx="2">
-            <a:schemeClr val="accent1"/>
-          </a:effectRef>
-          <a:fontRef idx="minor">
-            <a:schemeClr val="lt1"/>
-          </a:fontRef>
-        </p:style>
-        <p:txBody>
-          <a:bodyPr rtlCol="0" anchor="ctr" lIns="45720" rIns="45720"/>
-          <a:lstStyle/>
-          <a:p>
-            <a:pPr algn="ctr"/>
-            <a:r>
-              <a:rPr sz="900">
-                <a:solidFill>
-                  <a:srgbClr val="1F3A5F"/>
-                </a:solidFill>
-              </a:rPr>
-              <a:t>Gram 5: FR A-wing, Category 2, Endor</a:t>
-            </a:r>
-          </a:p>
-        </p:txBody>
-      </p:sp>
-      <p:sp>
-        <p:nvSpPr>
-          <p:cNvPr id="12" name="TextBox 11"/>
-          <p:cNvSpPr txBox="1"/>
-          <p:nvPr/>
-        </p:nvSpPr>
-        <p:spPr>
-          <a:xfrm>
-            <a:off x="9531705" y="1115568"/>
-            <a:ext cx="2200046" cy="1447800"/>
-          </a:xfrm>
-          <a:prstGeom prst="rect">
-            <a:avLst/>
-          </a:prstGeom>
-          <a:noFill/>
-        </p:spPr>
-        <p:txBody>
-          <a:bodyPr wrap="square">
-            <a:spAutoFit/>
-          </a:bodyPr>
-          <a:lstStyle/>
-          <a:p>
-            <a:r>
-              <a:rPr sz="800">
-                <a:hlinkClick r:id="rId19"/>
-              </a:rPr>
-              <a:t>Lofar 1</a:t>
-            </a:r>
-          </a:p>
-          <a:p>
-            <a:r>
-              <a:rPr sz="800">
-                <a:hlinkClick r:id="rId20"/>
-              </a:rPr>
-              <a:t>Lofar 2</a:t>
-            </a:r>
-          </a:p>
-          <a:p>
-            <a:r>
-              <a:rPr sz="800">
-                <a:hlinkClick r:id="rId21"/>
-              </a:rPr>
-              <a:t>Lofar 3</a:t>
-            </a:r>
-          </a:p>
-          <a:p>
-            <a:r>
-              <a:rPr sz="800">
-                <a:hlinkClick r:id="rId22"/>
-              </a:rPr>
-              <a:t>Lofar 4</a:t>
-            </a:r>
-          </a:p>
-        </p:txBody>
-      </p:sp>
-      <p:sp>
-        <p:nvSpPr>
-          <p:cNvPr id="13" name="Rounded Rectangle 12">
-            <a:hlinkClick r:id="rId23"/>
-          </p:cNvPr>
-          <p:cNvSpPr/>
-          <p:nvPr/>
-        </p:nvSpPr>
-        <p:spPr>
-          <a:xfrm>
-            <a:off x="365760" y="2682240"/>
-            <a:ext cx="2200046" cy="365760"/>
-          </a:xfrm>
-          <a:prstGeom prst="roundRect">
-            <a:avLst/>
-          </a:prstGeom>
-          <a:solidFill>
-            <a:srgbClr val="E8EEF7"/>
-          </a:solidFill>
-          <a:ln>
-            <a:solidFill>
-              <a:srgbClr val="1F3A5F"/>
-            </a:solidFill>
-          </a:ln>
-        </p:spPr>
-        <p:style>
-          <a:lnRef idx="1">
-            <a:schemeClr val="accent1"/>
-          </a:lnRef>
-          <a:fillRef idx="3">
-            <a:schemeClr val="accent1"/>
-          </a:fillRef>
-          <a:effectRef idx="2">
-            <a:schemeClr val="accent1"/>
-          </a:effectRef>
-          <a:fontRef idx="minor">
-            <a:schemeClr val="lt1"/>
-          </a:fontRef>
-        </p:style>
-        <p:txBody>
-          <a:bodyPr rtlCol="0" anchor="ctr" lIns="45720" rIns="45720"/>
-          <a:lstStyle/>
-          <a:p>
-            <a:pPr algn="ctr"/>
-            <a:r>
-              <a:rPr sz="900">
-                <a:solidFill>
-                  <a:srgbClr val="1F3A5F"/>
-                </a:solidFill>
-              </a:rPr>
-              <a:t>Gram 7: FR Discovery, Category 2, Dagobah</a:t>
-            </a:r>
-          </a:p>
-        </p:txBody>
-      </p:sp>
-      <p:sp>
-        <p:nvSpPr>
-          <p:cNvPr id="14" name="TextBox 13"/>
-          <p:cNvSpPr txBox="1"/>
-          <p:nvPr/>
-        </p:nvSpPr>
-        <p:spPr>
-          <a:xfrm>
-            <a:off x="365760" y="3066288"/>
-            <a:ext cx="2200046" cy="1447800"/>
-          </a:xfrm>
-          <a:prstGeom prst="rect">
-            <a:avLst/>
-          </a:prstGeom>
-          <a:noFill/>
-        </p:spPr>
-        <p:txBody>
-          <a:bodyPr wrap="square">
-            <a:spAutoFit/>
-          </a:bodyPr>
-          <a:lstStyle/>
-          <a:p>
-            <a:r>
-              <a:rPr sz="800">
-                <a:hlinkClick r:id="rId24"/>
-              </a:rPr>
-              <a:t>Lofar 1</a:t>
-            </a:r>
-          </a:p>
-          <a:p>
-            <a:r>
-              <a:rPr sz="800">
-                <a:hlinkClick r:id="rId25"/>
-              </a:rPr>
-              <a:t>Lofar 2</a:t>
-            </a:r>
-          </a:p>
-          <a:p>
-            <a:r>
-              <a:rPr sz="800">
-                <a:hlinkClick r:id="rId26"/>
-              </a:rPr>
-              <a:t>Lofar 3</a:t>
-            </a:r>
-          </a:p>
-        </p:txBody>
-      </p:sp>
-      <p:sp>
-        <p:nvSpPr>
-          <p:cNvPr id="15" name="Rounded Rectangle 14">
-            <a:hlinkClick r:id="rId27"/>
-          </p:cNvPr>
-          <p:cNvSpPr/>
-          <p:nvPr/>
-        </p:nvSpPr>
-        <p:spPr>
-          <a:xfrm>
-            <a:off x="2657246" y="2682240"/>
-            <a:ext cx="2200046" cy="365760"/>
-          </a:xfrm>
-          <a:prstGeom prst="roundRect">
-            <a:avLst/>
-          </a:prstGeom>
-          <a:solidFill>
-            <a:srgbClr val="E8EEF7"/>
-          </a:solidFill>
-          <a:ln>
-            <a:solidFill>
-              <a:srgbClr val="1F3A5F"/>
-            </a:solidFill>
-          </a:ln>
-        </p:spPr>
-        <p:style>
-          <a:lnRef idx="1">
-            <a:schemeClr val="accent1"/>
-          </a:lnRef>
-          <a:fillRef idx="3">
-            <a:schemeClr val="accent1"/>
-          </a:fillRef>
-          <a:effectRef idx="2">
-            <a:schemeClr val="accent1"/>
-          </a:effectRef>
-          <a:fontRef idx="minor">
-            <a:schemeClr val="lt1"/>
-          </a:fontRef>
-        </p:style>
-        <p:txBody>
-          <a:bodyPr rtlCol="0" anchor="ctr" lIns="45720" rIns="45720"/>
-          <a:lstStyle/>
-          <a:p>
-            <a:pPr algn="ctr"/>
-            <a:r>
-              <a:rPr sz="900">
-                <a:solidFill>
-                  <a:srgbClr val="1F3A5F"/>
-                </a:solidFill>
-              </a:rPr>
-              <a:t>Gram 9: FR Star Destroyer, Category 1, Yavin</a:t>
-            </a:r>
-          </a:p>
-        </p:txBody>
-      </p:sp>
-      <p:sp>
-        <p:nvSpPr>
-          <p:cNvPr id="16" name="TextBox 15"/>
-          <p:cNvSpPr txBox="1"/>
-          <p:nvPr/>
-        </p:nvSpPr>
-        <p:spPr>
-          <a:xfrm>
-            <a:off x="2657246" y="3066288"/>
-            <a:ext cx="2200046" cy="1447800"/>
-          </a:xfrm>
-          <a:prstGeom prst="rect">
-            <a:avLst/>
-          </a:prstGeom>
-          <a:noFill/>
-        </p:spPr>
-        <p:txBody>
-          <a:bodyPr wrap="square">
-            <a:spAutoFit/>
-          </a:bodyPr>
-          <a:lstStyle/>
-          <a:p>
-            <a:r>
-              <a:rPr sz="800">
-                <a:hlinkClick r:id="rId28"/>
-              </a:rPr>
-              <a:t>Lofar 1</a:t>
-            </a:r>
-          </a:p>
-        </p:txBody>
-      </p:sp>
-      <p:sp>
-        <p:nvSpPr>
-          <p:cNvPr id="17" name="Rounded Rectangle 16">
-            <a:hlinkClick r:id="rId29"/>
-          </p:cNvPr>
-          <p:cNvSpPr/>
-          <p:nvPr/>
-        </p:nvSpPr>
-        <p:spPr>
-          <a:xfrm>
-            <a:off x="4948732" y="2682240"/>
-            <a:ext cx="2200046" cy="365760"/>
-          </a:xfrm>
-          <a:prstGeom prst="roundRect">
-            <a:avLst/>
-          </a:prstGeom>
-          <a:solidFill>
-            <a:srgbClr val="E8EEF7"/>
-          </a:solidFill>
-          <a:ln>
-            <a:solidFill>
-              <a:srgbClr val="1F3A5F"/>
-            </a:solidFill>
-          </a:ln>
-        </p:spPr>
-        <p:style>
-          <a:lnRef idx="1">
-            <a:schemeClr val="accent1"/>
-          </a:lnRef>
-          <a:fillRef idx="3">
-            <a:schemeClr val="accent1"/>
-          </a:fillRef>
-          <a:effectRef idx="2">
-            <a:schemeClr val="accent1"/>
-          </a:effectRef>
-          <a:fontRef idx="minor">
-            <a:schemeClr val="lt1"/>
-          </a:fontRef>
-        </p:style>
-        <p:txBody>
-          <a:bodyPr rtlCol="0" anchor="ctr" lIns="45720" rIns="45720"/>
-          <a:lstStyle/>
-          <a:p>
-            <a:pPr algn="ctr"/>
-            <a:r>
-              <a:rPr sz="900">
-                <a:solidFill>
-                  <a:srgbClr val="1F3A5F"/>
-                </a:solidFill>
-              </a:rPr>
-              <a:t>Gram 10: FR Venator-class, Category 4, Bajor</a:t>
-            </a:r>
-          </a:p>
-        </p:txBody>
-      </p:sp>
-      <p:sp>
-        <p:nvSpPr>
-          <p:cNvPr id="18" name="TextBox 17"/>
-          <p:cNvSpPr txBox="1"/>
-          <p:nvPr/>
-        </p:nvSpPr>
-        <p:spPr>
-          <a:xfrm>
-            <a:off x="4948732" y="3066288"/>
-            <a:ext cx="2200046" cy="1447800"/>
-          </a:xfrm>
-          <a:prstGeom prst="rect">
-            <a:avLst/>
-          </a:prstGeom>
-          <a:noFill/>
-        </p:spPr>
-        <p:txBody>
-          <a:bodyPr wrap="square">
-            <a:spAutoFit/>
-          </a:bodyPr>
-          <a:lstStyle/>
-          <a:p>
-            <a:r>
-              <a:rPr sz="800">
-                <a:hlinkClick r:id="rId30"/>
-              </a:rPr>
-              <a:t>Lofar 1</a:t>
-            </a:r>
-          </a:p>
-          <a:p>
-            <a:r>
-              <a:rPr sz="800">
-                <a:hlinkClick r:id="rId31"/>
-              </a:rPr>
-              <a:t>Lofar 2</a:t>
-            </a:r>
-          </a:p>
-          <a:p>
-            <a:r>
-              <a:rPr sz="800">
-                <a:hlinkClick r:id="rId32"/>
-              </a:rPr>
-              <a:t>Lofar 3</a:t>
-            </a:r>
-          </a:p>
-        </p:txBody>
-      </p:sp>
-      <p:sp>
-        <p:nvSpPr>
-          <p:cNvPr id="19" name="Rounded Rectangle 18">
-            <a:hlinkClick r:id="rId33"/>
-          </p:cNvPr>
-          <p:cNvSpPr/>
-          <p:nvPr/>
-        </p:nvSpPr>
-        <p:spPr>
-          <a:xfrm>
-            <a:off x="7240219" y="2682240"/>
-            <a:ext cx="2200046" cy="365760"/>
-          </a:xfrm>
-          <a:prstGeom prst="roundRect">
-            <a:avLst/>
-          </a:prstGeom>
-          <a:solidFill>
-            <a:srgbClr val="E8EEF7"/>
-          </a:solidFill>
-          <a:ln>
-            <a:solidFill>
-              <a:srgbClr val="1F3A5F"/>
-            </a:solidFill>
-          </a:ln>
-        </p:spPr>
-        <p:style>
-          <a:lnRef idx="1">
-            <a:schemeClr val="accent1"/>
-          </a:lnRef>
-          <a:fillRef idx="3">
-            <a:schemeClr val="accent1"/>
-          </a:fillRef>
-          <a:effectRef idx="2">
-            <a:schemeClr val="accent1"/>
-          </a:effectRef>
-          <a:fontRef idx="minor">
-            <a:schemeClr val="lt1"/>
-          </a:fontRef>
-        </p:style>
-        <p:txBody>
-          <a:bodyPr rtlCol="0" anchor="ctr" lIns="45720" rIns="45720"/>
-          <a:lstStyle/>
-          <a:p>
-            <a:pPr algn="ctr"/>
-            <a:r>
-              <a:rPr sz="900">
-                <a:solidFill>
-                  <a:srgbClr val="1F3A5F"/>
-                </a:solidFill>
-              </a:rPr>
-              <a:t>Gram 11: FR Voyager, Category 1, Trill</a:t>
-            </a:r>
-          </a:p>
-        </p:txBody>
-      </p:sp>
-      <p:sp>
-        <p:nvSpPr>
-          <p:cNvPr id="20" name="TextBox 19"/>
-          <p:cNvSpPr txBox="1"/>
-          <p:nvPr/>
-        </p:nvSpPr>
-        <p:spPr>
-          <a:xfrm>
-            <a:off x="7240219" y="3066288"/>
-            <a:ext cx="2200046" cy="1447800"/>
-          </a:xfrm>
-          <a:prstGeom prst="rect">
-            <a:avLst/>
-          </a:prstGeom>
-          <a:noFill/>
-        </p:spPr>
-        <p:txBody>
-          <a:bodyPr wrap="square">
-            <a:spAutoFit/>
-          </a:bodyPr>
-          <a:lstStyle/>
-          <a:p>
-            <a:r>
-              <a:rPr sz="800">
-                <a:hlinkClick r:id="rId34"/>
-              </a:rPr>
-              <a:t>Lofar 1</a:t>
-            </a:r>
-          </a:p>
-          <a:p>
-            <a:r>
-              <a:rPr sz="800">
-                <a:hlinkClick r:id="rId35"/>
-              </a:rPr>
-              <a:t>Lofar 2</a:t>
-            </a:r>
-          </a:p>
-          <a:p>
-            <a:r>
-              <a:rPr sz="800">
-                <a:hlinkClick r:id="rId36"/>
-              </a:rPr>
-              <a:t>Lofar 3</a:t>
-            </a:r>
-          </a:p>
-        </p:txBody>
-      </p:sp>
-      <p:sp>
-        <p:nvSpPr>
-          <p:cNvPr id="21" name="Rounded Rectangle 20">
-            <a:hlinkClick r:id="rId37"/>
-          </p:cNvPr>
-          <p:cNvSpPr/>
-          <p:nvPr/>
-        </p:nvSpPr>
-        <p:spPr>
-          <a:xfrm>
-            <a:off x="9531705" y="2682240"/>
-            <a:ext cx="2200046" cy="365760"/>
-          </a:xfrm>
-          <a:prstGeom prst="roundRect">
-            <a:avLst/>
-          </a:prstGeom>
-          <a:solidFill>
-            <a:srgbClr val="E8EEF7"/>
-          </a:solidFill>
-          <a:ln>
-            <a:solidFill>
-              <a:srgbClr val="1F3A5F"/>
-            </a:solidFill>
-          </a:ln>
-        </p:spPr>
-        <p:style>
-          <a:lnRef idx="1">
-            <a:schemeClr val="accent1"/>
-          </a:lnRef>
-          <a:fillRef idx="3">
-            <a:schemeClr val="accent1"/>
-          </a:fillRef>
-          <a:effectRef idx="2">
-            <a:schemeClr val="accent1"/>
-          </a:effectRef>
-          <a:fontRef idx="minor">
-            <a:schemeClr val="lt1"/>
-          </a:fontRef>
-        </p:style>
-        <p:txBody>
-          <a:bodyPr rtlCol="0" anchor="ctr" lIns="45720" rIns="45720"/>
-          <a:lstStyle/>
-          <a:p>
-            <a:pPr algn="ctr"/>
-            <a:r>
-              <a:rPr sz="900">
-                <a:solidFill>
-                  <a:srgbClr val="1F3A5F"/>
-                </a:solidFill>
-              </a:rPr>
-              <a:t>Gram 12: FR Ghost, Category 3, Tantive</a:t>
-            </a:r>
-          </a:p>
-        </p:txBody>
-      </p:sp>
-      <p:sp>
-        <p:nvSpPr>
-          <p:cNvPr id="22" name="TextBox 21"/>
-          <p:cNvSpPr txBox="1"/>
-          <p:nvPr/>
-        </p:nvSpPr>
-        <p:spPr>
-          <a:xfrm>
-            <a:off x="9531705" y="3066288"/>
-            <a:ext cx="2200046" cy="1447800"/>
-          </a:xfrm>
-          <a:prstGeom prst="rect">
-            <a:avLst/>
-          </a:prstGeom>
-          <a:noFill/>
-        </p:spPr>
-        <p:txBody>
-          <a:bodyPr wrap="square">
-            <a:spAutoFit/>
-          </a:bodyPr>
-          <a:lstStyle/>
-          <a:p>
-            <a:r>
-              <a:rPr sz="800">
-                <a:hlinkClick r:id="rId38"/>
-              </a:rPr>
-              <a:t>Lofar 1</a:t>
-            </a:r>
-          </a:p>
-          <a:p>
-            <a:r>
-              <a:rPr sz="800">
-                <a:hlinkClick r:id="rId39"/>
-              </a:rPr>
-              <a:t>Lofar 2</a:t>
-            </a:r>
-          </a:p>
-        </p:txBody>
-      </p:sp>
-      <p:sp>
-        <p:nvSpPr>
-          <p:cNvPr id="23" name="Rounded Rectangle 22">
-            <a:hlinkClick r:id="rId40"/>
-          </p:cNvPr>
-          <p:cNvSpPr/>
-          <p:nvPr/>
-        </p:nvSpPr>
-        <p:spPr>
-          <a:xfrm>
-            <a:off x="365760" y="4632960"/>
-            <a:ext cx="2200046" cy="365760"/>
-          </a:xfrm>
-          <a:prstGeom prst="roundRect">
-            <a:avLst/>
-          </a:prstGeom>
-          <a:solidFill>
-            <a:srgbClr val="E8EEF7"/>
-          </a:solidFill>
-          <a:ln>
-            <a:solidFill>
-              <a:srgbClr val="1F3A5F"/>
-            </a:solidFill>
-          </a:ln>
-        </p:spPr>
-        <p:style>
-          <a:lnRef idx="1">
-            <a:schemeClr val="accent1"/>
-          </a:lnRef>
-          <a:fillRef idx="3">
-            <a:schemeClr val="accent1"/>
-          </a:fillRef>
-          <a:effectRef idx="2">
-            <a:schemeClr val="accent1"/>
-          </a:effectRef>
-          <a:fontRef idx="minor">
-            <a:schemeClr val="lt1"/>
-          </a:fontRef>
-        </p:style>
-        <p:txBody>
-          <a:bodyPr rtlCol="0" anchor="ctr" lIns="45720" rIns="45720"/>
-          <a:lstStyle/>
-          <a:p>
-            <a:pPr algn="ctr"/>
-            <a:r>
-              <a:rPr sz="900">
-                <a:solidFill>
-                  <a:srgbClr val="1F3A5F"/>
-                </a:solidFill>
-              </a:rPr>
-              <a:t>Gram 13: FR Venator-class, Category 4, Bajor</a:t>
-            </a:r>
-          </a:p>
-        </p:txBody>
-      </p:sp>
-      <p:sp>
-        <p:nvSpPr>
-          <p:cNvPr id="24" name="TextBox 23"/>
-          <p:cNvSpPr txBox="1"/>
-          <p:nvPr/>
-        </p:nvSpPr>
-        <p:spPr>
-          <a:xfrm>
-            <a:off x="365760" y="5017008"/>
-            <a:ext cx="2200046" cy="1447800"/>
-          </a:xfrm>
-          <a:prstGeom prst="rect">
-            <a:avLst/>
-          </a:prstGeom>
-          <a:noFill/>
-        </p:spPr>
-        <p:txBody>
-          <a:bodyPr wrap="square">
-            <a:spAutoFit/>
-          </a:bodyPr>
-          <a:lstStyle/>
-          <a:p>
-            <a:r>
-              <a:rPr sz="800">
-                <a:hlinkClick r:id="rId41"/>
-              </a:rPr>
-              <a:t>Lofar 1</a:t>
-            </a:r>
-          </a:p>
-        </p:txBody>
-      </p:sp>
-      <p:sp>
-        <p:nvSpPr>
-          <p:cNvPr id="25" name="Rounded Rectangle 24">
-            <a:hlinkClick r:id="rId42"/>
-          </p:cNvPr>
-          <p:cNvSpPr/>
-          <p:nvPr/>
-        </p:nvSpPr>
-        <p:spPr>
-          <a:xfrm>
-            <a:off x="2657246" y="4632960"/>
-            <a:ext cx="2200046" cy="365760"/>
-          </a:xfrm>
-          <a:prstGeom prst="roundRect">
-            <a:avLst/>
-          </a:prstGeom>
-          <a:solidFill>
-            <a:srgbClr val="E8EEF7"/>
-          </a:solidFill>
-          <a:ln>
-            <a:solidFill>
-              <a:srgbClr val="1F3A5F"/>
-            </a:solidFill>
-          </a:ln>
-        </p:spPr>
-        <p:style>
-          <a:lnRef idx="1">
-            <a:schemeClr val="accent1"/>
-          </a:lnRef>
-          <a:fillRef idx="3">
-            <a:schemeClr val="accent1"/>
-          </a:fillRef>
-          <a:effectRef idx="2">
-            <a:schemeClr val="accent1"/>
-          </a:effectRef>
-          <a:fontRef idx="minor">
-            <a:schemeClr val="lt1"/>
-          </a:fontRef>
-        </p:style>
-        <p:txBody>
-          <a:bodyPr rtlCol="0" anchor="ctr" lIns="45720" rIns="45720"/>
-          <a:lstStyle/>
-          <a:p>
-            <a:pPr algn="ctr"/>
-            <a:r>
-              <a:rPr sz="900">
-                <a:solidFill>
-                  <a:srgbClr val="1F3A5F"/>
-                </a:solidFill>
-              </a:rPr>
-              <a:t>Gram 14: FR Nebula-class, Category 1, Caprica</a:t>
-            </a:r>
-          </a:p>
-        </p:txBody>
-      </p:sp>
-      <p:sp>
-        <p:nvSpPr>
-          <p:cNvPr id="26" name="TextBox 25"/>
-          <p:cNvSpPr txBox="1"/>
-          <p:nvPr/>
-        </p:nvSpPr>
-        <p:spPr>
-          <a:xfrm>
-            <a:off x="2657246" y="5017008"/>
-            <a:ext cx="2200046" cy="1447800"/>
-          </a:xfrm>
-          <a:prstGeom prst="rect">
-            <a:avLst/>
-          </a:prstGeom>
-          <a:noFill/>
-        </p:spPr>
-        <p:txBody>
-          <a:bodyPr wrap="square">
-            <a:spAutoFit/>
-          </a:bodyPr>
-          <a:lstStyle/>
-          <a:p>
-            <a:r>
-              <a:rPr sz="800">
-                <a:hlinkClick r:id="rId43"/>
-              </a:rPr>
-              <a:t>Lofar 1</a:t>
-            </a:r>
-          </a:p>
-        </p:txBody>
-      </p:sp>
-      <p:sp>
-        <p:nvSpPr>
-          <p:cNvPr id="27" name="Rounded Rectangle 26">
-            <a:hlinkClick r:id="rId44"/>
-          </p:cNvPr>
-          <p:cNvSpPr/>
-          <p:nvPr/>
-        </p:nvSpPr>
-        <p:spPr>
-          <a:xfrm>
-            <a:off x="4948732" y="4632960"/>
-            <a:ext cx="2200046" cy="365760"/>
-          </a:xfrm>
-          <a:prstGeom prst="roundRect">
-            <a:avLst/>
-          </a:prstGeom>
-          <a:solidFill>
-            <a:srgbClr val="E8EEF7"/>
-          </a:solidFill>
-          <a:ln>
-            <a:solidFill>
-              <a:srgbClr val="1F3A5F"/>
-            </a:solidFill>
-          </a:ln>
-        </p:spPr>
-        <p:style>
-          <a:lnRef idx="1">
-            <a:schemeClr val="accent1"/>
-          </a:lnRef>
-          <a:fillRef idx="3">
-            <a:schemeClr val="accent1"/>
-          </a:fillRef>
-          <a:effectRef idx="2">
-            <a:schemeClr val="accent1"/>
-          </a:effectRef>
-          <a:fontRef idx="minor">
-            <a:schemeClr val="lt1"/>
-          </a:fontRef>
-        </p:style>
-        <p:txBody>
-          <a:bodyPr rtlCol="0" anchor="ctr" lIns="45720" rIns="45720"/>
-          <a:lstStyle/>
-          <a:p>
-            <a:pPr algn="ctr"/>
-            <a:r>
-              <a:rPr sz="900">
-                <a:solidFill>
-                  <a:srgbClr val="1F3A5F"/>
-                </a:solidFill>
-              </a:rPr>
-              <a:t>Gram 15: FR Sovereign-class, Category 1, Bajor</a:t>
-            </a:r>
-          </a:p>
-        </p:txBody>
-      </p:sp>
-      <p:sp>
-        <p:nvSpPr>
-          <p:cNvPr id="28" name="TextBox 27"/>
-          <p:cNvSpPr txBox="1"/>
-          <p:nvPr/>
-        </p:nvSpPr>
-        <p:spPr>
-          <a:xfrm>
-            <a:off x="4948732" y="5017008"/>
-            <a:ext cx="2200046" cy="1447800"/>
-          </a:xfrm>
-          <a:prstGeom prst="rect">
-            <a:avLst/>
-          </a:prstGeom>
-          <a:noFill/>
-        </p:spPr>
-        <p:txBody>
-          <a:bodyPr wrap="square">
-            <a:spAutoFit/>
-          </a:bodyPr>
-          <a:lstStyle/>
-          <a:p>
-            <a:r>
-              <a:rPr sz="800">
-                <a:hlinkClick r:id="rId45"/>
-              </a:rPr>
-              <a:t>Lofar 1</a:t>
-            </a:r>
-          </a:p>
-          <a:p>
-            <a:r>
-              <a:rPr sz="800">
-                <a:hlinkClick r:id="rId46"/>
-              </a:rPr>
-              <a:t>Lofar 2</a:t>
-            </a:r>
-          </a:p>
-          <a:p>
-            <a:r>
-              <a:rPr sz="800">
-                <a:hlinkClick r:id="rId47"/>
-              </a:rPr>
-              <a:t>Lofar 3</a:t>
-            </a:r>
-          </a:p>
-          <a:p>
-            <a:r>
-              <a:rPr sz="800">
-                <a:hlinkClick r:id="rId48"/>
-              </a:rPr>
-              <a:t>Lofar 4</a:t>
-            </a:r>
-          </a:p>
-        </p:txBody>
-      </p:sp>
-      <p:sp>
-        <p:nvSpPr>
-          <p:cNvPr id="29" name="Rounded Rectangle 28">
-            <a:hlinkClick r:id="rId49"/>
-          </p:cNvPr>
-          <p:cNvSpPr/>
-          <p:nvPr/>
-        </p:nvSpPr>
-        <p:spPr>
-          <a:xfrm>
-            <a:off x="7240219" y="4632960"/>
-            <a:ext cx="2200046" cy="365760"/>
-          </a:xfrm>
-          <a:prstGeom prst="roundRect">
-            <a:avLst/>
-          </a:prstGeom>
-          <a:solidFill>
-            <a:srgbClr val="E8EEF7"/>
-          </a:solidFill>
-          <a:ln>
-            <a:solidFill>
-              <a:srgbClr val="1F3A5F"/>
-            </a:solidFill>
-          </a:ln>
-        </p:spPr>
-        <p:style>
-          <a:lnRef idx="1">
-            <a:schemeClr val="accent1"/>
-          </a:lnRef>
-          <a:fillRef idx="3">
-            <a:schemeClr val="accent1"/>
-          </a:fillRef>
-          <a:effectRef idx="2">
-            <a:schemeClr val="accent1"/>
-          </a:effectRef>
-          <a:fontRef idx="minor">
-            <a:schemeClr val="lt1"/>
-          </a:fontRef>
-        </p:style>
-        <p:txBody>
-          <a:bodyPr rtlCol="0" anchor="ctr" lIns="45720" rIns="45720"/>
-          <a:lstStyle/>
-          <a:p>
-            <a:pPr algn="ctr"/>
-            <a:r>
-              <a:rPr sz="900">
-                <a:solidFill>
-                  <a:srgbClr val="1F3A5F"/>
-                </a:solidFill>
-              </a:rPr>
-              <a:t>Gram 16: FR TIE Fighter, Category 3, Yavin</a:t>
-            </a:r>
-          </a:p>
-        </p:txBody>
-      </p:sp>
-      <p:sp>
-        <p:nvSpPr>
-          <p:cNvPr id="30" name="TextBox 29"/>
-          <p:cNvSpPr txBox="1"/>
-          <p:nvPr/>
-        </p:nvSpPr>
-        <p:spPr>
-          <a:xfrm>
-            <a:off x="7240219" y="5017008"/>
-            <a:ext cx="2200046" cy="1447800"/>
-          </a:xfrm>
-          <a:prstGeom prst="rect">
-            <a:avLst/>
-          </a:prstGeom>
-          <a:noFill/>
-        </p:spPr>
-        <p:txBody>
-          <a:bodyPr wrap="square">
-            <a:spAutoFit/>
-          </a:bodyPr>
-          <a:lstStyle/>
-          <a:p>
-            <a:r>
-              <a:rPr sz="800">
-                <a:hlinkClick r:id="rId50"/>
-              </a:rPr>
-              <a:t>Lofar 1</a:t>
-            </a:r>
-          </a:p>
-        </p:txBody>
-      </p:sp>
-      <p:sp>
-        <p:nvSpPr>
-          <p:cNvPr id="31" name="Rounded Rectangle 30">
-            <a:hlinkClick r:id="rId51"/>
-          </p:cNvPr>
-          <p:cNvSpPr/>
-          <p:nvPr/>
-        </p:nvSpPr>
-        <p:spPr>
-          <a:xfrm>
-            <a:off x="9531705" y="4632960"/>
-            <a:ext cx="2200046" cy="365760"/>
-          </a:xfrm>
-          <a:prstGeom prst="roundRect">
-            <a:avLst/>
-          </a:prstGeom>
-          <a:solidFill>
-            <a:srgbClr val="E8EEF7"/>
-          </a:solidFill>
-          <a:ln>
-            <a:solidFill>
-              <a:srgbClr val="1F3A5F"/>
-            </a:solidFill>
-          </a:ln>
-        </p:spPr>
-        <p:style>
-          <a:lnRef idx="1">
-            <a:schemeClr val="accent1"/>
-          </a:lnRef>
-          <a:fillRef idx="3">
-            <a:schemeClr val="accent1"/>
-          </a:fillRef>
-          <a:effectRef idx="2">
-            <a:schemeClr val="accent1"/>
-          </a:effectRef>
-          <a:fontRef idx="minor">
-            <a:schemeClr val="lt1"/>
-          </a:fontRef>
-        </p:style>
-        <p:txBody>
-          <a:bodyPr rtlCol="0" anchor="ctr" lIns="45720" rIns="45720"/>
-          <a:lstStyle/>
-          <a:p>
-            <a:pPr algn="ctr"/>
-            <a:r>
-              <a:rPr sz="900">
-                <a:solidFill>
-                  <a:srgbClr val="1F3A5F"/>
-                </a:solidFill>
-              </a:rPr>
-              <a:t>Gram 18: FR Nebula-class, Category 4, Risa</a:t>
-            </a:r>
-          </a:p>
-        </p:txBody>
-      </p:sp>
-      <p:sp>
-        <p:nvSpPr>
-          <p:cNvPr id="32" name="TextBox 31"/>
-          <p:cNvSpPr txBox="1"/>
-          <p:nvPr/>
-        </p:nvSpPr>
-        <p:spPr>
-          <a:xfrm>
-            <a:off x="9531705" y="5017008"/>
-            <a:ext cx="2200046" cy="1447800"/>
-          </a:xfrm>
-          <a:prstGeom prst="rect">
-            <a:avLst/>
-          </a:prstGeom>
-          <a:noFill/>
-        </p:spPr>
-        <p:txBody>
-          <a:bodyPr wrap="square">
-            <a:spAutoFit/>
-          </a:bodyPr>
-          <a:lstStyle/>
-          <a:p>
-            <a:r>
-              <a:rPr sz="800">
-                <a:hlinkClick r:id="rId52"/>
-              </a:rPr>
-              <a:t>Lofar 1</a:t>
-            </a:r>
-          </a:p>
-          <a:p>
-            <a:r>
-              <a:rPr sz="800">
-                <a:hlinkClick r:id="rId53"/>
-              </a:rPr>
-              <a:t>Lofar 2</a:t>
-            </a:r>
-          </a:p>
-          <a:p>
-            <a:r>
-              <a:rPr sz="800">
-                <a:hlinkClick r:id="rId54"/>
-              </a:rPr>
-              <a:t>Lofar 3</a:t>
+              <a:t>Instructor Version</a:t>
             </a:r>
           </a:p>
         </p:txBody>
@@ -4679,7 +3224,7 @@
                   <a:srgbClr val="FFFFFF"/>
                 </a:solidFill>
               </a:rPr>
-              <a:t>Instructor Week 2 Grams — Page 2 of 3</a:t>
+              <a:t>Instructor Week 2 Grams — Page 1 of 3</a:t>
             </a:r>
           </a:p>
         </p:txBody>
@@ -4734,7 +3279,7 @@
                   <a:srgbClr val="1F3A5F"/>
                 </a:solidFill>
               </a:rPr>
-              <a:t>Gram 19: Akira-class contact bearing 162, codename Tatooine</a:t>
+              <a:t>Gram 1: FR Razor Crest, Category 1, Kronos</a:t>
             </a:r>
           </a:p>
         </p:txBody>
@@ -4768,12 +3313,20 @@
               <a:t>Lofar 1</a:t>
             </a:r>
           </a:p>
+          <a:p>
+            <a:r>
+              <a:rPr sz="800">
+                <a:hlinkClick r:id="rId4"/>
+              </a:rPr>
+              <a:t>Lofar 2</a:t>
+            </a:r>
+          </a:p>
         </p:txBody>
       </p:sp>
       <p:sp>
         <p:nvSpPr>
           <p:cNvPr id="5" name="Rounded Rectangle 4">
-            <a:hlinkClick r:id="rId4"/>
+            <a:hlinkClick r:id="rId5"/>
           </p:cNvPr>
           <p:cNvSpPr/>
           <p:nvPr/>
@@ -4820,7 +3373,7 @@
                   <a:srgbClr val="1F3A5F"/>
                 </a:solidFill>
               </a:rPr>
-              <a:t>Gram 20: FR Stargazer, Category 4, Gandalf</a:t>
+              <a:t>Gram 2: FR Razor Crest, Category 3, Kobol</a:t>
             </a:r>
           </a:p>
         </p:txBody>
@@ -4849,7 +3402,7 @@
           <a:p>
             <a:r>
               <a:rPr sz="800">
-                <a:hlinkClick r:id="rId5"/>
+                <a:hlinkClick r:id="rId6"/>
               </a:rPr>
               <a:t>Lofar 1</a:t>
             </a:r>
@@ -4857,7 +3410,7 @@
           <a:p>
             <a:r>
               <a:rPr sz="800">
-                <a:hlinkClick r:id="rId6"/>
+                <a:hlinkClick r:id="rId7"/>
               </a:rPr>
               <a:t>Lofar 2</a:t>
             </a:r>
@@ -4865,17 +3418,25 @@
           <a:p>
             <a:r>
               <a:rPr sz="800">
-                <a:hlinkClick r:id="rId7"/>
+                <a:hlinkClick r:id="rId8"/>
               </a:rPr>
               <a:t>Lofar 3</a:t>
             </a:r>
           </a:p>
+          <a:p>
+            <a:r>
+              <a:rPr sz="800">
+                <a:hlinkClick r:id="rId9"/>
+              </a:rPr>
+              <a:t>Lofar 4</a:t>
+            </a:r>
+          </a:p>
         </p:txBody>
       </p:sp>
       <p:sp>
         <p:nvSpPr>
           <p:cNvPr id="7" name="Rounded Rectangle 6">
-            <a:hlinkClick r:id="rId8"/>
+            <a:hlinkClick r:id="rId10"/>
           </p:cNvPr>
           <p:cNvSpPr/>
           <p:nvPr/>
@@ -4922,7 +3483,7 @@
                   <a:srgbClr val="1F3A5F"/>
                 </a:solidFill>
               </a:rPr>
-              <a:t>Gram 22: FR Y-wing, Category 1, Tantive</a:t>
+              <a:t>Gram 3: Slave I contact bearing 280, codename Yavin</a:t>
             </a:r>
           </a:p>
         </p:txBody>
@@ -4951,7 +3512,7 @@
           <a:p>
             <a:r>
               <a:rPr sz="800">
-                <a:hlinkClick r:id="rId9"/>
+                <a:hlinkClick r:id="rId11"/>
               </a:rPr>
               <a:t>Lofar 1</a:t>
             </a:r>
@@ -4959,17 +3520,33 @@
           <a:p>
             <a:r>
               <a:rPr sz="800">
-                <a:hlinkClick r:id="rId10"/>
+                <a:hlinkClick r:id="rId12"/>
               </a:rPr>
               <a:t>Lofar 2</a:t>
             </a:r>
           </a:p>
+          <a:p>
+            <a:r>
+              <a:rPr sz="800">
+                <a:hlinkClick r:id="rId13"/>
+              </a:rPr>
+              <a:t>Lofar 3</a:t>
+            </a:r>
+          </a:p>
+          <a:p>
+            <a:r>
+              <a:rPr sz="800">
+                <a:hlinkClick r:id="rId14"/>
+              </a:rPr>
+              <a:t>Lofar 4</a:t>
+            </a:r>
+          </a:p>
         </p:txBody>
       </p:sp>
       <p:sp>
         <p:nvSpPr>
           <p:cNvPr id="9" name="Rounded Rectangle 8">
-            <a:hlinkClick r:id="rId11"/>
+            <a:hlinkClick r:id="rId15"/>
           </p:cNvPr>
           <p:cNvSpPr/>
           <p:nvPr/>
@@ -5016,7 +3593,7 @@
                   <a:srgbClr val="1F3A5F"/>
                 </a:solidFill>
               </a:rPr>
-              <a:t>Gram 24: FR Sovereign-class, Category 2, Coruscant</a:t>
+              <a:t>Gram 4: FR Cerritos, Category 4, Gandalf</a:t>
             </a:r>
           </a:p>
         </p:txBody>
@@ -5045,7 +3622,7 @@
           <a:p>
             <a:r>
               <a:rPr sz="800">
-                <a:hlinkClick r:id="rId12"/>
+                <a:hlinkClick r:id="rId16"/>
               </a:rPr>
               <a:t>Lofar 1</a:t>
             </a:r>
@@ -5053,33 +3630,17 @@
           <a:p>
             <a:r>
               <a:rPr sz="800">
-                <a:hlinkClick r:id="rId13"/>
+                <a:hlinkClick r:id="rId17"/>
               </a:rPr>
               <a:t>Lofar 2</a:t>
             </a:r>
           </a:p>
-          <a:p>
-            <a:r>
-              <a:rPr sz="800">
-                <a:hlinkClick r:id="rId14"/>
-              </a:rPr>
-              <a:t>Lofar 3</a:t>
-            </a:r>
-          </a:p>
-          <a:p>
-            <a:r>
-              <a:rPr sz="800">
-                <a:hlinkClick r:id="rId15"/>
-              </a:rPr>
-              <a:t>Lofar 4</a:t>
-            </a:r>
-          </a:p>
         </p:txBody>
       </p:sp>
       <p:sp>
         <p:nvSpPr>
           <p:cNvPr id="11" name="Rounded Rectangle 10">
-            <a:hlinkClick r:id="rId16"/>
+            <a:hlinkClick r:id="rId18"/>
           </p:cNvPr>
           <p:cNvSpPr/>
           <p:nvPr/>
@@ -5126,7 +3687,7 @@
                   <a:srgbClr val="1F3A5F"/>
                 </a:solidFill>
               </a:rPr>
-              <a:t>Gram 25: FR Lambda Shuttle, Category 4, Gandalf</a:t>
+              <a:t>Gram 5: FR A-wing, Category 2, Endor</a:t>
             </a:r>
           </a:p>
         </p:txBody>
@@ -5155,7 +3716,7 @@
           <a:p>
             <a:r>
               <a:rPr sz="800">
-                <a:hlinkClick r:id="rId17"/>
+                <a:hlinkClick r:id="rId19"/>
               </a:rPr>
               <a:t>Lofar 1</a:t>
             </a:r>
@@ -5163,17 +3724,33 @@
           <a:p>
             <a:r>
               <a:rPr sz="800">
-                <a:hlinkClick r:id="rId18"/>
+                <a:hlinkClick r:id="rId20"/>
               </a:rPr>
               <a:t>Lofar 2</a:t>
             </a:r>
           </a:p>
+          <a:p>
+            <a:r>
+              <a:rPr sz="800">
+                <a:hlinkClick r:id="rId21"/>
+              </a:rPr>
+              <a:t>Lofar 3</a:t>
+            </a:r>
+          </a:p>
+          <a:p>
+            <a:r>
+              <a:rPr sz="800">
+                <a:hlinkClick r:id="rId22"/>
+              </a:rPr>
+              <a:t>Lofar 4</a:t>
+            </a:r>
+          </a:p>
         </p:txBody>
       </p:sp>
       <p:sp>
         <p:nvSpPr>
           <p:cNvPr id="13" name="Rounded Rectangle 12">
-            <a:hlinkClick r:id="rId19"/>
+            <a:hlinkClick r:id="rId23"/>
           </p:cNvPr>
           <p:cNvSpPr/>
           <p:nvPr/>
@@ -5220,7 +3797,7 @@
                   <a:srgbClr val="1F3A5F"/>
                 </a:solidFill>
               </a:rPr>
-              <a:t>Gram 26: FR Voyager, Category 1, Kronos</a:t>
+              <a:t>Gram 7: FR Discovery, Category 2, Dagobah</a:t>
             </a:r>
           </a:p>
         </p:txBody>
@@ -5249,17 +3826,33 @@
           <a:p>
             <a:r>
               <a:rPr sz="800">
-                <a:hlinkClick r:id="rId20"/>
+                <a:hlinkClick r:id="rId24"/>
               </a:rPr>
               <a:t>Lofar 1</a:t>
             </a:r>
           </a:p>
+          <a:p>
+            <a:r>
+              <a:rPr sz="800">
+                <a:hlinkClick r:id="rId25"/>
+              </a:rPr>
+              <a:t>Lofar 2</a:t>
+            </a:r>
+          </a:p>
+          <a:p>
+            <a:r>
+              <a:rPr sz="800">
+                <a:hlinkClick r:id="rId26"/>
+              </a:rPr>
+              <a:t>Lofar 3</a:t>
+            </a:r>
+          </a:p>
         </p:txBody>
       </p:sp>
       <p:sp>
         <p:nvSpPr>
           <p:cNvPr id="15" name="Rounded Rectangle 14">
-            <a:hlinkClick r:id="rId21"/>
+            <a:hlinkClick r:id="rId27"/>
           </p:cNvPr>
           <p:cNvSpPr/>
           <p:nvPr/>
@@ -5306,7 +3899,7 @@
                   <a:srgbClr val="1F3A5F"/>
                 </a:solidFill>
               </a:rPr>
-              <a:t>Gram 27: FR Millennium Falcon, Category 4, Tatooine</a:t>
+              <a:t>Gram 9: FR Star Destroyer, Category 1, Yavin</a:t>
             </a:r>
           </a:p>
         </p:txBody>
@@ -5335,7 +3928,7 @@
           <a:p>
             <a:r>
               <a:rPr sz="800">
-                <a:hlinkClick r:id="rId22"/>
+                <a:hlinkClick r:id="rId28"/>
               </a:rPr>
               <a:t>Lofar 1</a:t>
             </a:r>
@@ -5345,7 +3938,7 @@
       <p:sp>
         <p:nvSpPr>
           <p:cNvPr id="17" name="Rounded Rectangle 16">
-            <a:hlinkClick r:id="rId23"/>
+            <a:hlinkClick r:id="rId29"/>
           </p:cNvPr>
           <p:cNvSpPr/>
           <p:nvPr/>
@@ -5392,7 +3985,7 @@
                   <a:srgbClr val="1F3A5F"/>
                 </a:solidFill>
               </a:rPr>
-              <a:t>Gram 28: FR Enterprise, Category 3, Dagobah</a:t>
+              <a:t>Gram 10: FR Venator-class, Category 4, Bajor</a:t>
             </a:r>
           </a:p>
         </p:txBody>
@@ -5421,7 +4014,7 @@
           <a:p>
             <a:r>
               <a:rPr sz="800">
-                <a:hlinkClick r:id="rId24"/>
+                <a:hlinkClick r:id="rId30"/>
               </a:rPr>
               <a:t>Lofar 1</a:t>
             </a:r>
@@ -5429,7 +4022,7 @@
           <a:p>
             <a:r>
               <a:rPr sz="800">
-                <a:hlinkClick r:id="rId25"/>
+                <a:hlinkClick r:id="rId31"/>
               </a:rPr>
               <a:t>Lofar 2</a:t>
             </a:r>
@@ -5437,25 +4030,17 @@
           <a:p>
             <a:r>
               <a:rPr sz="800">
-                <a:hlinkClick r:id="rId26"/>
+                <a:hlinkClick r:id="rId32"/>
               </a:rPr>
               <a:t>Lofar 3</a:t>
             </a:r>
           </a:p>
-          <a:p>
-            <a:r>
-              <a:rPr sz="800">
-                <a:hlinkClick r:id="rId27"/>
-              </a:rPr>
-              <a:t>Lofar 4</a:t>
-            </a:r>
-          </a:p>
         </p:txBody>
       </p:sp>
       <p:sp>
         <p:nvSpPr>
           <p:cNvPr id="19" name="Rounded Rectangle 18">
-            <a:hlinkClick r:id="rId28"/>
+            <a:hlinkClick r:id="rId33"/>
           </p:cNvPr>
           <p:cNvSpPr/>
           <p:nvPr/>
@@ -5502,7 +4087,7 @@
                   <a:srgbClr val="1F3A5F"/>
                 </a:solidFill>
               </a:rPr>
-              <a:t>Gram 29: Prometheus contact bearing 036, codename Naboo</a:t>
+              <a:t>Gram 11: FR Voyager, Category 1, Trill</a:t>
             </a:r>
           </a:p>
         </p:txBody>
@@ -5531,7 +4116,7 @@
           <a:p>
             <a:r>
               <a:rPr sz="800">
-                <a:hlinkClick r:id="rId29"/>
+                <a:hlinkClick r:id="rId34"/>
               </a:rPr>
               <a:t>Lofar 1</a:t>
             </a:r>
@@ -5539,7 +4124,7 @@
           <a:p>
             <a:r>
               <a:rPr sz="800">
-                <a:hlinkClick r:id="rId30"/>
+                <a:hlinkClick r:id="rId35"/>
               </a:rPr>
               <a:t>Lofar 2</a:t>
             </a:r>
@@ -5547,25 +4132,17 @@
           <a:p>
             <a:r>
               <a:rPr sz="800">
-                <a:hlinkClick r:id="rId31"/>
+                <a:hlinkClick r:id="rId36"/>
               </a:rPr>
               <a:t>Lofar 3</a:t>
             </a:r>
           </a:p>
-          <a:p>
-            <a:r>
-              <a:rPr sz="800">
-                <a:hlinkClick r:id="rId32"/>
-              </a:rPr>
-              <a:t>Lofar 4</a:t>
-            </a:r>
-          </a:p>
         </p:txBody>
       </p:sp>
       <p:sp>
         <p:nvSpPr>
           <p:cNvPr id="21" name="Rounded Rectangle 20">
-            <a:hlinkClick r:id="rId33"/>
+            <a:hlinkClick r:id="rId37"/>
           </p:cNvPr>
           <p:cNvSpPr/>
           <p:nvPr/>
@@ -5612,7 +4189,7 @@
                   <a:srgbClr val="1F3A5F"/>
                 </a:solidFill>
               </a:rPr>
-              <a:t>Gram 30: Ghost contact bearing 343, codename Dank</a:t>
+              <a:t>Gram 12: FR Ghost, Category 3, Tantive</a:t>
             </a:r>
           </a:p>
         </p:txBody>
@@ -5641,7 +4218,7 @@
           <a:p>
             <a:r>
               <a:rPr sz="800">
-                <a:hlinkClick r:id="rId34"/>
+                <a:hlinkClick r:id="rId38"/>
               </a:rPr>
               <a:t>Lofar 1</a:t>
             </a:r>
@@ -5649,25 +4226,17 @@
           <a:p>
             <a:r>
               <a:rPr sz="800">
-                <a:hlinkClick r:id="rId35"/>
+                <a:hlinkClick r:id="rId39"/>
               </a:rPr>
               <a:t>Lofar 2</a:t>
             </a:r>
           </a:p>
-          <a:p>
-            <a:r>
-              <a:rPr sz="800">
-                <a:hlinkClick r:id="rId36"/>
-              </a:rPr>
-              <a:t>Lofar 3</a:t>
-            </a:r>
-          </a:p>
         </p:txBody>
       </p:sp>
       <p:sp>
         <p:nvSpPr>
           <p:cNvPr id="23" name="Rounded Rectangle 22">
-            <a:hlinkClick r:id="rId37"/>
+            <a:hlinkClick r:id="rId40"/>
           </p:cNvPr>
           <p:cNvSpPr/>
           <p:nvPr/>
@@ -5714,7 +4283,7 @@
                   <a:srgbClr val="1F3A5F"/>
                 </a:solidFill>
               </a:rPr>
-              <a:t>Gram 31: FR Imperial-class, Category 1, Yavin</a:t>
+              <a:t>Gram 13: FR Venator-class, Category 4, Bajor</a:t>
             </a:r>
           </a:p>
         </p:txBody>
@@ -5743,25 +4312,17 @@
           <a:p>
             <a:r>
               <a:rPr sz="800">
-                <a:hlinkClick r:id="rId38"/>
+                <a:hlinkClick r:id="rId41"/>
               </a:rPr>
               <a:t>Lofar 1</a:t>
             </a:r>
           </a:p>
-          <a:p>
-            <a:r>
-              <a:rPr sz="800">
-                <a:hlinkClick r:id="rId39"/>
-              </a:rPr>
-              <a:t>Lofar 2</a:t>
-            </a:r>
-          </a:p>
         </p:txBody>
       </p:sp>
       <p:sp>
         <p:nvSpPr>
           <p:cNvPr id="25" name="Rounded Rectangle 24">
-            <a:hlinkClick r:id="rId40"/>
+            <a:hlinkClick r:id="rId42"/>
           </p:cNvPr>
           <p:cNvSpPr/>
           <p:nvPr/>
@@ -5808,7 +4369,7 @@
                   <a:srgbClr val="1F3A5F"/>
                 </a:solidFill>
               </a:rPr>
-              <a:t>Gram 32: FR Outrider, Category 4, Mustafar</a:t>
+              <a:t>Gram 14: FR Nebula-class, Category 1, Caprica</a:t>
             </a:r>
           </a:p>
         </p:txBody>
@@ -5837,7 +4398,7 @@
           <a:p>
             <a:r>
               <a:rPr sz="800">
-                <a:hlinkClick r:id="rId41"/>
+                <a:hlinkClick r:id="rId43"/>
               </a:rPr>
               <a:t>Lofar 1</a:t>
             </a:r>
@@ -5847,7 +4408,7 @@
       <p:sp>
         <p:nvSpPr>
           <p:cNvPr id="27" name="Rounded Rectangle 26">
-            <a:hlinkClick r:id="rId42"/>
+            <a:hlinkClick r:id="rId44"/>
           </p:cNvPr>
           <p:cNvSpPr/>
           <p:nvPr/>
@@ -5894,7 +4455,7 @@
                   <a:srgbClr val="1F3A5F"/>
                 </a:solidFill>
               </a:rPr>
-              <a:t>Gram 33: FR Lambda Shuttle, Category 4, Bespin</a:t>
+              <a:t>Gram 15: FR Sovereign-class, Category 1, Bajor</a:t>
             </a:r>
           </a:p>
         </p:txBody>
@@ -5923,17 +4484,41 @@
           <a:p>
             <a:r>
               <a:rPr sz="800">
-                <a:hlinkClick r:id="rId43"/>
+                <a:hlinkClick r:id="rId45"/>
               </a:rPr>
               <a:t>Lofar 1</a:t>
             </a:r>
           </a:p>
+          <a:p>
+            <a:r>
+              <a:rPr sz="800">
+                <a:hlinkClick r:id="rId46"/>
+              </a:rPr>
+              <a:t>Lofar 2</a:t>
+            </a:r>
+          </a:p>
+          <a:p>
+            <a:r>
+              <a:rPr sz="800">
+                <a:hlinkClick r:id="rId47"/>
+              </a:rPr>
+              <a:t>Lofar 3</a:t>
+            </a:r>
+          </a:p>
+          <a:p>
+            <a:r>
+              <a:rPr sz="800">
+                <a:hlinkClick r:id="rId48"/>
+              </a:rPr>
+              <a:t>Lofar 4</a:t>
+            </a:r>
+          </a:p>
         </p:txBody>
       </p:sp>
       <p:sp>
         <p:nvSpPr>
           <p:cNvPr id="29" name="Rounded Rectangle 28">
-            <a:hlinkClick r:id="rId44"/>
+            <a:hlinkClick r:id="rId49"/>
           </p:cNvPr>
           <p:cNvSpPr/>
           <p:nvPr/>
@@ -5980,7 +4565,7 @@
                   <a:srgbClr val="1F3A5F"/>
                 </a:solidFill>
               </a:rPr>
-              <a:t>Gram 35: FR Ghost, Category 1, Tatooine</a:t>
+              <a:t>Gram 16: FR TIE Fighter, Category 3, Yavin</a:t>
             </a:r>
           </a:p>
         </p:txBody>
@@ -6009,33 +4594,17 @@
           <a:p>
             <a:r>
               <a:rPr sz="800">
-                <a:hlinkClick r:id="rId45"/>
+                <a:hlinkClick r:id="rId50"/>
               </a:rPr>
               <a:t>Lofar 1</a:t>
             </a:r>
           </a:p>
-          <a:p>
-            <a:r>
-              <a:rPr sz="800">
-                <a:hlinkClick r:id="rId46"/>
-              </a:rPr>
-              <a:t>Lofar 2</a:t>
-            </a:r>
-          </a:p>
-          <a:p>
-            <a:r>
-              <a:rPr sz="800">
-                <a:hlinkClick r:id="rId47"/>
-              </a:rPr>
-              <a:t>Lofar 3</a:t>
-            </a:r>
-          </a:p>
         </p:txBody>
       </p:sp>
       <p:sp>
         <p:nvSpPr>
           <p:cNvPr id="31" name="Rounded Rectangle 30">
-            <a:hlinkClick r:id="rId48"/>
+            <a:hlinkClick r:id="rId51"/>
           </p:cNvPr>
           <p:cNvSpPr/>
           <p:nvPr/>
@@ -6082,7 +4651,7 @@
                   <a:srgbClr val="1F3A5F"/>
                 </a:solidFill>
               </a:rPr>
-              <a:t>Gram 36: Rebel One contact bearing 243, codename Risa</a:t>
+              <a:t>Gram 18: FR Nebula-class, Category 4, Risa</a:t>
             </a:r>
           </a:p>
         </p:txBody>
@@ -6111,7 +4680,7 @@
           <a:p>
             <a:r>
               <a:rPr sz="800">
-                <a:hlinkClick r:id="rId49"/>
+                <a:hlinkClick r:id="rId52"/>
               </a:rPr>
               <a:t>Lofar 1</a:t>
             </a:r>
@@ -6119,7 +4688,7 @@
           <a:p>
             <a:r>
               <a:rPr sz="800">
-                <a:hlinkClick r:id="rId50"/>
+                <a:hlinkClick r:id="rId53"/>
               </a:rPr>
               <a:t>Lofar 2</a:t>
             </a:r>
@@ -6127,17 +4696,9 @@
           <a:p>
             <a:r>
               <a:rPr sz="800">
-                <a:hlinkClick r:id="rId51"/>
+                <a:hlinkClick r:id="rId54"/>
               </a:rPr>
               <a:t>Lofar 3</a:t>
-            </a:r>
-          </a:p>
-          <a:p>
-            <a:r>
-              <a:rPr sz="800">
-                <a:hlinkClick r:id="rId52"/>
-              </a:rPr>
-              <a:t>Lofar 4</a:t>
             </a:r>
           </a:p>
         </p:txBody>
@@ -6206,7 +4767,7 @@
                   <a:srgbClr val="FFFFFF"/>
                 </a:solidFill>
               </a:rPr>
-              <a:t>Instructor Week 2 Grams — Page 3 of 3</a:t>
+              <a:t>Instructor Week 2 Grams — Page 2 of 3</a:t>
             </a:r>
           </a:p>
         </p:txBody>
@@ -6261,7 +4822,7 @@
                   <a:srgbClr val="1F3A5F"/>
                 </a:solidFill>
               </a:rPr>
-              <a:t>Gram 38: Prometheus contact bearing 214, codename Gandalf</a:t>
+              <a:t>Gram 19: Akira-class contact bearing 162, codename Tatooine</a:t>
             </a:r>
           </a:p>
         </p:txBody>
@@ -6295,20 +4856,12 @@
               <a:t>Lofar 1</a:t>
             </a:r>
           </a:p>
-          <a:p>
-            <a:r>
-              <a:rPr sz="800">
-                <a:hlinkClick r:id="rId4"/>
-              </a:rPr>
-              <a:t>Lofar 2</a:t>
-            </a:r>
-          </a:p>
         </p:txBody>
       </p:sp>
       <p:sp>
         <p:nvSpPr>
           <p:cNvPr id="5" name="Rounded Rectangle 4">
-            <a:hlinkClick r:id="rId5"/>
+            <a:hlinkClick r:id="rId4"/>
           </p:cNvPr>
           <p:cNvSpPr/>
           <p:nvPr/>
@@ -6355,7 +4908,7 @@
                   <a:srgbClr val="1F3A5F"/>
                 </a:solidFill>
               </a:rPr>
-              <a:t>Gram 39: FR Razor Crest, Category 1, Romulus</a:t>
+              <a:t>Gram 20: FR Stargazer, Category 4, Gandalf</a:t>
             </a:r>
           </a:p>
         </p:txBody>
@@ -6384,9 +4937,17 @@
           <a:p>
             <a:r>
               <a:rPr sz="800">
+                <a:hlinkClick r:id="rId5"/>
+              </a:rPr>
+              <a:t>Lofar 1</a:t>
+            </a:r>
+          </a:p>
+          <a:p>
+            <a:r>
+              <a:rPr sz="800">
                 <a:hlinkClick r:id="rId6"/>
               </a:rPr>
-              <a:t>Lofar 1</a:t>
+              <a:t>Lofar 2</a:t>
             </a:r>
           </a:p>
           <a:p>
@@ -6394,14 +4955,6 @@
               <a:rPr sz="800">
                 <a:hlinkClick r:id="rId7"/>
               </a:rPr>
-              <a:t>Lofar 2</a:t>
-            </a:r>
-          </a:p>
-          <a:p>
-            <a:r>
-              <a:rPr sz="800">
-                <a:hlinkClick r:id="rId8"/>
-              </a:rPr>
               <a:t>Lofar 3</a:t>
             </a:r>
           </a:p>
@@ -6410,7 +4963,7 @@
       <p:sp>
         <p:nvSpPr>
           <p:cNvPr id="7" name="Rounded Rectangle 6">
-            <a:hlinkClick r:id="rId9"/>
+            <a:hlinkClick r:id="rId8"/>
           </p:cNvPr>
           <p:cNvSpPr/>
           <p:nvPr/>
@@ -6457,7 +5010,7 @@
                   <a:srgbClr val="1F3A5F"/>
                 </a:solidFill>
               </a:rPr>
-              <a:t>Gram 40: FR Outrider, Category 3, Bajor</a:t>
+              <a:t>Gram 22: FR Y-wing, Category 1, Tantive</a:t>
             </a:r>
           </a:p>
         </p:txBody>
@@ -6486,41 +5039,25 @@
           <a:p>
             <a:r>
               <a:rPr sz="800">
+                <a:hlinkClick r:id="rId9"/>
+              </a:rPr>
+              <a:t>Lofar 1</a:t>
+            </a:r>
+          </a:p>
+          <a:p>
+            <a:r>
+              <a:rPr sz="800">
                 <a:hlinkClick r:id="rId10"/>
               </a:rPr>
-              <a:t>Lofar 1</a:t>
-            </a:r>
-          </a:p>
-          <a:p>
-            <a:r>
-              <a:rPr sz="800">
-                <a:hlinkClick r:id="rId11"/>
-              </a:rPr>
               <a:t>Lofar 2</a:t>
             </a:r>
           </a:p>
-          <a:p>
-            <a:r>
-              <a:rPr sz="800">
-                <a:hlinkClick r:id="rId12"/>
-              </a:rPr>
-              <a:t>Lofar 3</a:t>
-            </a:r>
-          </a:p>
-          <a:p>
-            <a:r>
-              <a:rPr sz="800">
-                <a:hlinkClick r:id="rId13"/>
-              </a:rPr>
-              <a:t>Lofar 4</a:t>
-            </a:r>
-          </a:p>
         </p:txBody>
       </p:sp>
       <p:sp>
         <p:nvSpPr>
           <p:cNvPr id="9" name="Rounded Rectangle 8">
-            <a:hlinkClick r:id="rId14"/>
+            <a:hlinkClick r:id="rId11"/>
           </p:cNvPr>
           <p:cNvSpPr/>
           <p:nvPr/>
@@ -6567,7 +5104,7 @@
                   <a:srgbClr val="1F3A5F"/>
                 </a:solidFill>
               </a:rPr>
-              <a:t>Gram 41: FR TIE Bomber, Category 2, Vulcan</a:t>
+              <a:t>Gram 24: FR Sovereign-class, Category 2, Coruscant</a:t>
             </a:r>
           </a:p>
         </p:txBody>
@@ -6596,32 +5133,32 @@
           <a:p>
             <a:r>
               <a:rPr sz="800">
+                <a:hlinkClick r:id="rId12"/>
+              </a:rPr>
+              <a:t>Lofar 1</a:t>
+            </a:r>
+          </a:p>
+          <a:p>
+            <a:r>
+              <a:rPr sz="800">
+                <a:hlinkClick r:id="rId13"/>
+              </a:rPr>
+              <a:t>Lofar 2</a:t>
+            </a:r>
+          </a:p>
+          <a:p>
+            <a:r>
+              <a:rPr sz="800">
+                <a:hlinkClick r:id="rId14"/>
+              </a:rPr>
+              <a:t>Lofar 3</a:t>
+            </a:r>
+          </a:p>
+          <a:p>
+            <a:r>
+              <a:rPr sz="800">
                 <a:hlinkClick r:id="rId15"/>
               </a:rPr>
-              <a:t>Lofar 1</a:t>
-            </a:r>
-          </a:p>
-          <a:p>
-            <a:r>
-              <a:rPr sz="800">
-                <a:hlinkClick r:id="rId16"/>
-              </a:rPr>
-              <a:t>Lofar 2</a:t>
-            </a:r>
-          </a:p>
-          <a:p>
-            <a:r>
-              <a:rPr sz="800">
-                <a:hlinkClick r:id="rId17"/>
-              </a:rPr>
-              <a:t>Lofar 3</a:t>
-            </a:r>
-          </a:p>
-          <a:p>
-            <a:r>
-              <a:rPr sz="800">
-                <a:hlinkClick r:id="rId18"/>
-              </a:rPr>
               <a:t>Lofar 4</a:t>
             </a:r>
           </a:p>
@@ -6630,7 +5167,7 @@
       <p:sp>
         <p:nvSpPr>
           <p:cNvPr id="11" name="Rounded Rectangle 10">
-            <a:hlinkClick r:id="rId19"/>
+            <a:hlinkClick r:id="rId16"/>
           </p:cNvPr>
           <p:cNvSpPr/>
           <p:nvPr/>
@@ -6677,7 +5214,7 @@
                   <a:srgbClr val="1F3A5F"/>
                 </a:solidFill>
               </a:rPr>
-              <a:t>Gram 42: FR Nebulon-B, Category 2, Romulus</a:t>
+              <a:t>Gram 25: FR Lambda Shuttle, Category 4, Gandalf</a:t>
             </a:r>
           </a:p>
         </p:txBody>
@@ -6706,9 +5243,1646 @@
           <a:p>
             <a:r>
               <a:rPr sz="800">
+                <a:hlinkClick r:id="rId17"/>
+              </a:rPr>
+              <a:t>Lofar 1</a:t>
+            </a:r>
+          </a:p>
+          <a:p>
+            <a:r>
+              <a:rPr sz="800">
+                <a:hlinkClick r:id="rId18"/>
+              </a:rPr>
+              <a:t>Lofar 2</a:t>
+            </a:r>
+          </a:p>
+        </p:txBody>
+      </p:sp>
+      <p:sp>
+        <p:nvSpPr>
+          <p:cNvPr id="13" name="Rounded Rectangle 12">
+            <a:hlinkClick r:id="rId19"/>
+          </p:cNvPr>
+          <p:cNvSpPr/>
+          <p:nvPr/>
+        </p:nvSpPr>
+        <p:spPr>
+          <a:xfrm>
+            <a:off x="365760" y="2682240"/>
+            <a:ext cx="2200046" cy="365760"/>
+          </a:xfrm>
+          <a:prstGeom prst="roundRect">
+            <a:avLst/>
+          </a:prstGeom>
+          <a:solidFill>
+            <a:srgbClr val="E8EEF7"/>
+          </a:solidFill>
+          <a:ln>
+            <a:solidFill>
+              <a:srgbClr val="1F3A5F"/>
+            </a:solidFill>
+          </a:ln>
+        </p:spPr>
+        <p:style>
+          <a:lnRef idx="1">
+            <a:schemeClr val="accent1"/>
+          </a:lnRef>
+          <a:fillRef idx="3">
+            <a:schemeClr val="accent1"/>
+          </a:fillRef>
+          <a:effectRef idx="2">
+            <a:schemeClr val="accent1"/>
+          </a:effectRef>
+          <a:fontRef idx="minor">
+            <a:schemeClr val="lt1"/>
+          </a:fontRef>
+        </p:style>
+        <p:txBody>
+          <a:bodyPr rtlCol="0" anchor="ctr" lIns="45720" rIns="45720"/>
+          <a:lstStyle/>
+          <a:p>
+            <a:pPr algn="ctr"/>
+            <a:r>
+              <a:rPr sz="900">
+                <a:solidFill>
+                  <a:srgbClr val="1F3A5F"/>
+                </a:solidFill>
+              </a:rPr>
+              <a:t>Gram 26: FR Voyager, Category 1, Kronos</a:t>
+            </a:r>
+          </a:p>
+        </p:txBody>
+      </p:sp>
+      <p:sp>
+        <p:nvSpPr>
+          <p:cNvPr id="14" name="TextBox 13"/>
+          <p:cNvSpPr txBox="1"/>
+          <p:nvPr/>
+        </p:nvSpPr>
+        <p:spPr>
+          <a:xfrm>
+            <a:off x="365760" y="3066288"/>
+            <a:ext cx="2200046" cy="1447800"/>
+          </a:xfrm>
+          <a:prstGeom prst="rect">
+            <a:avLst/>
+          </a:prstGeom>
+          <a:noFill/>
+        </p:spPr>
+        <p:txBody>
+          <a:bodyPr wrap="square">
+            <a:spAutoFit/>
+          </a:bodyPr>
+          <a:lstStyle/>
+          <a:p>
+            <a:r>
+              <a:rPr sz="800">
                 <a:hlinkClick r:id="rId20"/>
               </a:rPr>
               <a:t>Lofar 1</a:t>
+            </a:r>
+          </a:p>
+        </p:txBody>
+      </p:sp>
+      <p:sp>
+        <p:nvSpPr>
+          <p:cNvPr id="15" name="Rounded Rectangle 14">
+            <a:hlinkClick r:id="rId21"/>
+          </p:cNvPr>
+          <p:cNvSpPr/>
+          <p:nvPr/>
+        </p:nvSpPr>
+        <p:spPr>
+          <a:xfrm>
+            <a:off x="2657246" y="2682240"/>
+            <a:ext cx="2200046" cy="365760"/>
+          </a:xfrm>
+          <a:prstGeom prst="roundRect">
+            <a:avLst/>
+          </a:prstGeom>
+          <a:solidFill>
+            <a:srgbClr val="E8EEF7"/>
+          </a:solidFill>
+          <a:ln>
+            <a:solidFill>
+              <a:srgbClr val="1F3A5F"/>
+            </a:solidFill>
+          </a:ln>
+        </p:spPr>
+        <p:style>
+          <a:lnRef idx="1">
+            <a:schemeClr val="accent1"/>
+          </a:lnRef>
+          <a:fillRef idx="3">
+            <a:schemeClr val="accent1"/>
+          </a:fillRef>
+          <a:effectRef idx="2">
+            <a:schemeClr val="accent1"/>
+          </a:effectRef>
+          <a:fontRef idx="minor">
+            <a:schemeClr val="lt1"/>
+          </a:fontRef>
+        </p:style>
+        <p:txBody>
+          <a:bodyPr rtlCol="0" anchor="ctr" lIns="45720" rIns="45720"/>
+          <a:lstStyle/>
+          <a:p>
+            <a:pPr algn="ctr"/>
+            <a:r>
+              <a:rPr sz="900">
+                <a:solidFill>
+                  <a:srgbClr val="1F3A5F"/>
+                </a:solidFill>
+              </a:rPr>
+              <a:t>Gram 27: FR Millennium Falcon, Category 4, Tatooine</a:t>
+            </a:r>
+          </a:p>
+        </p:txBody>
+      </p:sp>
+      <p:sp>
+        <p:nvSpPr>
+          <p:cNvPr id="16" name="TextBox 15"/>
+          <p:cNvSpPr txBox="1"/>
+          <p:nvPr/>
+        </p:nvSpPr>
+        <p:spPr>
+          <a:xfrm>
+            <a:off x="2657246" y="3066288"/>
+            <a:ext cx="2200046" cy="1447800"/>
+          </a:xfrm>
+          <a:prstGeom prst="rect">
+            <a:avLst/>
+          </a:prstGeom>
+          <a:noFill/>
+        </p:spPr>
+        <p:txBody>
+          <a:bodyPr wrap="square">
+            <a:spAutoFit/>
+          </a:bodyPr>
+          <a:lstStyle/>
+          <a:p>
+            <a:r>
+              <a:rPr sz="800">
+                <a:hlinkClick r:id="rId22"/>
+              </a:rPr>
+              <a:t>Lofar 1</a:t>
+            </a:r>
+          </a:p>
+        </p:txBody>
+      </p:sp>
+      <p:sp>
+        <p:nvSpPr>
+          <p:cNvPr id="17" name="Rounded Rectangle 16">
+            <a:hlinkClick r:id="rId23"/>
+          </p:cNvPr>
+          <p:cNvSpPr/>
+          <p:nvPr/>
+        </p:nvSpPr>
+        <p:spPr>
+          <a:xfrm>
+            <a:off x="4948732" y="2682240"/>
+            <a:ext cx="2200046" cy="365760"/>
+          </a:xfrm>
+          <a:prstGeom prst="roundRect">
+            <a:avLst/>
+          </a:prstGeom>
+          <a:solidFill>
+            <a:srgbClr val="E8EEF7"/>
+          </a:solidFill>
+          <a:ln>
+            <a:solidFill>
+              <a:srgbClr val="1F3A5F"/>
+            </a:solidFill>
+          </a:ln>
+        </p:spPr>
+        <p:style>
+          <a:lnRef idx="1">
+            <a:schemeClr val="accent1"/>
+          </a:lnRef>
+          <a:fillRef idx="3">
+            <a:schemeClr val="accent1"/>
+          </a:fillRef>
+          <a:effectRef idx="2">
+            <a:schemeClr val="accent1"/>
+          </a:effectRef>
+          <a:fontRef idx="minor">
+            <a:schemeClr val="lt1"/>
+          </a:fontRef>
+        </p:style>
+        <p:txBody>
+          <a:bodyPr rtlCol="0" anchor="ctr" lIns="45720" rIns="45720"/>
+          <a:lstStyle/>
+          <a:p>
+            <a:pPr algn="ctr"/>
+            <a:r>
+              <a:rPr sz="900">
+                <a:solidFill>
+                  <a:srgbClr val="1F3A5F"/>
+                </a:solidFill>
+              </a:rPr>
+              <a:t>Gram 28: FR Enterprise, Category 3, Dagobah</a:t>
+            </a:r>
+          </a:p>
+        </p:txBody>
+      </p:sp>
+      <p:sp>
+        <p:nvSpPr>
+          <p:cNvPr id="18" name="TextBox 17"/>
+          <p:cNvSpPr txBox="1"/>
+          <p:nvPr/>
+        </p:nvSpPr>
+        <p:spPr>
+          <a:xfrm>
+            <a:off x="4948732" y="3066288"/>
+            <a:ext cx="2200046" cy="1447800"/>
+          </a:xfrm>
+          <a:prstGeom prst="rect">
+            <a:avLst/>
+          </a:prstGeom>
+          <a:noFill/>
+        </p:spPr>
+        <p:txBody>
+          <a:bodyPr wrap="square">
+            <a:spAutoFit/>
+          </a:bodyPr>
+          <a:lstStyle/>
+          <a:p>
+            <a:r>
+              <a:rPr sz="800">
+                <a:hlinkClick r:id="rId24"/>
+              </a:rPr>
+              <a:t>Lofar 1</a:t>
+            </a:r>
+          </a:p>
+          <a:p>
+            <a:r>
+              <a:rPr sz="800">
+                <a:hlinkClick r:id="rId25"/>
+              </a:rPr>
+              <a:t>Lofar 2</a:t>
+            </a:r>
+          </a:p>
+          <a:p>
+            <a:r>
+              <a:rPr sz="800">
+                <a:hlinkClick r:id="rId26"/>
+              </a:rPr>
+              <a:t>Lofar 3</a:t>
+            </a:r>
+          </a:p>
+          <a:p>
+            <a:r>
+              <a:rPr sz="800">
+                <a:hlinkClick r:id="rId27"/>
+              </a:rPr>
+              <a:t>Lofar 4</a:t>
+            </a:r>
+          </a:p>
+        </p:txBody>
+      </p:sp>
+      <p:sp>
+        <p:nvSpPr>
+          <p:cNvPr id="19" name="Rounded Rectangle 18">
+            <a:hlinkClick r:id="rId28"/>
+          </p:cNvPr>
+          <p:cNvSpPr/>
+          <p:nvPr/>
+        </p:nvSpPr>
+        <p:spPr>
+          <a:xfrm>
+            <a:off x="7240219" y="2682240"/>
+            <a:ext cx="2200046" cy="365760"/>
+          </a:xfrm>
+          <a:prstGeom prst="roundRect">
+            <a:avLst/>
+          </a:prstGeom>
+          <a:solidFill>
+            <a:srgbClr val="E8EEF7"/>
+          </a:solidFill>
+          <a:ln>
+            <a:solidFill>
+              <a:srgbClr val="1F3A5F"/>
+            </a:solidFill>
+          </a:ln>
+        </p:spPr>
+        <p:style>
+          <a:lnRef idx="1">
+            <a:schemeClr val="accent1"/>
+          </a:lnRef>
+          <a:fillRef idx="3">
+            <a:schemeClr val="accent1"/>
+          </a:fillRef>
+          <a:effectRef idx="2">
+            <a:schemeClr val="accent1"/>
+          </a:effectRef>
+          <a:fontRef idx="minor">
+            <a:schemeClr val="lt1"/>
+          </a:fontRef>
+        </p:style>
+        <p:txBody>
+          <a:bodyPr rtlCol="0" anchor="ctr" lIns="45720" rIns="45720"/>
+          <a:lstStyle/>
+          <a:p>
+            <a:pPr algn="ctr"/>
+            <a:r>
+              <a:rPr sz="900">
+                <a:solidFill>
+                  <a:srgbClr val="1F3A5F"/>
+                </a:solidFill>
+              </a:rPr>
+              <a:t>Gram 29: Prometheus contact bearing 036, codename Naboo</a:t>
+            </a:r>
+          </a:p>
+        </p:txBody>
+      </p:sp>
+      <p:sp>
+        <p:nvSpPr>
+          <p:cNvPr id="20" name="TextBox 19"/>
+          <p:cNvSpPr txBox="1"/>
+          <p:nvPr/>
+        </p:nvSpPr>
+        <p:spPr>
+          <a:xfrm>
+            <a:off x="7240219" y="3066288"/>
+            <a:ext cx="2200046" cy="1447800"/>
+          </a:xfrm>
+          <a:prstGeom prst="rect">
+            <a:avLst/>
+          </a:prstGeom>
+          <a:noFill/>
+        </p:spPr>
+        <p:txBody>
+          <a:bodyPr wrap="square">
+            <a:spAutoFit/>
+          </a:bodyPr>
+          <a:lstStyle/>
+          <a:p>
+            <a:r>
+              <a:rPr sz="800">
+                <a:hlinkClick r:id="rId29"/>
+              </a:rPr>
+              <a:t>Lofar 1</a:t>
+            </a:r>
+          </a:p>
+          <a:p>
+            <a:r>
+              <a:rPr sz="800">
+                <a:hlinkClick r:id="rId30"/>
+              </a:rPr>
+              <a:t>Lofar 2</a:t>
+            </a:r>
+          </a:p>
+          <a:p>
+            <a:r>
+              <a:rPr sz="800">
+                <a:hlinkClick r:id="rId31"/>
+              </a:rPr>
+              <a:t>Lofar 3</a:t>
+            </a:r>
+          </a:p>
+          <a:p>
+            <a:r>
+              <a:rPr sz="800">
+                <a:hlinkClick r:id="rId32"/>
+              </a:rPr>
+              <a:t>Lofar 4</a:t>
+            </a:r>
+          </a:p>
+        </p:txBody>
+      </p:sp>
+      <p:sp>
+        <p:nvSpPr>
+          <p:cNvPr id="21" name="Rounded Rectangle 20">
+            <a:hlinkClick r:id="rId33"/>
+          </p:cNvPr>
+          <p:cNvSpPr/>
+          <p:nvPr/>
+        </p:nvSpPr>
+        <p:spPr>
+          <a:xfrm>
+            <a:off x="9531705" y="2682240"/>
+            <a:ext cx="2200046" cy="365760"/>
+          </a:xfrm>
+          <a:prstGeom prst="roundRect">
+            <a:avLst/>
+          </a:prstGeom>
+          <a:solidFill>
+            <a:srgbClr val="E8EEF7"/>
+          </a:solidFill>
+          <a:ln>
+            <a:solidFill>
+              <a:srgbClr val="1F3A5F"/>
+            </a:solidFill>
+          </a:ln>
+        </p:spPr>
+        <p:style>
+          <a:lnRef idx="1">
+            <a:schemeClr val="accent1"/>
+          </a:lnRef>
+          <a:fillRef idx="3">
+            <a:schemeClr val="accent1"/>
+          </a:fillRef>
+          <a:effectRef idx="2">
+            <a:schemeClr val="accent1"/>
+          </a:effectRef>
+          <a:fontRef idx="minor">
+            <a:schemeClr val="lt1"/>
+          </a:fontRef>
+        </p:style>
+        <p:txBody>
+          <a:bodyPr rtlCol="0" anchor="ctr" lIns="45720" rIns="45720"/>
+          <a:lstStyle/>
+          <a:p>
+            <a:pPr algn="ctr"/>
+            <a:r>
+              <a:rPr sz="900">
+                <a:solidFill>
+                  <a:srgbClr val="1F3A5F"/>
+                </a:solidFill>
+              </a:rPr>
+              <a:t>Gram 30: Ghost contact bearing 343, codename Dank</a:t>
+            </a:r>
+          </a:p>
+        </p:txBody>
+      </p:sp>
+      <p:sp>
+        <p:nvSpPr>
+          <p:cNvPr id="22" name="TextBox 21"/>
+          <p:cNvSpPr txBox="1"/>
+          <p:nvPr/>
+        </p:nvSpPr>
+        <p:spPr>
+          <a:xfrm>
+            <a:off x="9531705" y="3066288"/>
+            <a:ext cx="2200046" cy="1447800"/>
+          </a:xfrm>
+          <a:prstGeom prst="rect">
+            <a:avLst/>
+          </a:prstGeom>
+          <a:noFill/>
+        </p:spPr>
+        <p:txBody>
+          <a:bodyPr wrap="square">
+            <a:spAutoFit/>
+          </a:bodyPr>
+          <a:lstStyle/>
+          <a:p>
+            <a:r>
+              <a:rPr sz="800">
+                <a:hlinkClick r:id="rId34"/>
+              </a:rPr>
+              <a:t>Lofar 1</a:t>
+            </a:r>
+          </a:p>
+          <a:p>
+            <a:r>
+              <a:rPr sz="800">
+                <a:hlinkClick r:id="rId35"/>
+              </a:rPr>
+              <a:t>Lofar 2</a:t>
+            </a:r>
+          </a:p>
+          <a:p>
+            <a:r>
+              <a:rPr sz="800">
+                <a:hlinkClick r:id="rId36"/>
+              </a:rPr>
+              <a:t>Lofar 3</a:t>
+            </a:r>
+          </a:p>
+        </p:txBody>
+      </p:sp>
+      <p:sp>
+        <p:nvSpPr>
+          <p:cNvPr id="23" name="Rounded Rectangle 22">
+            <a:hlinkClick r:id="rId37"/>
+          </p:cNvPr>
+          <p:cNvSpPr/>
+          <p:nvPr/>
+        </p:nvSpPr>
+        <p:spPr>
+          <a:xfrm>
+            <a:off x="365760" y="4632960"/>
+            <a:ext cx="2200046" cy="365760"/>
+          </a:xfrm>
+          <a:prstGeom prst="roundRect">
+            <a:avLst/>
+          </a:prstGeom>
+          <a:solidFill>
+            <a:srgbClr val="E8EEF7"/>
+          </a:solidFill>
+          <a:ln>
+            <a:solidFill>
+              <a:srgbClr val="1F3A5F"/>
+            </a:solidFill>
+          </a:ln>
+        </p:spPr>
+        <p:style>
+          <a:lnRef idx="1">
+            <a:schemeClr val="accent1"/>
+          </a:lnRef>
+          <a:fillRef idx="3">
+            <a:schemeClr val="accent1"/>
+          </a:fillRef>
+          <a:effectRef idx="2">
+            <a:schemeClr val="accent1"/>
+          </a:effectRef>
+          <a:fontRef idx="minor">
+            <a:schemeClr val="lt1"/>
+          </a:fontRef>
+        </p:style>
+        <p:txBody>
+          <a:bodyPr rtlCol="0" anchor="ctr" lIns="45720" rIns="45720"/>
+          <a:lstStyle/>
+          <a:p>
+            <a:pPr algn="ctr"/>
+            <a:r>
+              <a:rPr sz="900">
+                <a:solidFill>
+                  <a:srgbClr val="1F3A5F"/>
+                </a:solidFill>
+              </a:rPr>
+              <a:t>Gram 31: FR Imperial-class, Category 1, Yavin</a:t>
+            </a:r>
+          </a:p>
+        </p:txBody>
+      </p:sp>
+      <p:sp>
+        <p:nvSpPr>
+          <p:cNvPr id="24" name="TextBox 23"/>
+          <p:cNvSpPr txBox="1"/>
+          <p:nvPr/>
+        </p:nvSpPr>
+        <p:spPr>
+          <a:xfrm>
+            <a:off x="365760" y="5017008"/>
+            <a:ext cx="2200046" cy="1447800"/>
+          </a:xfrm>
+          <a:prstGeom prst="rect">
+            <a:avLst/>
+          </a:prstGeom>
+          <a:noFill/>
+        </p:spPr>
+        <p:txBody>
+          <a:bodyPr wrap="square">
+            <a:spAutoFit/>
+          </a:bodyPr>
+          <a:lstStyle/>
+          <a:p>
+            <a:r>
+              <a:rPr sz="800">
+                <a:hlinkClick r:id="rId38"/>
+              </a:rPr>
+              <a:t>Lofar 1</a:t>
+            </a:r>
+          </a:p>
+          <a:p>
+            <a:r>
+              <a:rPr sz="800">
+                <a:hlinkClick r:id="rId39"/>
+              </a:rPr>
+              <a:t>Lofar 2</a:t>
+            </a:r>
+          </a:p>
+        </p:txBody>
+      </p:sp>
+      <p:sp>
+        <p:nvSpPr>
+          <p:cNvPr id="25" name="Rounded Rectangle 24">
+            <a:hlinkClick r:id="rId40"/>
+          </p:cNvPr>
+          <p:cNvSpPr/>
+          <p:nvPr/>
+        </p:nvSpPr>
+        <p:spPr>
+          <a:xfrm>
+            <a:off x="2657246" y="4632960"/>
+            <a:ext cx="2200046" cy="365760"/>
+          </a:xfrm>
+          <a:prstGeom prst="roundRect">
+            <a:avLst/>
+          </a:prstGeom>
+          <a:solidFill>
+            <a:srgbClr val="E8EEF7"/>
+          </a:solidFill>
+          <a:ln>
+            <a:solidFill>
+              <a:srgbClr val="1F3A5F"/>
+            </a:solidFill>
+          </a:ln>
+        </p:spPr>
+        <p:style>
+          <a:lnRef idx="1">
+            <a:schemeClr val="accent1"/>
+          </a:lnRef>
+          <a:fillRef idx="3">
+            <a:schemeClr val="accent1"/>
+          </a:fillRef>
+          <a:effectRef idx="2">
+            <a:schemeClr val="accent1"/>
+          </a:effectRef>
+          <a:fontRef idx="minor">
+            <a:schemeClr val="lt1"/>
+          </a:fontRef>
+        </p:style>
+        <p:txBody>
+          <a:bodyPr rtlCol="0" anchor="ctr" lIns="45720" rIns="45720"/>
+          <a:lstStyle/>
+          <a:p>
+            <a:pPr algn="ctr"/>
+            <a:r>
+              <a:rPr sz="900">
+                <a:solidFill>
+                  <a:srgbClr val="1F3A5F"/>
+                </a:solidFill>
+              </a:rPr>
+              <a:t>Gram 32: FR Outrider, Category 4, Mustafar</a:t>
+            </a:r>
+          </a:p>
+        </p:txBody>
+      </p:sp>
+      <p:sp>
+        <p:nvSpPr>
+          <p:cNvPr id="26" name="TextBox 25"/>
+          <p:cNvSpPr txBox="1"/>
+          <p:nvPr/>
+        </p:nvSpPr>
+        <p:spPr>
+          <a:xfrm>
+            <a:off x="2657246" y="5017008"/>
+            <a:ext cx="2200046" cy="1447800"/>
+          </a:xfrm>
+          <a:prstGeom prst="rect">
+            <a:avLst/>
+          </a:prstGeom>
+          <a:noFill/>
+        </p:spPr>
+        <p:txBody>
+          <a:bodyPr wrap="square">
+            <a:spAutoFit/>
+          </a:bodyPr>
+          <a:lstStyle/>
+          <a:p>
+            <a:r>
+              <a:rPr sz="800">
+                <a:hlinkClick r:id="rId41"/>
+              </a:rPr>
+              <a:t>Lofar 1</a:t>
+            </a:r>
+          </a:p>
+        </p:txBody>
+      </p:sp>
+      <p:sp>
+        <p:nvSpPr>
+          <p:cNvPr id="27" name="Rounded Rectangle 26">
+            <a:hlinkClick r:id="rId42"/>
+          </p:cNvPr>
+          <p:cNvSpPr/>
+          <p:nvPr/>
+        </p:nvSpPr>
+        <p:spPr>
+          <a:xfrm>
+            <a:off x="4948732" y="4632960"/>
+            <a:ext cx="2200046" cy="365760"/>
+          </a:xfrm>
+          <a:prstGeom prst="roundRect">
+            <a:avLst/>
+          </a:prstGeom>
+          <a:solidFill>
+            <a:srgbClr val="E8EEF7"/>
+          </a:solidFill>
+          <a:ln>
+            <a:solidFill>
+              <a:srgbClr val="1F3A5F"/>
+            </a:solidFill>
+          </a:ln>
+        </p:spPr>
+        <p:style>
+          <a:lnRef idx="1">
+            <a:schemeClr val="accent1"/>
+          </a:lnRef>
+          <a:fillRef idx="3">
+            <a:schemeClr val="accent1"/>
+          </a:fillRef>
+          <a:effectRef idx="2">
+            <a:schemeClr val="accent1"/>
+          </a:effectRef>
+          <a:fontRef idx="minor">
+            <a:schemeClr val="lt1"/>
+          </a:fontRef>
+        </p:style>
+        <p:txBody>
+          <a:bodyPr rtlCol="0" anchor="ctr" lIns="45720" rIns="45720"/>
+          <a:lstStyle/>
+          <a:p>
+            <a:pPr algn="ctr"/>
+            <a:r>
+              <a:rPr sz="900">
+                <a:solidFill>
+                  <a:srgbClr val="1F3A5F"/>
+                </a:solidFill>
+              </a:rPr>
+              <a:t>Gram 33: FR Lambda Shuttle, Category 4, Bespin</a:t>
+            </a:r>
+          </a:p>
+        </p:txBody>
+      </p:sp>
+      <p:sp>
+        <p:nvSpPr>
+          <p:cNvPr id="28" name="TextBox 27"/>
+          <p:cNvSpPr txBox="1"/>
+          <p:nvPr/>
+        </p:nvSpPr>
+        <p:spPr>
+          <a:xfrm>
+            <a:off x="4948732" y="5017008"/>
+            <a:ext cx="2200046" cy="1447800"/>
+          </a:xfrm>
+          <a:prstGeom prst="rect">
+            <a:avLst/>
+          </a:prstGeom>
+          <a:noFill/>
+        </p:spPr>
+        <p:txBody>
+          <a:bodyPr wrap="square">
+            <a:spAutoFit/>
+          </a:bodyPr>
+          <a:lstStyle/>
+          <a:p>
+            <a:r>
+              <a:rPr sz="800">
+                <a:hlinkClick r:id="rId43"/>
+              </a:rPr>
+              <a:t>Lofar 1</a:t>
+            </a:r>
+          </a:p>
+        </p:txBody>
+      </p:sp>
+      <p:sp>
+        <p:nvSpPr>
+          <p:cNvPr id="29" name="Rounded Rectangle 28">
+            <a:hlinkClick r:id="rId44"/>
+          </p:cNvPr>
+          <p:cNvSpPr/>
+          <p:nvPr/>
+        </p:nvSpPr>
+        <p:spPr>
+          <a:xfrm>
+            <a:off x="7240219" y="4632960"/>
+            <a:ext cx="2200046" cy="365760"/>
+          </a:xfrm>
+          <a:prstGeom prst="roundRect">
+            <a:avLst/>
+          </a:prstGeom>
+          <a:solidFill>
+            <a:srgbClr val="E8EEF7"/>
+          </a:solidFill>
+          <a:ln>
+            <a:solidFill>
+              <a:srgbClr val="1F3A5F"/>
+            </a:solidFill>
+          </a:ln>
+        </p:spPr>
+        <p:style>
+          <a:lnRef idx="1">
+            <a:schemeClr val="accent1"/>
+          </a:lnRef>
+          <a:fillRef idx="3">
+            <a:schemeClr val="accent1"/>
+          </a:fillRef>
+          <a:effectRef idx="2">
+            <a:schemeClr val="accent1"/>
+          </a:effectRef>
+          <a:fontRef idx="minor">
+            <a:schemeClr val="lt1"/>
+          </a:fontRef>
+        </p:style>
+        <p:txBody>
+          <a:bodyPr rtlCol="0" anchor="ctr" lIns="45720" rIns="45720"/>
+          <a:lstStyle/>
+          <a:p>
+            <a:pPr algn="ctr"/>
+            <a:r>
+              <a:rPr sz="900">
+                <a:solidFill>
+                  <a:srgbClr val="1F3A5F"/>
+                </a:solidFill>
+              </a:rPr>
+              <a:t>Gram 35: FR Ghost, Category 1, Tatooine</a:t>
+            </a:r>
+          </a:p>
+        </p:txBody>
+      </p:sp>
+      <p:sp>
+        <p:nvSpPr>
+          <p:cNvPr id="30" name="TextBox 29"/>
+          <p:cNvSpPr txBox="1"/>
+          <p:nvPr/>
+        </p:nvSpPr>
+        <p:spPr>
+          <a:xfrm>
+            <a:off x="7240219" y="5017008"/>
+            <a:ext cx="2200046" cy="1447800"/>
+          </a:xfrm>
+          <a:prstGeom prst="rect">
+            <a:avLst/>
+          </a:prstGeom>
+          <a:noFill/>
+        </p:spPr>
+        <p:txBody>
+          <a:bodyPr wrap="square">
+            <a:spAutoFit/>
+          </a:bodyPr>
+          <a:lstStyle/>
+          <a:p>
+            <a:r>
+              <a:rPr sz="800">
+                <a:hlinkClick r:id="rId45"/>
+              </a:rPr>
+              <a:t>Lofar 1</a:t>
+            </a:r>
+          </a:p>
+          <a:p>
+            <a:r>
+              <a:rPr sz="800">
+                <a:hlinkClick r:id="rId46"/>
+              </a:rPr>
+              <a:t>Lofar 2</a:t>
+            </a:r>
+          </a:p>
+          <a:p>
+            <a:r>
+              <a:rPr sz="800">
+                <a:hlinkClick r:id="rId47"/>
+              </a:rPr>
+              <a:t>Lofar 3</a:t>
+            </a:r>
+          </a:p>
+        </p:txBody>
+      </p:sp>
+      <p:sp>
+        <p:nvSpPr>
+          <p:cNvPr id="31" name="Rounded Rectangle 30">
+            <a:hlinkClick r:id="rId48"/>
+          </p:cNvPr>
+          <p:cNvSpPr/>
+          <p:nvPr/>
+        </p:nvSpPr>
+        <p:spPr>
+          <a:xfrm>
+            <a:off x="9531705" y="4632960"/>
+            <a:ext cx="2200046" cy="365760"/>
+          </a:xfrm>
+          <a:prstGeom prst="roundRect">
+            <a:avLst/>
+          </a:prstGeom>
+          <a:solidFill>
+            <a:srgbClr val="E8EEF7"/>
+          </a:solidFill>
+          <a:ln>
+            <a:solidFill>
+              <a:srgbClr val="1F3A5F"/>
+            </a:solidFill>
+          </a:ln>
+        </p:spPr>
+        <p:style>
+          <a:lnRef idx="1">
+            <a:schemeClr val="accent1"/>
+          </a:lnRef>
+          <a:fillRef idx="3">
+            <a:schemeClr val="accent1"/>
+          </a:fillRef>
+          <a:effectRef idx="2">
+            <a:schemeClr val="accent1"/>
+          </a:effectRef>
+          <a:fontRef idx="minor">
+            <a:schemeClr val="lt1"/>
+          </a:fontRef>
+        </p:style>
+        <p:txBody>
+          <a:bodyPr rtlCol="0" anchor="ctr" lIns="45720" rIns="45720"/>
+          <a:lstStyle/>
+          <a:p>
+            <a:pPr algn="ctr"/>
+            <a:r>
+              <a:rPr sz="900">
+                <a:solidFill>
+                  <a:srgbClr val="1F3A5F"/>
+                </a:solidFill>
+              </a:rPr>
+              <a:t>Gram 36: Rebel One contact bearing 243, codename Risa</a:t>
+            </a:r>
+          </a:p>
+        </p:txBody>
+      </p:sp>
+      <p:sp>
+        <p:nvSpPr>
+          <p:cNvPr id="32" name="TextBox 31"/>
+          <p:cNvSpPr txBox="1"/>
+          <p:nvPr/>
+        </p:nvSpPr>
+        <p:spPr>
+          <a:xfrm>
+            <a:off x="9531705" y="5017008"/>
+            <a:ext cx="2200046" cy="1447800"/>
+          </a:xfrm>
+          <a:prstGeom prst="rect">
+            <a:avLst/>
+          </a:prstGeom>
+          <a:noFill/>
+        </p:spPr>
+        <p:txBody>
+          <a:bodyPr wrap="square">
+            <a:spAutoFit/>
+          </a:bodyPr>
+          <a:lstStyle/>
+          <a:p>
+            <a:r>
+              <a:rPr sz="800">
+                <a:hlinkClick r:id="rId49"/>
+              </a:rPr>
+              <a:t>Lofar 1</a:t>
+            </a:r>
+          </a:p>
+          <a:p>
+            <a:r>
+              <a:rPr sz="800">
+                <a:hlinkClick r:id="rId50"/>
+              </a:rPr>
+              <a:t>Lofar 2</a:t>
+            </a:r>
+          </a:p>
+          <a:p>
+            <a:r>
+              <a:rPr sz="800">
+                <a:hlinkClick r:id="rId51"/>
+              </a:rPr>
+              <a:t>Lofar 3</a:t>
+            </a:r>
+          </a:p>
+          <a:p>
+            <a:r>
+              <a:rPr sz="800">
+                <a:hlinkClick r:id="rId52"/>
+              </a:rPr>
+              <a:t>Lofar 4</a:t>
+            </a:r>
+          </a:p>
+        </p:txBody>
+      </p:sp>
+    </p:spTree>
+  </p:cSld>
+  <p:clrMapOvr>
+    <a:masterClrMapping/>
+  </p:clrMapOvr>
+</p:sld>
+</file>
+
+<file path=ppt/slides/slide4.xml><?xml version="1.0" encoding="utf-8"?>
+<p:sld xmlns:a="http://schemas.openxmlformats.org/drawingml/2006/main" xmlns:p="http://schemas.openxmlformats.org/presentationml/2006/main" xmlns:r="http://schemas.openxmlformats.org/officeDocument/2006/relationships">
+  <p:cSld>
+    <p:spTree>
+      <p:nvGrpSpPr>
+        <p:cNvPr id="1" name=""/>
+        <p:cNvGrpSpPr/>
+        <p:nvPr/>
+      </p:nvGrpSpPr>
+      <p:grpSpPr/>
+      <p:sp>
+        <p:nvSpPr>
+          <p:cNvPr id="2" name="Rectangle 1"/>
+          <p:cNvSpPr/>
+          <p:nvPr/>
+        </p:nvSpPr>
+        <p:spPr>
+          <a:xfrm>
+            <a:off x="0" y="0"/>
+            <a:ext cx="12188952" cy="548640"/>
+          </a:xfrm>
+          <a:prstGeom prst="rect">
+            <a:avLst/>
+          </a:prstGeom>
+          <a:solidFill>
+            <a:srgbClr val="1F3A5F"/>
+          </a:solidFill>
+          <a:ln>
+            <a:noFill/>
+          </a:ln>
+        </p:spPr>
+        <p:style>
+          <a:lnRef idx="1">
+            <a:schemeClr val="accent1"/>
+          </a:lnRef>
+          <a:fillRef idx="3">
+            <a:schemeClr val="accent1"/>
+          </a:fillRef>
+          <a:effectRef idx="2">
+            <a:schemeClr val="accent1"/>
+          </a:effectRef>
+          <a:fontRef idx="minor">
+            <a:schemeClr val="lt1"/>
+          </a:fontRef>
+        </p:style>
+        <p:txBody>
+          <a:bodyPr rtlCol="0" anchor="ctr" lIns="182880" rIns="182880"/>
+          <a:lstStyle/>
+          <a:p>
+            <a:pPr algn="ctr"/>
+            <a:r>
+              <a:rPr sz="2000" b="1">
+                <a:solidFill>
+                  <a:srgbClr val="FFFFFF"/>
+                </a:solidFill>
+              </a:rPr>
+              <a:t>Instructor Week 2 Grams — Page 3 of 3</a:t>
+            </a:r>
+          </a:p>
+        </p:txBody>
+      </p:sp>
+      <p:sp>
+        <p:nvSpPr>
+          <p:cNvPr id="3" name="Rounded Rectangle 2">
+            <a:hlinkClick r:id="rId2"/>
+          </p:cNvPr>
+          <p:cNvSpPr/>
+          <p:nvPr/>
+        </p:nvSpPr>
+        <p:spPr>
+          <a:xfrm>
+            <a:off x="365760" y="731520"/>
+            <a:ext cx="2200046" cy="365760"/>
+          </a:xfrm>
+          <a:prstGeom prst="roundRect">
+            <a:avLst/>
+          </a:prstGeom>
+          <a:solidFill>
+            <a:srgbClr val="E8EEF7"/>
+          </a:solidFill>
+          <a:ln>
+            <a:solidFill>
+              <a:srgbClr val="1F3A5F"/>
+            </a:solidFill>
+          </a:ln>
+        </p:spPr>
+        <p:style>
+          <a:lnRef idx="1">
+            <a:schemeClr val="accent1"/>
+          </a:lnRef>
+          <a:fillRef idx="3">
+            <a:schemeClr val="accent1"/>
+          </a:fillRef>
+          <a:effectRef idx="2">
+            <a:schemeClr val="accent1"/>
+          </a:effectRef>
+          <a:fontRef idx="minor">
+            <a:schemeClr val="lt1"/>
+          </a:fontRef>
+        </p:style>
+        <p:txBody>
+          <a:bodyPr rtlCol="0" anchor="ctr" lIns="45720" rIns="45720"/>
+          <a:lstStyle/>
+          <a:p>
+            <a:pPr algn="ctr"/>
+            <a:r>
+              <a:rPr sz="900">
+                <a:solidFill>
+                  <a:srgbClr val="1F3A5F"/>
+                </a:solidFill>
+              </a:rPr>
+              <a:t>Gram 38: Prometheus contact bearing 214, codename Gandalf</a:t>
+            </a:r>
+          </a:p>
+        </p:txBody>
+      </p:sp>
+      <p:sp>
+        <p:nvSpPr>
+          <p:cNvPr id="4" name="TextBox 3"/>
+          <p:cNvSpPr txBox="1"/>
+          <p:nvPr/>
+        </p:nvSpPr>
+        <p:spPr>
+          <a:xfrm>
+            <a:off x="365760" y="1115568"/>
+            <a:ext cx="2200046" cy="1447800"/>
+          </a:xfrm>
+          <a:prstGeom prst="rect">
+            <a:avLst/>
+          </a:prstGeom>
+          <a:noFill/>
+        </p:spPr>
+        <p:txBody>
+          <a:bodyPr wrap="square">
+            <a:spAutoFit/>
+          </a:bodyPr>
+          <a:lstStyle/>
+          <a:p>
+            <a:r>
+              <a:rPr sz="800">
+                <a:hlinkClick r:id="rId3"/>
+              </a:rPr>
+              <a:t>Lofar 1</a:t>
+            </a:r>
+          </a:p>
+          <a:p>
+            <a:r>
+              <a:rPr sz="800">
+                <a:hlinkClick r:id="rId4"/>
+              </a:rPr>
+              <a:t>Lofar 2</a:t>
+            </a:r>
+          </a:p>
+        </p:txBody>
+      </p:sp>
+      <p:sp>
+        <p:nvSpPr>
+          <p:cNvPr id="5" name="Rounded Rectangle 4">
+            <a:hlinkClick r:id="rId5"/>
+          </p:cNvPr>
+          <p:cNvSpPr/>
+          <p:nvPr/>
+        </p:nvSpPr>
+        <p:spPr>
+          <a:xfrm>
+            <a:off x="2657246" y="731520"/>
+            <a:ext cx="2200046" cy="365760"/>
+          </a:xfrm>
+          <a:prstGeom prst="roundRect">
+            <a:avLst/>
+          </a:prstGeom>
+          <a:solidFill>
+            <a:srgbClr val="E8EEF7"/>
+          </a:solidFill>
+          <a:ln>
+            <a:solidFill>
+              <a:srgbClr val="1F3A5F"/>
+            </a:solidFill>
+          </a:ln>
+        </p:spPr>
+        <p:style>
+          <a:lnRef idx="1">
+            <a:schemeClr val="accent1"/>
+          </a:lnRef>
+          <a:fillRef idx="3">
+            <a:schemeClr val="accent1"/>
+          </a:fillRef>
+          <a:effectRef idx="2">
+            <a:schemeClr val="accent1"/>
+          </a:effectRef>
+          <a:fontRef idx="minor">
+            <a:schemeClr val="lt1"/>
+          </a:fontRef>
+        </p:style>
+        <p:txBody>
+          <a:bodyPr rtlCol="0" anchor="ctr" lIns="45720" rIns="45720"/>
+          <a:lstStyle/>
+          <a:p>
+            <a:pPr algn="ctr"/>
+            <a:r>
+              <a:rPr sz="900">
+                <a:solidFill>
+                  <a:srgbClr val="1F3A5F"/>
+                </a:solidFill>
+              </a:rPr>
+              <a:t>Gram 39: FR Razor Crest, Category 1, Romulus</a:t>
+            </a:r>
+          </a:p>
+        </p:txBody>
+      </p:sp>
+      <p:sp>
+        <p:nvSpPr>
+          <p:cNvPr id="6" name="TextBox 5"/>
+          <p:cNvSpPr txBox="1"/>
+          <p:nvPr/>
+        </p:nvSpPr>
+        <p:spPr>
+          <a:xfrm>
+            <a:off x="2657246" y="1115568"/>
+            <a:ext cx="2200046" cy="1447800"/>
+          </a:xfrm>
+          <a:prstGeom prst="rect">
+            <a:avLst/>
+          </a:prstGeom>
+          <a:noFill/>
+        </p:spPr>
+        <p:txBody>
+          <a:bodyPr wrap="square">
+            <a:spAutoFit/>
+          </a:bodyPr>
+          <a:lstStyle/>
+          <a:p>
+            <a:r>
+              <a:rPr sz="800">
+                <a:hlinkClick r:id="rId6"/>
+              </a:rPr>
+              <a:t>Lofar 1</a:t>
+            </a:r>
+          </a:p>
+          <a:p>
+            <a:r>
+              <a:rPr sz="800">
+                <a:hlinkClick r:id="rId7"/>
+              </a:rPr>
+              <a:t>Lofar 2</a:t>
+            </a:r>
+          </a:p>
+          <a:p>
+            <a:r>
+              <a:rPr sz="800">
+                <a:hlinkClick r:id="rId8"/>
+              </a:rPr>
+              <a:t>Lofar 3</a:t>
+            </a:r>
+          </a:p>
+        </p:txBody>
+      </p:sp>
+      <p:sp>
+        <p:nvSpPr>
+          <p:cNvPr id="7" name="Rounded Rectangle 6">
+            <a:hlinkClick r:id="rId9"/>
+          </p:cNvPr>
+          <p:cNvSpPr/>
+          <p:nvPr/>
+        </p:nvSpPr>
+        <p:spPr>
+          <a:xfrm>
+            <a:off x="4948732" y="731520"/>
+            <a:ext cx="2200046" cy="365760"/>
+          </a:xfrm>
+          <a:prstGeom prst="roundRect">
+            <a:avLst/>
+          </a:prstGeom>
+          <a:solidFill>
+            <a:srgbClr val="E8EEF7"/>
+          </a:solidFill>
+          <a:ln>
+            <a:solidFill>
+              <a:srgbClr val="1F3A5F"/>
+            </a:solidFill>
+          </a:ln>
+        </p:spPr>
+        <p:style>
+          <a:lnRef idx="1">
+            <a:schemeClr val="accent1"/>
+          </a:lnRef>
+          <a:fillRef idx="3">
+            <a:schemeClr val="accent1"/>
+          </a:fillRef>
+          <a:effectRef idx="2">
+            <a:schemeClr val="accent1"/>
+          </a:effectRef>
+          <a:fontRef idx="minor">
+            <a:schemeClr val="lt1"/>
+          </a:fontRef>
+        </p:style>
+        <p:txBody>
+          <a:bodyPr rtlCol="0" anchor="ctr" lIns="45720" rIns="45720"/>
+          <a:lstStyle/>
+          <a:p>
+            <a:pPr algn="ctr"/>
+            <a:r>
+              <a:rPr sz="900">
+                <a:solidFill>
+                  <a:srgbClr val="1F3A5F"/>
+                </a:solidFill>
+              </a:rPr>
+              <a:t>Gram 40: FR Outrider, Category 3, Bajor</a:t>
+            </a:r>
+          </a:p>
+        </p:txBody>
+      </p:sp>
+      <p:sp>
+        <p:nvSpPr>
+          <p:cNvPr id="8" name="TextBox 7"/>
+          <p:cNvSpPr txBox="1"/>
+          <p:nvPr/>
+        </p:nvSpPr>
+        <p:spPr>
+          <a:xfrm>
+            <a:off x="4948732" y="1115568"/>
+            <a:ext cx="2200046" cy="1447800"/>
+          </a:xfrm>
+          <a:prstGeom prst="rect">
+            <a:avLst/>
+          </a:prstGeom>
+          <a:noFill/>
+        </p:spPr>
+        <p:txBody>
+          <a:bodyPr wrap="square">
+            <a:spAutoFit/>
+          </a:bodyPr>
+          <a:lstStyle/>
+          <a:p>
+            <a:r>
+              <a:rPr sz="800">
+                <a:hlinkClick r:id="rId10"/>
+              </a:rPr>
+              <a:t>Lofar 1</a:t>
+            </a:r>
+          </a:p>
+          <a:p>
+            <a:r>
+              <a:rPr sz="800">
+                <a:hlinkClick r:id="rId11"/>
+              </a:rPr>
+              <a:t>Lofar 2</a:t>
+            </a:r>
+          </a:p>
+          <a:p>
+            <a:r>
+              <a:rPr sz="800">
+                <a:hlinkClick r:id="rId12"/>
+              </a:rPr>
+              <a:t>Lofar 3</a:t>
+            </a:r>
+          </a:p>
+          <a:p>
+            <a:r>
+              <a:rPr sz="800">
+                <a:hlinkClick r:id="rId13"/>
+              </a:rPr>
+              <a:t>Lofar 4</a:t>
+            </a:r>
+          </a:p>
+        </p:txBody>
+      </p:sp>
+      <p:sp>
+        <p:nvSpPr>
+          <p:cNvPr id="9" name="Rounded Rectangle 8">
+            <a:hlinkClick r:id="rId14"/>
+          </p:cNvPr>
+          <p:cNvSpPr/>
+          <p:nvPr/>
+        </p:nvSpPr>
+        <p:spPr>
+          <a:xfrm>
+            <a:off x="7240219" y="731520"/>
+            <a:ext cx="2200046" cy="365760"/>
+          </a:xfrm>
+          <a:prstGeom prst="roundRect">
+            <a:avLst/>
+          </a:prstGeom>
+          <a:solidFill>
+            <a:srgbClr val="E8EEF7"/>
+          </a:solidFill>
+          <a:ln>
+            <a:solidFill>
+              <a:srgbClr val="1F3A5F"/>
+            </a:solidFill>
+          </a:ln>
+        </p:spPr>
+        <p:style>
+          <a:lnRef idx="1">
+            <a:schemeClr val="accent1"/>
+          </a:lnRef>
+          <a:fillRef idx="3">
+            <a:schemeClr val="accent1"/>
+          </a:fillRef>
+          <a:effectRef idx="2">
+            <a:schemeClr val="accent1"/>
+          </a:effectRef>
+          <a:fontRef idx="minor">
+            <a:schemeClr val="lt1"/>
+          </a:fontRef>
+        </p:style>
+        <p:txBody>
+          <a:bodyPr rtlCol="0" anchor="ctr" lIns="45720" rIns="45720"/>
+          <a:lstStyle/>
+          <a:p>
+            <a:pPr algn="ctr"/>
+            <a:r>
+              <a:rPr sz="900">
+                <a:solidFill>
+                  <a:srgbClr val="1F3A5F"/>
+                </a:solidFill>
+              </a:rPr>
+              <a:t>Gram 41: FR TIE Bomber, Category 2, Vulcan</a:t>
+            </a:r>
+          </a:p>
+        </p:txBody>
+      </p:sp>
+      <p:sp>
+        <p:nvSpPr>
+          <p:cNvPr id="10" name="TextBox 9"/>
+          <p:cNvSpPr txBox="1"/>
+          <p:nvPr/>
+        </p:nvSpPr>
+        <p:spPr>
+          <a:xfrm>
+            <a:off x="7240219" y="1115568"/>
+            <a:ext cx="2200046" cy="1447800"/>
+          </a:xfrm>
+          <a:prstGeom prst="rect">
+            <a:avLst/>
+          </a:prstGeom>
+          <a:noFill/>
+        </p:spPr>
+        <p:txBody>
+          <a:bodyPr wrap="square">
+            <a:spAutoFit/>
+          </a:bodyPr>
+          <a:lstStyle/>
+          <a:p>
+            <a:r>
+              <a:rPr sz="800">
+                <a:hlinkClick r:id="rId15"/>
+              </a:rPr>
+              <a:t>Lofar 1</a:t>
+            </a:r>
+          </a:p>
+          <a:p>
+            <a:r>
+              <a:rPr sz="800">
+                <a:hlinkClick r:id="rId16"/>
+              </a:rPr>
+              <a:t>Lofar 2</a:t>
+            </a:r>
+          </a:p>
+          <a:p>
+            <a:r>
+              <a:rPr sz="800">
+                <a:hlinkClick r:id="rId17"/>
+              </a:rPr>
+              <a:t>Lofar 3</a:t>
+            </a:r>
+          </a:p>
+          <a:p>
+            <a:r>
+              <a:rPr sz="800">
+                <a:hlinkClick r:id="rId18"/>
+              </a:rPr>
+              <a:t>Lofar 4</a:t>
+            </a:r>
+          </a:p>
+        </p:txBody>
+      </p:sp>
+      <p:sp>
+        <p:nvSpPr>
+          <p:cNvPr id="11" name="Rounded Rectangle 10">
+            <a:hlinkClick r:id="rId19"/>
+          </p:cNvPr>
+          <p:cNvSpPr/>
+          <p:nvPr/>
+        </p:nvSpPr>
+        <p:spPr>
+          <a:xfrm>
+            <a:off x="9531705" y="731520"/>
+            <a:ext cx="2200046" cy="365760"/>
+          </a:xfrm>
+          <a:prstGeom prst="roundRect">
+            <a:avLst/>
+          </a:prstGeom>
+          <a:solidFill>
+            <a:srgbClr val="E8EEF7"/>
+          </a:solidFill>
+          <a:ln>
+            <a:solidFill>
+              <a:srgbClr val="1F3A5F"/>
+            </a:solidFill>
+          </a:ln>
+        </p:spPr>
+        <p:style>
+          <a:lnRef idx="1">
+            <a:schemeClr val="accent1"/>
+          </a:lnRef>
+          <a:fillRef idx="3">
+            <a:schemeClr val="accent1"/>
+          </a:fillRef>
+          <a:effectRef idx="2">
+            <a:schemeClr val="accent1"/>
+          </a:effectRef>
+          <a:fontRef idx="minor">
+            <a:schemeClr val="lt1"/>
+          </a:fontRef>
+        </p:style>
+        <p:txBody>
+          <a:bodyPr rtlCol="0" anchor="ctr" lIns="45720" rIns="45720"/>
+          <a:lstStyle/>
+          <a:p>
+            <a:pPr algn="ctr"/>
+            <a:r>
+              <a:rPr sz="900">
+                <a:solidFill>
+                  <a:srgbClr val="1F3A5F"/>
+                </a:solidFill>
+              </a:rPr>
+              <a:t>Gram 42: FR Nebulon-B, Category 2, Romulus</a:t>
+            </a:r>
+          </a:p>
+        </p:txBody>
+      </p:sp>
+      <p:sp>
+        <p:nvSpPr>
+          <p:cNvPr id="12" name="TextBox 11"/>
+          <p:cNvSpPr txBox="1"/>
+          <p:nvPr/>
+        </p:nvSpPr>
+        <p:spPr>
+          <a:xfrm>
+            <a:off x="9531705" y="1115568"/>
+            <a:ext cx="2200046" cy="1447800"/>
+          </a:xfrm>
+          <a:prstGeom prst="rect">
+            <a:avLst/>
+          </a:prstGeom>
+          <a:noFill/>
+        </p:spPr>
+        <p:txBody>
+          <a:bodyPr wrap="square">
+            <a:spAutoFit/>
+          </a:bodyPr>
+          <a:lstStyle/>
+          <a:p>
+            <a:r>
+              <a:rPr sz="800">
+                <a:hlinkClick r:id="rId20"/>
+              </a:rPr>
+              <a:t>Lofar 1</a:t>
+            </a:r>
+          </a:p>
+        </p:txBody>
+      </p:sp>
+    </p:spTree>
+  </p:cSld>
+  <p:clrMapOvr>
+    <a:masterClrMapping/>
+  </p:clrMapOvr>
+</p:sld>
+</file>
+
+<file path=ppt/slides/slide5.xml><?xml version="1.0" encoding="utf-8"?>
+<p:sld xmlns:a="http://schemas.openxmlformats.org/drawingml/2006/main" xmlns:p="http://schemas.openxmlformats.org/presentationml/2006/main" xmlns:r="http://schemas.openxmlformats.org/officeDocument/2006/relationships">
+  <p:cSld>
+    <p:spTree>
+      <p:nvGrpSpPr>
+        <p:cNvPr id="1" name=""/>
+        <p:cNvGrpSpPr/>
+        <p:nvPr/>
+      </p:nvGrpSpPr>
+      <p:grpSpPr/>
+      <p:sp>
+        <p:nvSpPr>
+          <p:cNvPr id="2" name="TextBox 1"/>
+          <p:cNvSpPr txBox="1"/>
+          <p:nvPr/>
+        </p:nvSpPr>
+        <p:spPr>
+          <a:xfrm>
+            <a:off x="914400" y="2377440"/>
+            <a:ext cx="10360152" cy="1280160"/>
+          </a:xfrm>
+          <a:prstGeom prst="rect">
+            <a:avLst/>
+          </a:prstGeom>
+          <a:noFill/>
+        </p:spPr>
+        <p:txBody>
+          <a:bodyPr wrap="square">
+            <a:spAutoFit/>
+          </a:bodyPr>
+          <a:lstStyle/>
+          <a:p>
+            <a:pPr algn="ctr"/>
+            <a:r>
+              <a:rPr sz="4000" b="1">
+                <a:solidFill>
+                  <a:srgbClr val="1F3A5F"/>
+                </a:solidFill>
+              </a:rPr>
+              <a:t>End of Instructor Week 2 Grams</a:t>
+            </a:r>
+          </a:p>
+        </p:txBody>
+      </p:sp>
+      <p:sp>
+        <p:nvSpPr>
+          <p:cNvPr id="3" name="TextBox 2"/>
+          <p:cNvSpPr txBox="1"/>
+          <p:nvPr/>
+        </p:nvSpPr>
+        <p:spPr>
+          <a:xfrm>
+            <a:off x="914400" y="3840480"/>
+            <a:ext cx="10360152" cy="731520"/>
+          </a:xfrm>
+          <a:prstGeom prst="rect">
+            <a:avLst/>
+          </a:prstGeom>
+          <a:noFill/>
+        </p:spPr>
+        <p:txBody>
+          <a:bodyPr wrap="none">
+            <a:spAutoFit/>
+          </a:bodyPr>
+          <a:lstStyle/>
+          <a:p>
+            <a:pPr algn="ctr"/>
+            <a:r>
+              <a:rPr sz="2400">
+                <a:solidFill>
+                  <a:srgbClr val="1F3A5F"/>
+                </a:solidFill>
+              </a:rPr>
+              <a:t>Instructor Version</a:t>
             </a:r>
           </a:p>
         </p:txBody>
